--- a/docs/pptx/auc3/jx-auc3-linsubhr-ratio-anemia3.pptx
+++ b/docs/pptx/auc3/jx-auc3-linsubhr-ratio-anemia3.pptx
@@ -2271,7 +2271,7 @@
           </p:nvSpPr>
           <p:spPr>
             <a:xfrm>
-              <a:off x="817517" y="5114368"/>
+              <a:off x="817517" y="5142518"/>
               <a:ext cx="7799693" cy="0"/>
             </a:xfrm>
             <a:custGeom>
@@ -2314,7 +2314,7 @@
           </p:nvSpPr>
           <p:spPr>
             <a:xfrm>
-              <a:off x="817517" y="4244691"/>
+              <a:off x="817517" y="4313054"/>
               <a:ext cx="7799693" cy="0"/>
             </a:xfrm>
             <a:custGeom>
@@ -2357,7 +2357,7 @@
           </p:nvSpPr>
           <p:spPr>
             <a:xfrm>
-              <a:off x="817517" y="3375014"/>
+              <a:off x="817517" y="3483591"/>
               <a:ext cx="7799693" cy="0"/>
             </a:xfrm>
             <a:custGeom>
@@ -2400,7 +2400,7 @@
           </p:nvSpPr>
           <p:spPr>
             <a:xfrm>
-              <a:off x="817517" y="2505337"/>
+              <a:off x="817517" y="2654127"/>
               <a:ext cx="7799693" cy="0"/>
             </a:xfrm>
             <a:custGeom>
@@ -2443,15 +2443,15 @@
           </p:nvSpPr>
           <p:spPr>
             <a:xfrm>
-              <a:off x="1615213" y="1896563"/>
-              <a:ext cx="0" cy="3826579"/>
+              <a:off x="1615213" y="2073503"/>
+              <a:ext cx="0" cy="3649639"/>
             </a:xfrm>
             <a:custGeom>
               <a:avLst/>
               <a:pathLst>
-                <a:path w="0" h="3826579">
+                <a:path w="0" h="3649639">
                   <a:moveTo>
-                    <a:pt x="0" y="3826579"/>
+                    <a:pt x="0" y="3649639"/>
                   </a:moveTo>
                   <a:lnTo>
                     <a:pt x="0" y="0"/>
@@ -2486,15 +2486,15 @@
           </p:nvSpPr>
           <p:spPr>
             <a:xfrm>
-              <a:off x="3387871" y="1896563"/>
-              <a:ext cx="0" cy="3826579"/>
+              <a:off x="3387871" y="2073503"/>
+              <a:ext cx="0" cy="3649639"/>
             </a:xfrm>
             <a:custGeom>
               <a:avLst/>
               <a:pathLst>
-                <a:path w="0" h="3826579">
+                <a:path w="0" h="3649639">
                   <a:moveTo>
-                    <a:pt x="0" y="3826579"/>
+                    <a:pt x="0" y="3649639"/>
                   </a:moveTo>
                   <a:lnTo>
                     <a:pt x="0" y="0"/>
@@ -2529,15 +2529,15 @@
           </p:nvSpPr>
           <p:spPr>
             <a:xfrm>
-              <a:off x="5160528" y="1896563"/>
-              <a:ext cx="0" cy="3826579"/>
+              <a:off x="5160528" y="2073503"/>
+              <a:ext cx="0" cy="3649639"/>
             </a:xfrm>
             <a:custGeom>
               <a:avLst/>
               <a:pathLst>
-                <a:path w="0" h="3826579">
+                <a:path w="0" h="3649639">
                   <a:moveTo>
-                    <a:pt x="0" y="3826579"/>
+                    <a:pt x="0" y="3649639"/>
                   </a:moveTo>
                   <a:lnTo>
                     <a:pt x="0" y="0"/>
@@ -2572,15 +2572,15 @@
           </p:nvSpPr>
           <p:spPr>
             <a:xfrm>
-              <a:off x="6933186" y="1896563"/>
-              <a:ext cx="0" cy="3826579"/>
+              <a:off x="6933186" y="2073503"/>
+              <a:ext cx="0" cy="3649639"/>
             </a:xfrm>
             <a:custGeom>
               <a:avLst/>
               <a:pathLst>
-                <a:path w="0" h="3826579">
+                <a:path w="0" h="3649639">
                   <a:moveTo>
-                    <a:pt x="0" y="3826579"/>
+                    <a:pt x="0" y="3649639"/>
                   </a:moveTo>
                   <a:lnTo>
                     <a:pt x="0" y="0"/>
@@ -2615,7 +2615,7 @@
           </p:nvSpPr>
           <p:spPr>
             <a:xfrm>
-              <a:off x="817517" y="5549207"/>
+              <a:off x="817517" y="5557249"/>
               <a:ext cx="7799693" cy="0"/>
             </a:xfrm>
             <a:custGeom>
@@ -2658,7 +2658,7 @@
           </p:nvSpPr>
           <p:spPr>
             <a:xfrm>
-              <a:off x="817517" y="4679530"/>
+              <a:off x="817517" y="4727786"/>
               <a:ext cx="7799693" cy="0"/>
             </a:xfrm>
             <a:custGeom>
@@ -2701,7 +2701,7 @@
           </p:nvSpPr>
           <p:spPr>
             <a:xfrm>
-              <a:off x="817517" y="3809853"/>
+              <a:off x="817517" y="3898322"/>
               <a:ext cx="7799693" cy="0"/>
             </a:xfrm>
             <a:custGeom>
@@ -2744,7 +2744,7 @@
           </p:nvSpPr>
           <p:spPr>
             <a:xfrm>
-              <a:off x="817517" y="2940175"/>
+              <a:off x="817517" y="3068859"/>
               <a:ext cx="7799693" cy="0"/>
             </a:xfrm>
             <a:custGeom>
@@ -2787,7 +2787,7 @@
           </p:nvSpPr>
           <p:spPr>
             <a:xfrm>
-              <a:off x="817517" y="2070498"/>
+              <a:off x="817517" y="2239395"/>
               <a:ext cx="7799693" cy="0"/>
             </a:xfrm>
             <a:custGeom>
@@ -2830,15 +2830,15 @@
           </p:nvSpPr>
           <p:spPr>
             <a:xfrm>
-              <a:off x="2501542" y="1896563"/>
-              <a:ext cx="0" cy="3826579"/>
+              <a:off x="2501542" y="2073503"/>
+              <a:ext cx="0" cy="3649639"/>
             </a:xfrm>
             <a:custGeom>
               <a:avLst/>
               <a:pathLst>
-                <a:path w="0" h="3826579">
+                <a:path w="0" h="3649639">
                   <a:moveTo>
-                    <a:pt x="0" y="3826579"/>
+                    <a:pt x="0" y="3649639"/>
                   </a:moveTo>
                   <a:lnTo>
                     <a:pt x="0" y="0"/>
@@ -2873,15 +2873,15 @@
           </p:nvSpPr>
           <p:spPr>
             <a:xfrm>
-              <a:off x="4274200" y="1896563"/>
-              <a:ext cx="0" cy="3826579"/>
+              <a:off x="4274200" y="2073503"/>
+              <a:ext cx="0" cy="3649639"/>
             </a:xfrm>
             <a:custGeom>
               <a:avLst/>
               <a:pathLst>
-                <a:path w="0" h="3826579">
+                <a:path w="0" h="3649639">
                   <a:moveTo>
-                    <a:pt x="0" y="3826579"/>
+                    <a:pt x="0" y="3649639"/>
                   </a:moveTo>
                   <a:lnTo>
                     <a:pt x="0" y="0"/>
@@ -2916,15 +2916,15 @@
           </p:nvSpPr>
           <p:spPr>
             <a:xfrm>
-              <a:off x="6046857" y="1896563"/>
-              <a:ext cx="0" cy="3826579"/>
+              <a:off x="6046857" y="2073503"/>
+              <a:ext cx="0" cy="3649639"/>
             </a:xfrm>
             <a:custGeom>
               <a:avLst/>
               <a:pathLst>
-                <a:path w="0" h="3826579">
+                <a:path w="0" h="3649639">
                   <a:moveTo>
-                    <a:pt x="0" y="3826579"/>
+                    <a:pt x="0" y="3649639"/>
                   </a:moveTo>
                   <a:lnTo>
                     <a:pt x="0" y="0"/>
@@ -2959,15 +2959,15 @@
           </p:nvSpPr>
           <p:spPr>
             <a:xfrm>
-              <a:off x="7819515" y="1896563"/>
-              <a:ext cx="0" cy="3826579"/>
+              <a:off x="7819515" y="2073503"/>
+              <a:ext cx="0" cy="3649639"/>
             </a:xfrm>
             <a:custGeom>
               <a:avLst/>
               <a:pathLst>
-                <a:path w="0" h="3826579">
+                <a:path w="0" h="3649639">
                   <a:moveTo>
-                    <a:pt x="0" y="3826579"/>
+                    <a:pt x="0" y="3649639"/>
                   </a:moveTo>
                   <a:lnTo>
                     <a:pt x="0" y="0"/>
@@ -3002,558 +3002,558 @@
           </p:nvSpPr>
           <p:spPr>
             <a:xfrm>
-              <a:off x="817517" y="1896563"/>
-              <a:ext cx="7392041" cy="3579053"/>
+              <a:off x="817517" y="2073503"/>
+              <a:ext cx="7392041" cy="3413559"/>
             </a:xfrm>
             <a:custGeom>
               <a:avLst/>
               <a:pathLst>
-                <a:path w="7392041" h="3579053">
+                <a:path w="7392041" h="3413559">
                   <a:moveTo>
                     <a:pt x="922403" y="0"/>
                   </a:moveTo>
                   <a:lnTo>
-                    <a:pt x="980824" y="127241"/>
-                  </a:lnTo>
-                  <a:lnTo>
-                    <a:pt x="1058068" y="287814"/>
-                  </a:lnTo>
-                  <a:lnTo>
-                    <a:pt x="1135311" y="441074"/>
-                  </a:lnTo>
-                  <a:lnTo>
-                    <a:pt x="1212555" y="587353"/>
-                  </a:lnTo>
-                  <a:lnTo>
-                    <a:pt x="1289799" y="726969"/>
-                  </a:lnTo>
-                  <a:lnTo>
-                    <a:pt x="1367042" y="860226"/>
-                  </a:lnTo>
-                  <a:lnTo>
-                    <a:pt x="1444286" y="987413"/>
-                  </a:lnTo>
-                  <a:lnTo>
-                    <a:pt x="1521529" y="1108808"/>
-                  </a:lnTo>
-                  <a:lnTo>
-                    <a:pt x="1598773" y="1224673"/>
-                  </a:lnTo>
-                  <a:lnTo>
-                    <a:pt x="1676016" y="1335261"/>
-                  </a:lnTo>
-                  <a:lnTo>
-                    <a:pt x="1753260" y="1440812"/>
-                  </a:lnTo>
-                  <a:lnTo>
-                    <a:pt x="1830504" y="1541555"/>
-                  </a:lnTo>
-                  <a:lnTo>
-                    <a:pt x="1907747" y="1637710"/>
-                  </a:lnTo>
-                  <a:lnTo>
-                    <a:pt x="1984991" y="1729485"/>
-                  </a:lnTo>
-                  <a:lnTo>
-                    <a:pt x="2062234" y="1817080"/>
-                  </a:lnTo>
-                  <a:lnTo>
-                    <a:pt x="2139478" y="1900685"/>
-                  </a:lnTo>
-                  <a:lnTo>
-                    <a:pt x="2216721" y="1980482"/>
-                  </a:lnTo>
-                  <a:lnTo>
-                    <a:pt x="2293965" y="2056645"/>
-                  </a:lnTo>
-                  <a:lnTo>
-                    <a:pt x="2371209" y="2129339"/>
-                  </a:lnTo>
-                  <a:lnTo>
-                    <a:pt x="2448452" y="2198721"/>
-                  </a:lnTo>
-                  <a:lnTo>
-                    <a:pt x="2525696" y="2264944"/>
-                  </a:lnTo>
-                  <a:lnTo>
-                    <a:pt x="2602939" y="2328150"/>
-                  </a:lnTo>
-                  <a:lnTo>
-                    <a:pt x="2680183" y="2388477"/>
-                  </a:lnTo>
-                  <a:lnTo>
-                    <a:pt x="2757426" y="2446057"/>
-                  </a:lnTo>
-                  <a:lnTo>
-                    <a:pt x="2834670" y="2501014"/>
-                  </a:lnTo>
-                  <a:lnTo>
-                    <a:pt x="2911914" y="2553467"/>
-                  </a:lnTo>
-                  <a:lnTo>
-                    <a:pt x="2989157" y="2603532"/>
-                  </a:lnTo>
-                  <a:lnTo>
-                    <a:pt x="3066401" y="2651316"/>
-                  </a:lnTo>
-                  <a:lnTo>
-                    <a:pt x="3143644" y="2696924"/>
-                  </a:lnTo>
-                  <a:lnTo>
-                    <a:pt x="3220888" y="2740455"/>
-                  </a:lnTo>
-                  <a:lnTo>
-                    <a:pt x="3298131" y="2782003"/>
-                  </a:lnTo>
-                  <a:lnTo>
-                    <a:pt x="3375375" y="2787802"/>
-                  </a:lnTo>
-                  <a:lnTo>
-                    <a:pt x="3452619" y="2792727"/>
-                  </a:lnTo>
-                  <a:lnTo>
-                    <a:pt x="3529862" y="2797624"/>
-                  </a:lnTo>
-                  <a:lnTo>
-                    <a:pt x="3607106" y="2802493"/>
-                  </a:lnTo>
-                  <a:lnTo>
-                    <a:pt x="3684349" y="2807335"/>
-                  </a:lnTo>
-                  <a:lnTo>
-                    <a:pt x="3761593" y="2812149"/>
-                  </a:lnTo>
-                  <a:lnTo>
-                    <a:pt x="3838836" y="2816936"/>
-                  </a:lnTo>
-                  <a:lnTo>
-                    <a:pt x="3916080" y="2821695"/>
-                  </a:lnTo>
-                  <a:lnTo>
-                    <a:pt x="3993324" y="2826427"/>
-                  </a:lnTo>
-                  <a:lnTo>
-                    <a:pt x="4070567" y="2831132"/>
-                  </a:lnTo>
-                  <a:lnTo>
-                    <a:pt x="4147811" y="2835811"/>
-                  </a:lnTo>
-                  <a:lnTo>
-                    <a:pt x="4225054" y="2840463"/>
-                  </a:lnTo>
-                  <a:lnTo>
-                    <a:pt x="4302298" y="2845088"/>
-                  </a:lnTo>
-                  <a:lnTo>
-                    <a:pt x="4379541" y="2849687"/>
-                  </a:lnTo>
-                  <a:lnTo>
-                    <a:pt x="4456785" y="2854260"/>
-                  </a:lnTo>
-                  <a:lnTo>
-                    <a:pt x="4534029" y="2858807"/>
-                  </a:lnTo>
-                  <a:lnTo>
-                    <a:pt x="4611272" y="2863327"/>
-                  </a:lnTo>
-                  <a:lnTo>
-                    <a:pt x="4688516" y="2867823"/>
-                  </a:lnTo>
-                  <a:lnTo>
-                    <a:pt x="4765759" y="2872292"/>
-                  </a:lnTo>
-                  <a:lnTo>
-                    <a:pt x="4843003" y="2876736"/>
-                  </a:lnTo>
-                  <a:lnTo>
-                    <a:pt x="4920246" y="2881155"/>
-                  </a:lnTo>
-                  <a:lnTo>
-                    <a:pt x="4997490" y="2885548"/>
-                  </a:lnTo>
-                  <a:lnTo>
-                    <a:pt x="5074734" y="2889917"/>
-                  </a:lnTo>
-                  <a:lnTo>
-                    <a:pt x="5151977" y="2894261"/>
-                  </a:lnTo>
-                  <a:lnTo>
-                    <a:pt x="5229221" y="2898580"/>
-                  </a:lnTo>
-                  <a:lnTo>
-                    <a:pt x="5306464" y="2902874"/>
-                  </a:lnTo>
-                  <a:lnTo>
-                    <a:pt x="5383708" y="2907144"/>
-                  </a:lnTo>
-                  <a:lnTo>
-                    <a:pt x="5460951" y="2911390"/>
-                  </a:lnTo>
-                  <a:lnTo>
-                    <a:pt x="5538195" y="2915611"/>
-                  </a:lnTo>
-                  <a:lnTo>
-                    <a:pt x="5615439" y="2919808"/>
-                  </a:lnTo>
-                  <a:lnTo>
-                    <a:pt x="5692682" y="2923982"/>
-                  </a:lnTo>
-                  <a:lnTo>
-                    <a:pt x="5769926" y="2928131"/>
-                  </a:lnTo>
-                  <a:lnTo>
-                    <a:pt x="5847169" y="2932258"/>
-                  </a:lnTo>
-                  <a:lnTo>
-                    <a:pt x="5924413" y="2936360"/>
-                  </a:lnTo>
-                  <a:lnTo>
-                    <a:pt x="6001656" y="2940439"/>
-                  </a:lnTo>
-                  <a:lnTo>
-                    <a:pt x="6078900" y="2944495"/>
-                  </a:lnTo>
-                  <a:lnTo>
-                    <a:pt x="6156144" y="2948528"/>
-                  </a:lnTo>
-                  <a:lnTo>
-                    <a:pt x="6233387" y="2952538"/>
-                  </a:lnTo>
-                  <a:lnTo>
-                    <a:pt x="6310631" y="2956525"/>
-                  </a:lnTo>
-                  <a:lnTo>
-                    <a:pt x="6387874" y="2960490"/>
-                  </a:lnTo>
-                  <a:lnTo>
-                    <a:pt x="6465118" y="2964431"/>
-                  </a:lnTo>
-                  <a:lnTo>
-                    <a:pt x="6542361" y="2968351"/>
-                  </a:lnTo>
-                  <a:lnTo>
-                    <a:pt x="6619605" y="2972248"/>
-                  </a:lnTo>
-                  <a:lnTo>
-                    <a:pt x="6696849" y="2976122"/>
-                  </a:lnTo>
-                  <a:lnTo>
-                    <a:pt x="6774092" y="2979975"/>
-                  </a:lnTo>
-                  <a:lnTo>
-                    <a:pt x="6851336" y="2983806"/>
-                  </a:lnTo>
-                  <a:lnTo>
-                    <a:pt x="6928579" y="2987615"/>
-                  </a:lnTo>
-                  <a:lnTo>
-                    <a:pt x="7005823" y="2991402"/>
-                  </a:lnTo>
-                  <a:lnTo>
-                    <a:pt x="7083066" y="2995168"/>
-                  </a:lnTo>
-                  <a:lnTo>
-                    <a:pt x="7160310" y="2998912"/>
-                  </a:lnTo>
-                  <a:lnTo>
-                    <a:pt x="7237554" y="3002635"/>
-                  </a:lnTo>
-                  <a:lnTo>
-                    <a:pt x="7314797" y="3006337"/>
-                  </a:lnTo>
-                  <a:lnTo>
-                    <a:pt x="7392041" y="3010018"/>
-                  </a:lnTo>
-                  <a:lnTo>
-                    <a:pt x="7392041" y="3579053"/>
-                  </a:lnTo>
-                  <a:lnTo>
-                    <a:pt x="7314797" y="3575541"/>
-                  </a:lnTo>
-                  <a:lnTo>
-                    <a:pt x="7237554" y="3571862"/>
-                  </a:lnTo>
-                  <a:lnTo>
-                    <a:pt x="7160310" y="3568007"/>
-                  </a:lnTo>
-                  <a:lnTo>
-                    <a:pt x="7083066" y="3563968"/>
-                  </a:lnTo>
-                  <a:lnTo>
-                    <a:pt x="7005823" y="3559737"/>
-                  </a:lnTo>
-                  <a:lnTo>
-                    <a:pt x="6928579" y="3555303"/>
-                  </a:lnTo>
-                  <a:lnTo>
-                    <a:pt x="6851336" y="3550658"/>
-                  </a:lnTo>
-                  <a:lnTo>
-                    <a:pt x="6774092" y="3545791"/>
-                  </a:lnTo>
-                  <a:lnTo>
-                    <a:pt x="6696849" y="3540692"/>
-                  </a:lnTo>
-                  <a:lnTo>
-                    <a:pt x="6619605" y="3535349"/>
-                  </a:lnTo>
-                  <a:lnTo>
-                    <a:pt x="6542361" y="3529752"/>
-                  </a:lnTo>
-                  <a:lnTo>
-                    <a:pt x="6465118" y="3523887"/>
-                  </a:lnTo>
-                  <a:lnTo>
-                    <a:pt x="6387874" y="3517743"/>
-                  </a:lnTo>
-                  <a:lnTo>
-                    <a:pt x="6310631" y="3511306"/>
-                  </a:lnTo>
-                  <a:lnTo>
-                    <a:pt x="6233387" y="3504561"/>
-                  </a:lnTo>
-                  <a:lnTo>
-                    <a:pt x="6156144" y="3497494"/>
-                  </a:lnTo>
-                  <a:lnTo>
-                    <a:pt x="6078900" y="3490090"/>
-                  </a:lnTo>
-                  <a:lnTo>
-                    <a:pt x="6001656" y="3482333"/>
-                  </a:lnTo>
-                  <a:lnTo>
-                    <a:pt x="5924413" y="3474206"/>
-                  </a:lnTo>
-                  <a:lnTo>
-                    <a:pt x="5847169" y="3465690"/>
-                  </a:lnTo>
-                  <a:lnTo>
-                    <a:pt x="5769926" y="3456769"/>
-                  </a:lnTo>
-                  <a:lnTo>
-                    <a:pt x="5692682" y="3447421"/>
-                  </a:lnTo>
-                  <a:lnTo>
-                    <a:pt x="5615439" y="3437628"/>
-                  </a:lnTo>
-                  <a:lnTo>
-                    <a:pt x="5538195" y="3427367"/>
-                  </a:lnTo>
-                  <a:lnTo>
-                    <a:pt x="5460951" y="3416617"/>
-                  </a:lnTo>
-                  <a:lnTo>
-                    <a:pt x="5383708" y="3405354"/>
-                  </a:lnTo>
-                  <a:lnTo>
-                    <a:pt x="5306464" y="3393553"/>
-                  </a:lnTo>
-                  <a:lnTo>
-                    <a:pt x="5229221" y="3381189"/>
-                  </a:lnTo>
-                  <a:lnTo>
-                    <a:pt x="5151977" y="3368234"/>
-                  </a:lnTo>
-                  <a:lnTo>
-                    <a:pt x="5074734" y="3354662"/>
-                  </a:lnTo>
-                  <a:lnTo>
-                    <a:pt x="4997490" y="3340442"/>
-                  </a:lnTo>
-                  <a:lnTo>
-                    <a:pt x="4920246" y="3325544"/>
-                  </a:lnTo>
-                  <a:lnTo>
-                    <a:pt x="4843003" y="3309934"/>
-                  </a:lnTo>
-                  <a:lnTo>
-                    <a:pt x="4765759" y="3293580"/>
-                  </a:lnTo>
-                  <a:lnTo>
-                    <a:pt x="4688516" y="3276445"/>
-                  </a:lnTo>
-                  <a:lnTo>
-                    <a:pt x="4611272" y="3258492"/>
-                  </a:lnTo>
-                  <a:lnTo>
-                    <a:pt x="4534029" y="3239683"/>
-                  </a:lnTo>
-                  <a:lnTo>
-                    <a:pt x="4456785" y="3219976"/>
-                  </a:lnTo>
-                  <a:lnTo>
-                    <a:pt x="4379541" y="3199329"/>
-                  </a:lnTo>
-                  <a:lnTo>
-                    <a:pt x="4302298" y="3177696"/>
-                  </a:lnTo>
-                  <a:lnTo>
-                    <a:pt x="4225054" y="3155031"/>
-                  </a:lnTo>
-                  <a:lnTo>
-                    <a:pt x="4147811" y="3131285"/>
-                  </a:lnTo>
-                  <a:lnTo>
-                    <a:pt x="4070567" y="3106405"/>
-                  </a:lnTo>
-                  <a:lnTo>
-                    <a:pt x="3993324" y="3080338"/>
-                  </a:lnTo>
-                  <a:lnTo>
-                    <a:pt x="3916080" y="3053027"/>
-                  </a:lnTo>
-                  <a:lnTo>
-                    <a:pt x="3838836" y="3024412"/>
-                  </a:lnTo>
-                  <a:lnTo>
-                    <a:pt x="3761593" y="2994433"/>
-                  </a:lnTo>
-                  <a:lnTo>
-                    <a:pt x="3684349" y="2963022"/>
-                  </a:lnTo>
-                  <a:lnTo>
-                    <a:pt x="3607106" y="2930113"/>
-                  </a:lnTo>
-                  <a:lnTo>
-                    <a:pt x="3529862" y="2895633"/>
-                  </a:lnTo>
-                  <a:lnTo>
-                    <a:pt x="3452619" y="2859507"/>
-                  </a:lnTo>
-                  <a:lnTo>
-                    <a:pt x="3375375" y="2821658"/>
-                  </a:lnTo>
-                  <a:lnTo>
-                    <a:pt x="3298131" y="2782848"/>
-                  </a:lnTo>
-                  <a:lnTo>
-                    <a:pt x="3220888" y="2777866"/>
-                  </a:lnTo>
-                  <a:lnTo>
-                    <a:pt x="3143644" y="2772856"/>
-                  </a:lnTo>
-                  <a:lnTo>
-                    <a:pt x="3066401" y="2767817"/>
-                  </a:lnTo>
-                  <a:lnTo>
-                    <a:pt x="2989157" y="2762749"/>
-                  </a:lnTo>
-                  <a:lnTo>
-                    <a:pt x="2911914" y="2757652"/>
-                  </a:lnTo>
-                  <a:lnTo>
-                    <a:pt x="2834670" y="2752526"/>
-                  </a:lnTo>
-                  <a:lnTo>
-                    <a:pt x="2757426" y="2747371"/>
-                  </a:lnTo>
-                  <a:lnTo>
-                    <a:pt x="2680183" y="2742186"/>
-                  </a:lnTo>
-                  <a:lnTo>
-                    <a:pt x="2602939" y="2736971"/>
-                  </a:lnTo>
-                  <a:lnTo>
-                    <a:pt x="2525696" y="2731726"/>
-                  </a:lnTo>
-                  <a:lnTo>
-                    <a:pt x="2448452" y="2726452"/>
-                  </a:lnTo>
-                  <a:lnTo>
-                    <a:pt x="2371209" y="2721147"/>
-                  </a:lnTo>
-                  <a:lnTo>
-                    <a:pt x="2293965" y="2715812"/>
-                  </a:lnTo>
-                  <a:lnTo>
-                    <a:pt x="2216721" y="2710446"/>
-                  </a:lnTo>
-                  <a:lnTo>
-                    <a:pt x="2139478" y="2705049"/>
-                  </a:lnTo>
-                  <a:lnTo>
-                    <a:pt x="2062234" y="2699622"/>
-                  </a:lnTo>
-                  <a:lnTo>
-                    <a:pt x="1984991" y="2694163"/>
-                  </a:lnTo>
-                  <a:lnTo>
-                    <a:pt x="1907747" y="2688674"/>
-                  </a:lnTo>
-                  <a:lnTo>
-                    <a:pt x="1830504" y="2683152"/>
-                  </a:lnTo>
-                  <a:lnTo>
-                    <a:pt x="1753260" y="2677600"/>
-                  </a:lnTo>
-                  <a:lnTo>
-                    <a:pt x="1676016" y="2672015"/>
-                  </a:lnTo>
-                  <a:lnTo>
-                    <a:pt x="1598773" y="2666398"/>
-                  </a:lnTo>
-                  <a:lnTo>
-                    <a:pt x="1521529" y="2660749"/>
-                  </a:lnTo>
-                  <a:lnTo>
-                    <a:pt x="1444286" y="2655068"/>
-                  </a:lnTo>
-                  <a:lnTo>
-                    <a:pt x="1367042" y="2649355"/>
-                  </a:lnTo>
-                  <a:lnTo>
-                    <a:pt x="1289799" y="2643608"/>
-                  </a:lnTo>
-                  <a:lnTo>
-                    <a:pt x="1212555" y="2637829"/>
-                  </a:lnTo>
-                  <a:lnTo>
-                    <a:pt x="1135311" y="2632016"/>
-                  </a:lnTo>
-                  <a:lnTo>
-                    <a:pt x="1058068" y="2626171"/>
-                  </a:lnTo>
-                  <a:lnTo>
-                    <a:pt x="980824" y="2620292"/>
-                  </a:lnTo>
-                  <a:lnTo>
-                    <a:pt x="903581" y="2614379"/>
-                  </a:lnTo>
-                  <a:lnTo>
-                    <a:pt x="826337" y="2608432"/>
-                  </a:lnTo>
-                  <a:lnTo>
-                    <a:pt x="749094" y="2602451"/>
-                  </a:lnTo>
-                  <a:lnTo>
-                    <a:pt x="671850" y="2596436"/>
-                  </a:lnTo>
-                  <a:lnTo>
-                    <a:pt x="594606" y="2590387"/>
-                  </a:lnTo>
-                  <a:lnTo>
-                    <a:pt x="517363" y="2584302"/>
-                  </a:lnTo>
-                  <a:lnTo>
-                    <a:pt x="440119" y="2578183"/>
-                  </a:lnTo>
-                  <a:lnTo>
-                    <a:pt x="362876" y="2572029"/>
-                  </a:lnTo>
-                  <a:lnTo>
-                    <a:pt x="285632" y="2565840"/>
-                  </a:lnTo>
-                  <a:lnTo>
-                    <a:pt x="208389" y="2559615"/>
-                  </a:lnTo>
-                  <a:lnTo>
-                    <a:pt x="131145" y="2553355"/>
-                  </a:lnTo>
-                  <a:lnTo>
-                    <a:pt x="53901" y="2547059"/>
-                  </a:lnTo>
-                  <a:lnTo>
-                    <a:pt x="0" y="2542640"/>
+                    <a:pt x="980824" y="121358"/>
+                  </a:lnTo>
+                  <a:lnTo>
+                    <a:pt x="1058068" y="274506"/>
+                  </a:lnTo>
+                  <a:lnTo>
+                    <a:pt x="1135311" y="420679"/>
+                  </a:lnTo>
+                  <a:lnTo>
+                    <a:pt x="1212555" y="560194"/>
+                  </a:lnTo>
+                  <a:lnTo>
+                    <a:pt x="1289799" y="693354"/>
+                  </a:lnTo>
+                  <a:lnTo>
+                    <a:pt x="1367042" y="820449"/>
+                  </a:lnTo>
+                  <a:lnTo>
+                    <a:pt x="1444286" y="941756"/>
+                  </a:lnTo>
+                  <a:lnTo>
+                    <a:pt x="1521529" y="1057537"/>
+                  </a:lnTo>
+                  <a:lnTo>
+                    <a:pt x="1598773" y="1168045"/>
+                  </a:lnTo>
+                  <a:lnTo>
+                    <a:pt x="1676016" y="1273519"/>
+                  </a:lnTo>
+                  <a:lnTo>
+                    <a:pt x="1753260" y="1374189"/>
+                  </a:lnTo>
+                  <a:lnTo>
+                    <a:pt x="1830504" y="1470274"/>
+                  </a:lnTo>
+                  <a:lnTo>
+                    <a:pt x="1907747" y="1561983"/>
+                  </a:lnTo>
+                  <a:lnTo>
+                    <a:pt x="1984991" y="1649514"/>
+                  </a:lnTo>
+                  <a:lnTo>
+                    <a:pt x="2062234" y="1733059"/>
+                  </a:lnTo>
+                  <a:lnTo>
+                    <a:pt x="2139478" y="1812798"/>
+                  </a:lnTo>
+                  <a:lnTo>
+                    <a:pt x="2216721" y="1888905"/>
+                  </a:lnTo>
+                  <a:lnTo>
+                    <a:pt x="2293965" y="1961546"/>
+                  </a:lnTo>
+                  <a:lnTo>
+                    <a:pt x="2371209" y="2030879"/>
+                  </a:lnTo>
+                  <a:lnTo>
+                    <a:pt x="2448452" y="2097053"/>
+                  </a:lnTo>
+                  <a:lnTo>
+                    <a:pt x="2525696" y="2160213"/>
+                  </a:lnTo>
+                  <a:lnTo>
+                    <a:pt x="2602939" y="2220497"/>
+                  </a:lnTo>
+                  <a:lnTo>
+                    <a:pt x="2680183" y="2278035"/>
+                  </a:lnTo>
+                  <a:lnTo>
+                    <a:pt x="2757426" y="2332952"/>
+                  </a:lnTo>
+                  <a:lnTo>
+                    <a:pt x="2834670" y="2385368"/>
+                  </a:lnTo>
+                  <a:lnTo>
+                    <a:pt x="2911914" y="2435396"/>
+                  </a:lnTo>
+                  <a:lnTo>
+                    <a:pt x="2989157" y="2483146"/>
+                  </a:lnTo>
+                  <a:lnTo>
+                    <a:pt x="3066401" y="2528720"/>
+                  </a:lnTo>
+                  <a:lnTo>
+                    <a:pt x="3143644" y="2572219"/>
+                  </a:lnTo>
+                  <a:lnTo>
+                    <a:pt x="3220888" y="2613737"/>
+                  </a:lnTo>
+                  <a:lnTo>
+                    <a:pt x="3298131" y="2653364"/>
+                  </a:lnTo>
+                  <a:lnTo>
+                    <a:pt x="3375375" y="2658895"/>
+                  </a:lnTo>
+                  <a:lnTo>
+                    <a:pt x="3452619" y="2663592"/>
+                  </a:lnTo>
+                  <a:lnTo>
+                    <a:pt x="3529862" y="2668263"/>
+                  </a:lnTo>
+                  <a:lnTo>
+                    <a:pt x="3607106" y="2672907"/>
+                  </a:lnTo>
+                  <a:lnTo>
+                    <a:pt x="3684349" y="2677525"/>
+                  </a:lnTo>
+                  <a:lnTo>
+                    <a:pt x="3761593" y="2682116"/>
+                  </a:lnTo>
+                  <a:lnTo>
+                    <a:pt x="3838836" y="2686681"/>
+                  </a:lnTo>
+                  <a:lnTo>
+                    <a:pt x="3916080" y="2691221"/>
+                  </a:lnTo>
+                  <a:lnTo>
+                    <a:pt x="3993324" y="2695734"/>
+                  </a:lnTo>
+                  <a:lnTo>
+                    <a:pt x="4070567" y="2700222"/>
+                  </a:lnTo>
+                  <a:lnTo>
+                    <a:pt x="4147811" y="2704684"/>
+                  </a:lnTo>
+                  <a:lnTo>
+                    <a:pt x="4225054" y="2709121"/>
+                  </a:lnTo>
+                  <a:lnTo>
+                    <a:pt x="4302298" y="2713532"/>
+                  </a:lnTo>
+                  <a:lnTo>
+                    <a:pt x="4379541" y="2717918"/>
+                  </a:lnTo>
+                  <a:lnTo>
+                    <a:pt x="4456785" y="2722280"/>
+                  </a:lnTo>
+                  <a:lnTo>
+                    <a:pt x="4534029" y="2726616"/>
+                  </a:lnTo>
+                  <a:lnTo>
+                    <a:pt x="4611272" y="2730928"/>
+                  </a:lnTo>
+                  <a:lnTo>
+                    <a:pt x="4688516" y="2735215"/>
+                  </a:lnTo>
+                  <a:lnTo>
+                    <a:pt x="4765759" y="2739478"/>
+                  </a:lnTo>
+                  <a:lnTo>
+                    <a:pt x="4843003" y="2743717"/>
+                  </a:lnTo>
+                  <a:lnTo>
+                    <a:pt x="4920246" y="2747931"/>
+                  </a:lnTo>
+                  <a:lnTo>
+                    <a:pt x="4997490" y="2752122"/>
+                  </a:lnTo>
+                  <a:lnTo>
+                    <a:pt x="5074734" y="2756288"/>
+                  </a:lnTo>
+                  <a:lnTo>
+                    <a:pt x="5151977" y="2760431"/>
+                  </a:lnTo>
+                  <a:lnTo>
+                    <a:pt x="5229221" y="2764550"/>
+                  </a:lnTo>
+                  <a:lnTo>
+                    <a:pt x="5306464" y="2768646"/>
+                  </a:lnTo>
+                  <a:lnTo>
+                    <a:pt x="5383708" y="2772719"/>
+                  </a:lnTo>
+                  <a:lnTo>
+                    <a:pt x="5460951" y="2776768"/>
+                  </a:lnTo>
+                  <a:lnTo>
+                    <a:pt x="5538195" y="2780794"/>
+                  </a:lnTo>
+                  <a:lnTo>
+                    <a:pt x="5615439" y="2784797"/>
+                  </a:lnTo>
+                  <a:lnTo>
+                    <a:pt x="5692682" y="2788778"/>
+                  </a:lnTo>
+                  <a:lnTo>
+                    <a:pt x="5769926" y="2792736"/>
+                  </a:lnTo>
+                  <a:lnTo>
+                    <a:pt x="5847169" y="2796671"/>
+                  </a:lnTo>
+                  <a:lnTo>
+                    <a:pt x="5924413" y="2800584"/>
+                  </a:lnTo>
+                  <a:lnTo>
+                    <a:pt x="6001656" y="2804474"/>
+                  </a:lnTo>
+                  <a:lnTo>
+                    <a:pt x="6078900" y="2808343"/>
+                  </a:lnTo>
+                  <a:lnTo>
+                    <a:pt x="6156144" y="2812189"/>
+                  </a:lnTo>
+                  <a:lnTo>
+                    <a:pt x="6233387" y="2816014"/>
+                  </a:lnTo>
+                  <a:lnTo>
+                    <a:pt x="6310631" y="2819817"/>
+                  </a:lnTo>
+                  <a:lnTo>
+                    <a:pt x="6387874" y="2823598"/>
+                  </a:lnTo>
+                  <a:lnTo>
+                    <a:pt x="6465118" y="2827357"/>
+                  </a:lnTo>
+                  <a:lnTo>
+                    <a:pt x="6542361" y="2831095"/>
+                  </a:lnTo>
+                  <a:lnTo>
+                    <a:pt x="6619605" y="2834812"/>
+                  </a:lnTo>
+                  <a:lnTo>
+                    <a:pt x="6696849" y="2838508"/>
+                  </a:lnTo>
+                  <a:lnTo>
+                    <a:pt x="6774092" y="2842182"/>
+                  </a:lnTo>
+                  <a:lnTo>
+                    <a:pt x="6851336" y="2845836"/>
+                  </a:lnTo>
+                  <a:lnTo>
+                    <a:pt x="6928579" y="2849469"/>
+                  </a:lnTo>
+                  <a:lnTo>
+                    <a:pt x="7005823" y="2853081"/>
+                  </a:lnTo>
+                  <a:lnTo>
+                    <a:pt x="7083066" y="2856673"/>
+                  </a:lnTo>
+                  <a:lnTo>
+                    <a:pt x="7160310" y="2860244"/>
+                  </a:lnTo>
+                  <a:lnTo>
+                    <a:pt x="7237554" y="2863795"/>
+                  </a:lnTo>
+                  <a:lnTo>
+                    <a:pt x="7314797" y="2867325"/>
+                  </a:lnTo>
+                  <a:lnTo>
+                    <a:pt x="7392041" y="2870836"/>
+                  </a:lnTo>
+                  <a:lnTo>
+                    <a:pt x="7392041" y="3413559"/>
+                  </a:lnTo>
+                  <a:lnTo>
+                    <a:pt x="7314797" y="3410210"/>
+                  </a:lnTo>
+                  <a:lnTo>
+                    <a:pt x="7237554" y="3406700"/>
+                  </a:lnTo>
+                  <a:lnTo>
+                    <a:pt x="7160310" y="3403024"/>
+                  </a:lnTo>
+                  <a:lnTo>
+                    <a:pt x="7083066" y="3399172"/>
+                  </a:lnTo>
+                  <a:lnTo>
+                    <a:pt x="7005823" y="3395136"/>
+                  </a:lnTo>
+                  <a:lnTo>
+                    <a:pt x="6928579" y="3390907"/>
+                  </a:lnTo>
+                  <a:lnTo>
+                    <a:pt x="6851336" y="3386477"/>
+                  </a:lnTo>
+                  <a:lnTo>
+                    <a:pt x="6774092" y="3381835"/>
+                  </a:lnTo>
+                  <a:lnTo>
+                    <a:pt x="6696849" y="3376971"/>
+                  </a:lnTo>
+                  <a:lnTo>
+                    <a:pt x="6619605" y="3371876"/>
+                  </a:lnTo>
+                  <a:lnTo>
+                    <a:pt x="6542361" y="3366538"/>
+                  </a:lnTo>
+                  <a:lnTo>
+                    <a:pt x="6465118" y="3360944"/>
+                  </a:lnTo>
+                  <a:lnTo>
+                    <a:pt x="6387874" y="3355084"/>
+                  </a:lnTo>
+                  <a:lnTo>
+                    <a:pt x="6310631" y="3348944"/>
+                  </a:lnTo>
+                  <a:lnTo>
+                    <a:pt x="6233387" y="3342511"/>
+                  </a:lnTo>
+                  <a:lnTo>
+                    <a:pt x="6156144" y="3335771"/>
+                  </a:lnTo>
+                  <a:lnTo>
+                    <a:pt x="6078900" y="3328710"/>
+                  </a:lnTo>
+                  <a:lnTo>
+                    <a:pt x="6001656" y="3321311"/>
+                  </a:lnTo>
+                  <a:lnTo>
+                    <a:pt x="5924413" y="3313560"/>
+                  </a:lnTo>
+                  <a:lnTo>
+                    <a:pt x="5847169" y="3305438"/>
+                  </a:lnTo>
+                  <a:lnTo>
+                    <a:pt x="5769926" y="3296929"/>
+                  </a:lnTo>
+                  <a:lnTo>
+                    <a:pt x="5692682" y="3288014"/>
+                  </a:lnTo>
+                  <a:lnTo>
+                    <a:pt x="5615439" y="3278673"/>
+                  </a:lnTo>
+                  <a:lnTo>
+                    <a:pt x="5538195" y="3268887"/>
+                  </a:lnTo>
+                  <a:lnTo>
+                    <a:pt x="5460951" y="3258634"/>
+                  </a:lnTo>
+                  <a:lnTo>
+                    <a:pt x="5383708" y="3247891"/>
+                  </a:lnTo>
+                  <a:lnTo>
+                    <a:pt x="5306464" y="3236636"/>
+                  </a:lnTo>
+                  <a:lnTo>
+                    <a:pt x="5229221" y="3224844"/>
+                  </a:lnTo>
+                  <a:lnTo>
+                    <a:pt x="5151977" y="3212489"/>
+                  </a:lnTo>
+                  <a:lnTo>
+                    <a:pt x="5074734" y="3199544"/>
+                  </a:lnTo>
+                  <a:lnTo>
+                    <a:pt x="4997490" y="3185981"/>
+                  </a:lnTo>
+                  <a:lnTo>
+                    <a:pt x="4920246" y="3171772"/>
+                  </a:lnTo>
+                  <a:lnTo>
+                    <a:pt x="4843003" y="3156884"/>
+                  </a:lnTo>
+                  <a:lnTo>
+                    <a:pt x="4765759" y="3141286"/>
+                  </a:lnTo>
+                  <a:lnTo>
+                    <a:pt x="4688516" y="3124943"/>
+                  </a:lnTo>
+                  <a:lnTo>
+                    <a:pt x="4611272" y="3107821"/>
+                  </a:lnTo>
+                  <a:lnTo>
+                    <a:pt x="4534029" y="3089881"/>
+                  </a:lnTo>
+                  <a:lnTo>
+                    <a:pt x="4456785" y="3071086"/>
+                  </a:lnTo>
+                  <a:lnTo>
+                    <a:pt x="4379541" y="3051393"/>
+                  </a:lnTo>
+                  <a:lnTo>
+                    <a:pt x="4302298" y="3030761"/>
+                  </a:lnTo>
+                  <a:lnTo>
+                    <a:pt x="4225054" y="3009144"/>
+                  </a:lnTo>
+                  <a:lnTo>
+                    <a:pt x="4147811" y="2986495"/>
+                  </a:lnTo>
+                  <a:lnTo>
+                    <a:pt x="4070567" y="2962766"/>
+                  </a:lnTo>
+                  <a:lnTo>
+                    <a:pt x="3993324" y="2937904"/>
+                  </a:lnTo>
+                  <a:lnTo>
+                    <a:pt x="3916080" y="2911856"/>
+                  </a:lnTo>
+                  <a:lnTo>
+                    <a:pt x="3838836" y="2884565"/>
+                  </a:lnTo>
+                  <a:lnTo>
+                    <a:pt x="3761593" y="2855971"/>
+                  </a:lnTo>
+                  <a:lnTo>
+                    <a:pt x="3684349" y="2826013"/>
+                  </a:lnTo>
+                  <a:lnTo>
+                    <a:pt x="3607106" y="2794625"/>
+                  </a:lnTo>
+                  <a:lnTo>
+                    <a:pt x="3529862" y="2761740"/>
+                  </a:lnTo>
+                  <a:lnTo>
+                    <a:pt x="3452619" y="2727285"/>
+                  </a:lnTo>
+                  <a:lnTo>
+                    <a:pt x="3375375" y="2691186"/>
+                  </a:lnTo>
+                  <a:lnTo>
+                    <a:pt x="3298131" y="2654170"/>
+                  </a:lnTo>
+                  <a:lnTo>
+                    <a:pt x="3220888" y="2649419"/>
+                  </a:lnTo>
+                  <a:lnTo>
+                    <a:pt x="3143644" y="2644640"/>
+                  </a:lnTo>
+                  <a:lnTo>
+                    <a:pt x="3066401" y="2639834"/>
+                  </a:lnTo>
+                  <a:lnTo>
+                    <a:pt x="2989157" y="2635001"/>
+                  </a:lnTo>
+                  <a:lnTo>
+                    <a:pt x="2911914" y="2630139"/>
+                  </a:lnTo>
+                  <a:lnTo>
+                    <a:pt x="2834670" y="2625250"/>
+                  </a:lnTo>
+                  <a:lnTo>
+                    <a:pt x="2757426" y="2620333"/>
+                  </a:lnTo>
+                  <a:lnTo>
+                    <a:pt x="2680183" y="2615388"/>
+                  </a:lnTo>
+                  <a:lnTo>
+                    <a:pt x="2602939" y="2610414"/>
+                  </a:lnTo>
+                  <a:lnTo>
+                    <a:pt x="2525696" y="2605412"/>
+                  </a:lnTo>
+                  <a:lnTo>
+                    <a:pt x="2448452" y="2600381"/>
+                  </a:lnTo>
+                  <a:lnTo>
+                    <a:pt x="2371209" y="2595322"/>
+                  </a:lnTo>
+                  <a:lnTo>
+                    <a:pt x="2293965" y="2590233"/>
+                  </a:lnTo>
+                  <a:lnTo>
+                    <a:pt x="2216721" y="2585116"/>
+                  </a:lnTo>
+                  <a:lnTo>
+                    <a:pt x="2139478" y="2579969"/>
+                  </a:lnTo>
+                  <a:lnTo>
+                    <a:pt x="2062234" y="2574792"/>
+                  </a:lnTo>
+                  <a:lnTo>
+                    <a:pt x="1984991" y="2569586"/>
+                  </a:lnTo>
+                  <a:lnTo>
+                    <a:pt x="1907747" y="2564350"/>
+                  </a:lnTo>
+                  <a:lnTo>
+                    <a:pt x="1830504" y="2559084"/>
+                  </a:lnTo>
+                  <a:lnTo>
+                    <a:pt x="1753260" y="2553788"/>
+                  </a:lnTo>
+                  <a:lnTo>
+                    <a:pt x="1676016" y="2548462"/>
+                  </a:lnTo>
+                  <a:lnTo>
+                    <a:pt x="1598773" y="2543105"/>
+                  </a:lnTo>
+                  <a:lnTo>
+                    <a:pt x="1521529" y="2537717"/>
+                  </a:lnTo>
+                  <a:lnTo>
+                    <a:pt x="1444286" y="2532299"/>
+                  </a:lnTo>
+                  <a:lnTo>
+                    <a:pt x="1367042" y="2526849"/>
+                  </a:lnTo>
+                  <a:lnTo>
+                    <a:pt x="1289799" y="2521369"/>
+                  </a:lnTo>
+                  <a:lnTo>
+                    <a:pt x="1212555" y="2515857"/>
+                  </a:lnTo>
+                  <a:lnTo>
+                    <a:pt x="1135311" y="2510313"/>
+                  </a:lnTo>
+                  <a:lnTo>
+                    <a:pt x="1058068" y="2504738"/>
+                  </a:lnTo>
+                  <a:lnTo>
+                    <a:pt x="980824" y="2499130"/>
+                  </a:lnTo>
+                  <a:lnTo>
+                    <a:pt x="903581" y="2493491"/>
+                  </a:lnTo>
+                  <a:lnTo>
+                    <a:pt x="826337" y="2487819"/>
+                  </a:lnTo>
+                  <a:lnTo>
+                    <a:pt x="749094" y="2482115"/>
+                  </a:lnTo>
+                  <a:lnTo>
+                    <a:pt x="671850" y="2476378"/>
+                  </a:lnTo>
+                  <a:lnTo>
+                    <a:pt x="594606" y="2470608"/>
+                  </a:lnTo>
+                  <a:lnTo>
+                    <a:pt x="517363" y="2464805"/>
+                  </a:lnTo>
+                  <a:lnTo>
+                    <a:pt x="440119" y="2458969"/>
+                  </a:lnTo>
+                  <a:lnTo>
+                    <a:pt x="362876" y="2453100"/>
+                  </a:lnTo>
+                  <a:lnTo>
+                    <a:pt x="285632" y="2447197"/>
+                  </a:lnTo>
+                  <a:lnTo>
+                    <a:pt x="208389" y="2441260"/>
+                  </a:lnTo>
+                  <a:lnTo>
+                    <a:pt x="131145" y="2435289"/>
+                  </a:lnTo>
+                  <a:lnTo>
+                    <a:pt x="53901" y="2429284"/>
+                  </a:lnTo>
+                  <a:lnTo>
+                    <a:pt x="0" y="2425069"/>
                   </a:lnTo>
                   <a:close/>
                 </a:path>
@@ -3579,267 +3579,267 @@
           </p:nvSpPr>
           <p:spPr>
             <a:xfrm>
-              <a:off x="1739920" y="1896563"/>
-              <a:ext cx="6469638" cy="3010018"/>
+              <a:off x="1739920" y="2073503"/>
+              <a:ext cx="6469638" cy="2870836"/>
             </a:xfrm>
             <a:custGeom>
               <a:avLst/>
               <a:pathLst>
-                <a:path w="6469638" h="3010018">
+                <a:path w="6469638" h="2870836">
                   <a:moveTo>
                     <a:pt x="0" y="0"/>
                   </a:moveTo>
                   <a:lnTo>
-                    <a:pt x="58421" y="127241"/>
-                  </a:lnTo>
-                  <a:lnTo>
-                    <a:pt x="135665" y="287814"/>
-                  </a:lnTo>
-                  <a:lnTo>
-                    <a:pt x="212908" y="441074"/>
-                  </a:lnTo>
-                  <a:lnTo>
-                    <a:pt x="290152" y="587353"/>
-                  </a:lnTo>
-                  <a:lnTo>
-                    <a:pt x="367395" y="726969"/>
-                  </a:lnTo>
-                  <a:lnTo>
-                    <a:pt x="444639" y="860226"/>
-                  </a:lnTo>
-                  <a:lnTo>
-                    <a:pt x="521883" y="987413"/>
-                  </a:lnTo>
-                  <a:lnTo>
-                    <a:pt x="599126" y="1108808"/>
-                  </a:lnTo>
-                  <a:lnTo>
-                    <a:pt x="676370" y="1224673"/>
-                  </a:lnTo>
-                  <a:lnTo>
-                    <a:pt x="753613" y="1335261"/>
-                  </a:lnTo>
-                  <a:lnTo>
-                    <a:pt x="830857" y="1440812"/>
-                  </a:lnTo>
-                  <a:lnTo>
-                    <a:pt x="908100" y="1541555"/>
-                  </a:lnTo>
-                  <a:lnTo>
-                    <a:pt x="985344" y="1637710"/>
-                  </a:lnTo>
-                  <a:lnTo>
-                    <a:pt x="1062588" y="1729485"/>
-                  </a:lnTo>
-                  <a:lnTo>
-                    <a:pt x="1139831" y="1817080"/>
-                  </a:lnTo>
-                  <a:lnTo>
-                    <a:pt x="1217075" y="1900685"/>
-                  </a:lnTo>
-                  <a:lnTo>
-                    <a:pt x="1294318" y="1980482"/>
-                  </a:lnTo>
-                  <a:lnTo>
-                    <a:pt x="1371562" y="2056645"/>
-                  </a:lnTo>
-                  <a:lnTo>
-                    <a:pt x="1448805" y="2129339"/>
-                  </a:lnTo>
-                  <a:lnTo>
-                    <a:pt x="1526049" y="2198721"/>
-                  </a:lnTo>
-                  <a:lnTo>
-                    <a:pt x="1603293" y="2264944"/>
-                  </a:lnTo>
-                  <a:lnTo>
-                    <a:pt x="1680536" y="2328150"/>
-                  </a:lnTo>
-                  <a:lnTo>
-                    <a:pt x="1757780" y="2388477"/>
-                  </a:lnTo>
-                  <a:lnTo>
-                    <a:pt x="1835023" y="2446057"/>
-                  </a:lnTo>
-                  <a:lnTo>
-                    <a:pt x="1912267" y="2501014"/>
-                  </a:lnTo>
-                  <a:lnTo>
-                    <a:pt x="1989510" y="2553467"/>
-                  </a:lnTo>
-                  <a:lnTo>
-                    <a:pt x="2066754" y="2603532"/>
-                  </a:lnTo>
-                  <a:lnTo>
-                    <a:pt x="2143998" y="2651316"/>
-                  </a:lnTo>
-                  <a:lnTo>
-                    <a:pt x="2221241" y="2696924"/>
-                  </a:lnTo>
-                  <a:lnTo>
-                    <a:pt x="2298485" y="2740455"/>
-                  </a:lnTo>
-                  <a:lnTo>
-                    <a:pt x="2375728" y="2782003"/>
-                  </a:lnTo>
-                  <a:lnTo>
-                    <a:pt x="2452972" y="2787802"/>
-                  </a:lnTo>
-                  <a:lnTo>
-                    <a:pt x="2530215" y="2792727"/>
-                  </a:lnTo>
-                  <a:lnTo>
-                    <a:pt x="2607459" y="2797624"/>
-                  </a:lnTo>
-                  <a:lnTo>
-                    <a:pt x="2684703" y="2802493"/>
-                  </a:lnTo>
-                  <a:lnTo>
-                    <a:pt x="2761946" y="2807335"/>
-                  </a:lnTo>
-                  <a:lnTo>
-                    <a:pt x="2839190" y="2812149"/>
-                  </a:lnTo>
-                  <a:lnTo>
-                    <a:pt x="2916433" y="2816936"/>
-                  </a:lnTo>
-                  <a:lnTo>
-                    <a:pt x="2993677" y="2821695"/>
-                  </a:lnTo>
-                  <a:lnTo>
-                    <a:pt x="3070920" y="2826427"/>
-                  </a:lnTo>
-                  <a:lnTo>
-                    <a:pt x="3148164" y="2831132"/>
-                  </a:lnTo>
-                  <a:lnTo>
-                    <a:pt x="3225408" y="2835811"/>
-                  </a:lnTo>
-                  <a:lnTo>
-                    <a:pt x="3302651" y="2840463"/>
-                  </a:lnTo>
-                  <a:lnTo>
-                    <a:pt x="3379895" y="2845088"/>
-                  </a:lnTo>
-                  <a:lnTo>
-                    <a:pt x="3457138" y="2849687"/>
-                  </a:lnTo>
-                  <a:lnTo>
-                    <a:pt x="3534382" y="2854260"/>
-                  </a:lnTo>
-                  <a:lnTo>
-                    <a:pt x="3611625" y="2858807"/>
-                  </a:lnTo>
-                  <a:lnTo>
-                    <a:pt x="3688869" y="2863327"/>
-                  </a:lnTo>
-                  <a:lnTo>
-                    <a:pt x="3766113" y="2867823"/>
-                  </a:lnTo>
-                  <a:lnTo>
-                    <a:pt x="3843356" y="2872292"/>
-                  </a:lnTo>
-                  <a:lnTo>
-                    <a:pt x="3920600" y="2876736"/>
-                  </a:lnTo>
-                  <a:lnTo>
-                    <a:pt x="3997843" y="2881155"/>
-                  </a:lnTo>
-                  <a:lnTo>
-                    <a:pt x="4075087" y="2885548"/>
-                  </a:lnTo>
-                  <a:lnTo>
-                    <a:pt x="4152330" y="2889917"/>
-                  </a:lnTo>
-                  <a:lnTo>
-                    <a:pt x="4229574" y="2894261"/>
-                  </a:lnTo>
-                  <a:lnTo>
-                    <a:pt x="4306818" y="2898580"/>
-                  </a:lnTo>
-                  <a:lnTo>
-                    <a:pt x="4384061" y="2902874"/>
-                  </a:lnTo>
-                  <a:lnTo>
-                    <a:pt x="4461305" y="2907144"/>
-                  </a:lnTo>
-                  <a:lnTo>
-                    <a:pt x="4538548" y="2911390"/>
-                  </a:lnTo>
-                  <a:lnTo>
-                    <a:pt x="4615792" y="2915611"/>
-                  </a:lnTo>
-                  <a:lnTo>
-                    <a:pt x="4693036" y="2919808"/>
-                  </a:lnTo>
-                  <a:lnTo>
-                    <a:pt x="4770279" y="2923982"/>
-                  </a:lnTo>
-                  <a:lnTo>
-                    <a:pt x="4847523" y="2928131"/>
-                  </a:lnTo>
-                  <a:lnTo>
-                    <a:pt x="4924766" y="2932258"/>
-                  </a:lnTo>
-                  <a:lnTo>
-                    <a:pt x="5002010" y="2936360"/>
-                  </a:lnTo>
-                  <a:lnTo>
-                    <a:pt x="5079253" y="2940439"/>
-                  </a:lnTo>
-                  <a:lnTo>
-                    <a:pt x="5156497" y="2944495"/>
-                  </a:lnTo>
-                  <a:lnTo>
-                    <a:pt x="5233741" y="2948528"/>
-                  </a:lnTo>
-                  <a:lnTo>
-                    <a:pt x="5310984" y="2952538"/>
-                  </a:lnTo>
-                  <a:lnTo>
-                    <a:pt x="5388228" y="2956525"/>
-                  </a:lnTo>
-                  <a:lnTo>
-                    <a:pt x="5465471" y="2960490"/>
-                  </a:lnTo>
-                  <a:lnTo>
-                    <a:pt x="5542715" y="2964431"/>
-                  </a:lnTo>
-                  <a:lnTo>
-                    <a:pt x="5619958" y="2968351"/>
-                  </a:lnTo>
-                  <a:lnTo>
-                    <a:pt x="5697202" y="2972248"/>
-                  </a:lnTo>
-                  <a:lnTo>
-                    <a:pt x="5774446" y="2976122"/>
-                  </a:lnTo>
-                  <a:lnTo>
-                    <a:pt x="5851689" y="2979975"/>
-                  </a:lnTo>
-                  <a:lnTo>
-                    <a:pt x="5928933" y="2983806"/>
-                  </a:lnTo>
-                  <a:lnTo>
-                    <a:pt x="6006176" y="2987615"/>
-                  </a:lnTo>
-                  <a:lnTo>
-                    <a:pt x="6083420" y="2991402"/>
-                  </a:lnTo>
-                  <a:lnTo>
-                    <a:pt x="6160663" y="2995168"/>
-                  </a:lnTo>
-                  <a:lnTo>
-                    <a:pt x="6237907" y="2998912"/>
-                  </a:lnTo>
-                  <a:lnTo>
-                    <a:pt x="6315151" y="3002635"/>
-                  </a:lnTo>
-                  <a:lnTo>
-                    <a:pt x="6392394" y="3006337"/>
-                  </a:lnTo>
-                  <a:lnTo>
-                    <a:pt x="6469638" y="3010018"/>
+                    <a:pt x="58421" y="121358"/>
+                  </a:lnTo>
+                  <a:lnTo>
+                    <a:pt x="135665" y="274506"/>
+                  </a:lnTo>
+                  <a:lnTo>
+                    <a:pt x="212908" y="420679"/>
+                  </a:lnTo>
+                  <a:lnTo>
+                    <a:pt x="290152" y="560194"/>
+                  </a:lnTo>
+                  <a:lnTo>
+                    <a:pt x="367395" y="693354"/>
+                  </a:lnTo>
+                  <a:lnTo>
+                    <a:pt x="444639" y="820449"/>
+                  </a:lnTo>
+                  <a:lnTo>
+                    <a:pt x="521883" y="941756"/>
+                  </a:lnTo>
+                  <a:lnTo>
+                    <a:pt x="599126" y="1057537"/>
+                  </a:lnTo>
+                  <a:lnTo>
+                    <a:pt x="676370" y="1168045"/>
+                  </a:lnTo>
+                  <a:lnTo>
+                    <a:pt x="753613" y="1273519"/>
+                  </a:lnTo>
+                  <a:lnTo>
+                    <a:pt x="830857" y="1374189"/>
+                  </a:lnTo>
+                  <a:lnTo>
+                    <a:pt x="908100" y="1470274"/>
+                  </a:lnTo>
+                  <a:lnTo>
+                    <a:pt x="985344" y="1561983"/>
+                  </a:lnTo>
+                  <a:lnTo>
+                    <a:pt x="1062588" y="1649514"/>
+                  </a:lnTo>
+                  <a:lnTo>
+                    <a:pt x="1139831" y="1733059"/>
+                  </a:lnTo>
+                  <a:lnTo>
+                    <a:pt x="1217075" y="1812798"/>
+                  </a:lnTo>
+                  <a:lnTo>
+                    <a:pt x="1294318" y="1888905"/>
+                  </a:lnTo>
+                  <a:lnTo>
+                    <a:pt x="1371562" y="1961546"/>
+                  </a:lnTo>
+                  <a:lnTo>
+                    <a:pt x="1448805" y="2030879"/>
+                  </a:lnTo>
+                  <a:lnTo>
+                    <a:pt x="1526049" y="2097053"/>
+                  </a:lnTo>
+                  <a:lnTo>
+                    <a:pt x="1603293" y="2160213"/>
+                  </a:lnTo>
+                  <a:lnTo>
+                    <a:pt x="1680536" y="2220497"/>
+                  </a:lnTo>
+                  <a:lnTo>
+                    <a:pt x="1757780" y="2278035"/>
+                  </a:lnTo>
+                  <a:lnTo>
+                    <a:pt x="1835023" y="2332952"/>
+                  </a:lnTo>
+                  <a:lnTo>
+                    <a:pt x="1912267" y="2385368"/>
+                  </a:lnTo>
+                  <a:lnTo>
+                    <a:pt x="1989510" y="2435396"/>
+                  </a:lnTo>
+                  <a:lnTo>
+                    <a:pt x="2066754" y="2483146"/>
+                  </a:lnTo>
+                  <a:lnTo>
+                    <a:pt x="2143998" y="2528720"/>
+                  </a:lnTo>
+                  <a:lnTo>
+                    <a:pt x="2221241" y="2572219"/>
+                  </a:lnTo>
+                  <a:lnTo>
+                    <a:pt x="2298485" y="2613737"/>
+                  </a:lnTo>
+                  <a:lnTo>
+                    <a:pt x="2375728" y="2653364"/>
+                  </a:lnTo>
+                  <a:lnTo>
+                    <a:pt x="2452972" y="2658895"/>
+                  </a:lnTo>
+                  <a:lnTo>
+                    <a:pt x="2530215" y="2663592"/>
+                  </a:lnTo>
+                  <a:lnTo>
+                    <a:pt x="2607459" y="2668263"/>
+                  </a:lnTo>
+                  <a:lnTo>
+                    <a:pt x="2684703" y="2672907"/>
+                  </a:lnTo>
+                  <a:lnTo>
+                    <a:pt x="2761946" y="2677525"/>
+                  </a:lnTo>
+                  <a:lnTo>
+                    <a:pt x="2839190" y="2682116"/>
+                  </a:lnTo>
+                  <a:lnTo>
+                    <a:pt x="2916433" y="2686681"/>
+                  </a:lnTo>
+                  <a:lnTo>
+                    <a:pt x="2993677" y="2691221"/>
+                  </a:lnTo>
+                  <a:lnTo>
+                    <a:pt x="3070920" y="2695734"/>
+                  </a:lnTo>
+                  <a:lnTo>
+                    <a:pt x="3148164" y="2700222"/>
+                  </a:lnTo>
+                  <a:lnTo>
+                    <a:pt x="3225408" y="2704684"/>
+                  </a:lnTo>
+                  <a:lnTo>
+                    <a:pt x="3302651" y="2709121"/>
+                  </a:lnTo>
+                  <a:lnTo>
+                    <a:pt x="3379895" y="2713532"/>
+                  </a:lnTo>
+                  <a:lnTo>
+                    <a:pt x="3457138" y="2717918"/>
+                  </a:lnTo>
+                  <a:lnTo>
+                    <a:pt x="3534382" y="2722280"/>
+                  </a:lnTo>
+                  <a:lnTo>
+                    <a:pt x="3611625" y="2726616"/>
+                  </a:lnTo>
+                  <a:lnTo>
+                    <a:pt x="3688869" y="2730928"/>
+                  </a:lnTo>
+                  <a:lnTo>
+                    <a:pt x="3766113" y="2735215"/>
+                  </a:lnTo>
+                  <a:lnTo>
+                    <a:pt x="3843356" y="2739478"/>
+                  </a:lnTo>
+                  <a:lnTo>
+                    <a:pt x="3920600" y="2743717"/>
+                  </a:lnTo>
+                  <a:lnTo>
+                    <a:pt x="3997843" y="2747931"/>
+                  </a:lnTo>
+                  <a:lnTo>
+                    <a:pt x="4075087" y="2752122"/>
+                  </a:lnTo>
+                  <a:lnTo>
+                    <a:pt x="4152330" y="2756288"/>
+                  </a:lnTo>
+                  <a:lnTo>
+                    <a:pt x="4229574" y="2760431"/>
+                  </a:lnTo>
+                  <a:lnTo>
+                    <a:pt x="4306818" y="2764550"/>
+                  </a:lnTo>
+                  <a:lnTo>
+                    <a:pt x="4384061" y="2768646"/>
+                  </a:lnTo>
+                  <a:lnTo>
+                    <a:pt x="4461305" y="2772719"/>
+                  </a:lnTo>
+                  <a:lnTo>
+                    <a:pt x="4538548" y="2776768"/>
+                  </a:lnTo>
+                  <a:lnTo>
+                    <a:pt x="4615792" y="2780794"/>
+                  </a:lnTo>
+                  <a:lnTo>
+                    <a:pt x="4693036" y="2784797"/>
+                  </a:lnTo>
+                  <a:lnTo>
+                    <a:pt x="4770279" y="2788778"/>
+                  </a:lnTo>
+                  <a:lnTo>
+                    <a:pt x="4847523" y="2792736"/>
+                  </a:lnTo>
+                  <a:lnTo>
+                    <a:pt x="4924766" y="2796671"/>
+                  </a:lnTo>
+                  <a:lnTo>
+                    <a:pt x="5002010" y="2800584"/>
+                  </a:lnTo>
+                  <a:lnTo>
+                    <a:pt x="5079253" y="2804474"/>
+                  </a:lnTo>
+                  <a:lnTo>
+                    <a:pt x="5156497" y="2808343"/>
+                  </a:lnTo>
+                  <a:lnTo>
+                    <a:pt x="5233741" y="2812189"/>
+                  </a:lnTo>
+                  <a:lnTo>
+                    <a:pt x="5310984" y="2816014"/>
+                  </a:lnTo>
+                  <a:lnTo>
+                    <a:pt x="5388228" y="2819817"/>
+                  </a:lnTo>
+                  <a:lnTo>
+                    <a:pt x="5465471" y="2823598"/>
+                  </a:lnTo>
+                  <a:lnTo>
+                    <a:pt x="5542715" y="2827357"/>
+                  </a:lnTo>
+                  <a:lnTo>
+                    <a:pt x="5619958" y="2831095"/>
+                  </a:lnTo>
+                  <a:lnTo>
+                    <a:pt x="5697202" y="2834812"/>
+                  </a:lnTo>
+                  <a:lnTo>
+                    <a:pt x="5774446" y="2838508"/>
+                  </a:lnTo>
+                  <a:lnTo>
+                    <a:pt x="5851689" y="2842182"/>
+                  </a:lnTo>
+                  <a:lnTo>
+                    <a:pt x="5928933" y="2845836"/>
+                  </a:lnTo>
+                  <a:lnTo>
+                    <a:pt x="6006176" y="2849469"/>
+                  </a:lnTo>
+                  <a:lnTo>
+                    <a:pt x="6083420" y="2853081"/>
+                  </a:lnTo>
+                  <a:lnTo>
+                    <a:pt x="6160663" y="2856673"/>
+                  </a:lnTo>
+                  <a:lnTo>
+                    <a:pt x="6237907" y="2860244"/>
+                  </a:lnTo>
+                  <a:lnTo>
+                    <a:pt x="6315151" y="2863795"/>
+                  </a:lnTo>
+                  <a:lnTo>
+                    <a:pt x="6392394" y="2867325"/>
+                  </a:lnTo>
+                  <a:lnTo>
+                    <a:pt x="6469638" y="2870836"/>
                   </a:lnTo>
                 </a:path>
               </a:pathLst>
@@ -3859,300 +3859,300 @@
           </p:nvSpPr>
           <p:spPr>
             <a:xfrm>
-              <a:off x="817517" y="4439203"/>
-              <a:ext cx="7392041" cy="1036413"/>
+              <a:off x="817517" y="4498572"/>
+              <a:ext cx="7392041" cy="988490"/>
             </a:xfrm>
             <a:custGeom>
               <a:avLst/>
               <a:pathLst>
-                <a:path w="7392041" h="1036413">
+                <a:path w="7392041" h="988490">
                   <a:moveTo>
-                    <a:pt x="7392041" y="1036413"/>
+                    <a:pt x="7392041" y="988490"/>
                   </a:moveTo>
                   <a:lnTo>
-                    <a:pt x="7314797" y="1032901"/>
-                  </a:lnTo>
-                  <a:lnTo>
-                    <a:pt x="7237554" y="1029222"/>
-                  </a:lnTo>
-                  <a:lnTo>
-                    <a:pt x="7160310" y="1025367"/>
-                  </a:lnTo>
-                  <a:lnTo>
-                    <a:pt x="7083066" y="1021328"/>
-                  </a:lnTo>
-                  <a:lnTo>
-                    <a:pt x="7005823" y="1017096"/>
-                  </a:lnTo>
-                  <a:lnTo>
-                    <a:pt x="6928579" y="1012663"/>
-                  </a:lnTo>
-                  <a:lnTo>
-                    <a:pt x="6851336" y="1008017"/>
-                  </a:lnTo>
-                  <a:lnTo>
-                    <a:pt x="6774092" y="1003151"/>
-                  </a:lnTo>
-                  <a:lnTo>
-                    <a:pt x="6696849" y="998051"/>
-                  </a:lnTo>
-                  <a:lnTo>
-                    <a:pt x="6619605" y="992709"/>
-                  </a:lnTo>
-                  <a:lnTo>
-                    <a:pt x="6542361" y="987112"/>
-                  </a:lnTo>
-                  <a:lnTo>
-                    <a:pt x="6465118" y="981247"/>
-                  </a:lnTo>
-                  <a:lnTo>
-                    <a:pt x="6387874" y="975103"/>
-                  </a:lnTo>
-                  <a:lnTo>
-                    <a:pt x="6310631" y="968665"/>
-                  </a:lnTo>
-                  <a:lnTo>
-                    <a:pt x="6233387" y="961920"/>
-                  </a:lnTo>
-                  <a:lnTo>
-                    <a:pt x="6156144" y="954854"/>
-                  </a:lnTo>
-                  <a:lnTo>
-                    <a:pt x="6078900" y="947450"/>
-                  </a:lnTo>
-                  <a:lnTo>
-                    <a:pt x="6001656" y="939693"/>
-                  </a:lnTo>
-                  <a:lnTo>
-                    <a:pt x="5924413" y="931565"/>
-                  </a:lnTo>
-                  <a:lnTo>
-                    <a:pt x="5847169" y="923050"/>
-                  </a:lnTo>
-                  <a:lnTo>
-                    <a:pt x="5769926" y="914129"/>
-                  </a:lnTo>
-                  <a:lnTo>
-                    <a:pt x="5692682" y="904781"/>
-                  </a:lnTo>
-                  <a:lnTo>
-                    <a:pt x="5615439" y="894988"/>
-                  </a:lnTo>
-                  <a:lnTo>
-                    <a:pt x="5538195" y="884727"/>
-                  </a:lnTo>
-                  <a:lnTo>
-                    <a:pt x="5460951" y="873977"/>
-                  </a:lnTo>
-                  <a:lnTo>
-                    <a:pt x="5383708" y="862713"/>
-                  </a:lnTo>
-                  <a:lnTo>
-                    <a:pt x="5306464" y="850912"/>
-                  </a:lnTo>
-                  <a:lnTo>
-                    <a:pt x="5229221" y="838548"/>
-                  </a:lnTo>
-                  <a:lnTo>
-                    <a:pt x="5151977" y="825594"/>
-                  </a:lnTo>
-                  <a:lnTo>
-                    <a:pt x="5074734" y="812022"/>
-                  </a:lnTo>
-                  <a:lnTo>
-                    <a:pt x="4997490" y="797802"/>
-                  </a:lnTo>
-                  <a:lnTo>
-                    <a:pt x="4920246" y="782903"/>
-                  </a:lnTo>
-                  <a:lnTo>
-                    <a:pt x="4843003" y="767294"/>
-                  </a:lnTo>
-                  <a:lnTo>
-                    <a:pt x="4765759" y="750939"/>
-                  </a:lnTo>
-                  <a:lnTo>
-                    <a:pt x="4688516" y="733804"/>
-                  </a:lnTo>
-                  <a:lnTo>
-                    <a:pt x="4611272" y="715852"/>
-                  </a:lnTo>
-                  <a:lnTo>
-                    <a:pt x="4534029" y="697043"/>
-                  </a:lnTo>
-                  <a:lnTo>
-                    <a:pt x="4456785" y="677336"/>
-                  </a:lnTo>
-                  <a:lnTo>
-                    <a:pt x="4379541" y="656688"/>
-                  </a:lnTo>
-                  <a:lnTo>
-                    <a:pt x="4302298" y="635056"/>
-                  </a:lnTo>
-                  <a:lnTo>
-                    <a:pt x="4225054" y="612391"/>
-                  </a:lnTo>
-                  <a:lnTo>
-                    <a:pt x="4147811" y="588644"/>
-                  </a:lnTo>
-                  <a:lnTo>
-                    <a:pt x="4070567" y="563764"/>
-                  </a:lnTo>
-                  <a:lnTo>
-                    <a:pt x="3993324" y="537697"/>
-                  </a:lnTo>
-                  <a:lnTo>
-                    <a:pt x="3916080" y="510386"/>
-                  </a:lnTo>
-                  <a:lnTo>
-                    <a:pt x="3838836" y="481772"/>
-                  </a:lnTo>
-                  <a:lnTo>
-                    <a:pt x="3761593" y="451792"/>
-                  </a:lnTo>
-                  <a:lnTo>
-                    <a:pt x="3684349" y="420382"/>
-                  </a:lnTo>
-                  <a:lnTo>
-                    <a:pt x="3607106" y="387472"/>
-                  </a:lnTo>
-                  <a:lnTo>
-                    <a:pt x="3529862" y="352992"/>
-                  </a:lnTo>
-                  <a:lnTo>
-                    <a:pt x="3452619" y="316867"/>
-                  </a:lnTo>
-                  <a:lnTo>
-                    <a:pt x="3375375" y="279018"/>
-                  </a:lnTo>
-                  <a:lnTo>
-                    <a:pt x="3298131" y="240208"/>
-                  </a:lnTo>
-                  <a:lnTo>
-                    <a:pt x="3220888" y="235226"/>
-                  </a:lnTo>
-                  <a:lnTo>
-                    <a:pt x="3143644" y="230216"/>
-                  </a:lnTo>
-                  <a:lnTo>
-                    <a:pt x="3066401" y="225177"/>
-                  </a:lnTo>
-                  <a:lnTo>
-                    <a:pt x="2989157" y="220109"/>
-                  </a:lnTo>
-                  <a:lnTo>
-                    <a:pt x="2911914" y="215012"/>
-                  </a:lnTo>
-                  <a:lnTo>
-                    <a:pt x="2834670" y="209886"/>
-                  </a:lnTo>
-                  <a:lnTo>
-                    <a:pt x="2757426" y="204730"/>
-                  </a:lnTo>
-                  <a:lnTo>
-                    <a:pt x="2680183" y="199545"/>
-                  </a:lnTo>
-                  <a:lnTo>
-                    <a:pt x="2602939" y="194330"/>
-                  </a:lnTo>
-                  <a:lnTo>
-                    <a:pt x="2525696" y="189086"/>
-                  </a:lnTo>
-                  <a:lnTo>
-                    <a:pt x="2448452" y="183811"/>
-                  </a:lnTo>
-                  <a:lnTo>
-                    <a:pt x="2371209" y="178506"/>
-                  </a:lnTo>
-                  <a:lnTo>
-                    <a:pt x="2293965" y="173171"/>
-                  </a:lnTo>
-                  <a:lnTo>
-                    <a:pt x="2216721" y="167805"/>
-                  </a:lnTo>
-                  <a:lnTo>
-                    <a:pt x="2139478" y="162409"/>
-                  </a:lnTo>
-                  <a:lnTo>
-                    <a:pt x="2062234" y="156982"/>
-                  </a:lnTo>
-                  <a:lnTo>
-                    <a:pt x="1984991" y="151523"/>
-                  </a:lnTo>
-                  <a:lnTo>
-                    <a:pt x="1907747" y="146033"/>
-                  </a:lnTo>
-                  <a:lnTo>
-                    <a:pt x="1830504" y="140512"/>
-                  </a:lnTo>
-                  <a:lnTo>
-                    <a:pt x="1753260" y="134959"/>
-                  </a:lnTo>
-                  <a:lnTo>
-                    <a:pt x="1676016" y="129375"/>
-                  </a:lnTo>
-                  <a:lnTo>
-                    <a:pt x="1598773" y="123758"/>
-                  </a:lnTo>
-                  <a:lnTo>
-                    <a:pt x="1521529" y="118109"/>
-                  </a:lnTo>
-                  <a:lnTo>
-                    <a:pt x="1444286" y="112428"/>
-                  </a:lnTo>
-                  <a:lnTo>
-                    <a:pt x="1367042" y="106714"/>
-                  </a:lnTo>
-                  <a:lnTo>
-                    <a:pt x="1289799" y="100968"/>
-                  </a:lnTo>
-                  <a:lnTo>
-                    <a:pt x="1212555" y="95189"/>
-                  </a:lnTo>
-                  <a:lnTo>
-                    <a:pt x="1135311" y="89376"/>
-                  </a:lnTo>
-                  <a:lnTo>
-                    <a:pt x="1058068" y="83530"/>
-                  </a:lnTo>
-                  <a:lnTo>
-                    <a:pt x="980824" y="77651"/>
-                  </a:lnTo>
-                  <a:lnTo>
-                    <a:pt x="903581" y="71738"/>
-                  </a:lnTo>
-                  <a:lnTo>
-                    <a:pt x="826337" y="65792"/>
-                  </a:lnTo>
-                  <a:lnTo>
-                    <a:pt x="749094" y="59811"/>
-                  </a:lnTo>
-                  <a:lnTo>
-                    <a:pt x="671850" y="53796"/>
-                  </a:lnTo>
-                  <a:lnTo>
-                    <a:pt x="594606" y="47746"/>
-                  </a:lnTo>
-                  <a:lnTo>
-                    <a:pt x="517363" y="41662"/>
-                  </a:lnTo>
-                  <a:lnTo>
-                    <a:pt x="440119" y="35543"/>
-                  </a:lnTo>
-                  <a:lnTo>
-                    <a:pt x="362876" y="29389"/>
-                  </a:lnTo>
-                  <a:lnTo>
-                    <a:pt x="285632" y="23200"/>
-                  </a:lnTo>
-                  <a:lnTo>
-                    <a:pt x="208389" y="16975"/>
-                  </a:lnTo>
-                  <a:lnTo>
-                    <a:pt x="131145" y="10715"/>
-                  </a:lnTo>
-                  <a:lnTo>
-                    <a:pt x="53901" y="4418"/>
+                    <a:pt x="7314797" y="985140"/>
+                  </a:lnTo>
+                  <a:lnTo>
+                    <a:pt x="7237554" y="981631"/>
+                  </a:lnTo>
+                  <a:lnTo>
+                    <a:pt x="7160310" y="977954"/>
+                  </a:lnTo>
+                  <a:lnTo>
+                    <a:pt x="7083066" y="974102"/>
+                  </a:lnTo>
+                  <a:lnTo>
+                    <a:pt x="7005823" y="970066"/>
+                  </a:lnTo>
+                  <a:lnTo>
+                    <a:pt x="6928579" y="965837"/>
+                  </a:lnTo>
+                  <a:lnTo>
+                    <a:pt x="6851336" y="961407"/>
+                  </a:lnTo>
+                  <a:lnTo>
+                    <a:pt x="6774092" y="956765"/>
+                  </a:lnTo>
+                  <a:lnTo>
+                    <a:pt x="6696849" y="951902"/>
+                  </a:lnTo>
+                  <a:lnTo>
+                    <a:pt x="6619605" y="946807"/>
+                  </a:lnTo>
+                  <a:lnTo>
+                    <a:pt x="6542361" y="941468"/>
+                  </a:lnTo>
+                  <a:lnTo>
+                    <a:pt x="6465118" y="935875"/>
+                  </a:lnTo>
+                  <a:lnTo>
+                    <a:pt x="6387874" y="930014"/>
+                  </a:lnTo>
+                  <a:lnTo>
+                    <a:pt x="6310631" y="923874"/>
+                  </a:lnTo>
+                  <a:lnTo>
+                    <a:pt x="6233387" y="917442"/>
+                  </a:lnTo>
+                  <a:lnTo>
+                    <a:pt x="6156144" y="910702"/>
+                  </a:lnTo>
+                  <a:lnTo>
+                    <a:pt x="6078900" y="903640"/>
+                  </a:lnTo>
+                  <a:lnTo>
+                    <a:pt x="6001656" y="896242"/>
+                  </a:lnTo>
+                  <a:lnTo>
+                    <a:pt x="5924413" y="888490"/>
+                  </a:lnTo>
+                  <a:lnTo>
+                    <a:pt x="5847169" y="880369"/>
+                  </a:lnTo>
+                  <a:lnTo>
+                    <a:pt x="5769926" y="871860"/>
+                  </a:lnTo>
+                  <a:lnTo>
+                    <a:pt x="5692682" y="862944"/>
+                  </a:lnTo>
+                  <a:lnTo>
+                    <a:pt x="5615439" y="853604"/>
+                  </a:lnTo>
+                  <a:lnTo>
+                    <a:pt x="5538195" y="843818"/>
+                  </a:lnTo>
+                  <a:lnTo>
+                    <a:pt x="5460951" y="833564"/>
+                  </a:lnTo>
+                  <a:lnTo>
+                    <a:pt x="5383708" y="822822"/>
+                  </a:lnTo>
+                  <a:lnTo>
+                    <a:pt x="5306464" y="811566"/>
+                  </a:lnTo>
+                  <a:lnTo>
+                    <a:pt x="5229221" y="799774"/>
+                  </a:lnTo>
+                  <a:lnTo>
+                    <a:pt x="5151977" y="787419"/>
+                  </a:lnTo>
+                  <a:lnTo>
+                    <a:pt x="5074734" y="774474"/>
+                  </a:lnTo>
+                  <a:lnTo>
+                    <a:pt x="4997490" y="760912"/>
+                  </a:lnTo>
+                  <a:lnTo>
+                    <a:pt x="4920246" y="746702"/>
+                  </a:lnTo>
+                  <a:lnTo>
+                    <a:pt x="4843003" y="731814"/>
+                  </a:lnTo>
+                  <a:lnTo>
+                    <a:pt x="4765759" y="716216"/>
+                  </a:lnTo>
+                  <a:lnTo>
+                    <a:pt x="4688516" y="699874"/>
+                  </a:lnTo>
+                  <a:lnTo>
+                    <a:pt x="4611272" y="682751"/>
+                  </a:lnTo>
+                  <a:lnTo>
+                    <a:pt x="4534029" y="664812"/>
+                  </a:lnTo>
+                  <a:lnTo>
+                    <a:pt x="4456785" y="646016"/>
+                  </a:lnTo>
+                  <a:lnTo>
+                    <a:pt x="4379541" y="626323"/>
+                  </a:lnTo>
+                  <a:lnTo>
+                    <a:pt x="4302298" y="605691"/>
+                  </a:lnTo>
+                  <a:lnTo>
+                    <a:pt x="4225054" y="584074"/>
+                  </a:lnTo>
+                  <a:lnTo>
+                    <a:pt x="4147811" y="561426"/>
+                  </a:lnTo>
+                  <a:lnTo>
+                    <a:pt x="4070567" y="537696"/>
+                  </a:lnTo>
+                  <a:lnTo>
+                    <a:pt x="3993324" y="512834"/>
+                  </a:lnTo>
+                  <a:lnTo>
+                    <a:pt x="3916080" y="486786"/>
+                  </a:lnTo>
+                  <a:lnTo>
+                    <a:pt x="3838836" y="459495"/>
+                  </a:lnTo>
+                  <a:lnTo>
+                    <a:pt x="3761593" y="430902"/>
+                  </a:lnTo>
+                  <a:lnTo>
+                    <a:pt x="3684349" y="400943"/>
+                  </a:lnTo>
+                  <a:lnTo>
+                    <a:pt x="3607106" y="369556"/>
+                  </a:lnTo>
+                  <a:lnTo>
+                    <a:pt x="3529862" y="336670"/>
+                  </a:lnTo>
+                  <a:lnTo>
+                    <a:pt x="3452619" y="302215"/>
+                  </a:lnTo>
+                  <a:lnTo>
+                    <a:pt x="3375375" y="266116"/>
+                  </a:lnTo>
+                  <a:lnTo>
+                    <a:pt x="3298131" y="229101"/>
+                  </a:lnTo>
+                  <a:lnTo>
+                    <a:pt x="3220888" y="224349"/>
+                  </a:lnTo>
+                  <a:lnTo>
+                    <a:pt x="3143644" y="219571"/>
+                  </a:lnTo>
+                  <a:lnTo>
+                    <a:pt x="3066401" y="214765"/>
+                  </a:lnTo>
+                  <a:lnTo>
+                    <a:pt x="2989157" y="209931"/>
+                  </a:lnTo>
+                  <a:lnTo>
+                    <a:pt x="2911914" y="205070"/>
+                  </a:lnTo>
+                  <a:lnTo>
+                    <a:pt x="2834670" y="200181"/>
+                  </a:lnTo>
+                  <a:lnTo>
+                    <a:pt x="2757426" y="195264"/>
+                  </a:lnTo>
+                  <a:lnTo>
+                    <a:pt x="2680183" y="190318"/>
+                  </a:lnTo>
+                  <a:lnTo>
+                    <a:pt x="2602939" y="185345"/>
+                  </a:lnTo>
+                  <a:lnTo>
+                    <a:pt x="2525696" y="180343"/>
+                  </a:lnTo>
+                  <a:lnTo>
+                    <a:pt x="2448452" y="175312"/>
+                  </a:lnTo>
+                  <a:lnTo>
+                    <a:pt x="2371209" y="170252"/>
+                  </a:lnTo>
+                  <a:lnTo>
+                    <a:pt x="2293965" y="165164"/>
+                  </a:lnTo>
+                  <a:lnTo>
+                    <a:pt x="2216721" y="160046"/>
+                  </a:lnTo>
+                  <a:lnTo>
+                    <a:pt x="2139478" y="154899"/>
+                  </a:lnTo>
+                  <a:lnTo>
+                    <a:pt x="2062234" y="149723"/>
+                  </a:lnTo>
+                  <a:lnTo>
+                    <a:pt x="1984991" y="144517"/>
+                  </a:lnTo>
+                  <a:lnTo>
+                    <a:pt x="1907747" y="139281"/>
+                  </a:lnTo>
+                  <a:lnTo>
+                    <a:pt x="1830504" y="134015"/>
+                  </a:lnTo>
+                  <a:lnTo>
+                    <a:pt x="1753260" y="128719"/>
+                  </a:lnTo>
+                  <a:lnTo>
+                    <a:pt x="1676016" y="123392"/>
+                  </a:lnTo>
+                  <a:lnTo>
+                    <a:pt x="1598773" y="118035"/>
+                  </a:lnTo>
+                  <a:lnTo>
+                    <a:pt x="1521529" y="112648"/>
+                  </a:lnTo>
+                  <a:lnTo>
+                    <a:pt x="1444286" y="107229"/>
+                  </a:lnTo>
+                  <a:lnTo>
+                    <a:pt x="1367042" y="101780"/>
+                  </a:lnTo>
+                  <a:lnTo>
+                    <a:pt x="1289799" y="96299"/>
+                  </a:lnTo>
+                  <a:lnTo>
+                    <a:pt x="1212555" y="90787"/>
+                  </a:lnTo>
+                  <a:lnTo>
+                    <a:pt x="1135311" y="85243"/>
+                  </a:lnTo>
+                  <a:lnTo>
+                    <a:pt x="1058068" y="79668"/>
+                  </a:lnTo>
+                  <a:lnTo>
+                    <a:pt x="980824" y="74061"/>
+                  </a:lnTo>
+                  <a:lnTo>
+                    <a:pt x="903581" y="68421"/>
+                  </a:lnTo>
+                  <a:lnTo>
+                    <a:pt x="826337" y="62749"/>
+                  </a:lnTo>
+                  <a:lnTo>
+                    <a:pt x="749094" y="57045"/>
+                  </a:lnTo>
+                  <a:lnTo>
+                    <a:pt x="671850" y="51308"/>
+                  </a:lnTo>
+                  <a:lnTo>
+                    <a:pt x="594606" y="45538"/>
+                  </a:lnTo>
+                  <a:lnTo>
+                    <a:pt x="517363" y="39736"/>
+                  </a:lnTo>
+                  <a:lnTo>
+                    <a:pt x="440119" y="33900"/>
+                  </a:lnTo>
+                  <a:lnTo>
+                    <a:pt x="362876" y="28030"/>
+                  </a:lnTo>
+                  <a:lnTo>
+                    <a:pt x="285632" y="22127"/>
+                  </a:lnTo>
+                  <a:lnTo>
+                    <a:pt x="208389" y="16190"/>
+                  </a:lnTo>
+                  <a:lnTo>
+                    <a:pt x="131145" y="10219"/>
+                  </a:lnTo>
+                  <a:lnTo>
+                    <a:pt x="53901" y="4214"/>
                   </a:lnTo>
                   <a:lnTo>
                     <a:pt x="0" y="0"/>
@@ -4175,303 +4175,303 @@
           </p:nvSpPr>
           <p:spPr>
             <a:xfrm>
-              <a:off x="817517" y="2889493"/>
-              <a:ext cx="7392041" cy="2442248"/>
+              <a:off x="817517" y="3020520"/>
+              <a:ext cx="7392041" cy="2329320"/>
             </a:xfrm>
             <a:custGeom>
               <a:avLst/>
               <a:pathLst>
-                <a:path w="7392041" h="2442248">
+                <a:path w="7392041" h="2329320">
                   <a:moveTo>
                     <a:pt x="0" y="0"/>
                   </a:moveTo>
                   <a:lnTo>
-                    <a:pt x="53901" y="48308"/>
-                  </a:lnTo>
-                  <a:lnTo>
-                    <a:pt x="131145" y="115747"/>
-                  </a:lnTo>
-                  <a:lnTo>
-                    <a:pt x="208389" y="181445"/>
-                  </a:lnTo>
-                  <a:lnTo>
-                    <a:pt x="285632" y="245446"/>
-                  </a:lnTo>
-                  <a:lnTo>
-                    <a:pt x="362876" y="307794"/>
-                  </a:lnTo>
-                  <a:lnTo>
-                    <a:pt x="440119" y="368533"/>
-                  </a:lnTo>
-                  <a:lnTo>
-                    <a:pt x="517363" y="427702"/>
-                  </a:lnTo>
-                  <a:lnTo>
-                    <a:pt x="594606" y="485344"/>
-                  </a:lnTo>
-                  <a:lnTo>
-                    <a:pt x="671850" y="541497"/>
-                  </a:lnTo>
-                  <a:lnTo>
-                    <a:pt x="749094" y="596200"/>
-                  </a:lnTo>
-                  <a:lnTo>
-                    <a:pt x="826337" y="649490"/>
-                  </a:lnTo>
-                  <a:lnTo>
-                    <a:pt x="903581" y="701404"/>
-                  </a:lnTo>
-                  <a:lnTo>
-                    <a:pt x="980824" y="751977"/>
-                  </a:lnTo>
-                  <a:lnTo>
-                    <a:pt x="1058068" y="801244"/>
-                  </a:lnTo>
-                  <a:lnTo>
-                    <a:pt x="1135311" y="849239"/>
-                  </a:lnTo>
-                  <a:lnTo>
-                    <a:pt x="1212555" y="895995"/>
-                  </a:lnTo>
-                  <a:lnTo>
-                    <a:pt x="1289799" y="941543"/>
-                  </a:lnTo>
-                  <a:lnTo>
-                    <a:pt x="1367042" y="985914"/>
-                  </a:lnTo>
-                  <a:lnTo>
-                    <a:pt x="1444286" y="1029140"/>
-                  </a:lnTo>
-                  <a:lnTo>
-                    <a:pt x="1521529" y="1071250"/>
-                  </a:lnTo>
-                  <a:lnTo>
-                    <a:pt x="1598773" y="1112272"/>
-                  </a:lnTo>
-                  <a:lnTo>
-                    <a:pt x="1676016" y="1152234"/>
-                  </a:lnTo>
-                  <a:lnTo>
-                    <a:pt x="1753260" y="1191165"/>
-                  </a:lnTo>
-                  <a:lnTo>
-                    <a:pt x="1830504" y="1229090"/>
-                  </a:lnTo>
-                  <a:lnTo>
-                    <a:pt x="1907747" y="1266036"/>
-                  </a:lnTo>
-                  <a:lnTo>
-                    <a:pt x="1984991" y="1302028"/>
-                  </a:lnTo>
-                  <a:lnTo>
-                    <a:pt x="2062234" y="1337090"/>
-                  </a:lnTo>
-                  <a:lnTo>
-                    <a:pt x="2139478" y="1371246"/>
-                  </a:lnTo>
-                  <a:lnTo>
-                    <a:pt x="2216721" y="1404521"/>
-                  </a:lnTo>
-                  <a:lnTo>
-                    <a:pt x="2293965" y="1436936"/>
-                  </a:lnTo>
-                  <a:lnTo>
-                    <a:pt x="2371209" y="1468515"/>
-                  </a:lnTo>
-                  <a:lnTo>
-                    <a:pt x="2448452" y="1499277"/>
-                  </a:lnTo>
-                  <a:lnTo>
-                    <a:pt x="2525696" y="1529245"/>
-                  </a:lnTo>
-                  <a:lnTo>
-                    <a:pt x="2602939" y="1558440"/>
-                  </a:lnTo>
-                  <a:lnTo>
-                    <a:pt x="2680183" y="1586880"/>
-                  </a:lnTo>
-                  <a:lnTo>
-                    <a:pt x="2757426" y="1614586"/>
-                  </a:lnTo>
-                  <a:lnTo>
-                    <a:pt x="2834670" y="1641576"/>
-                  </a:lnTo>
-                  <a:lnTo>
-                    <a:pt x="2911914" y="1667870"/>
-                  </a:lnTo>
-                  <a:lnTo>
-                    <a:pt x="2989157" y="1693484"/>
-                  </a:lnTo>
-                  <a:lnTo>
-                    <a:pt x="3066401" y="1718437"/>
-                  </a:lnTo>
-                  <a:lnTo>
-                    <a:pt x="3143644" y="1742745"/>
-                  </a:lnTo>
-                  <a:lnTo>
-                    <a:pt x="3220888" y="1766426"/>
-                  </a:lnTo>
-                  <a:lnTo>
-                    <a:pt x="3298131" y="1789495"/>
-                  </a:lnTo>
-                  <a:lnTo>
-                    <a:pt x="3375375" y="1811968"/>
-                  </a:lnTo>
-                  <a:lnTo>
-                    <a:pt x="3452619" y="1833861"/>
-                  </a:lnTo>
-                  <a:lnTo>
-                    <a:pt x="3529862" y="1855189"/>
-                  </a:lnTo>
-                  <a:lnTo>
-                    <a:pt x="3607106" y="1875966"/>
-                  </a:lnTo>
-                  <a:lnTo>
-                    <a:pt x="3684349" y="1896206"/>
-                  </a:lnTo>
-                  <a:lnTo>
-                    <a:pt x="3761593" y="1915924"/>
-                  </a:lnTo>
-                  <a:lnTo>
-                    <a:pt x="3838836" y="1935132"/>
-                  </a:lnTo>
-                  <a:lnTo>
-                    <a:pt x="3916080" y="1953844"/>
-                  </a:lnTo>
-                  <a:lnTo>
-                    <a:pt x="3993324" y="1972073"/>
-                  </a:lnTo>
-                  <a:lnTo>
-                    <a:pt x="4070567" y="1989831"/>
-                  </a:lnTo>
-                  <a:lnTo>
-                    <a:pt x="4147811" y="2007131"/>
-                  </a:lnTo>
-                  <a:lnTo>
-                    <a:pt x="4225054" y="2023984"/>
-                  </a:lnTo>
-                  <a:lnTo>
-                    <a:pt x="4302298" y="2040402"/>
-                  </a:lnTo>
-                  <a:lnTo>
-                    <a:pt x="4379541" y="2056395"/>
-                  </a:lnTo>
-                  <a:lnTo>
-                    <a:pt x="4456785" y="2071976"/>
-                  </a:lnTo>
-                  <a:lnTo>
-                    <a:pt x="4534029" y="2087154"/>
-                  </a:lnTo>
-                  <a:lnTo>
-                    <a:pt x="4611272" y="2101941"/>
-                  </a:lnTo>
-                  <a:lnTo>
-                    <a:pt x="4688516" y="2116345"/>
-                  </a:lnTo>
-                  <a:lnTo>
-                    <a:pt x="4765759" y="2130378"/>
-                  </a:lnTo>
-                  <a:lnTo>
-                    <a:pt x="4843003" y="2144048"/>
-                  </a:lnTo>
-                  <a:lnTo>
-                    <a:pt x="4920246" y="2157365"/>
-                  </a:lnTo>
-                  <a:lnTo>
-                    <a:pt x="4997490" y="2170338"/>
-                  </a:lnTo>
-                  <a:lnTo>
-                    <a:pt x="5074734" y="2182976"/>
-                  </a:lnTo>
-                  <a:lnTo>
-                    <a:pt x="5151977" y="2195288"/>
-                  </a:lnTo>
-                  <a:lnTo>
-                    <a:pt x="5229221" y="2207281"/>
-                  </a:lnTo>
-                  <a:lnTo>
-                    <a:pt x="5306464" y="2218965"/>
-                  </a:lnTo>
-                  <a:lnTo>
-                    <a:pt x="5383708" y="2230348"/>
-                  </a:lnTo>
-                  <a:lnTo>
-                    <a:pt x="5460951" y="2241436"/>
-                  </a:lnTo>
-                  <a:lnTo>
-                    <a:pt x="5538195" y="2252238"/>
-                  </a:lnTo>
-                  <a:lnTo>
-                    <a:pt x="5615439" y="2262761"/>
-                  </a:lnTo>
-                  <a:lnTo>
-                    <a:pt x="5692682" y="2273012"/>
-                  </a:lnTo>
-                  <a:lnTo>
-                    <a:pt x="5769926" y="2282999"/>
-                  </a:lnTo>
-                  <a:lnTo>
-                    <a:pt x="5847169" y="2292727"/>
-                  </a:lnTo>
-                  <a:lnTo>
-                    <a:pt x="5924413" y="2302205"/>
-                  </a:lnTo>
-                  <a:lnTo>
-                    <a:pt x="6001656" y="2311437"/>
-                  </a:lnTo>
-                  <a:lnTo>
-                    <a:pt x="6078900" y="2320432"/>
-                  </a:lnTo>
-                  <a:lnTo>
-                    <a:pt x="6156144" y="2329194"/>
-                  </a:lnTo>
-                  <a:lnTo>
-                    <a:pt x="6233387" y="2337729"/>
-                  </a:lnTo>
-                  <a:lnTo>
-                    <a:pt x="6310631" y="2346044"/>
-                  </a:lnTo>
-                  <a:lnTo>
-                    <a:pt x="6387874" y="2354145"/>
-                  </a:lnTo>
-                  <a:lnTo>
-                    <a:pt x="6465118" y="2362036"/>
-                  </a:lnTo>
-                  <a:lnTo>
-                    <a:pt x="6542361" y="2369724"/>
-                  </a:lnTo>
-                  <a:lnTo>
-                    <a:pt x="6619605" y="2377213"/>
-                  </a:lnTo>
-                  <a:lnTo>
-                    <a:pt x="6696849" y="2384508"/>
-                  </a:lnTo>
-                  <a:lnTo>
-                    <a:pt x="6774092" y="2391615"/>
-                  </a:lnTo>
-                  <a:lnTo>
-                    <a:pt x="6851336" y="2398539"/>
-                  </a:lnTo>
-                  <a:lnTo>
-                    <a:pt x="6928579" y="2405284"/>
-                  </a:lnTo>
-                  <a:lnTo>
-                    <a:pt x="7005823" y="2411854"/>
-                  </a:lnTo>
-                  <a:lnTo>
-                    <a:pt x="7083066" y="2418255"/>
-                  </a:lnTo>
-                  <a:lnTo>
-                    <a:pt x="7160310" y="2424491"/>
-                  </a:lnTo>
-                  <a:lnTo>
-                    <a:pt x="7237554" y="2430566"/>
-                  </a:lnTo>
-                  <a:lnTo>
-                    <a:pt x="7314797" y="2436483"/>
-                  </a:lnTo>
-                  <a:lnTo>
-                    <a:pt x="7392041" y="2442248"/>
+                    <a:pt x="53901" y="46074"/>
+                  </a:lnTo>
+                  <a:lnTo>
+                    <a:pt x="131145" y="110395"/>
+                  </a:lnTo>
+                  <a:lnTo>
+                    <a:pt x="208389" y="173055"/>
+                  </a:lnTo>
+                  <a:lnTo>
+                    <a:pt x="285632" y="234097"/>
+                  </a:lnTo>
+                  <a:lnTo>
+                    <a:pt x="362876" y="293562"/>
+                  </a:lnTo>
+                  <a:lnTo>
+                    <a:pt x="440119" y="351492"/>
+                  </a:lnTo>
+                  <a:lnTo>
+                    <a:pt x="517363" y="407925"/>
+                  </a:lnTo>
+                  <a:lnTo>
+                    <a:pt x="594606" y="462902"/>
+                  </a:lnTo>
+                  <a:lnTo>
+                    <a:pt x="671850" y="516458"/>
+                  </a:lnTo>
+                  <a:lnTo>
+                    <a:pt x="749094" y="568632"/>
+                  </a:lnTo>
+                  <a:lnTo>
+                    <a:pt x="826337" y="619458"/>
+                  </a:lnTo>
+                  <a:lnTo>
+                    <a:pt x="903581" y="668971"/>
+                  </a:lnTo>
+                  <a:lnTo>
+                    <a:pt x="980824" y="717206"/>
+                  </a:lnTo>
+                  <a:lnTo>
+                    <a:pt x="1058068" y="764195"/>
+                  </a:lnTo>
+                  <a:lnTo>
+                    <a:pt x="1135311" y="809971"/>
+                  </a:lnTo>
+                  <a:lnTo>
+                    <a:pt x="1212555" y="854564"/>
+                  </a:lnTo>
+                  <a:lnTo>
+                    <a:pt x="1289799" y="898006"/>
+                  </a:lnTo>
+                  <a:lnTo>
+                    <a:pt x="1367042" y="940326"/>
+                  </a:lnTo>
+                  <a:lnTo>
+                    <a:pt x="1444286" y="981553"/>
+                  </a:lnTo>
+                  <a:lnTo>
+                    <a:pt x="1521529" y="1021715"/>
+                  </a:lnTo>
+                  <a:lnTo>
+                    <a:pt x="1598773" y="1060841"/>
+                  </a:lnTo>
+                  <a:lnTo>
+                    <a:pt x="1676016" y="1098955"/>
+                  </a:lnTo>
+                  <a:lnTo>
+                    <a:pt x="1753260" y="1136086"/>
+                  </a:lnTo>
+                  <a:lnTo>
+                    <a:pt x="1830504" y="1172257"/>
+                  </a:lnTo>
+                  <a:lnTo>
+                    <a:pt x="1907747" y="1207495"/>
+                  </a:lnTo>
+                  <a:lnTo>
+                    <a:pt x="1984991" y="1241822"/>
+                  </a:lnTo>
+                  <a:lnTo>
+                    <a:pt x="2062234" y="1275263"/>
+                  </a:lnTo>
+                  <a:lnTo>
+                    <a:pt x="2139478" y="1307841"/>
+                  </a:lnTo>
+                  <a:lnTo>
+                    <a:pt x="2216721" y="1339577"/>
+                  </a:lnTo>
+                  <a:lnTo>
+                    <a:pt x="2293965" y="1370493"/>
+                  </a:lnTo>
+                  <a:lnTo>
+                    <a:pt x="2371209" y="1400611"/>
+                  </a:lnTo>
+                  <a:lnTo>
+                    <a:pt x="2448452" y="1429951"/>
+                  </a:lnTo>
+                  <a:lnTo>
+                    <a:pt x="2525696" y="1458534"/>
+                  </a:lnTo>
+                  <a:lnTo>
+                    <a:pt x="2602939" y="1486378"/>
+                  </a:lnTo>
+                  <a:lnTo>
+                    <a:pt x="2680183" y="1513503"/>
+                  </a:lnTo>
+                  <a:lnTo>
+                    <a:pt x="2757426" y="1539928"/>
+                  </a:lnTo>
+                  <a:lnTo>
+                    <a:pt x="2834670" y="1565670"/>
+                  </a:lnTo>
+                  <a:lnTo>
+                    <a:pt x="2911914" y="1590748"/>
+                  </a:lnTo>
+                  <a:lnTo>
+                    <a:pt x="2989157" y="1615178"/>
+                  </a:lnTo>
+                  <a:lnTo>
+                    <a:pt x="3066401" y="1638977"/>
+                  </a:lnTo>
+                  <a:lnTo>
+                    <a:pt x="3143644" y="1662161"/>
+                  </a:lnTo>
+                  <a:lnTo>
+                    <a:pt x="3220888" y="1684747"/>
+                  </a:lnTo>
+                  <a:lnTo>
+                    <a:pt x="3298131" y="1706749"/>
+                  </a:lnTo>
+                  <a:lnTo>
+                    <a:pt x="3375375" y="1728184"/>
+                  </a:lnTo>
+                  <a:lnTo>
+                    <a:pt x="3452619" y="1749064"/>
+                  </a:lnTo>
+                  <a:lnTo>
+                    <a:pt x="3529862" y="1769406"/>
+                  </a:lnTo>
+                  <a:lnTo>
+                    <a:pt x="3607106" y="1789222"/>
+                  </a:lnTo>
+                  <a:lnTo>
+                    <a:pt x="3684349" y="1808526"/>
+                  </a:lnTo>
+                  <a:lnTo>
+                    <a:pt x="3761593" y="1827332"/>
+                  </a:lnTo>
+                  <a:lnTo>
+                    <a:pt x="3838836" y="1845652"/>
+                  </a:lnTo>
+                  <a:lnTo>
+                    <a:pt x="3916080" y="1863499"/>
+                  </a:lnTo>
+                  <a:lnTo>
+                    <a:pt x="3993324" y="1880885"/>
+                  </a:lnTo>
+                  <a:lnTo>
+                    <a:pt x="4070567" y="1897822"/>
+                  </a:lnTo>
+                  <a:lnTo>
+                    <a:pt x="4147811" y="1914322"/>
+                  </a:lnTo>
+                  <a:lnTo>
+                    <a:pt x="4225054" y="1930396"/>
+                  </a:lnTo>
+                  <a:lnTo>
+                    <a:pt x="4302298" y="1946054"/>
+                  </a:lnTo>
+                  <a:lnTo>
+                    <a:pt x="4379541" y="1961308"/>
+                  </a:lnTo>
+                  <a:lnTo>
+                    <a:pt x="4456785" y="1976169"/>
+                  </a:lnTo>
+                  <a:lnTo>
+                    <a:pt x="4534029" y="1990645"/>
+                  </a:lnTo>
+                  <a:lnTo>
+                    <a:pt x="4611272" y="2004748"/>
+                  </a:lnTo>
+                  <a:lnTo>
+                    <a:pt x="4688516" y="2018486"/>
+                  </a:lnTo>
+                  <a:lnTo>
+                    <a:pt x="4765759" y="2031870"/>
+                  </a:lnTo>
+                  <a:lnTo>
+                    <a:pt x="4843003" y="2044908"/>
+                  </a:lnTo>
+                  <a:lnTo>
+                    <a:pt x="4920246" y="2057609"/>
+                  </a:lnTo>
+                  <a:lnTo>
+                    <a:pt x="4997490" y="2069982"/>
+                  </a:lnTo>
+                  <a:lnTo>
+                    <a:pt x="5074734" y="2082036"/>
+                  </a:lnTo>
+                  <a:lnTo>
+                    <a:pt x="5151977" y="2093778"/>
+                  </a:lnTo>
+                  <a:lnTo>
+                    <a:pt x="5229221" y="2105217"/>
+                  </a:lnTo>
+                  <a:lnTo>
+                    <a:pt x="5306464" y="2116361"/>
+                  </a:lnTo>
+                  <a:lnTo>
+                    <a:pt x="5383708" y="2127217"/>
+                  </a:lnTo>
+                  <a:lnTo>
+                    <a:pt x="5460951" y="2137793"/>
+                  </a:lnTo>
+                  <a:lnTo>
+                    <a:pt x="5538195" y="2148095"/>
+                  </a:lnTo>
+                  <a:lnTo>
+                    <a:pt x="5615439" y="2158132"/>
+                  </a:lnTo>
+                  <a:lnTo>
+                    <a:pt x="5692682" y="2167909"/>
+                  </a:lnTo>
+                  <a:lnTo>
+                    <a:pt x="5769926" y="2177434"/>
+                  </a:lnTo>
+                  <a:lnTo>
+                    <a:pt x="5847169" y="2186713"/>
+                  </a:lnTo>
+                  <a:lnTo>
+                    <a:pt x="5924413" y="2195752"/>
+                  </a:lnTo>
+                  <a:lnTo>
+                    <a:pt x="6001656" y="2204557"/>
+                  </a:lnTo>
+                  <a:lnTo>
+                    <a:pt x="6078900" y="2213136"/>
+                  </a:lnTo>
+                  <a:lnTo>
+                    <a:pt x="6156144" y="2221493"/>
+                  </a:lnTo>
+                  <a:lnTo>
+                    <a:pt x="6233387" y="2229633"/>
+                  </a:lnTo>
+                  <a:lnTo>
+                    <a:pt x="6310631" y="2237564"/>
+                  </a:lnTo>
+                  <a:lnTo>
+                    <a:pt x="6387874" y="2245290"/>
+                  </a:lnTo>
+                  <a:lnTo>
+                    <a:pt x="6465118" y="2252817"/>
+                  </a:lnTo>
+                  <a:lnTo>
+                    <a:pt x="6542361" y="2260149"/>
+                  </a:lnTo>
+                  <a:lnTo>
+                    <a:pt x="6619605" y="2267291"/>
+                  </a:lnTo>
+                  <a:lnTo>
+                    <a:pt x="6696849" y="2274249"/>
+                  </a:lnTo>
+                  <a:lnTo>
+                    <a:pt x="6774092" y="2281028"/>
+                  </a:lnTo>
+                  <a:lnTo>
+                    <a:pt x="6851336" y="2287631"/>
+                  </a:lnTo>
+                  <a:lnTo>
+                    <a:pt x="6928579" y="2294064"/>
+                  </a:lnTo>
+                  <a:lnTo>
+                    <a:pt x="7005823" y="2300331"/>
+                  </a:lnTo>
+                  <a:lnTo>
+                    <a:pt x="7083066" y="2306436"/>
+                  </a:lnTo>
+                  <a:lnTo>
+                    <a:pt x="7160310" y="2312383"/>
+                  </a:lnTo>
+                  <a:lnTo>
+                    <a:pt x="7237554" y="2318177"/>
+                  </a:lnTo>
+                  <a:lnTo>
+                    <a:pt x="7314797" y="2323821"/>
+                  </a:lnTo>
+                  <a:lnTo>
+                    <a:pt x="7392041" y="2329320"/>
                   </a:lnTo>
                 </a:path>
               </a:pathLst>
@@ -4500,7 +4500,7 @@
           </p:nvSpPr>
           <p:spPr>
             <a:xfrm>
-              <a:off x="817517" y="4679530"/>
+              <a:off x="817517" y="4727786"/>
               <a:ext cx="7799693" cy="0"/>
             </a:xfrm>
             <a:custGeom>
@@ -4543,15 +4543,15 @@
           </p:nvSpPr>
           <p:spPr>
             <a:xfrm>
-              <a:off x="4117484" y="1896563"/>
-              <a:ext cx="0" cy="3826579"/>
+              <a:off x="4117484" y="2073503"/>
+              <a:ext cx="0" cy="3649639"/>
             </a:xfrm>
             <a:custGeom>
               <a:avLst/>
               <a:pathLst>
-                <a:path w="0" h="3826579">
+                <a:path w="0" h="3649639">
                   <a:moveTo>
-                    <a:pt x="0" y="3826579"/>
+                    <a:pt x="0" y="3649639"/>
                   </a:moveTo>
                   <a:lnTo>
                     <a:pt x="0" y="0"/>
@@ -4586,7 +4586,7 @@
           </p:nvSpPr>
           <p:spPr>
             <a:xfrm>
-              <a:off x="692708" y="5509156"/>
+              <a:off x="692708" y="5517199"/>
               <a:ext cx="62179" cy="80101"/>
             </a:xfrm>
             <a:prstGeom prst="rect">
@@ -4632,7 +4632,7 @@
           </p:nvSpPr>
           <p:spPr>
             <a:xfrm>
-              <a:off x="692708" y="4639479"/>
+              <a:off x="692708" y="4687735"/>
               <a:ext cx="62179" cy="80101"/>
             </a:xfrm>
             <a:prstGeom prst="rect">
@@ -4678,7 +4678,7 @@
           </p:nvSpPr>
           <p:spPr>
             <a:xfrm>
-              <a:off x="692708" y="3769802"/>
+              <a:off x="692708" y="3858272"/>
               <a:ext cx="62179" cy="80101"/>
             </a:xfrm>
             <a:prstGeom prst="rect">
@@ -4724,7 +4724,7 @@
           </p:nvSpPr>
           <p:spPr>
             <a:xfrm>
-              <a:off x="692708" y="2900125"/>
+              <a:off x="692708" y="3028808"/>
               <a:ext cx="62179" cy="80101"/>
             </a:xfrm>
             <a:prstGeom prst="rect">
@@ -4770,7 +4770,7 @@
           </p:nvSpPr>
           <p:spPr>
             <a:xfrm>
-              <a:off x="692708" y="2030448"/>
+              <a:off x="692708" y="2199345"/>
               <a:ext cx="62179" cy="80101"/>
             </a:xfrm>
             <a:prstGeom prst="rect">
@@ -5046,7 +5046,7 @@
           </p:nvSpPr>
           <p:spPr>
             <a:xfrm rot="-5400000">
-              <a:off x="68446" y="3759743"/>
+              <a:off x="68446" y="3848213"/>
               <a:ext cx="1016904" cy="100218"/>
             </a:xfrm>
             <a:prstGeom prst="rect">
@@ -5087,6 +5087,52 @@
         <p:sp>
           <p:nvSpPr>
             <p:cNvPr id="38" name="tx38"/>
+            <p:cNvSpPr/>
+            <p:nvPr/>
+          </p:nvSpPr>
+          <p:spPr>
+            <a:xfrm>
+              <a:off x="817517" y="1896563"/>
+              <a:ext cx="5626211" cy="82021"/>
+            </a:xfrm>
+            <a:prstGeom prst="rect">
+              <a:avLst/>
+            </a:prstGeom>
+            <a:noFill/>
+          </p:spPr>
+          <p:txBody>
+            <a:bodyPr lIns="0" rIns="0" tIns="0" bIns="0" anchorCtr="1" anchor="ctr" wrap="none"/>
+            <a:lstStyle/>
+            <a:p>
+              <a:pPr algn="l" marL="0" marR="0" indent="0">
+                <a:lnSpc>
+                  <a:spcPts val="900"/>
+                </a:lnSpc>
+                <a:spcBef>
+                  <a:spcPts val="0"/>
+                </a:spcBef>
+                <a:spcAft>
+                  <a:spcPts val="0"/>
+                </a:spcAft>
+              </a:pPr>
+              <a:r>
+                <a:rPr sz="900">
+                  <a:solidFill>
+                    <a:srgbClr val="404040">
+                      <a:alpha val="100000"/>
+                    </a:srgbClr>
+                  </a:solidFill>
+                  <a:latin typeface="Helvetica"/>
+                  <a:cs typeface="Helvetica"/>
+                </a:rPr>
+                <a:t>subHR per 0.1 ratio decline: 1.35 (1.07-1.71)  |  per IQR decline (Δ = 0.30): 2.43 (1.21-4.85)  |  IQR: [0.84, 1.14]</a:t>
+              </a:r>
+            </a:p>
+          </p:txBody>
+        </p:sp>
+        <p:sp>
+          <p:nvSpPr>
+            <p:cNvPr id="39" name="tx39"/>
             <p:cNvSpPr/>
             <p:nvPr/>
           </p:nvSpPr>

--- a/docs/pptx/auc3/jx-auc3-linsubhr-ratio-anemia3.pptx
+++ b/docs/pptx/auc3/jx-auc3-linsubhr-ratio-anemia3.pptx
@@ -5093,7 +5093,7 @@
           <p:spPr>
             <a:xfrm>
               <a:off x="817517" y="1896563"/>
-              <a:ext cx="5626211" cy="82021"/>
+              <a:ext cx="6169365" cy="82021"/>
             </a:xfrm>
             <a:prstGeom prst="rect">
               <a:avLst/>
@@ -5125,7 +5125,7 @@
                   <a:latin typeface="Helvetica"/>
                   <a:cs typeface="Helvetica"/>
                 </a:rPr>
-                <a:t>subHR per 0.1 ratio decline: 1.35 (1.07-1.71)  |  per IQR decline (Δ = 0.30): 2.43 (1.21-4.85)  |  IQR: [0.84, 1.14]</a:t>
+                <a:t>subHR per 0.1 ratio decline: 1.35 (1.07-1.71), p = 0.012  |  per IQR decline (Δ = 0.30): 2.43 (1.21-4.85)  |  IQR: [0.84, 1.14]</a:t>
               </a:r>
             </a:p>
           </p:txBody>

--- a/docs/pptx/auc3/jx-auc3-linsubhr-ratio-anemia3.pptx
+++ b/docs/pptx/auc3/jx-auc3-linsubhr-ratio-anemia3.pptx
@@ -5093,7 +5093,7 @@
           <p:spPr>
             <a:xfrm>
               <a:off x="817517" y="1896563"/>
-              <a:ext cx="6169365" cy="82021"/>
+              <a:ext cx="6833128" cy="82021"/>
             </a:xfrm>
             <a:prstGeom prst="rect">
               <a:avLst/>
@@ -5125,7 +5125,7 @@
                   <a:latin typeface="Helvetica"/>
                   <a:cs typeface="Helvetica"/>
                 </a:rPr>
-                <a:t>subHR per 0.1 ratio decline: 1.35 (1.07-1.71), p = 0.012  |  per IQR decline (Δ = 0.30): 2.43 (1.21-4.85)  |  IQR: [0.84, 1.14]</a:t>
+                <a:t>subHR per 0.1 ratio decline: 1.35 (1.07-1.71), p_Bonf = 0.073 (n = 6)  |  per IQR decline (Δ = 0.30): 2.43 (1.21-4.85)  |  IQR: [0.84, 1.14]</a:t>
               </a:r>
             </a:p>
           </p:txBody>

--- a/docs/pptx/auc3/jx-auc3-linsubhr-ratio-anemia3.pptx
+++ b/docs/pptx/auc3/jx-auc3-linsubhr-ratio-anemia3.pptx
@@ -2443,7 +2443,7 @@
           </p:nvSpPr>
           <p:spPr>
             <a:xfrm>
-              <a:off x="1615213" y="2073503"/>
+              <a:off x="1531834" y="2073503"/>
               <a:ext cx="0" cy="3649639"/>
             </a:xfrm>
             <a:custGeom>
@@ -2486,7 +2486,7 @@
           </p:nvSpPr>
           <p:spPr>
             <a:xfrm>
-              <a:off x="3387871" y="2073503"/>
+              <a:off x="3586410" y="2073503"/>
               <a:ext cx="0" cy="3649639"/>
             </a:xfrm>
             <a:custGeom>
@@ -2529,7 +2529,7 @@
           </p:nvSpPr>
           <p:spPr>
             <a:xfrm>
-              <a:off x="5160528" y="2073503"/>
+              <a:off x="5640985" y="2073503"/>
               <a:ext cx="0" cy="3649639"/>
             </a:xfrm>
             <a:custGeom>
@@ -2572,7 +2572,7 @@
           </p:nvSpPr>
           <p:spPr>
             <a:xfrm>
-              <a:off x="6933186" y="2073503"/>
+              <a:off x="7695561" y="2073503"/>
               <a:ext cx="0" cy="3649639"/>
             </a:xfrm>
             <a:custGeom>
@@ -2830,7 +2830,7 @@
           </p:nvSpPr>
           <p:spPr>
             <a:xfrm>
-              <a:off x="2501542" y="2073503"/>
+              <a:off x="2559122" y="2073503"/>
               <a:ext cx="0" cy="3649639"/>
             </a:xfrm>
             <a:custGeom>
@@ -2873,7 +2873,7 @@
           </p:nvSpPr>
           <p:spPr>
             <a:xfrm>
-              <a:off x="4274200" y="2073503"/>
+              <a:off x="4613698" y="2073503"/>
               <a:ext cx="0" cy="3649639"/>
             </a:xfrm>
             <a:custGeom>
@@ -2916,7 +2916,7 @@
           </p:nvSpPr>
           <p:spPr>
             <a:xfrm>
-              <a:off x="6046857" y="2073503"/>
+              <a:off x="6668273" y="2073503"/>
               <a:ext cx="0" cy="3649639"/>
             </a:xfrm>
             <a:custGeom>
@@ -2953,607 +2953,573 @@
         </p:sp>
         <p:sp>
           <p:nvSpPr>
-            <p:cNvPr id="20" name="pl20"/>
+            <p:cNvPr id="20" name="pg20"/>
             <p:cNvSpPr/>
             <p:nvPr/>
           </p:nvSpPr>
           <p:spPr>
             <a:xfrm>
-              <a:off x="7819515" y="2073503"/>
-              <a:ext cx="0" cy="3649639"/>
+              <a:off x="1172049" y="2073503"/>
+              <a:ext cx="7090630" cy="3413559"/>
             </a:xfrm>
             <a:custGeom>
               <a:avLst/>
               <a:pathLst>
-                <a:path w="0" h="3649639">
+                <a:path w="7090630" h="3413559">
                   <a:moveTo>
-                    <a:pt x="0" y="3649639"/>
+                    <a:pt x="1091790" y="0"/>
                   </a:moveTo>
                   <a:lnTo>
-                    <a:pt x="0" y="0"/>
-                  </a:lnTo>
-                  <a:lnTo>
-                    <a:pt x="0" y="0"/>
-                  </a:lnTo>
-                </a:path>
-              </a:pathLst>
-            </a:custGeom>
-            <a:ln w="13550" cap="flat">
-              <a:solidFill>
-                <a:srgbClr val="EBEBEB">
-                  <a:alpha val="100000"/>
-                </a:srgbClr>
-              </a:solidFill>
-              <a:prstDash val="solid"/>
-              <a:round/>
-            </a:ln>
-          </p:spPr>
-          <p:txBody>
-            <a:bodyPr/>
-            <a:lstStyle/>
-            <a:p/>
-          </p:txBody>
-        </p:sp>
-        <p:sp>
-          <p:nvSpPr>
-            <p:cNvPr id="21" name="pg21"/>
-            <p:cNvSpPr/>
-            <p:nvPr/>
-          </p:nvSpPr>
-          <p:spPr>
-            <a:xfrm>
-              <a:off x="817517" y="2073503"/>
-              <a:ext cx="7392041" cy="3413559"/>
-            </a:xfrm>
-            <a:custGeom>
-              <a:avLst/>
-              <a:pathLst>
-                <a:path w="7392041" h="3413559">
-                  <a:moveTo>
-                    <a:pt x="922403" y="0"/>
-                  </a:moveTo>
-                  <a:lnTo>
-                    <a:pt x="980824" y="121358"/>
-                  </a:lnTo>
-                  <a:lnTo>
-                    <a:pt x="1058068" y="274506"/>
-                  </a:lnTo>
-                  <a:lnTo>
-                    <a:pt x="1135311" y="420679"/>
-                  </a:lnTo>
-                  <a:lnTo>
-                    <a:pt x="1212555" y="560194"/>
-                  </a:lnTo>
-                  <a:lnTo>
-                    <a:pt x="1289799" y="693354"/>
-                  </a:lnTo>
-                  <a:lnTo>
-                    <a:pt x="1367042" y="820449"/>
-                  </a:lnTo>
-                  <a:lnTo>
-                    <a:pt x="1444286" y="941756"/>
-                  </a:lnTo>
-                  <a:lnTo>
-                    <a:pt x="1521529" y="1057537"/>
-                  </a:lnTo>
-                  <a:lnTo>
-                    <a:pt x="1598773" y="1168045"/>
-                  </a:lnTo>
-                  <a:lnTo>
-                    <a:pt x="1676016" y="1273519"/>
-                  </a:lnTo>
-                  <a:lnTo>
-                    <a:pt x="1753260" y="1374189"/>
-                  </a:lnTo>
-                  <a:lnTo>
-                    <a:pt x="1830504" y="1470274"/>
-                  </a:lnTo>
-                  <a:lnTo>
-                    <a:pt x="1907747" y="1561983"/>
-                  </a:lnTo>
-                  <a:lnTo>
-                    <a:pt x="1984991" y="1649514"/>
-                  </a:lnTo>
-                  <a:lnTo>
-                    <a:pt x="2062234" y="1733059"/>
-                  </a:lnTo>
-                  <a:lnTo>
-                    <a:pt x="2139478" y="1812798"/>
-                  </a:lnTo>
-                  <a:lnTo>
-                    <a:pt x="2216721" y="1888905"/>
-                  </a:lnTo>
-                  <a:lnTo>
-                    <a:pt x="2293965" y="1961546"/>
-                  </a:lnTo>
-                  <a:lnTo>
-                    <a:pt x="2371209" y="2030879"/>
-                  </a:lnTo>
-                  <a:lnTo>
-                    <a:pt x="2448452" y="2097053"/>
-                  </a:lnTo>
-                  <a:lnTo>
-                    <a:pt x="2525696" y="2160213"/>
-                  </a:lnTo>
-                  <a:lnTo>
-                    <a:pt x="2602939" y="2220497"/>
-                  </a:lnTo>
-                  <a:lnTo>
-                    <a:pt x="2680183" y="2278035"/>
-                  </a:lnTo>
-                  <a:lnTo>
-                    <a:pt x="2757426" y="2332952"/>
-                  </a:lnTo>
-                  <a:lnTo>
-                    <a:pt x="2834670" y="2385368"/>
-                  </a:lnTo>
-                  <a:lnTo>
-                    <a:pt x="2911914" y="2435396"/>
-                  </a:lnTo>
-                  <a:lnTo>
-                    <a:pt x="2989157" y="2483146"/>
-                  </a:lnTo>
-                  <a:lnTo>
-                    <a:pt x="3066401" y="2528720"/>
-                  </a:lnTo>
-                  <a:lnTo>
-                    <a:pt x="3143644" y="2572219"/>
-                  </a:lnTo>
-                  <a:lnTo>
-                    <a:pt x="3220888" y="2613737"/>
-                  </a:lnTo>
-                  <a:lnTo>
-                    <a:pt x="3298131" y="2653364"/>
-                  </a:lnTo>
-                  <a:lnTo>
-                    <a:pt x="3375375" y="2658895"/>
-                  </a:lnTo>
-                  <a:lnTo>
-                    <a:pt x="3452619" y="2663592"/>
-                  </a:lnTo>
-                  <a:lnTo>
-                    <a:pt x="3529862" y="2668263"/>
-                  </a:lnTo>
-                  <a:lnTo>
-                    <a:pt x="3607106" y="2672907"/>
-                  </a:lnTo>
-                  <a:lnTo>
-                    <a:pt x="3684349" y="2677525"/>
-                  </a:lnTo>
-                  <a:lnTo>
-                    <a:pt x="3761593" y="2682116"/>
-                  </a:lnTo>
-                  <a:lnTo>
-                    <a:pt x="3838836" y="2686681"/>
-                  </a:lnTo>
-                  <a:lnTo>
-                    <a:pt x="3916080" y="2691221"/>
-                  </a:lnTo>
-                  <a:lnTo>
-                    <a:pt x="3993324" y="2695734"/>
-                  </a:lnTo>
-                  <a:lnTo>
-                    <a:pt x="4070567" y="2700222"/>
-                  </a:lnTo>
-                  <a:lnTo>
-                    <a:pt x="4147811" y="2704684"/>
-                  </a:lnTo>
-                  <a:lnTo>
-                    <a:pt x="4225054" y="2709121"/>
-                  </a:lnTo>
-                  <a:lnTo>
-                    <a:pt x="4302298" y="2713532"/>
-                  </a:lnTo>
-                  <a:lnTo>
-                    <a:pt x="4379541" y="2717918"/>
-                  </a:lnTo>
-                  <a:lnTo>
-                    <a:pt x="4456785" y="2722280"/>
-                  </a:lnTo>
-                  <a:lnTo>
-                    <a:pt x="4534029" y="2726616"/>
-                  </a:lnTo>
-                  <a:lnTo>
-                    <a:pt x="4611272" y="2730928"/>
-                  </a:lnTo>
-                  <a:lnTo>
-                    <a:pt x="4688516" y="2735215"/>
-                  </a:lnTo>
-                  <a:lnTo>
-                    <a:pt x="4765759" y="2739478"/>
-                  </a:lnTo>
-                  <a:lnTo>
-                    <a:pt x="4843003" y="2743717"/>
-                  </a:lnTo>
-                  <a:lnTo>
-                    <a:pt x="4920246" y="2747931"/>
-                  </a:lnTo>
-                  <a:lnTo>
-                    <a:pt x="4997490" y="2752122"/>
-                  </a:lnTo>
-                  <a:lnTo>
-                    <a:pt x="5074734" y="2756288"/>
-                  </a:lnTo>
-                  <a:lnTo>
-                    <a:pt x="5151977" y="2760431"/>
-                  </a:lnTo>
-                  <a:lnTo>
-                    <a:pt x="5229221" y="2764550"/>
-                  </a:lnTo>
-                  <a:lnTo>
-                    <a:pt x="5306464" y="2768646"/>
-                  </a:lnTo>
-                  <a:lnTo>
-                    <a:pt x="5383708" y="2772719"/>
-                  </a:lnTo>
-                  <a:lnTo>
-                    <a:pt x="5460951" y="2776768"/>
-                  </a:lnTo>
-                  <a:lnTo>
-                    <a:pt x="5538195" y="2780794"/>
-                  </a:lnTo>
-                  <a:lnTo>
-                    <a:pt x="5615439" y="2784797"/>
-                  </a:lnTo>
-                  <a:lnTo>
-                    <a:pt x="5692682" y="2788778"/>
-                  </a:lnTo>
-                  <a:lnTo>
-                    <a:pt x="5769926" y="2792736"/>
-                  </a:lnTo>
-                  <a:lnTo>
-                    <a:pt x="5847169" y="2796671"/>
-                  </a:lnTo>
-                  <a:lnTo>
-                    <a:pt x="5924413" y="2800584"/>
-                  </a:lnTo>
-                  <a:lnTo>
-                    <a:pt x="6001656" y="2804474"/>
-                  </a:lnTo>
-                  <a:lnTo>
-                    <a:pt x="6078900" y="2808343"/>
-                  </a:lnTo>
-                  <a:lnTo>
-                    <a:pt x="6156144" y="2812189"/>
-                  </a:lnTo>
-                  <a:lnTo>
-                    <a:pt x="6233387" y="2816014"/>
-                  </a:lnTo>
-                  <a:lnTo>
-                    <a:pt x="6310631" y="2819817"/>
-                  </a:lnTo>
-                  <a:lnTo>
-                    <a:pt x="6387874" y="2823598"/>
-                  </a:lnTo>
-                  <a:lnTo>
-                    <a:pt x="6465118" y="2827357"/>
-                  </a:lnTo>
-                  <a:lnTo>
-                    <a:pt x="6542361" y="2831095"/>
-                  </a:lnTo>
-                  <a:lnTo>
-                    <a:pt x="6619605" y="2834812"/>
-                  </a:lnTo>
-                  <a:lnTo>
-                    <a:pt x="6696849" y="2838508"/>
-                  </a:lnTo>
-                  <a:lnTo>
-                    <a:pt x="6774092" y="2842182"/>
-                  </a:lnTo>
-                  <a:lnTo>
-                    <a:pt x="6851336" y="2845836"/>
-                  </a:lnTo>
-                  <a:lnTo>
-                    <a:pt x="6928579" y="2849469"/>
-                  </a:lnTo>
-                  <a:lnTo>
-                    <a:pt x="7005823" y="2853081"/>
-                  </a:lnTo>
-                  <a:lnTo>
-                    <a:pt x="7083066" y="2856673"/>
-                  </a:lnTo>
-                  <a:lnTo>
-                    <a:pt x="7160310" y="2860244"/>
-                  </a:lnTo>
-                  <a:lnTo>
-                    <a:pt x="7237554" y="2863795"/>
-                  </a:lnTo>
-                  <a:lnTo>
-                    <a:pt x="7314797" y="2867325"/>
-                  </a:lnTo>
-                  <a:lnTo>
-                    <a:pt x="7392041" y="2870836"/>
-                  </a:lnTo>
-                  <a:lnTo>
-                    <a:pt x="7392041" y="3413559"/>
-                  </a:lnTo>
-                  <a:lnTo>
-                    <a:pt x="7314797" y="3410210"/>
-                  </a:lnTo>
-                  <a:lnTo>
-                    <a:pt x="7237554" y="3406700"/>
-                  </a:lnTo>
-                  <a:lnTo>
-                    <a:pt x="7160310" y="3403024"/>
-                  </a:lnTo>
-                  <a:lnTo>
-                    <a:pt x="7083066" y="3399172"/>
-                  </a:lnTo>
-                  <a:lnTo>
-                    <a:pt x="7005823" y="3395136"/>
-                  </a:lnTo>
-                  <a:lnTo>
-                    <a:pt x="6928579" y="3390907"/>
-                  </a:lnTo>
-                  <a:lnTo>
-                    <a:pt x="6851336" y="3386477"/>
-                  </a:lnTo>
-                  <a:lnTo>
-                    <a:pt x="6774092" y="3381835"/>
-                  </a:lnTo>
-                  <a:lnTo>
-                    <a:pt x="6696849" y="3376971"/>
-                  </a:lnTo>
-                  <a:lnTo>
-                    <a:pt x="6619605" y="3371876"/>
-                  </a:lnTo>
-                  <a:lnTo>
-                    <a:pt x="6542361" y="3366538"/>
-                  </a:lnTo>
-                  <a:lnTo>
-                    <a:pt x="6465118" y="3360944"/>
-                  </a:lnTo>
-                  <a:lnTo>
-                    <a:pt x="6387874" y="3355084"/>
-                  </a:lnTo>
-                  <a:lnTo>
-                    <a:pt x="6310631" y="3348944"/>
-                  </a:lnTo>
-                  <a:lnTo>
-                    <a:pt x="6233387" y="3342511"/>
-                  </a:lnTo>
-                  <a:lnTo>
-                    <a:pt x="6156144" y="3335771"/>
-                  </a:lnTo>
-                  <a:lnTo>
-                    <a:pt x="6078900" y="3328710"/>
-                  </a:lnTo>
-                  <a:lnTo>
-                    <a:pt x="6001656" y="3321311"/>
-                  </a:lnTo>
-                  <a:lnTo>
-                    <a:pt x="5924413" y="3313560"/>
-                  </a:lnTo>
-                  <a:lnTo>
-                    <a:pt x="5847169" y="3305438"/>
-                  </a:lnTo>
-                  <a:lnTo>
-                    <a:pt x="5769926" y="3296929"/>
-                  </a:lnTo>
-                  <a:lnTo>
-                    <a:pt x="5692682" y="3288014"/>
-                  </a:lnTo>
-                  <a:lnTo>
-                    <a:pt x="5615439" y="3278673"/>
-                  </a:lnTo>
-                  <a:lnTo>
-                    <a:pt x="5538195" y="3268887"/>
-                  </a:lnTo>
-                  <a:lnTo>
-                    <a:pt x="5460951" y="3258634"/>
-                  </a:lnTo>
-                  <a:lnTo>
-                    <a:pt x="5383708" y="3247891"/>
-                  </a:lnTo>
-                  <a:lnTo>
-                    <a:pt x="5306464" y="3236636"/>
-                  </a:lnTo>
-                  <a:lnTo>
-                    <a:pt x="5229221" y="3224844"/>
-                  </a:lnTo>
-                  <a:lnTo>
-                    <a:pt x="5151977" y="3212489"/>
-                  </a:lnTo>
-                  <a:lnTo>
-                    <a:pt x="5074734" y="3199544"/>
-                  </a:lnTo>
-                  <a:lnTo>
-                    <a:pt x="4997490" y="3185981"/>
-                  </a:lnTo>
-                  <a:lnTo>
-                    <a:pt x="4920246" y="3171772"/>
-                  </a:lnTo>
-                  <a:lnTo>
-                    <a:pt x="4843003" y="3156884"/>
-                  </a:lnTo>
-                  <a:lnTo>
-                    <a:pt x="4765759" y="3141286"/>
-                  </a:lnTo>
-                  <a:lnTo>
-                    <a:pt x="4688516" y="3124943"/>
-                  </a:lnTo>
-                  <a:lnTo>
-                    <a:pt x="4611272" y="3107821"/>
-                  </a:lnTo>
-                  <a:lnTo>
-                    <a:pt x="4534029" y="3089881"/>
-                  </a:lnTo>
-                  <a:lnTo>
-                    <a:pt x="4456785" y="3071086"/>
-                  </a:lnTo>
-                  <a:lnTo>
-                    <a:pt x="4379541" y="3051393"/>
-                  </a:lnTo>
-                  <a:lnTo>
-                    <a:pt x="4302298" y="3030761"/>
-                  </a:lnTo>
-                  <a:lnTo>
-                    <a:pt x="4225054" y="3009144"/>
-                  </a:lnTo>
-                  <a:lnTo>
-                    <a:pt x="4147811" y="2986495"/>
-                  </a:lnTo>
-                  <a:lnTo>
-                    <a:pt x="4070567" y="2962766"/>
-                  </a:lnTo>
-                  <a:lnTo>
-                    <a:pt x="3993324" y="2937904"/>
-                  </a:lnTo>
-                  <a:lnTo>
-                    <a:pt x="3916080" y="2911856"/>
-                  </a:lnTo>
-                  <a:lnTo>
-                    <a:pt x="3838836" y="2884565"/>
-                  </a:lnTo>
-                  <a:lnTo>
-                    <a:pt x="3761593" y="2855971"/>
-                  </a:lnTo>
-                  <a:lnTo>
-                    <a:pt x="3684349" y="2826013"/>
-                  </a:lnTo>
-                  <a:lnTo>
-                    <a:pt x="3607106" y="2794625"/>
-                  </a:lnTo>
-                  <a:lnTo>
-                    <a:pt x="3529862" y="2761740"/>
-                  </a:lnTo>
-                  <a:lnTo>
-                    <a:pt x="3452619" y="2727285"/>
-                  </a:lnTo>
-                  <a:lnTo>
-                    <a:pt x="3375375" y="2691186"/>
-                  </a:lnTo>
-                  <a:lnTo>
-                    <a:pt x="3298131" y="2654170"/>
-                  </a:lnTo>
-                  <a:lnTo>
-                    <a:pt x="3220888" y="2649419"/>
-                  </a:lnTo>
-                  <a:lnTo>
-                    <a:pt x="3143644" y="2644640"/>
-                  </a:lnTo>
-                  <a:lnTo>
-                    <a:pt x="3066401" y="2639834"/>
-                  </a:lnTo>
-                  <a:lnTo>
-                    <a:pt x="2989157" y="2635001"/>
-                  </a:lnTo>
-                  <a:lnTo>
-                    <a:pt x="2911914" y="2630139"/>
-                  </a:lnTo>
-                  <a:lnTo>
-                    <a:pt x="2834670" y="2625250"/>
-                  </a:lnTo>
-                  <a:lnTo>
-                    <a:pt x="2757426" y="2620333"/>
-                  </a:lnTo>
-                  <a:lnTo>
-                    <a:pt x="2680183" y="2615388"/>
-                  </a:lnTo>
-                  <a:lnTo>
-                    <a:pt x="2602939" y="2610414"/>
-                  </a:lnTo>
-                  <a:lnTo>
-                    <a:pt x="2525696" y="2605412"/>
-                  </a:lnTo>
-                  <a:lnTo>
-                    <a:pt x="2448452" y="2600381"/>
-                  </a:lnTo>
-                  <a:lnTo>
-                    <a:pt x="2371209" y="2595322"/>
-                  </a:lnTo>
-                  <a:lnTo>
-                    <a:pt x="2293965" y="2590233"/>
-                  </a:lnTo>
-                  <a:lnTo>
-                    <a:pt x="2216721" y="2585116"/>
-                  </a:lnTo>
-                  <a:lnTo>
-                    <a:pt x="2139478" y="2579969"/>
-                  </a:lnTo>
-                  <a:lnTo>
-                    <a:pt x="2062234" y="2574792"/>
-                  </a:lnTo>
-                  <a:lnTo>
-                    <a:pt x="1984991" y="2569586"/>
-                  </a:lnTo>
-                  <a:lnTo>
-                    <a:pt x="1907747" y="2564350"/>
-                  </a:lnTo>
-                  <a:lnTo>
-                    <a:pt x="1830504" y="2559084"/>
-                  </a:lnTo>
-                  <a:lnTo>
-                    <a:pt x="1753260" y="2553788"/>
-                  </a:lnTo>
-                  <a:lnTo>
-                    <a:pt x="1676016" y="2548462"/>
-                  </a:lnTo>
-                  <a:lnTo>
-                    <a:pt x="1598773" y="2543105"/>
-                  </a:lnTo>
-                  <a:lnTo>
-                    <a:pt x="1521529" y="2537717"/>
-                  </a:lnTo>
-                  <a:lnTo>
-                    <a:pt x="1444286" y="2532299"/>
-                  </a:lnTo>
-                  <a:lnTo>
-                    <a:pt x="1367042" y="2526849"/>
-                  </a:lnTo>
-                  <a:lnTo>
-                    <a:pt x="1289799" y="2521369"/>
-                  </a:lnTo>
-                  <a:lnTo>
-                    <a:pt x="1212555" y="2515857"/>
-                  </a:lnTo>
-                  <a:lnTo>
-                    <a:pt x="1135311" y="2510313"/>
-                  </a:lnTo>
-                  <a:lnTo>
-                    <a:pt x="1058068" y="2504738"/>
-                  </a:lnTo>
-                  <a:lnTo>
-                    <a:pt x="980824" y="2499130"/>
-                  </a:lnTo>
-                  <a:lnTo>
-                    <a:pt x="903581" y="2493491"/>
-                  </a:lnTo>
-                  <a:lnTo>
-                    <a:pt x="826337" y="2487819"/>
-                  </a:lnTo>
-                  <a:lnTo>
-                    <a:pt x="749094" y="2482115"/>
-                  </a:lnTo>
-                  <a:lnTo>
-                    <a:pt x="671850" y="2476378"/>
-                  </a:lnTo>
-                  <a:lnTo>
-                    <a:pt x="594606" y="2470608"/>
-                  </a:lnTo>
-                  <a:lnTo>
-                    <a:pt x="517363" y="2464805"/>
-                  </a:lnTo>
-                  <a:lnTo>
-                    <a:pt x="440119" y="2458969"/>
-                  </a:lnTo>
-                  <a:lnTo>
-                    <a:pt x="362876" y="2453100"/>
-                  </a:lnTo>
-                  <a:lnTo>
-                    <a:pt x="285632" y="2447197"/>
-                  </a:lnTo>
-                  <a:lnTo>
-                    <a:pt x="208389" y="2441260"/>
-                  </a:lnTo>
-                  <a:lnTo>
-                    <a:pt x="131145" y="2435289"/>
-                  </a:lnTo>
-                  <a:lnTo>
-                    <a:pt x="53901" y="2429284"/>
-                  </a:lnTo>
-                  <a:lnTo>
-                    <a:pt x="0" y="2425069"/>
+                    <a:pt x="1145960" y="121358"/>
+                  </a:lnTo>
+                  <a:lnTo>
+                    <a:pt x="1217582" y="274506"/>
+                  </a:lnTo>
+                  <a:lnTo>
+                    <a:pt x="1289205" y="420679"/>
+                  </a:lnTo>
+                  <a:lnTo>
+                    <a:pt x="1360827" y="560194"/>
+                  </a:lnTo>
+                  <a:lnTo>
+                    <a:pt x="1432450" y="693354"/>
+                  </a:lnTo>
+                  <a:lnTo>
+                    <a:pt x="1504073" y="820449"/>
+                  </a:lnTo>
+                  <a:lnTo>
+                    <a:pt x="1575695" y="941756"/>
+                  </a:lnTo>
+                  <a:lnTo>
+                    <a:pt x="1647318" y="1057537"/>
+                  </a:lnTo>
+                  <a:lnTo>
+                    <a:pt x="1718940" y="1168045"/>
+                  </a:lnTo>
+                  <a:lnTo>
+                    <a:pt x="1790563" y="1273519"/>
+                  </a:lnTo>
+                  <a:lnTo>
+                    <a:pt x="1862185" y="1374189"/>
+                  </a:lnTo>
+                  <a:lnTo>
+                    <a:pt x="1933808" y="1470274"/>
+                  </a:lnTo>
+                  <a:lnTo>
+                    <a:pt x="2005430" y="1561983"/>
+                  </a:lnTo>
+                  <a:lnTo>
+                    <a:pt x="2077053" y="1649514"/>
+                  </a:lnTo>
+                  <a:lnTo>
+                    <a:pt x="2148675" y="1733059"/>
+                  </a:lnTo>
+                  <a:lnTo>
+                    <a:pt x="2220298" y="1812798"/>
+                  </a:lnTo>
+                  <a:lnTo>
+                    <a:pt x="2291920" y="1888905"/>
+                  </a:lnTo>
+                  <a:lnTo>
+                    <a:pt x="2363543" y="1961546"/>
+                  </a:lnTo>
+                  <a:lnTo>
+                    <a:pt x="2435165" y="2030879"/>
+                  </a:lnTo>
+                  <a:lnTo>
+                    <a:pt x="2506788" y="2097053"/>
+                  </a:lnTo>
+                  <a:lnTo>
+                    <a:pt x="2578410" y="2160213"/>
+                  </a:lnTo>
+                  <a:lnTo>
+                    <a:pt x="2650033" y="2220497"/>
+                  </a:lnTo>
+                  <a:lnTo>
+                    <a:pt x="2721655" y="2278035"/>
+                  </a:lnTo>
+                  <a:lnTo>
+                    <a:pt x="2793278" y="2332952"/>
+                  </a:lnTo>
+                  <a:lnTo>
+                    <a:pt x="2864901" y="2385368"/>
+                  </a:lnTo>
+                  <a:lnTo>
+                    <a:pt x="2936523" y="2435396"/>
+                  </a:lnTo>
+                  <a:lnTo>
+                    <a:pt x="3008146" y="2483146"/>
+                  </a:lnTo>
+                  <a:lnTo>
+                    <a:pt x="3079768" y="2528720"/>
+                  </a:lnTo>
+                  <a:lnTo>
+                    <a:pt x="3151391" y="2572219"/>
+                  </a:lnTo>
+                  <a:lnTo>
+                    <a:pt x="3223013" y="2613737"/>
+                  </a:lnTo>
+                  <a:lnTo>
+                    <a:pt x="3294636" y="2653364"/>
+                  </a:lnTo>
+                  <a:lnTo>
+                    <a:pt x="3366258" y="2658895"/>
+                  </a:lnTo>
+                  <a:lnTo>
+                    <a:pt x="3437881" y="2663592"/>
+                  </a:lnTo>
+                  <a:lnTo>
+                    <a:pt x="3509503" y="2668263"/>
+                  </a:lnTo>
+                  <a:lnTo>
+                    <a:pt x="3581126" y="2672907"/>
+                  </a:lnTo>
+                  <a:lnTo>
+                    <a:pt x="3652748" y="2677525"/>
+                  </a:lnTo>
+                  <a:lnTo>
+                    <a:pt x="3724371" y="2682116"/>
+                  </a:lnTo>
+                  <a:lnTo>
+                    <a:pt x="3795993" y="2686681"/>
+                  </a:lnTo>
+                  <a:lnTo>
+                    <a:pt x="3867616" y="2691221"/>
+                  </a:lnTo>
+                  <a:lnTo>
+                    <a:pt x="3939238" y="2695734"/>
+                  </a:lnTo>
+                  <a:lnTo>
+                    <a:pt x="4010861" y="2700222"/>
+                  </a:lnTo>
+                  <a:lnTo>
+                    <a:pt x="4082483" y="2704684"/>
+                  </a:lnTo>
+                  <a:lnTo>
+                    <a:pt x="4154106" y="2709121"/>
+                  </a:lnTo>
+                  <a:lnTo>
+                    <a:pt x="4225729" y="2713532"/>
+                  </a:lnTo>
+                  <a:lnTo>
+                    <a:pt x="4297351" y="2717918"/>
+                  </a:lnTo>
+                  <a:lnTo>
+                    <a:pt x="4368974" y="2722280"/>
+                  </a:lnTo>
+                  <a:lnTo>
+                    <a:pt x="4440596" y="2726616"/>
+                  </a:lnTo>
+                  <a:lnTo>
+                    <a:pt x="4512219" y="2730928"/>
+                  </a:lnTo>
+                  <a:lnTo>
+                    <a:pt x="4583841" y="2735215"/>
+                  </a:lnTo>
+                  <a:lnTo>
+                    <a:pt x="4655464" y="2739478"/>
+                  </a:lnTo>
+                  <a:lnTo>
+                    <a:pt x="4727086" y="2743717"/>
+                  </a:lnTo>
+                  <a:lnTo>
+                    <a:pt x="4798709" y="2747931"/>
+                  </a:lnTo>
+                  <a:lnTo>
+                    <a:pt x="4870331" y="2752122"/>
+                  </a:lnTo>
+                  <a:lnTo>
+                    <a:pt x="4941954" y="2756288"/>
+                  </a:lnTo>
+                  <a:lnTo>
+                    <a:pt x="5013576" y="2760431"/>
+                  </a:lnTo>
+                  <a:lnTo>
+                    <a:pt x="5085199" y="2764550"/>
+                  </a:lnTo>
+                  <a:lnTo>
+                    <a:pt x="5156821" y="2768646"/>
+                  </a:lnTo>
+                  <a:lnTo>
+                    <a:pt x="5228444" y="2772719"/>
+                  </a:lnTo>
+                  <a:lnTo>
+                    <a:pt x="5300066" y="2776768"/>
+                  </a:lnTo>
+                  <a:lnTo>
+                    <a:pt x="5371689" y="2780794"/>
+                  </a:lnTo>
+                  <a:lnTo>
+                    <a:pt x="5443311" y="2784797"/>
+                  </a:lnTo>
+                  <a:lnTo>
+                    <a:pt x="5514934" y="2788778"/>
+                  </a:lnTo>
+                  <a:lnTo>
+                    <a:pt x="5586557" y="2792736"/>
+                  </a:lnTo>
+                  <a:lnTo>
+                    <a:pt x="5658179" y="2796671"/>
+                  </a:lnTo>
+                  <a:lnTo>
+                    <a:pt x="5729802" y="2800584"/>
+                  </a:lnTo>
+                  <a:lnTo>
+                    <a:pt x="5801424" y="2804474"/>
+                  </a:lnTo>
+                  <a:lnTo>
+                    <a:pt x="5873047" y="2808343"/>
+                  </a:lnTo>
+                  <a:lnTo>
+                    <a:pt x="5944669" y="2812189"/>
+                  </a:lnTo>
+                  <a:lnTo>
+                    <a:pt x="6016292" y="2816014"/>
+                  </a:lnTo>
+                  <a:lnTo>
+                    <a:pt x="6087914" y="2819817"/>
+                  </a:lnTo>
+                  <a:lnTo>
+                    <a:pt x="6159537" y="2823598"/>
+                  </a:lnTo>
+                  <a:lnTo>
+                    <a:pt x="6231159" y="2827357"/>
+                  </a:lnTo>
+                  <a:lnTo>
+                    <a:pt x="6302782" y="2831095"/>
+                  </a:lnTo>
+                  <a:lnTo>
+                    <a:pt x="6374404" y="2834812"/>
+                  </a:lnTo>
+                  <a:lnTo>
+                    <a:pt x="6446027" y="2838508"/>
+                  </a:lnTo>
+                  <a:lnTo>
+                    <a:pt x="6517649" y="2842182"/>
+                  </a:lnTo>
+                  <a:lnTo>
+                    <a:pt x="6589272" y="2845836"/>
+                  </a:lnTo>
+                  <a:lnTo>
+                    <a:pt x="6660894" y="2849469"/>
+                  </a:lnTo>
+                  <a:lnTo>
+                    <a:pt x="6732517" y="2853081"/>
+                  </a:lnTo>
+                  <a:lnTo>
+                    <a:pt x="6804139" y="2856673"/>
+                  </a:lnTo>
+                  <a:lnTo>
+                    <a:pt x="6875762" y="2860244"/>
+                  </a:lnTo>
+                  <a:lnTo>
+                    <a:pt x="6947385" y="2863795"/>
+                  </a:lnTo>
+                  <a:lnTo>
+                    <a:pt x="7019007" y="2867325"/>
+                  </a:lnTo>
+                  <a:lnTo>
+                    <a:pt x="7090630" y="2870836"/>
+                  </a:lnTo>
+                  <a:lnTo>
+                    <a:pt x="7090630" y="3413559"/>
+                  </a:lnTo>
+                  <a:lnTo>
+                    <a:pt x="7019007" y="3410210"/>
+                  </a:lnTo>
+                  <a:lnTo>
+                    <a:pt x="6947385" y="3406700"/>
+                  </a:lnTo>
+                  <a:lnTo>
+                    <a:pt x="6875762" y="3403024"/>
+                  </a:lnTo>
+                  <a:lnTo>
+                    <a:pt x="6804139" y="3399172"/>
+                  </a:lnTo>
+                  <a:lnTo>
+                    <a:pt x="6732517" y="3395136"/>
+                  </a:lnTo>
+                  <a:lnTo>
+                    <a:pt x="6660894" y="3390907"/>
+                  </a:lnTo>
+                  <a:lnTo>
+                    <a:pt x="6589272" y="3386477"/>
+                  </a:lnTo>
+                  <a:lnTo>
+                    <a:pt x="6517649" y="3381835"/>
+                  </a:lnTo>
+                  <a:lnTo>
+                    <a:pt x="6446027" y="3376971"/>
+                  </a:lnTo>
+                  <a:lnTo>
+                    <a:pt x="6374404" y="3371876"/>
+                  </a:lnTo>
+                  <a:lnTo>
+                    <a:pt x="6302782" y="3366538"/>
+                  </a:lnTo>
+                  <a:lnTo>
+                    <a:pt x="6231159" y="3360944"/>
+                  </a:lnTo>
+                  <a:lnTo>
+                    <a:pt x="6159537" y="3355084"/>
+                  </a:lnTo>
+                  <a:lnTo>
+                    <a:pt x="6087914" y="3348944"/>
+                  </a:lnTo>
+                  <a:lnTo>
+                    <a:pt x="6016292" y="3342511"/>
+                  </a:lnTo>
+                  <a:lnTo>
+                    <a:pt x="5944669" y="3335771"/>
+                  </a:lnTo>
+                  <a:lnTo>
+                    <a:pt x="5873047" y="3328710"/>
+                  </a:lnTo>
+                  <a:lnTo>
+                    <a:pt x="5801424" y="3321311"/>
+                  </a:lnTo>
+                  <a:lnTo>
+                    <a:pt x="5729802" y="3313560"/>
+                  </a:lnTo>
+                  <a:lnTo>
+                    <a:pt x="5658179" y="3305438"/>
+                  </a:lnTo>
+                  <a:lnTo>
+                    <a:pt x="5586557" y="3296929"/>
+                  </a:lnTo>
+                  <a:lnTo>
+                    <a:pt x="5514934" y="3288014"/>
+                  </a:lnTo>
+                  <a:lnTo>
+                    <a:pt x="5443311" y="3278673"/>
+                  </a:lnTo>
+                  <a:lnTo>
+                    <a:pt x="5371689" y="3268887"/>
+                  </a:lnTo>
+                  <a:lnTo>
+                    <a:pt x="5300066" y="3258634"/>
+                  </a:lnTo>
+                  <a:lnTo>
+                    <a:pt x="5228444" y="3247891"/>
+                  </a:lnTo>
+                  <a:lnTo>
+                    <a:pt x="5156821" y="3236636"/>
+                  </a:lnTo>
+                  <a:lnTo>
+                    <a:pt x="5085199" y="3224844"/>
+                  </a:lnTo>
+                  <a:lnTo>
+                    <a:pt x="5013576" y="3212489"/>
+                  </a:lnTo>
+                  <a:lnTo>
+                    <a:pt x="4941954" y="3199544"/>
+                  </a:lnTo>
+                  <a:lnTo>
+                    <a:pt x="4870331" y="3185981"/>
+                  </a:lnTo>
+                  <a:lnTo>
+                    <a:pt x="4798709" y="3171772"/>
+                  </a:lnTo>
+                  <a:lnTo>
+                    <a:pt x="4727086" y="3156884"/>
+                  </a:lnTo>
+                  <a:lnTo>
+                    <a:pt x="4655464" y="3141286"/>
+                  </a:lnTo>
+                  <a:lnTo>
+                    <a:pt x="4583841" y="3124943"/>
+                  </a:lnTo>
+                  <a:lnTo>
+                    <a:pt x="4512219" y="3107821"/>
+                  </a:lnTo>
+                  <a:lnTo>
+                    <a:pt x="4440596" y="3089881"/>
+                  </a:lnTo>
+                  <a:lnTo>
+                    <a:pt x="4368974" y="3071086"/>
+                  </a:lnTo>
+                  <a:lnTo>
+                    <a:pt x="4297351" y="3051393"/>
+                  </a:lnTo>
+                  <a:lnTo>
+                    <a:pt x="4225729" y="3030761"/>
+                  </a:lnTo>
+                  <a:lnTo>
+                    <a:pt x="4154106" y="3009144"/>
+                  </a:lnTo>
+                  <a:lnTo>
+                    <a:pt x="4082483" y="2986495"/>
+                  </a:lnTo>
+                  <a:lnTo>
+                    <a:pt x="4010861" y="2962766"/>
+                  </a:lnTo>
+                  <a:lnTo>
+                    <a:pt x="3939238" y="2937904"/>
+                  </a:lnTo>
+                  <a:lnTo>
+                    <a:pt x="3867616" y="2911856"/>
+                  </a:lnTo>
+                  <a:lnTo>
+                    <a:pt x="3795993" y="2884565"/>
+                  </a:lnTo>
+                  <a:lnTo>
+                    <a:pt x="3724371" y="2855971"/>
+                  </a:lnTo>
+                  <a:lnTo>
+                    <a:pt x="3652748" y="2826013"/>
+                  </a:lnTo>
+                  <a:lnTo>
+                    <a:pt x="3581126" y="2794625"/>
+                  </a:lnTo>
+                  <a:lnTo>
+                    <a:pt x="3509503" y="2761740"/>
+                  </a:lnTo>
+                  <a:lnTo>
+                    <a:pt x="3437881" y="2727285"/>
+                  </a:lnTo>
+                  <a:lnTo>
+                    <a:pt x="3366258" y="2691186"/>
+                  </a:lnTo>
+                  <a:lnTo>
+                    <a:pt x="3294636" y="2654170"/>
+                  </a:lnTo>
+                  <a:lnTo>
+                    <a:pt x="3223013" y="2649419"/>
+                  </a:lnTo>
+                  <a:lnTo>
+                    <a:pt x="3151391" y="2644640"/>
+                  </a:lnTo>
+                  <a:lnTo>
+                    <a:pt x="3079768" y="2639834"/>
+                  </a:lnTo>
+                  <a:lnTo>
+                    <a:pt x="3008146" y="2635001"/>
+                  </a:lnTo>
+                  <a:lnTo>
+                    <a:pt x="2936523" y="2630139"/>
+                  </a:lnTo>
+                  <a:lnTo>
+                    <a:pt x="2864901" y="2625250"/>
+                  </a:lnTo>
+                  <a:lnTo>
+                    <a:pt x="2793278" y="2620333"/>
+                  </a:lnTo>
+                  <a:lnTo>
+                    <a:pt x="2721655" y="2615388"/>
+                  </a:lnTo>
+                  <a:lnTo>
+                    <a:pt x="2650033" y="2610414"/>
+                  </a:lnTo>
+                  <a:lnTo>
+                    <a:pt x="2578410" y="2605412"/>
+                  </a:lnTo>
+                  <a:lnTo>
+                    <a:pt x="2506788" y="2600381"/>
+                  </a:lnTo>
+                  <a:lnTo>
+                    <a:pt x="2435165" y="2595322"/>
+                  </a:lnTo>
+                  <a:lnTo>
+                    <a:pt x="2363543" y="2590233"/>
+                  </a:lnTo>
+                  <a:lnTo>
+                    <a:pt x="2291920" y="2585116"/>
+                  </a:lnTo>
+                  <a:lnTo>
+                    <a:pt x="2220298" y="2579969"/>
+                  </a:lnTo>
+                  <a:lnTo>
+                    <a:pt x="2148675" y="2574792"/>
+                  </a:lnTo>
+                  <a:lnTo>
+                    <a:pt x="2077053" y="2569586"/>
+                  </a:lnTo>
+                  <a:lnTo>
+                    <a:pt x="2005430" y="2564350"/>
+                  </a:lnTo>
+                  <a:lnTo>
+                    <a:pt x="1933808" y="2559084"/>
+                  </a:lnTo>
+                  <a:lnTo>
+                    <a:pt x="1862185" y="2553788"/>
+                  </a:lnTo>
+                  <a:lnTo>
+                    <a:pt x="1790563" y="2548462"/>
+                  </a:lnTo>
+                  <a:lnTo>
+                    <a:pt x="1718940" y="2543105"/>
+                  </a:lnTo>
+                  <a:lnTo>
+                    <a:pt x="1647318" y="2537717"/>
+                  </a:lnTo>
+                  <a:lnTo>
+                    <a:pt x="1575695" y="2532299"/>
+                  </a:lnTo>
+                  <a:lnTo>
+                    <a:pt x="1504073" y="2526849"/>
+                  </a:lnTo>
+                  <a:lnTo>
+                    <a:pt x="1432450" y="2521369"/>
+                  </a:lnTo>
+                  <a:lnTo>
+                    <a:pt x="1360827" y="2515857"/>
+                  </a:lnTo>
+                  <a:lnTo>
+                    <a:pt x="1289205" y="2510313"/>
+                  </a:lnTo>
+                  <a:lnTo>
+                    <a:pt x="1217582" y="2504738"/>
+                  </a:lnTo>
+                  <a:lnTo>
+                    <a:pt x="1145960" y="2499130"/>
+                  </a:lnTo>
+                  <a:lnTo>
+                    <a:pt x="1074337" y="2493491"/>
+                  </a:lnTo>
+                  <a:lnTo>
+                    <a:pt x="1002715" y="2487819"/>
+                  </a:lnTo>
+                  <a:lnTo>
+                    <a:pt x="931092" y="2482115"/>
+                  </a:lnTo>
+                  <a:lnTo>
+                    <a:pt x="859470" y="2476378"/>
+                  </a:lnTo>
+                  <a:lnTo>
+                    <a:pt x="787847" y="2470608"/>
+                  </a:lnTo>
+                  <a:lnTo>
+                    <a:pt x="716225" y="2464805"/>
+                  </a:lnTo>
+                  <a:lnTo>
+                    <a:pt x="644602" y="2458969"/>
+                  </a:lnTo>
+                  <a:lnTo>
+                    <a:pt x="572980" y="2453100"/>
+                  </a:lnTo>
+                  <a:lnTo>
+                    <a:pt x="501357" y="2447197"/>
+                  </a:lnTo>
+                  <a:lnTo>
+                    <a:pt x="429735" y="2441260"/>
+                  </a:lnTo>
+                  <a:lnTo>
+                    <a:pt x="358112" y="2435289"/>
+                  </a:lnTo>
+                  <a:lnTo>
+                    <a:pt x="286490" y="2429284"/>
+                  </a:lnTo>
+                  <a:lnTo>
+                    <a:pt x="214867" y="2423244"/>
+                  </a:lnTo>
+                  <a:lnTo>
+                    <a:pt x="143245" y="2417170"/>
+                  </a:lnTo>
+                  <a:lnTo>
+                    <a:pt x="71622" y="2411061"/>
+                  </a:lnTo>
+                  <a:lnTo>
+                    <a:pt x="0" y="2404917"/>
                   </a:lnTo>
                   <a:close/>
                 </a:path>
@@ -3573,273 +3539,598 @@
         </p:sp>
         <p:sp>
           <p:nvSpPr>
+            <p:cNvPr id="21" name="pl21"/>
+            <p:cNvSpPr/>
+            <p:nvPr/>
+          </p:nvSpPr>
+          <p:spPr>
+            <a:xfrm>
+              <a:off x="2263839" y="2073503"/>
+              <a:ext cx="5998839" cy="2870836"/>
+            </a:xfrm>
+            <a:custGeom>
+              <a:avLst/>
+              <a:pathLst>
+                <a:path w="5998839" h="2870836">
+                  <a:moveTo>
+                    <a:pt x="0" y="0"/>
+                  </a:moveTo>
+                  <a:lnTo>
+                    <a:pt x="54170" y="121358"/>
+                  </a:lnTo>
+                  <a:lnTo>
+                    <a:pt x="125792" y="274506"/>
+                  </a:lnTo>
+                  <a:lnTo>
+                    <a:pt x="197415" y="420679"/>
+                  </a:lnTo>
+                  <a:lnTo>
+                    <a:pt x="269037" y="560194"/>
+                  </a:lnTo>
+                  <a:lnTo>
+                    <a:pt x="340660" y="693354"/>
+                  </a:lnTo>
+                  <a:lnTo>
+                    <a:pt x="412282" y="820449"/>
+                  </a:lnTo>
+                  <a:lnTo>
+                    <a:pt x="483905" y="941756"/>
+                  </a:lnTo>
+                  <a:lnTo>
+                    <a:pt x="555527" y="1057537"/>
+                  </a:lnTo>
+                  <a:lnTo>
+                    <a:pt x="627150" y="1168045"/>
+                  </a:lnTo>
+                  <a:lnTo>
+                    <a:pt x="698773" y="1273519"/>
+                  </a:lnTo>
+                  <a:lnTo>
+                    <a:pt x="770395" y="1374189"/>
+                  </a:lnTo>
+                  <a:lnTo>
+                    <a:pt x="842018" y="1470274"/>
+                  </a:lnTo>
+                  <a:lnTo>
+                    <a:pt x="913640" y="1561983"/>
+                  </a:lnTo>
+                  <a:lnTo>
+                    <a:pt x="985263" y="1649514"/>
+                  </a:lnTo>
+                  <a:lnTo>
+                    <a:pt x="1056885" y="1733059"/>
+                  </a:lnTo>
+                  <a:lnTo>
+                    <a:pt x="1128508" y="1812798"/>
+                  </a:lnTo>
+                  <a:lnTo>
+                    <a:pt x="1200130" y="1888905"/>
+                  </a:lnTo>
+                  <a:lnTo>
+                    <a:pt x="1271753" y="1961546"/>
+                  </a:lnTo>
+                  <a:lnTo>
+                    <a:pt x="1343375" y="2030879"/>
+                  </a:lnTo>
+                  <a:lnTo>
+                    <a:pt x="1414998" y="2097053"/>
+                  </a:lnTo>
+                  <a:lnTo>
+                    <a:pt x="1486620" y="2160213"/>
+                  </a:lnTo>
+                  <a:lnTo>
+                    <a:pt x="1558243" y="2220497"/>
+                  </a:lnTo>
+                  <a:lnTo>
+                    <a:pt x="1629865" y="2278035"/>
+                  </a:lnTo>
+                  <a:lnTo>
+                    <a:pt x="1701488" y="2332952"/>
+                  </a:lnTo>
+                  <a:lnTo>
+                    <a:pt x="1773110" y="2385368"/>
+                  </a:lnTo>
+                  <a:lnTo>
+                    <a:pt x="1844733" y="2435396"/>
+                  </a:lnTo>
+                  <a:lnTo>
+                    <a:pt x="1916355" y="2483146"/>
+                  </a:lnTo>
+                  <a:lnTo>
+                    <a:pt x="1987978" y="2528720"/>
+                  </a:lnTo>
+                  <a:lnTo>
+                    <a:pt x="2059601" y="2572219"/>
+                  </a:lnTo>
+                  <a:lnTo>
+                    <a:pt x="2131223" y="2613737"/>
+                  </a:lnTo>
+                  <a:lnTo>
+                    <a:pt x="2202846" y="2653364"/>
+                  </a:lnTo>
+                  <a:lnTo>
+                    <a:pt x="2274468" y="2658895"/>
+                  </a:lnTo>
+                  <a:lnTo>
+                    <a:pt x="2346091" y="2663592"/>
+                  </a:lnTo>
+                  <a:lnTo>
+                    <a:pt x="2417713" y="2668263"/>
+                  </a:lnTo>
+                  <a:lnTo>
+                    <a:pt x="2489336" y="2672907"/>
+                  </a:lnTo>
+                  <a:lnTo>
+                    <a:pt x="2560958" y="2677525"/>
+                  </a:lnTo>
+                  <a:lnTo>
+                    <a:pt x="2632581" y="2682116"/>
+                  </a:lnTo>
+                  <a:lnTo>
+                    <a:pt x="2704203" y="2686681"/>
+                  </a:lnTo>
+                  <a:lnTo>
+                    <a:pt x="2775826" y="2691221"/>
+                  </a:lnTo>
+                  <a:lnTo>
+                    <a:pt x="2847448" y="2695734"/>
+                  </a:lnTo>
+                  <a:lnTo>
+                    <a:pt x="2919071" y="2700222"/>
+                  </a:lnTo>
+                  <a:lnTo>
+                    <a:pt x="2990693" y="2704684"/>
+                  </a:lnTo>
+                  <a:lnTo>
+                    <a:pt x="3062316" y="2709121"/>
+                  </a:lnTo>
+                  <a:lnTo>
+                    <a:pt x="3133938" y="2713532"/>
+                  </a:lnTo>
+                  <a:lnTo>
+                    <a:pt x="3205561" y="2717918"/>
+                  </a:lnTo>
+                  <a:lnTo>
+                    <a:pt x="3277183" y="2722280"/>
+                  </a:lnTo>
+                  <a:lnTo>
+                    <a:pt x="3348806" y="2726616"/>
+                  </a:lnTo>
+                  <a:lnTo>
+                    <a:pt x="3420429" y="2730928"/>
+                  </a:lnTo>
+                  <a:lnTo>
+                    <a:pt x="3492051" y="2735215"/>
+                  </a:lnTo>
+                  <a:lnTo>
+                    <a:pt x="3563674" y="2739478"/>
+                  </a:lnTo>
+                  <a:lnTo>
+                    <a:pt x="3635296" y="2743717"/>
+                  </a:lnTo>
+                  <a:lnTo>
+                    <a:pt x="3706919" y="2747931"/>
+                  </a:lnTo>
+                  <a:lnTo>
+                    <a:pt x="3778541" y="2752122"/>
+                  </a:lnTo>
+                  <a:lnTo>
+                    <a:pt x="3850164" y="2756288"/>
+                  </a:lnTo>
+                  <a:lnTo>
+                    <a:pt x="3921786" y="2760431"/>
+                  </a:lnTo>
+                  <a:lnTo>
+                    <a:pt x="3993409" y="2764550"/>
+                  </a:lnTo>
+                  <a:lnTo>
+                    <a:pt x="4065031" y="2768646"/>
+                  </a:lnTo>
+                  <a:lnTo>
+                    <a:pt x="4136654" y="2772719"/>
+                  </a:lnTo>
+                  <a:lnTo>
+                    <a:pt x="4208276" y="2776768"/>
+                  </a:lnTo>
+                  <a:lnTo>
+                    <a:pt x="4279899" y="2780794"/>
+                  </a:lnTo>
+                  <a:lnTo>
+                    <a:pt x="4351521" y="2784797"/>
+                  </a:lnTo>
+                  <a:lnTo>
+                    <a:pt x="4423144" y="2788778"/>
+                  </a:lnTo>
+                  <a:lnTo>
+                    <a:pt x="4494766" y="2792736"/>
+                  </a:lnTo>
+                  <a:lnTo>
+                    <a:pt x="4566389" y="2796671"/>
+                  </a:lnTo>
+                  <a:lnTo>
+                    <a:pt x="4638011" y="2800584"/>
+                  </a:lnTo>
+                  <a:lnTo>
+                    <a:pt x="4709634" y="2804474"/>
+                  </a:lnTo>
+                  <a:lnTo>
+                    <a:pt x="4781257" y="2808343"/>
+                  </a:lnTo>
+                  <a:lnTo>
+                    <a:pt x="4852879" y="2812189"/>
+                  </a:lnTo>
+                  <a:lnTo>
+                    <a:pt x="4924502" y="2816014"/>
+                  </a:lnTo>
+                  <a:lnTo>
+                    <a:pt x="4996124" y="2819817"/>
+                  </a:lnTo>
+                  <a:lnTo>
+                    <a:pt x="5067747" y="2823598"/>
+                  </a:lnTo>
+                  <a:lnTo>
+                    <a:pt x="5139369" y="2827357"/>
+                  </a:lnTo>
+                  <a:lnTo>
+                    <a:pt x="5210992" y="2831095"/>
+                  </a:lnTo>
+                  <a:lnTo>
+                    <a:pt x="5282614" y="2834812"/>
+                  </a:lnTo>
+                  <a:lnTo>
+                    <a:pt x="5354237" y="2838508"/>
+                  </a:lnTo>
+                  <a:lnTo>
+                    <a:pt x="5425859" y="2842182"/>
+                  </a:lnTo>
+                  <a:lnTo>
+                    <a:pt x="5497482" y="2845836"/>
+                  </a:lnTo>
+                  <a:lnTo>
+                    <a:pt x="5569104" y="2849469"/>
+                  </a:lnTo>
+                  <a:lnTo>
+                    <a:pt x="5640727" y="2853081"/>
+                  </a:lnTo>
+                  <a:lnTo>
+                    <a:pt x="5712349" y="2856673"/>
+                  </a:lnTo>
+                  <a:lnTo>
+                    <a:pt x="5783972" y="2860244"/>
+                  </a:lnTo>
+                  <a:lnTo>
+                    <a:pt x="5855594" y="2863795"/>
+                  </a:lnTo>
+                  <a:lnTo>
+                    <a:pt x="5927217" y="2867325"/>
+                  </a:lnTo>
+                  <a:lnTo>
+                    <a:pt x="5998839" y="2870836"/>
+                  </a:lnTo>
+                </a:path>
+              </a:pathLst>
+            </a:custGeom>
+          </p:spPr>
+          <p:txBody>
+            <a:bodyPr/>
+            <a:lstStyle/>
+            <a:p/>
+          </p:txBody>
+        </p:sp>
+        <p:sp>
+          <p:nvSpPr>
             <p:cNvPr id="22" name="pl22"/>
             <p:cNvSpPr/>
             <p:nvPr/>
           </p:nvSpPr>
           <p:spPr>
             <a:xfrm>
-              <a:off x="1739920" y="2073503"/>
-              <a:ext cx="6469638" cy="2870836"/>
+              <a:off x="1172049" y="4478420"/>
+              <a:ext cx="7090630" cy="1008642"/>
             </a:xfrm>
             <a:custGeom>
               <a:avLst/>
               <a:pathLst>
-                <a:path w="6469638" h="2870836">
+                <a:path w="7090630" h="1008642">
                   <a:moveTo>
+                    <a:pt x="7090630" y="1008642"/>
+                  </a:moveTo>
+                  <a:lnTo>
+                    <a:pt x="7019007" y="1005292"/>
+                  </a:lnTo>
+                  <a:lnTo>
+                    <a:pt x="6947385" y="1001783"/>
+                  </a:lnTo>
+                  <a:lnTo>
+                    <a:pt x="6875762" y="998106"/>
+                  </a:lnTo>
+                  <a:lnTo>
+                    <a:pt x="6804139" y="994254"/>
+                  </a:lnTo>
+                  <a:lnTo>
+                    <a:pt x="6732517" y="990218"/>
+                  </a:lnTo>
+                  <a:lnTo>
+                    <a:pt x="6660894" y="985989"/>
+                  </a:lnTo>
+                  <a:lnTo>
+                    <a:pt x="6589272" y="981559"/>
+                  </a:lnTo>
+                  <a:lnTo>
+                    <a:pt x="6517649" y="976917"/>
+                  </a:lnTo>
+                  <a:lnTo>
+                    <a:pt x="6446027" y="972054"/>
+                  </a:lnTo>
+                  <a:lnTo>
+                    <a:pt x="6374404" y="966958"/>
+                  </a:lnTo>
+                  <a:lnTo>
+                    <a:pt x="6302782" y="961620"/>
+                  </a:lnTo>
+                  <a:lnTo>
+                    <a:pt x="6231159" y="956027"/>
+                  </a:lnTo>
+                  <a:lnTo>
+                    <a:pt x="6159537" y="950166"/>
+                  </a:lnTo>
+                  <a:lnTo>
+                    <a:pt x="6087914" y="944026"/>
+                  </a:lnTo>
+                  <a:lnTo>
+                    <a:pt x="6016292" y="937593"/>
+                  </a:lnTo>
+                  <a:lnTo>
+                    <a:pt x="5944669" y="930854"/>
+                  </a:lnTo>
+                  <a:lnTo>
+                    <a:pt x="5873047" y="923792"/>
+                  </a:lnTo>
+                  <a:lnTo>
+                    <a:pt x="5801424" y="916394"/>
+                  </a:lnTo>
+                  <a:lnTo>
+                    <a:pt x="5729802" y="908642"/>
+                  </a:lnTo>
+                  <a:lnTo>
+                    <a:pt x="5658179" y="900521"/>
+                  </a:lnTo>
+                  <a:lnTo>
+                    <a:pt x="5586557" y="892011"/>
+                  </a:lnTo>
+                  <a:lnTo>
+                    <a:pt x="5514934" y="883096"/>
+                  </a:lnTo>
+                  <a:lnTo>
+                    <a:pt x="5443311" y="873756"/>
+                  </a:lnTo>
+                  <a:lnTo>
+                    <a:pt x="5371689" y="863969"/>
+                  </a:lnTo>
+                  <a:lnTo>
+                    <a:pt x="5300066" y="853716"/>
+                  </a:lnTo>
+                  <a:lnTo>
+                    <a:pt x="5228444" y="842974"/>
+                  </a:lnTo>
+                  <a:lnTo>
+                    <a:pt x="5156821" y="831718"/>
+                  </a:lnTo>
+                  <a:lnTo>
+                    <a:pt x="5085199" y="819926"/>
+                  </a:lnTo>
+                  <a:lnTo>
+                    <a:pt x="5013576" y="807571"/>
+                  </a:lnTo>
+                  <a:lnTo>
+                    <a:pt x="4941954" y="794626"/>
+                  </a:lnTo>
+                  <a:lnTo>
+                    <a:pt x="4870331" y="781064"/>
+                  </a:lnTo>
+                  <a:lnTo>
+                    <a:pt x="4798709" y="766854"/>
+                  </a:lnTo>
+                  <a:lnTo>
+                    <a:pt x="4727086" y="751966"/>
+                  </a:lnTo>
+                  <a:lnTo>
+                    <a:pt x="4655464" y="736368"/>
+                  </a:lnTo>
+                  <a:lnTo>
+                    <a:pt x="4583841" y="720026"/>
+                  </a:lnTo>
+                  <a:lnTo>
+                    <a:pt x="4512219" y="702903"/>
+                  </a:lnTo>
+                  <a:lnTo>
+                    <a:pt x="4440596" y="684964"/>
+                  </a:lnTo>
+                  <a:lnTo>
+                    <a:pt x="4368974" y="666168"/>
+                  </a:lnTo>
+                  <a:lnTo>
+                    <a:pt x="4297351" y="646475"/>
+                  </a:lnTo>
+                  <a:lnTo>
+                    <a:pt x="4225729" y="625843"/>
+                  </a:lnTo>
+                  <a:lnTo>
+                    <a:pt x="4154106" y="604226"/>
+                  </a:lnTo>
+                  <a:lnTo>
+                    <a:pt x="4082483" y="581577"/>
+                  </a:lnTo>
+                  <a:lnTo>
+                    <a:pt x="4010861" y="557848"/>
+                  </a:lnTo>
+                  <a:lnTo>
+                    <a:pt x="3939238" y="532986"/>
+                  </a:lnTo>
+                  <a:lnTo>
+                    <a:pt x="3867616" y="506938"/>
+                  </a:lnTo>
+                  <a:lnTo>
+                    <a:pt x="3795993" y="479647"/>
+                  </a:lnTo>
+                  <a:lnTo>
+                    <a:pt x="3724371" y="451053"/>
+                  </a:lnTo>
+                  <a:lnTo>
+                    <a:pt x="3652748" y="421095"/>
+                  </a:lnTo>
+                  <a:lnTo>
+                    <a:pt x="3581126" y="389708"/>
+                  </a:lnTo>
+                  <a:lnTo>
+                    <a:pt x="3509503" y="356822"/>
+                  </a:lnTo>
+                  <a:lnTo>
+                    <a:pt x="3437881" y="322367"/>
+                  </a:lnTo>
+                  <a:lnTo>
+                    <a:pt x="3366258" y="286268"/>
+                  </a:lnTo>
+                  <a:lnTo>
+                    <a:pt x="3294636" y="249253"/>
+                  </a:lnTo>
+                  <a:lnTo>
+                    <a:pt x="3223013" y="244501"/>
+                  </a:lnTo>
+                  <a:lnTo>
+                    <a:pt x="3151391" y="239723"/>
+                  </a:lnTo>
+                  <a:lnTo>
+                    <a:pt x="3079768" y="234917"/>
+                  </a:lnTo>
+                  <a:lnTo>
+                    <a:pt x="3008146" y="230083"/>
+                  </a:lnTo>
+                  <a:lnTo>
+                    <a:pt x="2936523" y="225222"/>
+                  </a:lnTo>
+                  <a:lnTo>
+                    <a:pt x="2864901" y="220333"/>
+                  </a:lnTo>
+                  <a:lnTo>
+                    <a:pt x="2793278" y="215415"/>
+                  </a:lnTo>
+                  <a:lnTo>
+                    <a:pt x="2721655" y="210470"/>
+                  </a:lnTo>
+                  <a:lnTo>
+                    <a:pt x="2650033" y="205497"/>
+                  </a:lnTo>
+                  <a:lnTo>
+                    <a:pt x="2578410" y="200495"/>
+                  </a:lnTo>
+                  <a:lnTo>
+                    <a:pt x="2506788" y="195464"/>
+                  </a:lnTo>
+                  <a:lnTo>
+                    <a:pt x="2435165" y="190404"/>
+                  </a:lnTo>
+                  <a:lnTo>
+                    <a:pt x="2363543" y="185316"/>
+                  </a:lnTo>
+                  <a:lnTo>
+                    <a:pt x="2291920" y="180198"/>
+                  </a:lnTo>
+                  <a:lnTo>
+                    <a:pt x="2220298" y="175051"/>
+                  </a:lnTo>
+                  <a:lnTo>
+                    <a:pt x="2148675" y="169875"/>
+                  </a:lnTo>
+                  <a:lnTo>
+                    <a:pt x="2077053" y="164669"/>
+                  </a:lnTo>
+                  <a:lnTo>
+                    <a:pt x="2005430" y="159433"/>
+                  </a:lnTo>
+                  <a:lnTo>
+                    <a:pt x="1933808" y="154167"/>
+                  </a:lnTo>
+                  <a:lnTo>
+                    <a:pt x="1862185" y="148871"/>
+                  </a:lnTo>
+                  <a:lnTo>
+                    <a:pt x="1790563" y="143544"/>
+                  </a:lnTo>
+                  <a:lnTo>
+                    <a:pt x="1718940" y="138187"/>
+                  </a:lnTo>
+                  <a:lnTo>
+                    <a:pt x="1647318" y="132800"/>
+                  </a:lnTo>
+                  <a:lnTo>
+                    <a:pt x="1575695" y="127381"/>
+                  </a:lnTo>
+                  <a:lnTo>
+                    <a:pt x="1504073" y="121932"/>
+                  </a:lnTo>
+                  <a:lnTo>
+                    <a:pt x="1432450" y="116451"/>
+                  </a:lnTo>
+                  <a:lnTo>
+                    <a:pt x="1360827" y="110939"/>
+                  </a:lnTo>
+                  <a:lnTo>
+                    <a:pt x="1289205" y="105395"/>
+                  </a:lnTo>
+                  <a:lnTo>
+                    <a:pt x="1217582" y="99820"/>
+                  </a:lnTo>
+                  <a:lnTo>
+                    <a:pt x="1145960" y="94213"/>
+                  </a:lnTo>
+                  <a:lnTo>
+                    <a:pt x="1074337" y="88573"/>
+                  </a:lnTo>
+                  <a:lnTo>
+                    <a:pt x="1002715" y="82901"/>
+                  </a:lnTo>
+                  <a:lnTo>
+                    <a:pt x="931092" y="77197"/>
+                  </a:lnTo>
+                  <a:lnTo>
+                    <a:pt x="859470" y="71460"/>
+                  </a:lnTo>
+                  <a:lnTo>
+                    <a:pt x="787847" y="65690"/>
+                  </a:lnTo>
+                  <a:lnTo>
+                    <a:pt x="716225" y="59888"/>
+                  </a:lnTo>
+                  <a:lnTo>
+                    <a:pt x="644602" y="54051"/>
+                  </a:lnTo>
+                  <a:lnTo>
+                    <a:pt x="572980" y="48182"/>
+                  </a:lnTo>
+                  <a:lnTo>
+                    <a:pt x="501357" y="42279"/>
+                  </a:lnTo>
+                  <a:lnTo>
+                    <a:pt x="429735" y="36342"/>
+                  </a:lnTo>
+                  <a:lnTo>
+                    <a:pt x="358112" y="30371"/>
+                  </a:lnTo>
+                  <a:lnTo>
+                    <a:pt x="286490" y="24366"/>
+                  </a:lnTo>
+                  <a:lnTo>
+                    <a:pt x="214867" y="18326"/>
+                  </a:lnTo>
+                  <a:lnTo>
+                    <a:pt x="143245" y="12252"/>
+                  </a:lnTo>
+                  <a:lnTo>
+                    <a:pt x="71622" y="6143"/>
+                  </a:lnTo>
+                  <a:lnTo>
                     <a:pt x="0" y="0"/>
-                  </a:moveTo>
-                  <a:lnTo>
-                    <a:pt x="58421" y="121358"/>
-                  </a:lnTo>
-                  <a:lnTo>
-                    <a:pt x="135665" y="274506"/>
-                  </a:lnTo>
-                  <a:lnTo>
-                    <a:pt x="212908" y="420679"/>
-                  </a:lnTo>
-                  <a:lnTo>
-                    <a:pt x="290152" y="560194"/>
-                  </a:lnTo>
-                  <a:lnTo>
-                    <a:pt x="367395" y="693354"/>
-                  </a:lnTo>
-                  <a:lnTo>
-                    <a:pt x="444639" y="820449"/>
-                  </a:lnTo>
-                  <a:lnTo>
-                    <a:pt x="521883" y="941756"/>
-                  </a:lnTo>
-                  <a:lnTo>
-                    <a:pt x="599126" y="1057537"/>
-                  </a:lnTo>
-                  <a:lnTo>
-                    <a:pt x="676370" y="1168045"/>
-                  </a:lnTo>
-                  <a:lnTo>
-                    <a:pt x="753613" y="1273519"/>
-                  </a:lnTo>
-                  <a:lnTo>
-                    <a:pt x="830857" y="1374189"/>
-                  </a:lnTo>
-                  <a:lnTo>
-                    <a:pt x="908100" y="1470274"/>
-                  </a:lnTo>
-                  <a:lnTo>
-                    <a:pt x="985344" y="1561983"/>
-                  </a:lnTo>
-                  <a:lnTo>
-                    <a:pt x="1062588" y="1649514"/>
-                  </a:lnTo>
-                  <a:lnTo>
-                    <a:pt x="1139831" y="1733059"/>
-                  </a:lnTo>
-                  <a:lnTo>
-                    <a:pt x="1217075" y="1812798"/>
-                  </a:lnTo>
-                  <a:lnTo>
-                    <a:pt x="1294318" y="1888905"/>
-                  </a:lnTo>
-                  <a:lnTo>
-                    <a:pt x="1371562" y="1961546"/>
-                  </a:lnTo>
-                  <a:lnTo>
-                    <a:pt x="1448805" y="2030879"/>
-                  </a:lnTo>
-                  <a:lnTo>
-                    <a:pt x="1526049" y="2097053"/>
-                  </a:lnTo>
-                  <a:lnTo>
-                    <a:pt x="1603293" y="2160213"/>
-                  </a:lnTo>
-                  <a:lnTo>
-                    <a:pt x="1680536" y="2220497"/>
-                  </a:lnTo>
-                  <a:lnTo>
-                    <a:pt x="1757780" y="2278035"/>
-                  </a:lnTo>
-                  <a:lnTo>
-                    <a:pt x="1835023" y="2332952"/>
-                  </a:lnTo>
-                  <a:lnTo>
-                    <a:pt x="1912267" y="2385368"/>
-                  </a:lnTo>
-                  <a:lnTo>
-                    <a:pt x="1989510" y="2435396"/>
-                  </a:lnTo>
-                  <a:lnTo>
-                    <a:pt x="2066754" y="2483146"/>
-                  </a:lnTo>
-                  <a:lnTo>
-                    <a:pt x="2143998" y="2528720"/>
-                  </a:lnTo>
-                  <a:lnTo>
-                    <a:pt x="2221241" y="2572219"/>
-                  </a:lnTo>
-                  <a:lnTo>
-                    <a:pt x="2298485" y="2613737"/>
-                  </a:lnTo>
-                  <a:lnTo>
-                    <a:pt x="2375728" y="2653364"/>
-                  </a:lnTo>
-                  <a:lnTo>
-                    <a:pt x="2452972" y="2658895"/>
-                  </a:lnTo>
-                  <a:lnTo>
-                    <a:pt x="2530215" y="2663592"/>
-                  </a:lnTo>
-                  <a:lnTo>
-                    <a:pt x="2607459" y="2668263"/>
-                  </a:lnTo>
-                  <a:lnTo>
-                    <a:pt x="2684703" y="2672907"/>
-                  </a:lnTo>
-                  <a:lnTo>
-                    <a:pt x="2761946" y="2677525"/>
-                  </a:lnTo>
-                  <a:lnTo>
-                    <a:pt x="2839190" y="2682116"/>
-                  </a:lnTo>
-                  <a:lnTo>
-                    <a:pt x="2916433" y="2686681"/>
-                  </a:lnTo>
-                  <a:lnTo>
-                    <a:pt x="2993677" y="2691221"/>
-                  </a:lnTo>
-                  <a:lnTo>
-                    <a:pt x="3070920" y="2695734"/>
-                  </a:lnTo>
-                  <a:lnTo>
-                    <a:pt x="3148164" y="2700222"/>
-                  </a:lnTo>
-                  <a:lnTo>
-                    <a:pt x="3225408" y="2704684"/>
-                  </a:lnTo>
-                  <a:lnTo>
-                    <a:pt x="3302651" y="2709121"/>
-                  </a:lnTo>
-                  <a:lnTo>
-                    <a:pt x="3379895" y="2713532"/>
-                  </a:lnTo>
-                  <a:lnTo>
-                    <a:pt x="3457138" y="2717918"/>
-                  </a:lnTo>
-                  <a:lnTo>
-                    <a:pt x="3534382" y="2722280"/>
-                  </a:lnTo>
-                  <a:lnTo>
-                    <a:pt x="3611625" y="2726616"/>
-                  </a:lnTo>
-                  <a:lnTo>
-                    <a:pt x="3688869" y="2730928"/>
-                  </a:lnTo>
-                  <a:lnTo>
-                    <a:pt x="3766113" y="2735215"/>
-                  </a:lnTo>
-                  <a:lnTo>
-                    <a:pt x="3843356" y="2739478"/>
-                  </a:lnTo>
-                  <a:lnTo>
-                    <a:pt x="3920600" y="2743717"/>
-                  </a:lnTo>
-                  <a:lnTo>
-                    <a:pt x="3997843" y="2747931"/>
-                  </a:lnTo>
-                  <a:lnTo>
-                    <a:pt x="4075087" y="2752122"/>
-                  </a:lnTo>
-                  <a:lnTo>
-                    <a:pt x="4152330" y="2756288"/>
-                  </a:lnTo>
-                  <a:lnTo>
-                    <a:pt x="4229574" y="2760431"/>
-                  </a:lnTo>
-                  <a:lnTo>
-                    <a:pt x="4306818" y="2764550"/>
-                  </a:lnTo>
-                  <a:lnTo>
-                    <a:pt x="4384061" y="2768646"/>
-                  </a:lnTo>
-                  <a:lnTo>
-                    <a:pt x="4461305" y="2772719"/>
-                  </a:lnTo>
-                  <a:lnTo>
-                    <a:pt x="4538548" y="2776768"/>
-                  </a:lnTo>
-                  <a:lnTo>
-                    <a:pt x="4615792" y="2780794"/>
-                  </a:lnTo>
-                  <a:lnTo>
-                    <a:pt x="4693036" y="2784797"/>
-                  </a:lnTo>
-                  <a:lnTo>
-                    <a:pt x="4770279" y="2788778"/>
-                  </a:lnTo>
-                  <a:lnTo>
-                    <a:pt x="4847523" y="2792736"/>
-                  </a:lnTo>
-                  <a:lnTo>
-                    <a:pt x="4924766" y="2796671"/>
-                  </a:lnTo>
-                  <a:lnTo>
-                    <a:pt x="5002010" y="2800584"/>
-                  </a:lnTo>
-                  <a:lnTo>
-                    <a:pt x="5079253" y="2804474"/>
-                  </a:lnTo>
-                  <a:lnTo>
-                    <a:pt x="5156497" y="2808343"/>
-                  </a:lnTo>
-                  <a:lnTo>
-                    <a:pt x="5233741" y="2812189"/>
-                  </a:lnTo>
-                  <a:lnTo>
-                    <a:pt x="5310984" y="2816014"/>
-                  </a:lnTo>
-                  <a:lnTo>
-                    <a:pt x="5388228" y="2819817"/>
-                  </a:lnTo>
-                  <a:lnTo>
-                    <a:pt x="5465471" y="2823598"/>
-                  </a:lnTo>
-                  <a:lnTo>
-                    <a:pt x="5542715" y="2827357"/>
-                  </a:lnTo>
-                  <a:lnTo>
-                    <a:pt x="5619958" y="2831095"/>
-                  </a:lnTo>
-                  <a:lnTo>
-                    <a:pt x="5697202" y="2834812"/>
-                  </a:lnTo>
-                  <a:lnTo>
-                    <a:pt x="5774446" y="2838508"/>
-                  </a:lnTo>
-                  <a:lnTo>
-                    <a:pt x="5851689" y="2842182"/>
-                  </a:lnTo>
-                  <a:lnTo>
-                    <a:pt x="5928933" y="2845836"/>
-                  </a:lnTo>
-                  <a:lnTo>
-                    <a:pt x="6006176" y="2849469"/>
-                  </a:lnTo>
-                  <a:lnTo>
-                    <a:pt x="6083420" y="2853081"/>
-                  </a:lnTo>
-                  <a:lnTo>
-                    <a:pt x="6160663" y="2856673"/>
-                  </a:lnTo>
-                  <a:lnTo>
-                    <a:pt x="6237907" y="2860244"/>
-                  </a:lnTo>
-                  <a:lnTo>
-                    <a:pt x="6315151" y="2863795"/>
-                  </a:lnTo>
-                  <a:lnTo>
-                    <a:pt x="6392394" y="2867325"/>
-                  </a:lnTo>
-                  <a:lnTo>
-                    <a:pt x="6469638" y="2870836"/>
                   </a:lnTo>
                 </a:path>
               </a:pathLst>
@@ -3859,619 +4150,312 @@
           </p:nvSpPr>
           <p:spPr>
             <a:xfrm>
-              <a:off x="817517" y="4498572"/>
-              <a:ext cx="7392041" cy="988490"/>
+              <a:off x="1172049" y="2791801"/>
+              <a:ext cx="7090630" cy="2558039"/>
             </a:xfrm>
             <a:custGeom>
               <a:avLst/>
               <a:pathLst>
-                <a:path w="7392041" h="988490">
-                  <a:moveTo>
-                    <a:pt x="7392041" y="988490"/>
-                  </a:moveTo>
-                  <a:lnTo>
-                    <a:pt x="7314797" y="985140"/>
-                  </a:lnTo>
-                  <a:lnTo>
-                    <a:pt x="7237554" y="981631"/>
-                  </a:lnTo>
-                  <a:lnTo>
-                    <a:pt x="7160310" y="977954"/>
-                  </a:lnTo>
-                  <a:lnTo>
-                    <a:pt x="7083066" y="974102"/>
-                  </a:lnTo>
-                  <a:lnTo>
-                    <a:pt x="7005823" y="970066"/>
-                  </a:lnTo>
-                  <a:lnTo>
-                    <a:pt x="6928579" y="965837"/>
-                  </a:lnTo>
-                  <a:lnTo>
-                    <a:pt x="6851336" y="961407"/>
-                  </a:lnTo>
-                  <a:lnTo>
-                    <a:pt x="6774092" y="956765"/>
-                  </a:lnTo>
-                  <a:lnTo>
-                    <a:pt x="6696849" y="951902"/>
-                  </a:lnTo>
-                  <a:lnTo>
-                    <a:pt x="6619605" y="946807"/>
-                  </a:lnTo>
-                  <a:lnTo>
-                    <a:pt x="6542361" y="941468"/>
-                  </a:lnTo>
-                  <a:lnTo>
-                    <a:pt x="6465118" y="935875"/>
-                  </a:lnTo>
-                  <a:lnTo>
-                    <a:pt x="6387874" y="930014"/>
-                  </a:lnTo>
-                  <a:lnTo>
-                    <a:pt x="6310631" y="923874"/>
-                  </a:lnTo>
-                  <a:lnTo>
-                    <a:pt x="6233387" y="917442"/>
-                  </a:lnTo>
-                  <a:lnTo>
-                    <a:pt x="6156144" y="910702"/>
-                  </a:lnTo>
-                  <a:lnTo>
-                    <a:pt x="6078900" y="903640"/>
-                  </a:lnTo>
-                  <a:lnTo>
-                    <a:pt x="6001656" y="896242"/>
-                  </a:lnTo>
-                  <a:lnTo>
-                    <a:pt x="5924413" y="888490"/>
-                  </a:lnTo>
-                  <a:lnTo>
-                    <a:pt x="5847169" y="880369"/>
-                  </a:lnTo>
-                  <a:lnTo>
-                    <a:pt x="5769926" y="871860"/>
-                  </a:lnTo>
-                  <a:lnTo>
-                    <a:pt x="5692682" y="862944"/>
-                  </a:lnTo>
-                  <a:lnTo>
-                    <a:pt x="5615439" y="853604"/>
-                  </a:lnTo>
-                  <a:lnTo>
-                    <a:pt x="5538195" y="843818"/>
-                  </a:lnTo>
-                  <a:lnTo>
-                    <a:pt x="5460951" y="833564"/>
-                  </a:lnTo>
-                  <a:lnTo>
-                    <a:pt x="5383708" y="822822"/>
-                  </a:lnTo>
-                  <a:lnTo>
-                    <a:pt x="5306464" y="811566"/>
-                  </a:lnTo>
-                  <a:lnTo>
-                    <a:pt x="5229221" y="799774"/>
-                  </a:lnTo>
-                  <a:lnTo>
-                    <a:pt x="5151977" y="787419"/>
-                  </a:lnTo>
-                  <a:lnTo>
-                    <a:pt x="5074734" y="774474"/>
-                  </a:lnTo>
-                  <a:lnTo>
-                    <a:pt x="4997490" y="760912"/>
-                  </a:lnTo>
-                  <a:lnTo>
-                    <a:pt x="4920246" y="746702"/>
-                  </a:lnTo>
-                  <a:lnTo>
-                    <a:pt x="4843003" y="731814"/>
-                  </a:lnTo>
-                  <a:lnTo>
-                    <a:pt x="4765759" y="716216"/>
-                  </a:lnTo>
-                  <a:lnTo>
-                    <a:pt x="4688516" y="699874"/>
-                  </a:lnTo>
-                  <a:lnTo>
-                    <a:pt x="4611272" y="682751"/>
-                  </a:lnTo>
-                  <a:lnTo>
-                    <a:pt x="4534029" y="664812"/>
-                  </a:lnTo>
-                  <a:lnTo>
-                    <a:pt x="4456785" y="646016"/>
-                  </a:lnTo>
-                  <a:lnTo>
-                    <a:pt x="4379541" y="626323"/>
-                  </a:lnTo>
-                  <a:lnTo>
-                    <a:pt x="4302298" y="605691"/>
-                  </a:lnTo>
-                  <a:lnTo>
-                    <a:pt x="4225054" y="584074"/>
-                  </a:lnTo>
-                  <a:lnTo>
-                    <a:pt x="4147811" y="561426"/>
-                  </a:lnTo>
-                  <a:lnTo>
-                    <a:pt x="4070567" y="537696"/>
-                  </a:lnTo>
-                  <a:lnTo>
-                    <a:pt x="3993324" y="512834"/>
-                  </a:lnTo>
-                  <a:lnTo>
-                    <a:pt x="3916080" y="486786"/>
-                  </a:lnTo>
-                  <a:lnTo>
-                    <a:pt x="3838836" y="459495"/>
-                  </a:lnTo>
-                  <a:lnTo>
-                    <a:pt x="3761593" y="430902"/>
-                  </a:lnTo>
-                  <a:lnTo>
-                    <a:pt x="3684349" y="400943"/>
-                  </a:lnTo>
-                  <a:lnTo>
-                    <a:pt x="3607106" y="369556"/>
-                  </a:lnTo>
-                  <a:lnTo>
-                    <a:pt x="3529862" y="336670"/>
-                  </a:lnTo>
-                  <a:lnTo>
-                    <a:pt x="3452619" y="302215"/>
-                  </a:lnTo>
-                  <a:lnTo>
-                    <a:pt x="3375375" y="266116"/>
-                  </a:lnTo>
-                  <a:lnTo>
-                    <a:pt x="3298131" y="229101"/>
-                  </a:lnTo>
-                  <a:lnTo>
-                    <a:pt x="3220888" y="224349"/>
-                  </a:lnTo>
-                  <a:lnTo>
-                    <a:pt x="3143644" y="219571"/>
-                  </a:lnTo>
-                  <a:lnTo>
-                    <a:pt x="3066401" y="214765"/>
-                  </a:lnTo>
-                  <a:lnTo>
-                    <a:pt x="2989157" y="209931"/>
-                  </a:lnTo>
-                  <a:lnTo>
-                    <a:pt x="2911914" y="205070"/>
-                  </a:lnTo>
-                  <a:lnTo>
-                    <a:pt x="2834670" y="200181"/>
-                  </a:lnTo>
-                  <a:lnTo>
-                    <a:pt x="2757426" y="195264"/>
-                  </a:lnTo>
-                  <a:lnTo>
-                    <a:pt x="2680183" y="190318"/>
-                  </a:lnTo>
-                  <a:lnTo>
-                    <a:pt x="2602939" y="185345"/>
-                  </a:lnTo>
-                  <a:lnTo>
-                    <a:pt x="2525696" y="180343"/>
-                  </a:lnTo>
-                  <a:lnTo>
-                    <a:pt x="2448452" y="175312"/>
-                  </a:lnTo>
-                  <a:lnTo>
-                    <a:pt x="2371209" y="170252"/>
-                  </a:lnTo>
-                  <a:lnTo>
-                    <a:pt x="2293965" y="165164"/>
-                  </a:lnTo>
-                  <a:lnTo>
-                    <a:pt x="2216721" y="160046"/>
-                  </a:lnTo>
-                  <a:lnTo>
-                    <a:pt x="2139478" y="154899"/>
-                  </a:lnTo>
-                  <a:lnTo>
-                    <a:pt x="2062234" y="149723"/>
-                  </a:lnTo>
-                  <a:lnTo>
-                    <a:pt x="1984991" y="144517"/>
-                  </a:lnTo>
-                  <a:lnTo>
-                    <a:pt x="1907747" y="139281"/>
-                  </a:lnTo>
-                  <a:lnTo>
-                    <a:pt x="1830504" y="134015"/>
-                  </a:lnTo>
-                  <a:lnTo>
-                    <a:pt x="1753260" y="128719"/>
-                  </a:lnTo>
-                  <a:lnTo>
-                    <a:pt x="1676016" y="123392"/>
-                  </a:lnTo>
-                  <a:lnTo>
-                    <a:pt x="1598773" y="118035"/>
-                  </a:lnTo>
-                  <a:lnTo>
-                    <a:pt x="1521529" y="112648"/>
-                  </a:lnTo>
-                  <a:lnTo>
-                    <a:pt x="1444286" y="107229"/>
-                  </a:lnTo>
-                  <a:lnTo>
-                    <a:pt x="1367042" y="101780"/>
-                  </a:lnTo>
-                  <a:lnTo>
-                    <a:pt x="1289799" y="96299"/>
-                  </a:lnTo>
-                  <a:lnTo>
-                    <a:pt x="1212555" y="90787"/>
-                  </a:lnTo>
-                  <a:lnTo>
-                    <a:pt x="1135311" y="85243"/>
-                  </a:lnTo>
-                  <a:lnTo>
-                    <a:pt x="1058068" y="79668"/>
-                  </a:lnTo>
-                  <a:lnTo>
-                    <a:pt x="980824" y="74061"/>
-                  </a:lnTo>
-                  <a:lnTo>
-                    <a:pt x="903581" y="68421"/>
-                  </a:lnTo>
-                  <a:lnTo>
-                    <a:pt x="826337" y="62749"/>
-                  </a:lnTo>
-                  <a:lnTo>
-                    <a:pt x="749094" y="57045"/>
-                  </a:lnTo>
-                  <a:lnTo>
-                    <a:pt x="671850" y="51308"/>
-                  </a:lnTo>
-                  <a:lnTo>
-                    <a:pt x="594606" y="45538"/>
-                  </a:lnTo>
-                  <a:lnTo>
-                    <a:pt x="517363" y="39736"/>
-                  </a:lnTo>
-                  <a:lnTo>
-                    <a:pt x="440119" y="33900"/>
-                  </a:lnTo>
-                  <a:lnTo>
-                    <a:pt x="362876" y="28030"/>
-                  </a:lnTo>
-                  <a:lnTo>
-                    <a:pt x="285632" y="22127"/>
-                  </a:lnTo>
-                  <a:lnTo>
-                    <a:pt x="208389" y="16190"/>
-                  </a:lnTo>
-                  <a:lnTo>
-                    <a:pt x="131145" y="10219"/>
-                  </a:lnTo>
-                  <a:lnTo>
-                    <a:pt x="53901" y="4214"/>
-                  </a:lnTo>
-                  <a:lnTo>
-                    <a:pt x="0" y="0"/>
-                  </a:lnTo>
-                </a:path>
-              </a:pathLst>
-            </a:custGeom>
-          </p:spPr>
-          <p:txBody>
-            <a:bodyPr/>
-            <a:lstStyle/>
-            <a:p/>
-          </p:txBody>
-        </p:sp>
-        <p:sp>
-          <p:nvSpPr>
-            <p:cNvPr id="24" name="pl24"/>
-            <p:cNvSpPr/>
-            <p:nvPr/>
-          </p:nvSpPr>
-          <p:spPr>
-            <a:xfrm>
-              <a:off x="817517" y="3020520"/>
-              <a:ext cx="7392041" cy="2329320"/>
-            </a:xfrm>
-            <a:custGeom>
-              <a:avLst/>
-              <a:pathLst>
-                <a:path w="7392041" h="2329320">
+                <a:path w="7090630" h="2558039">
                   <a:moveTo>
                     <a:pt x="0" y="0"/>
                   </a:moveTo>
                   <a:lnTo>
-                    <a:pt x="53901" y="46074"/>
-                  </a:lnTo>
-                  <a:lnTo>
-                    <a:pt x="131145" y="110395"/>
-                  </a:lnTo>
-                  <a:lnTo>
-                    <a:pt x="208389" y="173055"/>
-                  </a:lnTo>
-                  <a:lnTo>
-                    <a:pt x="285632" y="234097"/>
-                  </a:lnTo>
-                  <a:lnTo>
-                    <a:pt x="362876" y="293562"/>
-                  </a:lnTo>
-                  <a:lnTo>
-                    <a:pt x="440119" y="351492"/>
-                  </a:lnTo>
-                  <a:lnTo>
-                    <a:pt x="517363" y="407925"/>
-                  </a:lnTo>
-                  <a:lnTo>
-                    <a:pt x="594606" y="462902"/>
-                  </a:lnTo>
-                  <a:lnTo>
-                    <a:pt x="671850" y="516458"/>
-                  </a:lnTo>
-                  <a:lnTo>
-                    <a:pt x="749094" y="568632"/>
-                  </a:lnTo>
-                  <a:lnTo>
-                    <a:pt x="826337" y="619458"/>
-                  </a:lnTo>
-                  <a:lnTo>
-                    <a:pt x="903581" y="668971"/>
-                  </a:lnTo>
-                  <a:lnTo>
-                    <a:pt x="980824" y="717206"/>
-                  </a:lnTo>
-                  <a:lnTo>
-                    <a:pt x="1058068" y="764195"/>
-                  </a:lnTo>
-                  <a:lnTo>
-                    <a:pt x="1135311" y="809971"/>
-                  </a:lnTo>
-                  <a:lnTo>
-                    <a:pt x="1212555" y="854564"/>
-                  </a:lnTo>
-                  <a:lnTo>
-                    <a:pt x="1289799" y="898006"/>
-                  </a:lnTo>
-                  <a:lnTo>
-                    <a:pt x="1367042" y="940326"/>
-                  </a:lnTo>
-                  <a:lnTo>
-                    <a:pt x="1444286" y="981553"/>
-                  </a:lnTo>
-                  <a:lnTo>
-                    <a:pt x="1521529" y="1021715"/>
-                  </a:lnTo>
-                  <a:lnTo>
-                    <a:pt x="1598773" y="1060841"/>
-                  </a:lnTo>
-                  <a:lnTo>
-                    <a:pt x="1676016" y="1098955"/>
-                  </a:lnTo>
-                  <a:lnTo>
-                    <a:pt x="1753260" y="1136086"/>
-                  </a:lnTo>
-                  <a:lnTo>
-                    <a:pt x="1830504" y="1172257"/>
-                  </a:lnTo>
-                  <a:lnTo>
-                    <a:pt x="1907747" y="1207495"/>
-                  </a:lnTo>
-                  <a:lnTo>
-                    <a:pt x="1984991" y="1241822"/>
-                  </a:lnTo>
-                  <a:lnTo>
-                    <a:pt x="2062234" y="1275263"/>
-                  </a:lnTo>
-                  <a:lnTo>
-                    <a:pt x="2139478" y="1307841"/>
-                  </a:lnTo>
-                  <a:lnTo>
-                    <a:pt x="2216721" y="1339577"/>
-                  </a:lnTo>
-                  <a:lnTo>
-                    <a:pt x="2293965" y="1370493"/>
-                  </a:lnTo>
-                  <a:lnTo>
-                    <a:pt x="2371209" y="1400611"/>
-                  </a:lnTo>
-                  <a:lnTo>
-                    <a:pt x="2448452" y="1429951"/>
-                  </a:lnTo>
-                  <a:lnTo>
-                    <a:pt x="2525696" y="1458534"/>
-                  </a:lnTo>
-                  <a:lnTo>
-                    <a:pt x="2602939" y="1486378"/>
-                  </a:lnTo>
-                  <a:lnTo>
-                    <a:pt x="2680183" y="1513503"/>
-                  </a:lnTo>
-                  <a:lnTo>
-                    <a:pt x="2757426" y="1539928"/>
-                  </a:lnTo>
-                  <a:lnTo>
-                    <a:pt x="2834670" y="1565670"/>
-                  </a:lnTo>
-                  <a:lnTo>
-                    <a:pt x="2911914" y="1590748"/>
-                  </a:lnTo>
-                  <a:lnTo>
-                    <a:pt x="2989157" y="1615178"/>
-                  </a:lnTo>
-                  <a:lnTo>
-                    <a:pt x="3066401" y="1638977"/>
-                  </a:lnTo>
-                  <a:lnTo>
-                    <a:pt x="3143644" y="1662161"/>
-                  </a:lnTo>
-                  <a:lnTo>
-                    <a:pt x="3220888" y="1684747"/>
-                  </a:lnTo>
-                  <a:lnTo>
-                    <a:pt x="3298131" y="1706749"/>
-                  </a:lnTo>
-                  <a:lnTo>
-                    <a:pt x="3375375" y="1728184"/>
-                  </a:lnTo>
-                  <a:lnTo>
-                    <a:pt x="3452619" y="1749064"/>
-                  </a:lnTo>
-                  <a:lnTo>
-                    <a:pt x="3529862" y="1769406"/>
-                  </a:lnTo>
-                  <a:lnTo>
-                    <a:pt x="3607106" y="1789222"/>
-                  </a:lnTo>
-                  <a:lnTo>
-                    <a:pt x="3684349" y="1808526"/>
-                  </a:lnTo>
-                  <a:lnTo>
-                    <a:pt x="3761593" y="1827332"/>
-                  </a:lnTo>
-                  <a:lnTo>
-                    <a:pt x="3838836" y="1845652"/>
-                  </a:lnTo>
-                  <a:lnTo>
-                    <a:pt x="3916080" y="1863499"/>
-                  </a:lnTo>
-                  <a:lnTo>
-                    <a:pt x="3993324" y="1880885"/>
-                  </a:lnTo>
-                  <a:lnTo>
-                    <a:pt x="4070567" y="1897822"/>
-                  </a:lnTo>
-                  <a:lnTo>
-                    <a:pt x="4147811" y="1914322"/>
-                  </a:lnTo>
-                  <a:lnTo>
-                    <a:pt x="4225054" y="1930396"/>
-                  </a:lnTo>
-                  <a:lnTo>
-                    <a:pt x="4302298" y="1946054"/>
-                  </a:lnTo>
-                  <a:lnTo>
-                    <a:pt x="4379541" y="1961308"/>
-                  </a:lnTo>
-                  <a:lnTo>
-                    <a:pt x="4456785" y="1976169"/>
-                  </a:lnTo>
-                  <a:lnTo>
-                    <a:pt x="4534029" y="1990645"/>
-                  </a:lnTo>
-                  <a:lnTo>
-                    <a:pt x="4611272" y="2004748"/>
-                  </a:lnTo>
-                  <a:lnTo>
-                    <a:pt x="4688516" y="2018486"/>
-                  </a:lnTo>
-                  <a:lnTo>
-                    <a:pt x="4765759" y="2031870"/>
-                  </a:lnTo>
-                  <a:lnTo>
-                    <a:pt x="4843003" y="2044908"/>
-                  </a:lnTo>
-                  <a:lnTo>
-                    <a:pt x="4920246" y="2057609"/>
-                  </a:lnTo>
-                  <a:lnTo>
-                    <a:pt x="4997490" y="2069982"/>
-                  </a:lnTo>
-                  <a:lnTo>
-                    <a:pt x="5074734" y="2082036"/>
-                  </a:lnTo>
-                  <a:lnTo>
-                    <a:pt x="5151977" y="2093778"/>
-                  </a:lnTo>
-                  <a:lnTo>
-                    <a:pt x="5229221" y="2105217"/>
-                  </a:lnTo>
-                  <a:lnTo>
-                    <a:pt x="5306464" y="2116361"/>
-                  </a:lnTo>
-                  <a:lnTo>
-                    <a:pt x="5383708" y="2127217"/>
-                  </a:lnTo>
-                  <a:lnTo>
-                    <a:pt x="5460951" y="2137793"/>
-                  </a:lnTo>
-                  <a:lnTo>
-                    <a:pt x="5538195" y="2148095"/>
-                  </a:lnTo>
-                  <a:lnTo>
-                    <a:pt x="5615439" y="2158132"/>
-                  </a:lnTo>
-                  <a:lnTo>
-                    <a:pt x="5692682" y="2167909"/>
-                  </a:lnTo>
-                  <a:lnTo>
-                    <a:pt x="5769926" y="2177434"/>
-                  </a:lnTo>
-                  <a:lnTo>
-                    <a:pt x="5847169" y="2186713"/>
-                  </a:lnTo>
-                  <a:lnTo>
-                    <a:pt x="5924413" y="2195752"/>
-                  </a:lnTo>
-                  <a:lnTo>
-                    <a:pt x="6001656" y="2204557"/>
-                  </a:lnTo>
-                  <a:lnTo>
-                    <a:pt x="6078900" y="2213136"/>
-                  </a:lnTo>
-                  <a:lnTo>
-                    <a:pt x="6156144" y="2221493"/>
-                  </a:lnTo>
-                  <a:lnTo>
-                    <a:pt x="6233387" y="2229633"/>
-                  </a:lnTo>
-                  <a:lnTo>
-                    <a:pt x="6310631" y="2237564"/>
-                  </a:lnTo>
-                  <a:lnTo>
-                    <a:pt x="6387874" y="2245290"/>
-                  </a:lnTo>
-                  <a:lnTo>
-                    <a:pt x="6465118" y="2252817"/>
-                  </a:lnTo>
-                  <a:lnTo>
-                    <a:pt x="6542361" y="2260149"/>
-                  </a:lnTo>
-                  <a:lnTo>
-                    <a:pt x="6619605" y="2267291"/>
-                  </a:lnTo>
-                  <a:lnTo>
-                    <a:pt x="6696849" y="2274249"/>
-                  </a:lnTo>
-                  <a:lnTo>
-                    <a:pt x="6774092" y="2281028"/>
-                  </a:lnTo>
-                  <a:lnTo>
-                    <a:pt x="6851336" y="2287631"/>
-                  </a:lnTo>
-                  <a:lnTo>
-                    <a:pt x="6928579" y="2294064"/>
-                  </a:lnTo>
-                  <a:lnTo>
-                    <a:pt x="7005823" y="2300331"/>
-                  </a:lnTo>
-                  <a:lnTo>
-                    <a:pt x="7083066" y="2306436"/>
-                  </a:lnTo>
-                  <a:lnTo>
-                    <a:pt x="7160310" y="2312383"/>
-                  </a:lnTo>
-                  <a:lnTo>
-                    <a:pt x="7237554" y="2318177"/>
-                  </a:lnTo>
-                  <a:lnTo>
-                    <a:pt x="7314797" y="2323821"/>
-                  </a:lnTo>
-                  <a:lnTo>
-                    <a:pt x="7392041" y="2329320"/>
+                    <a:pt x="71622" y="71417"/>
+                  </a:lnTo>
+                  <a:lnTo>
+                    <a:pt x="143245" y="140990"/>
+                  </a:lnTo>
+                  <a:lnTo>
+                    <a:pt x="214867" y="208767"/>
+                  </a:lnTo>
+                  <a:lnTo>
+                    <a:pt x="286490" y="274793"/>
+                  </a:lnTo>
+                  <a:lnTo>
+                    <a:pt x="358112" y="339114"/>
+                  </a:lnTo>
+                  <a:lnTo>
+                    <a:pt x="429735" y="401774"/>
+                  </a:lnTo>
+                  <a:lnTo>
+                    <a:pt x="501357" y="462816"/>
+                  </a:lnTo>
+                  <a:lnTo>
+                    <a:pt x="572980" y="522282"/>
+                  </a:lnTo>
+                  <a:lnTo>
+                    <a:pt x="644602" y="580211"/>
+                  </a:lnTo>
+                  <a:lnTo>
+                    <a:pt x="716225" y="636645"/>
+                  </a:lnTo>
+                  <a:lnTo>
+                    <a:pt x="787847" y="691621"/>
+                  </a:lnTo>
+                  <a:lnTo>
+                    <a:pt x="859470" y="745178"/>
+                  </a:lnTo>
+                  <a:lnTo>
+                    <a:pt x="931092" y="797351"/>
+                  </a:lnTo>
+                  <a:lnTo>
+                    <a:pt x="1002715" y="848177"/>
+                  </a:lnTo>
+                  <a:lnTo>
+                    <a:pt x="1074337" y="897691"/>
+                  </a:lnTo>
+                  <a:lnTo>
+                    <a:pt x="1145960" y="945925"/>
+                  </a:lnTo>
+                  <a:lnTo>
+                    <a:pt x="1217582" y="992915"/>
+                  </a:lnTo>
+                  <a:lnTo>
+                    <a:pt x="1289205" y="1038690"/>
+                  </a:lnTo>
+                  <a:lnTo>
+                    <a:pt x="1360827" y="1083284"/>
+                  </a:lnTo>
+                  <a:lnTo>
+                    <a:pt x="1432450" y="1126726"/>
+                  </a:lnTo>
+                  <a:lnTo>
+                    <a:pt x="1504073" y="1169045"/>
+                  </a:lnTo>
+                  <a:lnTo>
+                    <a:pt x="1575695" y="1210273"/>
+                  </a:lnTo>
+                  <a:lnTo>
+                    <a:pt x="1647318" y="1250435"/>
+                  </a:lnTo>
+                  <a:lnTo>
+                    <a:pt x="1718940" y="1289560"/>
+                  </a:lnTo>
+                  <a:lnTo>
+                    <a:pt x="1790563" y="1327675"/>
+                  </a:lnTo>
+                  <a:lnTo>
+                    <a:pt x="1862185" y="1364805"/>
+                  </a:lnTo>
+                  <a:lnTo>
+                    <a:pt x="1933808" y="1400977"/>
+                  </a:lnTo>
+                  <a:lnTo>
+                    <a:pt x="2005430" y="1436214"/>
+                  </a:lnTo>
+                  <a:lnTo>
+                    <a:pt x="2077053" y="1470542"/>
+                  </a:lnTo>
+                  <a:lnTo>
+                    <a:pt x="2148675" y="1503983"/>
+                  </a:lnTo>
+                  <a:lnTo>
+                    <a:pt x="2220298" y="1536560"/>
+                  </a:lnTo>
+                  <a:lnTo>
+                    <a:pt x="2291920" y="1568296"/>
+                  </a:lnTo>
+                  <a:lnTo>
+                    <a:pt x="2363543" y="1599212"/>
+                  </a:lnTo>
+                  <a:lnTo>
+                    <a:pt x="2435165" y="1629330"/>
+                  </a:lnTo>
+                  <a:lnTo>
+                    <a:pt x="2506788" y="1658671"/>
+                  </a:lnTo>
+                  <a:lnTo>
+                    <a:pt x="2578410" y="1687253"/>
+                  </a:lnTo>
+                  <a:lnTo>
+                    <a:pt x="2650033" y="1715097"/>
+                  </a:lnTo>
+                  <a:lnTo>
+                    <a:pt x="2721655" y="1742223"/>
+                  </a:lnTo>
+                  <a:lnTo>
+                    <a:pt x="2793278" y="1768647"/>
+                  </a:lnTo>
+                  <a:lnTo>
+                    <a:pt x="2864901" y="1794390"/>
+                  </a:lnTo>
+                  <a:lnTo>
+                    <a:pt x="2936523" y="1819467"/>
+                  </a:lnTo>
+                  <a:lnTo>
+                    <a:pt x="3008146" y="1843897"/>
+                  </a:lnTo>
+                  <a:lnTo>
+                    <a:pt x="3079768" y="1867696"/>
+                  </a:lnTo>
+                  <a:lnTo>
+                    <a:pt x="3151391" y="1890881"/>
+                  </a:lnTo>
+                  <a:lnTo>
+                    <a:pt x="3223013" y="1913466"/>
+                  </a:lnTo>
+                  <a:lnTo>
+                    <a:pt x="3294636" y="1935469"/>
+                  </a:lnTo>
+                  <a:lnTo>
+                    <a:pt x="3366258" y="1956903"/>
+                  </a:lnTo>
+                  <a:lnTo>
+                    <a:pt x="3437881" y="1977784"/>
+                  </a:lnTo>
+                  <a:lnTo>
+                    <a:pt x="3509503" y="1998125"/>
+                  </a:lnTo>
+                  <a:lnTo>
+                    <a:pt x="3581126" y="2017941"/>
+                  </a:lnTo>
+                  <a:lnTo>
+                    <a:pt x="3652748" y="2037246"/>
+                  </a:lnTo>
+                  <a:lnTo>
+                    <a:pt x="3724371" y="2056051"/>
+                  </a:lnTo>
+                  <a:lnTo>
+                    <a:pt x="3795993" y="2074371"/>
+                  </a:lnTo>
+                  <a:lnTo>
+                    <a:pt x="3867616" y="2092219"/>
+                  </a:lnTo>
+                  <a:lnTo>
+                    <a:pt x="3939238" y="2109605"/>
+                  </a:lnTo>
+                  <a:lnTo>
+                    <a:pt x="4010861" y="2126542"/>
+                  </a:lnTo>
+                  <a:lnTo>
+                    <a:pt x="4082483" y="2143042"/>
+                  </a:lnTo>
+                  <a:lnTo>
+                    <a:pt x="4154106" y="2159115"/>
+                  </a:lnTo>
+                  <a:lnTo>
+                    <a:pt x="4225729" y="2174774"/>
+                  </a:lnTo>
+                  <a:lnTo>
+                    <a:pt x="4297351" y="2190028"/>
+                  </a:lnTo>
+                  <a:lnTo>
+                    <a:pt x="4368974" y="2204888"/>
+                  </a:lnTo>
+                  <a:lnTo>
+                    <a:pt x="4440596" y="2219364"/>
+                  </a:lnTo>
+                  <a:lnTo>
+                    <a:pt x="4512219" y="2233467"/>
+                  </a:lnTo>
+                  <a:lnTo>
+                    <a:pt x="4583841" y="2247205"/>
+                  </a:lnTo>
+                  <a:lnTo>
+                    <a:pt x="4655464" y="2260589"/>
+                  </a:lnTo>
+                  <a:lnTo>
+                    <a:pt x="4727086" y="2273627"/>
+                  </a:lnTo>
+                  <a:lnTo>
+                    <a:pt x="4798709" y="2286328"/>
+                  </a:lnTo>
+                  <a:lnTo>
+                    <a:pt x="4870331" y="2298702"/>
+                  </a:lnTo>
+                  <a:lnTo>
+                    <a:pt x="4941954" y="2310755"/>
+                  </a:lnTo>
+                  <a:lnTo>
+                    <a:pt x="5013576" y="2322498"/>
+                  </a:lnTo>
+                  <a:lnTo>
+                    <a:pt x="5085199" y="2333937"/>
+                  </a:lnTo>
+                  <a:lnTo>
+                    <a:pt x="5156821" y="2345081"/>
+                  </a:lnTo>
+                  <a:lnTo>
+                    <a:pt x="5228444" y="2355937"/>
+                  </a:lnTo>
+                  <a:lnTo>
+                    <a:pt x="5300066" y="2366512"/>
+                  </a:lnTo>
+                  <a:lnTo>
+                    <a:pt x="5371689" y="2376815"/>
+                  </a:lnTo>
+                  <a:lnTo>
+                    <a:pt x="5443311" y="2386851"/>
+                  </a:lnTo>
+                  <a:lnTo>
+                    <a:pt x="5514934" y="2396628"/>
+                  </a:lnTo>
+                  <a:lnTo>
+                    <a:pt x="5586557" y="2406153"/>
+                  </a:lnTo>
+                  <a:lnTo>
+                    <a:pt x="5658179" y="2415432"/>
+                  </a:lnTo>
+                  <a:lnTo>
+                    <a:pt x="5729802" y="2424471"/>
+                  </a:lnTo>
+                  <a:lnTo>
+                    <a:pt x="5801424" y="2433277"/>
+                  </a:lnTo>
+                  <a:lnTo>
+                    <a:pt x="5873047" y="2441855"/>
+                  </a:lnTo>
+                  <a:lnTo>
+                    <a:pt x="5944669" y="2450212"/>
+                  </a:lnTo>
+                  <a:lnTo>
+                    <a:pt x="6016292" y="2458353"/>
+                  </a:lnTo>
+                  <a:lnTo>
+                    <a:pt x="6087914" y="2466284"/>
+                  </a:lnTo>
+                  <a:lnTo>
+                    <a:pt x="6159537" y="2474010"/>
+                  </a:lnTo>
+                  <a:lnTo>
+                    <a:pt x="6231159" y="2481536"/>
+                  </a:lnTo>
+                  <a:lnTo>
+                    <a:pt x="6302782" y="2488868"/>
+                  </a:lnTo>
+                  <a:lnTo>
+                    <a:pt x="6374404" y="2496011"/>
+                  </a:lnTo>
+                  <a:lnTo>
+                    <a:pt x="6446027" y="2502969"/>
+                  </a:lnTo>
+                  <a:lnTo>
+                    <a:pt x="6517649" y="2509747"/>
+                  </a:lnTo>
+                  <a:lnTo>
+                    <a:pt x="6589272" y="2516351"/>
+                  </a:lnTo>
+                  <a:lnTo>
+                    <a:pt x="6660894" y="2522784"/>
+                  </a:lnTo>
+                  <a:lnTo>
+                    <a:pt x="6732517" y="2529051"/>
+                  </a:lnTo>
+                  <a:lnTo>
+                    <a:pt x="6804139" y="2535156"/>
+                  </a:lnTo>
+                  <a:lnTo>
+                    <a:pt x="6875762" y="2541103"/>
+                  </a:lnTo>
+                  <a:lnTo>
+                    <a:pt x="6947385" y="2546897"/>
+                  </a:lnTo>
+                  <a:lnTo>
+                    <a:pt x="7019007" y="2552541"/>
+                  </a:lnTo>
+                  <a:lnTo>
+                    <a:pt x="7090630" y="2558039"/>
                   </a:lnTo>
                 </a:path>
               </a:pathLst>
@@ -4494,7 +4478,7 @@
         </p:sp>
         <p:sp>
           <p:nvSpPr>
-            <p:cNvPr id="25" name="pl25"/>
+            <p:cNvPr id="24" name="pl24"/>
             <p:cNvSpPr/>
             <p:nvPr/>
           </p:nvSpPr>
@@ -4537,13 +4521,13 @@
         </p:sp>
         <p:sp>
           <p:nvSpPr>
-            <p:cNvPr id="26" name="pl26"/>
+            <p:cNvPr id="25" name="pl25"/>
             <p:cNvSpPr/>
             <p:nvPr/>
           </p:nvSpPr>
           <p:spPr>
             <a:xfrm>
-              <a:off x="4117484" y="2073503"/>
+              <a:off x="4468386" y="2073503"/>
               <a:ext cx="0" cy="3649639"/>
             </a:xfrm>
             <a:custGeom>
@@ -4580,7 +4564,7 @@
         </p:sp>
         <p:sp>
           <p:nvSpPr>
-            <p:cNvPr id="27" name="tx27"/>
+            <p:cNvPr id="26" name="tx26"/>
             <p:cNvSpPr/>
             <p:nvPr/>
           </p:nvSpPr>
@@ -4626,7 +4610,7 @@
         </p:sp>
         <p:sp>
           <p:nvSpPr>
-            <p:cNvPr id="28" name="tx28"/>
+            <p:cNvPr id="27" name="tx27"/>
             <p:cNvSpPr/>
             <p:nvPr/>
           </p:nvSpPr>
@@ -4672,7 +4656,7 @@
         </p:sp>
         <p:sp>
           <p:nvSpPr>
-            <p:cNvPr id="29" name="tx29"/>
+            <p:cNvPr id="28" name="tx28"/>
             <p:cNvSpPr/>
             <p:nvPr/>
           </p:nvSpPr>
@@ -4718,7 +4702,7 @@
         </p:sp>
         <p:sp>
           <p:nvSpPr>
-            <p:cNvPr id="30" name="tx30"/>
+            <p:cNvPr id="29" name="tx29"/>
             <p:cNvSpPr/>
             <p:nvPr/>
           </p:nvSpPr>
@@ -4764,7 +4748,7 @@
         </p:sp>
         <p:sp>
           <p:nvSpPr>
-            <p:cNvPr id="31" name="tx31"/>
+            <p:cNvPr id="30" name="tx30"/>
             <p:cNvSpPr/>
             <p:nvPr/>
           </p:nvSpPr>
@@ -4810,14 +4794,14 @@
         </p:sp>
         <p:sp>
           <p:nvSpPr>
-            <p:cNvPr id="32" name="tx32"/>
+            <p:cNvPr id="31" name="tx31"/>
             <p:cNvSpPr/>
             <p:nvPr/>
           </p:nvSpPr>
           <p:spPr>
             <a:xfrm>
-              <a:off x="2423864" y="5785772"/>
-              <a:ext cx="155356" cy="80101"/>
+              <a:off x="2478335" y="5785772"/>
+              <a:ext cx="161574" cy="80101"/>
             </a:xfrm>
             <a:prstGeom prst="rect">
               <a:avLst/>
@@ -4849,21 +4833,21 @@
                   <a:latin typeface="Helvetica"/>
                   <a:cs typeface="Helvetica"/>
                 </a:rPr>
-                <a:t>0.8</a:t>
+                <a:t>-25</a:t>
               </a:r>
             </a:p>
           </p:txBody>
         </p:sp>
         <p:sp>
           <p:nvSpPr>
-            <p:cNvPr id="33" name="tx33"/>
+            <p:cNvPr id="32" name="tx32"/>
             <p:cNvSpPr/>
             <p:nvPr/>
           </p:nvSpPr>
           <p:spPr>
             <a:xfrm>
-              <a:off x="4196521" y="5785772"/>
-              <a:ext cx="155356" cy="80101"/>
+              <a:off x="4582608" y="5785772"/>
+              <a:ext cx="62179" cy="80101"/>
             </a:xfrm>
             <a:prstGeom prst="rect">
               <a:avLst/>
@@ -4895,21 +4879,21 @@
                   <a:latin typeface="Helvetica"/>
                   <a:cs typeface="Helvetica"/>
                 </a:rPr>
-                <a:t>1.0</a:t>
+                <a:t>0</a:t>
               </a:r>
             </a:p>
           </p:txBody>
         </p:sp>
         <p:sp>
           <p:nvSpPr>
-            <p:cNvPr id="34" name="tx34"/>
+            <p:cNvPr id="33" name="tx33"/>
             <p:cNvSpPr/>
             <p:nvPr/>
           </p:nvSpPr>
           <p:spPr>
             <a:xfrm>
-              <a:off x="5969179" y="5785772"/>
-              <a:ext cx="155356" cy="80101"/>
+              <a:off x="6606094" y="5785772"/>
+              <a:ext cx="124358" cy="80101"/>
             </a:xfrm>
             <a:prstGeom prst="rect">
               <a:avLst/>
@@ -4941,67 +4925,21 @@
                   <a:latin typeface="Helvetica"/>
                   <a:cs typeface="Helvetica"/>
                 </a:rPr>
-                <a:t>1.2</a:t>
+                <a:t>25</a:t>
               </a:r>
             </a:p>
           </p:txBody>
         </p:sp>
         <p:sp>
           <p:nvSpPr>
-            <p:cNvPr id="35" name="tx35"/>
+            <p:cNvPr id="34" name="tx34"/>
             <p:cNvSpPr/>
             <p:nvPr/>
           </p:nvSpPr>
           <p:spPr>
             <a:xfrm>
-              <a:off x="7741836" y="5785772"/>
-              <a:ext cx="155356" cy="80101"/>
-            </a:xfrm>
-            <a:prstGeom prst="rect">
-              <a:avLst/>
-            </a:prstGeom>
-            <a:noFill/>
-          </p:spPr>
-          <p:txBody>
-            <a:bodyPr lIns="0" rIns="0" tIns="0" bIns="0" anchorCtr="1" anchor="ctr" wrap="none"/>
-            <a:lstStyle/>
-            <a:p>
-              <a:pPr algn="l" marL="0" marR="0" indent="0">
-                <a:lnSpc>
-                  <a:spcPts val="880"/>
-                </a:lnSpc>
-                <a:spcBef>
-                  <a:spcPts val="0"/>
-                </a:spcBef>
-                <a:spcAft>
-                  <a:spcPts val="0"/>
-                </a:spcAft>
-              </a:pPr>
-              <a:r>
-                <a:rPr sz="880">
-                  <a:solidFill>
-                    <a:srgbClr val="4D4D4D">
-                      <a:alpha val="100000"/>
-                    </a:srgbClr>
-                  </a:solidFill>
-                  <a:latin typeface="Helvetica"/>
-                  <a:cs typeface="Helvetica"/>
-                </a:rPr>
-                <a:t>1.4</a:t>
-              </a:r>
-            </a:p>
-          </p:txBody>
-        </p:sp>
-        <p:sp>
-          <p:nvSpPr>
-            <p:cNvPr id="36" name="tx36"/>
-            <p:cNvSpPr/>
-            <p:nvPr/>
-          </p:nvSpPr>
-          <p:spPr>
-            <a:xfrm>
-              <a:off x="3879271" y="5925448"/>
-              <a:ext cx="1676186" cy="100218"/>
+              <a:off x="2928340" y="5925448"/>
+              <a:ext cx="3578047" cy="100218"/>
             </a:xfrm>
             <a:prstGeom prst="rect">
               <a:avLst/>
@@ -5033,14 +4971,14 @@
                   <a:latin typeface="Helvetica"/>
                   <a:cs typeface="Helvetica"/>
                 </a:rPr>
-                <a:t>CKD-EPI Cr-Cys / CG ratio</a:t>
+                <a:t>eGFR difference (%): 100 × (CKD-EPI Cr-Cys − CG) / CG</a:t>
               </a:r>
             </a:p>
           </p:txBody>
         </p:sp>
         <p:sp>
           <p:nvSpPr>
-            <p:cNvPr id="37" name="tx37"/>
+            <p:cNvPr id="35" name="tx35"/>
             <p:cNvSpPr/>
             <p:nvPr/>
           </p:nvSpPr>
@@ -5086,14 +5024,14 @@
         </p:sp>
         <p:sp>
           <p:nvSpPr>
-            <p:cNvPr id="38" name="tx38"/>
+            <p:cNvPr id="36" name="tx36"/>
             <p:cNvSpPr/>
             <p:nvPr/>
           </p:nvSpPr>
           <p:spPr>
             <a:xfrm>
               <a:off x="817517" y="1896563"/>
-              <a:ext cx="6833128" cy="82021"/>
+              <a:ext cx="6985375" cy="82021"/>
             </a:xfrm>
             <a:prstGeom prst="rect">
               <a:avLst/>
@@ -5125,14 +5063,14 @@
                   <a:latin typeface="Helvetica"/>
                   <a:cs typeface="Helvetica"/>
                 </a:rPr>
-                <a:t>subHR per 0.1 ratio decline: 1.35 (1.07-1.71), p_Bonf = 0.073 (n = 6)  |  per IQR decline (Δ = 0.30): 2.43 (1.21-4.85)  |  IQR: [0.84, 1.14]</a:t>
+                <a:t>subHR per 10 % decline: 1.35 (1.07-1.71), p_Bonf = 0.073 (n = 6)  |  per IQR decline (Δ = 29.5 %): 2.43 (1.21-4.85)  |  IQR: [-15.6, 13.9] %</a:t>
               </a:r>
             </a:p>
           </p:txBody>
         </p:sp>
         <p:sp>
           <p:nvSpPr>
-            <p:cNvPr id="39" name="tx39"/>
+            <p:cNvPr id="37" name="tx37"/>
             <p:cNvSpPr/>
             <p:nvPr/>
           </p:nvSpPr>

--- a/docs/pptx/auc3/jx-auc3-linsubhr-ratio-anemia3.pptx
+++ b/docs/pptx/auc3/jx-auc3-linsubhr-ratio-anemia3.pptx
@@ -2265,34 +2265,26 @@
         </p:sp>
         <p:sp>
           <p:nvSpPr>
-            <p:cNvPr id="4" name="pl4"/>
+            <p:cNvPr id="4" name="rc4"/>
             <p:cNvSpPr/>
             <p:nvPr/>
           </p:nvSpPr>
           <p:spPr>
             <a:xfrm>
-              <a:off x="817517" y="5142518"/>
-              <a:ext cx="7799693" cy="0"/>
+              <a:off x="457200" y="1600200"/>
+              <a:ext cx="8229600" cy="4525962"/>
             </a:xfrm>
-            <a:custGeom>
+            <a:prstGeom prst="rect">
               <a:avLst/>
-              <a:pathLst>
-                <a:path w="7799693" h="0">
-                  <a:moveTo>
-                    <a:pt x="0" y="0"/>
-                  </a:moveTo>
-                  <a:lnTo>
-                    <a:pt x="7799693" y="0"/>
-                  </a:lnTo>
-                  <a:lnTo>
-                    <a:pt x="7799693" y="0"/>
-                  </a:lnTo>
-                </a:path>
-              </a:pathLst>
-            </a:custGeom>
-            <a:ln w="6775" cap="flat">
+            </a:prstGeom>
+            <a:solidFill>
+              <a:srgbClr val="FFFFFF">
+                <a:alpha val="100000"/>
+              </a:srgbClr>
+            </a:solidFill>
+            <a:ln w="13550" cap="rnd">
               <a:solidFill>
-                <a:srgbClr val="EBEBEB">
+                <a:srgbClr val="FFFFFF">
                   <a:alpha val="100000"/>
                 </a:srgbClr>
               </a:solidFill>
@@ -2314,21 +2306,21 @@
           </p:nvSpPr>
           <p:spPr>
             <a:xfrm>
-              <a:off x="817517" y="4313054"/>
-              <a:ext cx="7799693" cy="0"/>
+              <a:off x="887106" y="3250627"/>
+              <a:ext cx="7660515" cy="0"/>
             </a:xfrm>
             <a:custGeom>
               <a:avLst/>
               <a:pathLst>
-                <a:path w="7799693" h="0">
+                <a:path w="7660515" h="0">
                   <a:moveTo>
                     <a:pt x="0" y="0"/>
                   </a:moveTo>
                   <a:lnTo>
-                    <a:pt x="7799693" y="0"/>
-                  </a:lnTo>
-                  <a:lnTo>
-                    <a:pt x="7799693" y="0"/>
+                    <a:pt x="7660515" y="0"/>
+                  </a:lnTo>
+                  <a:lnTo>
+                    <a:pt x="7660515" y="0"/>
                   </a:lnTo>
                 </a:path>
               </a:pathLst>
@@ -2357,21 +2349,21 @@
           </p:nvSpPr>
           <p:spPr>
             <a:xfrm>
-              <a:off x="817517" y="3483591"/>
-              <a:ext cx="7799693" cy="0"/>
+              <a:off x="887106" y="2951293"/>
+              <a:ext cx="7660515" cy="0"/>
             </a:xfrm>
             <a:custGeom>
               <a:avLst/>
               <a:pathLst>
-                <a:path w="7799693" h="0">
+                <a:path w="7660515" h="0">
                   <a:moveTo>
                     <a:pt x="0" y="0"/>
                   </a:moveTo>
                   <a:lnTo>
-                    <a:pt x="7799693" y="0"/>
-                  </a:lnTo>
-                  <a:lnTo>
-                    <a:pt x="7799693" y="0"/>
+                    <a:pt x="7660515" y="0"/>
+                  </a:lnTo>
+                  <a:lnTo>
+                    <a:pt x="7660515" y="0"/>
                   </a:lnTo>
                 </a:path>
               </a:pathLst>
@@ -2400,21 +2392,21 @@
           </p:nvSpPr>
           <p:spPr>
             <a:xfrm>
-              <a:off x="817517" y="2654127"/>
-              <a:ext cx="7799693" cy="0"/>
+              <a:off x="887106" y="2651959"/>
+              <a:ext cx="7660515" cy="0"/>
             </a:xfrm>
             <a:custGeom>
               <a:avLst/>
               <a:pathLst>
-                <a:path w="7799693" h="0">
+                <a:path w="7660515" h="0">
                   <a:moveTo>
                     <a:pt x="0" y="0"/>
                   </a:moveTo>
                   <a:lnTo>
-                    <a:pt x="7799693" y="0"/>
-                  </a:lnTo>
-                  <a:lnTo>
-                    <a:pt x="7799693" y="0"/>
+                    <a:pt x="7660515" y="0"/>
+                  </a:lnTo>
+                  <a:lnTo>
+                    <a:pt x="7660515" y="0"/>
                   </a:lnTo>
                 </a:path>
               </a:pathLst>
@@ -2443,21 +2435,21 @@
           </p:nvSpPr>
           <p:spPr>
             <a:xfrm>
-              <a:off x="1531834" y="2073503"/>
-              <a:ext cx="0" cy="3649639"/>
+              <a:off x="887106" y="2352625"/>
+              <a:ext cx="7660515" cy="0"/>
             </a:xfrm>
             <a:custGeom>
               <a:avLst/>
               <a:pathLst>
-                <a:path w="0" h="3649639">
+                <a:path w="7660515" h="0">
                   <a:moveTo>
-                    <a:pt x="0" y="3649639"/>
+                    <a:pt x="0" y="0"/>
                   </a:moveTo>
                   <a:lnTo>
-                    <a:pt x="0" y="0"/>
-                  </a:lnTo>
-                  <a:lnTo>
-                    <a:pt x="0" y="0"/>
+                    <a:pt x="7660515" y="0"/>
+                  </a:lnTo>
+                  <a:lnTo>
+                    <a:pt x="7660515" y="0"/>
                   </a:lnTo>
                 </a:path>
               </a:pathLst>
@@ -2486,15 +2478,15 @@
           </p:nvSpPr>
           <p:spPr>
             <a:xfrm>
-              <a:off x="3586410" y="2073503"/>
-              <a:ext cx="0" cy="3649639"/>
+              <a:off x="1588677" y="2143092"/>
+              <a:ext cx="0" cy="1317069"/>
             </a:xfrm>
             <a:custGeom>
               <a:avLst/>
               <a:pathLst>
-                <a:path w="0" h="3649639">
+                <a:path w="0" h="1317069">
                   <a:moveTo>
-                    <a:pt x="0" y="3649639"/>
+                    <a:pt x="0" y="1317069"/>
                   </a:moveTo>
                   <a:lnTo>
                     <a:pt x="0" y="0"/>
@@ -2529,15 +2521,15 @@
           </p:nvSpPr>
           <p:spPr>
             <a:xfrm>
-              <a:off x="5640985" y="2073503"/>
-              <a:ext cx="0" cy="3649639"/>
+              <a:off x="3606590" y="2143092"/>
+              <a:ext cx="0" cy="1317069"/>
             </a:xfrm>
             <a:custGeom>
               <a:avLst/>
               <a:pathLst>
-                <a:path w="0" h="3649639">
+                <a:path w="0" h="1317069">
                   <a:moveTo>
-                    <a:pt x="0" y="3649639"/>
+                    <a:pt x="0" y="1317069"/>
                   </a:moveTo>
                   <a:lnTo>
                     <a:pt x="0" y="0"/>
@@ -2572,15 +2564,15 @@
           </p:nvSpPr>
           <p:spPr>
             <a:xfrm>
-              <a:off x="7695561" y="2073503"/>
-              <a:ext cx="0" cy="3649639"/>
+              <a:off x="5624504" y="2143092"/>
+              <a:ext cx="0" cy="1317069"/>
             </a:xfrm>
             <a:custGeom>
               <a:avLst/>
               <a:pathLst>
-                <a:path w="0" h="3649639">
+                <a:path w="0" h="1317069">
                   <a:moveTo>
-                    <a:pt x="0" y="3649639"/>
+                    <a:pt x="0" y="1317069"/>
                   </a:moveTo>
                   <a:lnTo>
                     <a:pt x="0" y="0"/>
@@ -2615,26 +2607,26 @@
           </p:nvSpPr>
           <p:spPr>
             <a:xfrm>
-              <a:off x="817517" y="5557249"/>
-              <a:ext cx="7799693" cy="0"/>
+              <a:off x="7642418" y="2143092"/>
+              <a:ext cx="0" cy="1317069"/>
             </a:xfrm>
             <a:custGeom>
               <a:avLst/>
               <a:pathLst>
-                <a:path w="7799693" h="0">
+                <a:path w="0" h="1317069">
                   <a:moveTo>
+                    <a:pt x="0" y="1317069"/>
+                  </a:moveTo>
+                  <a:lnTo>
                     <a:pt x="0" y="0"/>
-                  </a:moveTo>
-                  <a:lnTo>
-                    <a:pt x="7799693" y="0"/>
-                  </a:lnTo>
-                  <a:lnTo>
-                    <a:pt x="7799693" y="0"/>
+                  </a:lnTo>
+                  <a:lnTo>
+                    <a:pt x="0" y="0"/>
                   </a:lnTo>
                 </a:path>
               </a:pathLst>
             </a:custGeom>
-            <a:ln w="13550" cap="flat">
+            <a:ln w="6775" cap="flat">
               <a:solidFill>
                 <a:srgbClr val="EBEBEB">
                   <a:alpha val="100000"/>
@@ -2658,21 +2650,21 @@
           </p:nvSpPr>
           <p:spPr>
             <a:xfrm>
-              <a:off x="817517" y="4727786"/>
-              <a:ext cx="7799693" cy="0"/>
+              <a:off x="887106" y="3400294"/>
+              <a:ext cx="7660515" cy="0"/>
             </a:xfrm>
             <a:custGeom>
               <a:avLst/>
               <a:pathLst>
-                <a:path w="7799693" h="0">
+                <a:path w="7660515" h="0">
                   <a:moveTo>
                     <a:pt x="0" y="0"/>
                   </a:moveTo>
                   <a:lnTo>
-                    <a:pt x="7799693" y="0"/>
-                  </a:lnTo>
-                  <a:lnTo>
-                    <a:pt x="7799693" y="0"/>
+                    <a:pt x="7660515" y="0"/>
+                  </a:lnTo>
+                  <a:lnTo>
+                    <a:pt x="7660515" y="0"/>
                   </a:lnTo>
                 </a:path>
               </a:pathLst>
@@ -2701,21 +2693,21 @@
           </p:nvSpPr>
           <p:spPr>
             <a:xfrm>
-              <a:off x="817517" y="3898322"/>
-              <a:ext cx="7799693" cy="0"/>
+              <a:off x="887106" y="3100960"/>
+              <a:ext cx="7660515" cy="0"/>
             </a:xfrm>
             <a:custGeom>
               <a:avLst/>
               <a:pathLst>
-                <a:path w="7799693" h="0">
+                <a:path w="7660515" h="0">
                   <a:moveTo>
                     <a:pt x="0" y="0"/>
                   </a:moveTo>
                   <a:lnTo>
-                    <a:pt x="7799693" y="0"/>
-                  </a:lnTo>
-                  <a:lnTo>
-                    <a:pt x="7799693" y="0"/>
+                    <a:pt x="7660515" y="0"/>
+                  </a:lnTo>
+                  <a:lnTo>
+                    <a:pt x="7660515" y="0"/>
                   </a:lnTo>
                 </a:path>
               </a:pathLst>
@@ -2744,21 +2736,21 @@
           </p:nvSpPr>
           <p:spPr>
             <a:xfrm>
-              <a:off x="817517" y="3068859"/>
-              <a:ext cx="7799693" cy="0"/>
+              <a:off x="887106" y="2801626"/>
+              <a:ext cx="7660515" cy="0"/>
             </a:xfrm>
             <a:custGeom>
               <a:avLst/>
               <a:pathLst>
-                <a:path w="7799693" h="0">
+                <a:path w="7660515" h="0">
                   <a:moveTo>
                     <a:pt x="0" y="0"/>
                   </a:moveTo>
                   <a:lnTo>
-                    <a:pt x="7799693" y="0"/>
-                  </a:lnTo>
-                  <a:lnTo>
-                    <a:pt x="7799693" y="0"/>
+                    <a:pt x="7660515" y="0"/>
+                  </a:lnTo>
+                  <a:lnTo>
+                    <a:pt x="7660515" y="0"/>
                   </a:lnTo>
                 </a:path>
               </a:pathLst>
@@ -2787,21 +2779,21 @@
           </p:nvSpPr>
           <p:spPr>
             <a:xfrm>
-              <a:off x="817517" y="2239395"/>
-              <a:ext cx="7799693" cy="0"/>
+              <a:off x="887106" y="2502292"/>
+              <a:ext cx="7660515" cy="0"/>
             </a:xfrm>
             <a:custGeom>
               <a:avLst/>
               <a:pathLst>
-                <a:path w="7799693" h="0">
+                <a:path w="7660515" h="0">
                   <a:moveTo>
                     <a:pt x="0" y="0"/>
                   </a:moveTo>
                   <a:lnTo>
-                    <a:pt x="7799693" y="0"/>
-                  </a:lnTo>
-                  <a:lnTo>
-                    <a:pt x="7799693" y="0"/>
+                    <a:pt x="7660515" y="0"/>
+                  </a:lnTo>
+                  <a:lnTo>
+                    <a:pt x="7660515" y="0"/>
                   </a:lnTo>
                 </a:path>
               </a:pathLst>
@@ -2830,21 +2822,21 @@
           </p:nvSpPr>
           <p:spPr>
             <a:xfrm>
-              <a:off x="2559122" y="2073503"/>
-              <a:ext cx="0" cy="3649639"/>
+              <a:off x="887106" y="2202958"/>
+              <a:ext cx="7660515" cy="0"/>
             </a:xfrm>
             <a:custGeom>
               <a:avLst/>
               <a:pathLst>
-                <a:path w="0" h="3649639">
+                <a:path w="7660515" h="0">
                   <a:moveTo>
-                    <a:pt x="0" y="3649639"/>
+                    <a:pt x="0" y="0"/>
                   </a:moveTo>
                   <a:lnTo>
-                    <a:pt x="0" y="0"/>
-                  </a:lnTo>
-                  <a:lnTo>
-                    <a:pt x="0" y="0"/>
+                    <a:pt x="7660515" y="0"/>
+                  </a:lnTo>
+                  <a:lnTo>
+                    <a:pt x="7660515" y="0"/>
                   </a:lnTo>
                 </a:path>
               </a:pathLst>
@@ -2873,15 +2865,15 @@
           </p:nvSpPr>
           <p:spPr>
             <a:xfrm>
-              <a:off x="4613698" y="2073503"/>
-              <a:ext cx="0" cy="3649639"/>
+              <a:off x="2597634" y="2143092"/>
+              <a:ext cx="0" cy="1317069"/>
             </a:xfrm>
             <a:custGeom>
               <a:avLst/>
               <a:pathLst>
-                <a:path w="0" h="3649639">
+                <a:path w="0" h="1317069">
                   <a:moveTo>
-                    <a:pt x="0" y="3649639"/>
+                    <a:pt x="0" y="1317069"/>
                   </a:moveTo>
                   <a:lnTo>
                     <a:pt x="0" y="0"/>
@@ -2916,15 +2908,15 @@
           </p:nvSpPr>
           <p:spPr>
             <a:xfrm>
-              <a:off x="6668273" y="2073503"/>
-              <a:ext cx="0" cy="3649639"/>
+              <a:off x="4615547" y="2143092"/>
+              <a:ext cx="0" cy="1317069"/>
             </a:xfrm>
             <a:custGeom>
               <a:avLst/>
               <a:pathLst>
-                <a:path w="0" h="3649639">
+                <a:path w="0" h="1317069">
                   <a:moveTo>
-                    <a:pt x="0" y="3649639"/>
+                    <a:pt x="0" y="1317069"/>
                   </a:moveTo>
                   <a:lnTo>
                     <a:pt x="0" y="0"/>
@@ -2953,573 +2945,616 @@
         </p:sp>
         <p:sp>
           <p:nvSpPr>
-            <p:cNvPr id="20" name="pg20"/>
+            <p:cNvPr id="20" name="pl20"/>
             <p:cNvSpPr/>
             <p:nvPr/>
           </p:nvSpPr>
           <p:spPr>
             <a:xfrm>
-              <a:off x="1172049" y="2073503"/>
-              <a:ext cx="7090630" cy="3413559"/>
+              <a:off x="6633461" y="2143092"/>
+              <a:ext cx="0" cy="1317069"/>
             </a:xfrm>
             <a:custGeom>
               <a:avLst/>
               <a:pathLst>
-                <a:path w="7090630" h="3413559">
+                <a:path w="0" h="1317069">
                   <a:moveTo>
-                    <a:pt x="1091790" y="0"/>
+                    <a:pt x="0" y="1317069"/>
                   </a:moveTo>
                   <a:lnTo>
-                    <a:pt x="1145960" y="121358"/>
-                  </a:lnTo>
-                  <a:lnTo>
-                    <a:pt x="1217582" y="274506"/>
-                  </a:lnTo>
-                  <a:lnTo>
-                    <a:pt x="1289205" y="420679"/>
-                  </a:lnTo>
-                  <a:lnTo>
-                    <a:pt x="1360827" y="560194"/>
-                  </a:lnTo>
-                  <a:lnTo>
-                    <a:pt x="1432450" y="693354"/>
-                  </a:lnTo>
-                  <a:lnTo>
-                    <a:pt x="1504073" y="820449"/>
-                  </a:lnTo>
-                  <a:lnTo>
-                    <a:pt x="1575695" y="941756"/>
-                  </a:lnTo>
-                  <a:lnTo>
-                    <a:pt x="1647318" y="1057537"/>
-                  </a:lnTo>
-                  <a:lnTo>
-                    <a:pt x="1718940" y="1168045"/>
-                  </a:lnTo>
-                  <a:lnTo>
-                    <a:pt x="1790563" y="1273519"/>
-                  </a:lnTo>
-                  <a:lnTo>
-                    <a:pt x="1862185" y="1374189"/>
-                  </a:lnTo>
-                  <a:lnTo>
-                    <a:pt x="1933808" y="1470274"/>
-                  </a:lnTo>
-                  <a:lnTo>
-                    <a:pt x="2005430" y="1561983"/>
-                  </a:lnTo>
-                  <a:lnTo>
-                    <a:pt x="2077053" y="1649514"/>
-                  </a:lnTo>
-                  <a:lnTo>
-                    <a:pt x="2148675" y="1733059"/>
-                  </a:lnTo>
-                  <a:lnTo>
-                    <a:pt x="2220298" y="1812798"/>
-                  </a:lnTo>
-                  <a:lnTo>
-                    <a:pt x="2291920" y="1888905"/>
-                  </a:lnTo>
-                  <a:lnTo>
-                    <a:pt x="2363543" y="1961546"/>
-                  </a:lnTo>
-                  <a:lnTo>
-                    <a:pt x="2435165" y="2030879"/>
-                  </a:lnTo>
-                  <a:lnTo>
-                    <a:pt x="2506788" y="2097053"/>
-                  </a:lnTo>
-                  <a:lnTo>
-                    <a:pt x="2578410" y="2160213"/>
-                  </a:lnTo>
-                  <a:lnTo>
-                    <a:pt x="2650033" y="2220497"/>
-                  </a:lnTo>
-                  <a:lnTo>
-                    <a:pt x="2721655" y="2278035"/>
-                  </a:lnTo>
-                  <a:lnTo>
-                    <a:pt x="2793278" y="2332952"/>
-                  </a:lnTo>
-                  <a:lnTo>
-                    <a:pt x="2864901" y="2385368"/>
-                  </a:lnTo>
-                  <a:lnTo>
-                    <a:pt x="2936523" y="2435396"/>
-                  </a:lnTo>
-                  <a:lnTo>
-                    <a:pt x="3008146" y="2483146"/>
-                  </a:lnTo>
-                  <a:lnTo>
-                    <a:pt x="3079768" y="2528720"/>
-                  </a:lnTo>
-                  <a:lnTo>
-                    <a:pt x="3151391" y="2572219"/>
-                  </a:lnTo>
-                  <a:lnTo>
-                    <a:pt x="3223013" y="2613737"/>
-                  </a:lnTo>
-                  <a:lnTo>
-                    <a:pt x="3294636" y="2653364"/>
-                  </a:lnTo>
-                  <a:lnTo>
-                    <a:pt x="3366258" y="2658895"/>
-                  </a:lnTo>
-                  <a:lnTo>
-                    <a:pt x="3437881" y="2663592"/>
-                  </a:lnTo>
-                  <a:lnTo>
-                    <a:pt x="3509503" y="2668263"/>
-                  </a:lnTo>
-                  <a:lnTo>
-                    <a:pt x="3581126" y="2672907"/>
-                  </a:lnTo>
-                  <a:lnTo>
-                    <a:pt x="3652748" y="2677525"/>
-                  </a:lnTo>
-                  <a:lnTo>
-                    <a:pt x="3724371" y="2682116"/>
-                  </a:lnTo>
-                  <a:lnTo>
-                    <a:pt x="3795993" y="2686681"/>
-                  </a:lnTo>
-                  <a:lnTo>
-                    <a:pt x="3867616" y="2691221"/>
-                  </a:lnTo>
-                  <a:lnTo>
-                    <a:pt x="3939238" y="2695734"/>
-                  </a:lnTo>
-                  <a:lnTo>
-                    <a:pt x="4010861" y="2700222"/>
-                  </a:lnTo>
-                  <a:lnTo>
-                    <a:pt x="4082483" y="2704684"/>
-                  </a:lnTo>
-                  <a:lnTo>
-                    <a:pt x="4154106" y="2709121"/>
-                  </a:lnTo>
-                  <a:lnTo>
-                    <a:pt x="4225729" y="2713532"/>
-                  </a:lnTo>
-                  <a:lnTo>
-                    <a:pt x="4297351" y="2717918"/>
-                  </a:lnTo>
-                  <a:lnTo>
-                    <a:pt x="4368974" y="2722280"/>
-                  </a:lnTo>
-                  <a:lnTo>
-                    <a:pt x="4440596" y="2726616"/>
-                  </a:lnTo>
-                  <a:lnTo>
-                    <a:pt x="4512219" y="2730928"/>
-                  </a:lnTo>
-                  <a:lnTo>
-                    <a:pt x="4583841" y="2735215"/>
-                  </a:lnTo>
-                  <a:lnTo>
-                    <a:pt x="4655464" y="2739478"/>
-                  </a:lnTo>
-                  <a:lnTo>
-                    <a:pt x="4727086" y="2743717"/>
-                  </a:lnTo>
-                  <a:lnTo>
-                    <a:pt x="4798709" y="2747931"/>
-                  </a:lnTo>
-                  <a:lnTo>
-                    <a:pt x="4870331" y="2752122"/>
-                  </a:lnTo>
-                  <a:lnTo>
-                    <a:pt x="4941954" y="2756288"/>
-                  </a:lnTo>
-                  <a:lnTo>
-                    <a:pt x="5013576" y="2760431"/>
-                  </a:lnTo>
-                  <a:lnTo>
-                    <a:pt x="5085199" y="2764550"/>
-                  </a:lnTo>
-                  <a:lnTo>
-                    <a:pt x="5156821" y="2768646"/>
-                  </a:lnTo>
-                  <a:lnTo>
-                    <a:pt x="5228444" y="2772719"/>
-                  </a:lnTo>
-                  <a:lnTo>
-                    <a:pt x="5300066" y="2776768"/>
-                  </a:lnTo>
-                  <a:lnTo>
-                    <a:pt x="5371689" y="2780794"/>
-                  </a:lnTo>
-                  <a:lnTo>
-                    <a:pt x="5443311" y="2784797"/>
-                  </a:lnTo>
-                  <a:lnTo>
-                    <a:pt x="5514934" y="2788778"/>
-                  </a:lnTo>
-                  <a:lnTo>
-                    <a:pt x="5586557" y="2792736"/>
-                  </a:lnTo>
-                  <a:lnTo>
-                    <a:pt x="5658179" y="2796671"/>
-                  </a:lnTo>
-                  <a:lnTo>
-                    <a:pt x="5729802" y="2800584"/>
-                  </a:lnTo>
-                  <a:lnTo>
-                    <a:pt x="5801424" y="2804474"/>
-                  </a:lnTo>
-                  <a:lnTo>
-                    <a:pt x="5873047" y="2808343"/>
-                  </a:lnTo>
-                  <a:lnTo>
-                    <a:pt x="5944669" y="2812189"/>
-                  </a:lnTo>
-                  <a:lnTo>
-                    <a:pt x="6016292" y="2816014"/>
-                  </a:lnTo>
-                  <a:lnTo>
-                    <a:pt x="6087914" y="2819817"/>
-                  </a:lnTo>
-                  <a:lnTo>
-                    <a:pt x="6159537" y="2823598"/>
-                  </a:lnTo>
-                  <a:lnTo>
-                    <a:pt x="6231159" y="2827357"/>
-                  </a:lnTo>
-                  <a:lnTo>
-                    <a:pt x="6302782" y="2831095"/>
-                  </a:lnTo>
-                  <a:lnTo>
-                    <a:pt x="6374404" y="2834812"/>
-                  </a:lnTo>
-                  <a:lnTo>
-                    <a:pt x="6446027" y="2838508"/>
-                  </a:lnTo>
-                  <a:lnTo>
-                    <a:pt x="6517649" y="2842182"/>
-                  </a:lnTo>
-                  <a:lnTo>
-                    <a:pt x="6589272" y="2845836"/>
-                  </a:lnTo>
-                  <a:lnTo>
-                    <a:pt x="6660894" y="2849469"/>
-                  </a:lnTo>
-                  <a:lnTo>
-                    <a:pt x="6732517" y="2853081"/>
-                  </a:lnTo>
-                  <a:lnTo>
-                    <a:pt x="6804139" y="2856673"/>
-                  </a:lnTo>
-                  <a:lnTo>
-                    <a:pt x="6875762" y="2860244"/>
-                  </a:lnTo>
-                  <a:lnTo>
-                    <a:pt x="6947385" y="2863795"/>
-                  </a:lnTo>
-                  <a:lnTo>
-                    <a:pt x="7019007" y="2867325"/>
-                  </a:lnTo>
-                  <a:lnTo>
-                    <a:pt x="7090630" y="2870836"/>
-                  </a:lnTo>
-                  <a:lnTo>
-                    <a:pt x="7090630" y="3413559"/>
-                  </a:lnTo>
-                  <a:lnTo>
-                    <a:pt x="7019007" y="3410210"/>
-                  </a:lnTo>
-                  <a:lnTo>
-                    <a:pt x="6947385" y="3406700"/>
-                  </a:lnTo>
-                  <a:lnTo>
-                    <a:pt x="6875762" y="3403024"/>
-                  </a:lnTo>
-                  <a:lnTo>
-                    <a:pt x="6804139" y="3399172"/>
-                  </a:lnTo>
-                  <a:lnTo>
-                    <a:pt x="6732517" y="3395136"/>
-                  </a:lnTo>
-                  <a:lnTo>
-                    <a:pt x="6660894" y="3390907"/>
-                  </a:lnTo>
-                  <a:lnTo>
-                    <a:pt x="6589272" y="3386477"/>
-                  </a:lnTo>
-                  <a:lnTo>
-                    <a:pt x="6517649" y="3381835"/>
-                  </a:lnTo>
-                  <a:lnTo>
-                    <a:pt x="6446027" y="3376971"/>
-                  </a:lnTo>
-                  <a:lnTo>
-                    <a:pt x="6374404" y="3371876"/>
-                  </a:lnTo>
-                  <a:lnTo>
-                    <a:pt x="6302782" y="3366538"/>
-                  </a:lnTo>
-                  <a:lnTo>
-                    <a:pt x="6231159" y="3360944"/>
-                  </a:lnTo>
-                  <a:lnTo>
-                    <a:pt x="6159537" y="3355084"/>
-                  </a:lnTo>
-                  <a:lnTo>
-                    <a:pt x="6087914" y="3348944"/>
-                  </a:lnTo>
-                  <a:lnTo>
-                    <a:pt x="6016292" y="3342511"/>
-                  </a:lnTo>
-                  <a:lnTo>
-                    <a:pt x="5944669" y="3335771"/>
-                  </a:lnTo>
-                  <a:lnTo>
-                    <a:pt x="5873047" y="3328710"/>
-                  </a:lnTo>
-                  <a:lnTo>
-                    <a:pt x="5801424" y="3321311"/>
-                  </a:lnTo>
-                  <a:lnTo>
-                    <a:pt x="5729802" y="3313560"/>
-                  </a:lnTo>
-                  <a:lnTo>
-                    <a:pt x="5658179" y="3305438"/>
-                  </a:lnTo>
-                  <a:lnTo>
-                    <a:pt x="5586557" y="3296929"/>
-                  </a:lnTo>
-                  <a:lnTo>
-                    <a:pt x="5514934" y="3288014"/>
-                  </a:lnTo>
-                  <a:lnTo>
-                    <a:pt x="5443311" y="3278673"/>
-                  </a:lnTo>
-                  <a:lnTo>
-                    <a:pt x="5371689" y="3268887"/>
-                  </a:lnTo>
-                  <a:lnTo>
-                    <a:pt x="5300066" y="3258634"/>
-                  </a:lnTo>
-                  <a:lnTo>
-                    <a:pt x="5228444" y="3247891"/>
-                  </a:lnTo>
-                  <a:lnTo>
-                    <a:pt x="5156821" y="3236636"/>
-                  </a:lnTo>
-                  <a:lnTo>
-                    <a:pt x="5085199" y="3224844"/>
-                  </a:lnTo>
-                  <a:lnTo>
-                    <a:pt x="5013576" y="3212489"/>
-                  </a:lnTo>
-                  <a:lnTo>
-                    <a:pt x="4941954" y="3199544"/>
-                  </a:lnTo>
-                  <a:lnTo>
-                    <a:pt x="4870331" y="3185981"/>
-                  </a:lnTo>
-                  <a:lnTo>
-                    <a:pt x="4798709" y="3171772"/>
-                  </a:lnTo>
-                  <a:lnTo>
-                    <a:pt x="4727086" y="3156884"/>
-                  </a:lnTo>
-                  <a:lnTo>
-                    <a:pt x="4655464" y="3141286"/>
-                  </a:lnTo>
-                  <a:lnTo>
-                    <a:pt x="4583841" y="3124943"/>
-                  </a:lnTo>
-                  <a:lnTo>
-                    <a:pt x="4512219" y="3107821"/>
-                  </a:lnTo>
-                  <a:lnTo>
-                    <a:pt x="4440596" y="3089881"/>
-                  </a:lnTo>
-                  <a:lnTo>
-                    <a:pt x="4368974" y="3071086"/>
-                  </a:lnTo>
-                  <a:lnTo>
-                    <a:pt x="4297351" y="3051393"/>
-                  </a:lnTo>
-                  <a:lnTo>
-                    <a:pt x="4225729" y="3030761"/>
-                  </a:lnTo>
-                  <a:lnTo>
-                    <a:pt x="4154106" y="3009144"/>
-                  </a:lnTo>
-                  <a:lnTo>
-                    <a:pt x="4082483" y="2986495"/>
-                  </a:lnTo>
-                  <a:lnTo>
-                    <a:pt x="4010861" y="2962766"/>
-                  </a:lnTo>
-                  <a:lnTo>
-                    <a:pt x="3939238" y="2937904"/>
-                  </a:lnTo>
-                  <a:lnTo>
-                    <a:pt x="3867616" y="2911856"/>
-                  </a:lnTo>
-                  <a:lnTo>
-                    <a:pt x="3795993" y="2884565"/>
-                  </a:lnTo>
-                  <a:lnTo>
-                    <a:pt x="3724371" y="2855971"/>
-                  </a:lnTo>
-                  <a:lnTo>
-                    <a:pt x="3652748" y="2826013"/>
-                  </a:lnTo>
-                  <a:lnTo>
-                    <a:pt x="3581126" y="2794625"/>
-                  </a:lnTo>
-                  <a:lnTo>
-                    <a:pt x="3509503" y="2761740"/>
-                  </a:lnTo>
-                  <a:lnTo>
-                    <a:pt x="3437881" y="2727285"/>
-                  </a:lnTo>
-                  <a:lnTo>
-                    <a:pt x="3366258" y="2691186"/>
-                  </a:lnTo>
-                  <a:lnTo>
-                    <a:pt x="3294636" y="2654170"/>
-                  </a:lnTo>
-                  <a:lnTo>
-                    <a:pt x="3223013" y="2649419"/>
-                  </a:lnTo>
-                  <a:lnTo>
-                    <a:pt x="3151391" y="2644640"/>
-                  </a:lnTo>
-                  <a:lnTo>
-                    <a:pt x="3079768" y="2639834"/>
-                  </a:lnTo>
-                  <a:lnTo>
-                    <a:pt x="3008146" y="2635001"/>
-                  </a:lnTo>
-                  <a:lnTo>
-                    <a:pt x="2936523" y="2630139"/>
-                  </a:lnTo>
-                  <a:lnTo>
-                    <a:pt x="2864901" y="2625250"/>
-                  </a:lnTo>
-                  <a:lnTo>
-                    <a:pt x="2793278" y="2620333"/>
-                  </a:lnTo>
-                  <a:lnTo>
-                    <a:pt x="2721655" y="2615388"/>
-                  </a:lnTo>
-                  <a:lnTo>
-                    <a:pt x="2650033" y="2610414"/>
-                  </a:lnTo>
-                  <a:lnTo>
-                    <a:pt x="2578410" y="2605412"/>
-                  </a:lnTo>
-                  <a:lnTo>
-                    <a:pt x="2506788" y="2600381"/>
-                  </a:lnTo>
-                  <a:lnTo>
-                    <a:pt x="2435165" y="2595322"/>
-                  </a:lnTo>
-                  <a:lnTo>
-                    <a:pt x="2363543" y="2590233"/>
-                  </a:lnTo>
-                  <a:lnTo>
-                    <a:pt x="2291920" y="2585116"/>
-                  </a:lnTo>
-                  <a:lnTo>
-                    <a:pt x="2220298" y="2579969"/>
-                  </a:lnTo>
-                  <a:lnTo>
-                    <a:pt x="2148675" y="2574792"/>
-                  </a:lnTo>
-                  <a:lnTo>
-                    <a:pt x="2077053" y="2569586"/>
-                  </a:lnTo>
-                  <a:lnTo>
-                    <a:pt x="2005430" y="2564350"/>
-                  </a:lnTo>
-                  <a:lnTo>
-                    <a:pt x="1933808" y="2559084"/>
-                  </a:lnTo>
-                  <a:lnTo>
-                    <a:pt x="1862185" y="2553788"/>
-                  </a:lnTo>
-                  <a:lnTo>
-                    <a:pt x="1790563" y="2548462"/>
-                  </a:lnTo>
-                  <a:lnTo>
-                    <a:pt x="1718940" y="2543105"/>
-                  </a:lnTo>
-                  <a:lnTo>
-                    <a:pt x="1647318" y="2537717"/>
-                  </a:lnTo>
-                  <a:lnTo>
-                    <a:pt x="1575695" y="2532299"/>
-                  </a:lnTo>
-                  <a:lnTo>
-                    <a:pt x="1504073" y="2526849"/>
-                  </a:lnTo>
-                  <a:lnTo>
-                    <a:pt x="1432450" y="2521369"/>
-                  </a:lnTo>
-                  <a:lnTo>
-                    <a:pt x="1360827" y="2515857"/>
-                  </a:lnTo>
-                  <a:lnTo>
-                    <a:pt x="1289205" y="2510313"/>
-                  </a:lnTo>
-                  <a:lnTo>
-                    <a:pt x="1217582" y="2504738"/>
-                  </a:lnTo>
-                  <a:lnTo>
-                    <a:pt x="1145960" y="2499130"/>
-                  </a:lnTo>
-                  <a:lnTo>
-                    <a:pt x="1074337" y="2493491"/>
-                  </a:lnTo>
-                  <a:lnTo>
-                    <a:pt x="1002715" y="2487819"/>
-                  </a:lnTo>
-                  <a:lnTo>
-                    <a:pt x="931092" y="2482115"/>
-                  </a:lnTo>
-                  <a:lnTo>
-                    <a:pt x="859470" y="2476378"/>
-                  </a:lnTo>
-                  <a:lnTo>
-                    <a:pt x="787847" y="2470608"/>
-                  </a:lnTo>
-                  <a:lnTo>
-                    <a:pt x="716225" y="2464805"/>
-                  </a:lnTo>
-                  <a:lnTo>
-                    <a:pt x="644602" y="2458969"/>
-                  </a:lnTo>
-                  <a:lnTo>
-                    <a:pt x="572980" y="2453100"/>
-                  </a:lnTo>
-                  <a:lnTo>
-                    <a:pt x="501357" y="2447197"/>
-                  </a:lnTo>
-                  <a:lnTo>
-                    <a:pt x="429735" y="2441260"/>
-                  </a:lnTo>
-                  <a:lnTo>
-                    <a:pt x="358112" y="2435289"/>
-                  </a:lnTo>
-                  <a:lnTo>
-                    <a:pt x="286490" y="2429284"/>
-                  </a:lnTo>
-                  <a:lnTo>
-                    <a:pt x="214867" y="2423244"/>
-                  </a:lnTo>
-                  <a:lnTo>
-                    <a:pt x="143245" y="2417170"/>
-                  </a:lnTo>
-                  <a:lnTo>
-                    <a:pt x="71622" y="2411061"/>
-                  </a:lnTo>
-                  <a:lnTo>
-                    <a:pt x="0" y="2404917"/>
+                    <a:pt x="0" y="0"/>
+                  </a:lnTo>
+                  <a:lnTo>
+                    <a:pt x="0" y="0"/>
+                  </a:lnTo>
+                </a:path>
+              </a:pathLst>
+            </a:custGeom>
+            <a:ln w="13550" cap="flat">
+              <a:solidFill>
+                <a:srgbClr val="EBEBEB">
+                  <a:alpha val="100000"/>
+                </a:srgbClr>
+              </a:solidFill>
+              <a:prstDash val="solid"/>
+              <a:round/>
+            </a:ln>
+          </p:spPr>
+          <p:txBody>
+            <a:bodyPr/>
+            <a:lstStyle/>
+            <a:p/>
+          </p:txBody>
+        </p:sp>
+        <p:sp>
+          <p:nvSpPr>
+            <p:cNvPr id="21" name="pg21"/>
+            <p:cNvSpPr/>
+            <p:nvPr/>
+          </p:nvSpPr>
+          <p:spPr>
+            <a:xfrm>
+              <a:off x="1235312" y="2143092"/>
+              <a:ext cx="6964104" cy="1231873"/>
+            </a:xfrm>
+            <a:custGeom>
+              <a:avLst/>
+              <a:pathLst>
+                <a:path w="6964104" h="1231873">
+                  <a:moveTo>
+                    <a:pt x="1072308" y="0"/>
+                  </a:moveTo>
+                  <a:lnTo>
+                    <a:pt x="1125511" y="43795"/>
+                  </a:lnTo>
+                  <a:lnTo>
+                    <a:pt x="1195856" y="99062"/>
+                  </a:lnTo>
+                  <a:lnTo>
+                    <a:pt x="1266200" y="151813"/>
+                  </a:lnTo>
+                  <a:lnTo>
+                    <a:pt x="1336545" y="202160"/>
+                  </a:lnTo>
+                  <a:lnTo>
+                    <a:pt x="1406889" y="250215"/>
+                  </a:lnTo>
+                  <a:lnTo>
+                    <a:pt x="1477234" y="296081"/>
+                  </a:lnTo>
+                  <a:lnTo>
+                    <a:pt x="1547578" y="339857"/>
+                  </a:lnTo>
+                  <a:lnTo>
+                    <a:pt x="1617923" y="381640"/>
+                  </a:lnTo>
+                  <a:lnTo>
+                    <a:pt x="1688267" y="421519"/>
+                  </a:lnTo>
+                  <a:lnTo>
+                    <a:pt x="1758612" y="459583"/>
+                  </a:lnTo>
+                  <a:lnTo>
+                    <a:pt x="1828956" y="495912"/>
+                  </a:lnTo>
+                  <a:lnTo>
+                    <a:pt x="1899301" y="530587"/>
+                  </a:lnTo>
+                  <a:lnTo>
+                    <a:pt x="1969645" y="563682"/>
+                  </a:lnTo>
+                  <a:lnTo>
+                    <a:pt x="2039990" y="595270"/>
+                  </a:lnTo>
+                  <a:lnTo>
+                    <a:pt x="2110334" y="625420"/>
+                  </a:lnTo>
+                  <a:lnTo>
+                    <a:pt x="2180679" y="654196"/>
+                  </a:lnTo>
+                  <a:lnTo>
+                    <a:pt x="2251023" y="681661"/>
+                  </a:lnTo>
+                  <a:lnTo>
+                    <a:pt x="2321368" y="707876"/>
+                  </a:lnTo>
+                  <a:lnTo>
+                    <a:pt x="2391712" y="732896"/>
+                  </a:lnTo>
+                  <a:lnTo>
+                    <a:pt x="2462057" y="756777"/>
+                  </a:lnTo>
+                  <a:lnTo>
+                    <a:pt x="2532401" y="779570"/>
+                  </a:lnTo>
+                  <a:lnTo>
+                    <a:pt x="2602746" y="801325"/>
+                  </a:lnTo>
+                  <a:lnTo>
+                    <a:pt x="2673090" y="822089"/>
+                  </a:lnTo>
+                  <a:lnTo>
+                    <a:pt x="2743435" y="841907"/>
+                  </a:lnTo>
+                  <a:lnTo>
+                    <a:pt x="2813779" y="860823"/>
+                  </a:lnTo>
+                  <a:lnTo>
+                    <a:pt x="2884124" y="878877"/>
+                  </a:lnTo>
+                  <a:lnTo>
+                    <a:pt x="2954468" y="896109"/>
+                  </a:lnTo>
+                  <a:lnTo>
+                    <a:pt x="3024813" y="912555"/>
+                  </a:lnTo>
+                  <a:lnTo>
+                    <a:pt x="3095157" y="928253"/>
+                  </a:lnTo>
+                  <a:lnTo>
+                    <a:pt x="3165502" y="943236"/>
+                  </a:lnTo>
+                  <a:lnTo>
+                    <a:pt x="3235846" y="957536"/>
+                  </a:lnTo>
+                  <a:lnTo>
+                    <a:pt x="3306191" y="959532"/>
+                  </a:lnTo>
+                  <a:lnTo>
+                    <a:pt x="3376535" y="961227"/>
+                  </a:lnTo>
+                  <a:lnTo>
+                    <a:pt x="3446880" y="962913"/>
+                  </a:lnTo>
+                  <a:lnTo>
+                    <a:pt x="3517224" y="964589"/>
+                  </a:lnTo>
+                  <a:lnTo>
+                    <a:pt x="3587569" y="966255"/>
+                  </a:lnTo>
+                  <a:lnTo>
+                    <a:pt x="3657913" y="967912"/>
+                  </a:lnTo>
+                  <a:lnTo>
+                    <a:pt x="3728257" y="969560"/>
+                  </a:lnTo>
+                  <a:lnTo>
+                    <a:pt x="3798602" y="971198"/>
+                  </a:lnTo>
+                  <a:lnTo>
+                    <a:pt x="3868946" y="972827"/>
+                  </a:lnTo>
+                  <a:lnTo>
+                    <a:pt x="3939291" y="974446"/>
+                  </a:lnTo>
+                  <a:lnTo>
+                    <a:pt x="4009635" y="976056"/>
+                  </a:lnTo>
+                  <a:lnTo>
+                    <a:pt x="4079980" y="977658"/>
+                  </a:lnTo>
+                  <a:lnTo>
+                    <a:pt x="4150324" y="979250"/>
+                  </a:lnTo>
+                  <a:lnTo>
+                    <a:pt x="4220669" y="980833"/>
+                  </a:lnTo>
+                  <a:lnTo>
+                    <a:pt x="4291013" y="982406"/>
+                  </a:lnTo>
+                  <a:lnTo>
+                    <a:pt x="4361358" y="983971"/>
+                  </a:lnTo>
+                  <a:lnTo>
+                    <a:pt x="4431702" y="985527"/>
+                  </a:lnTo>
+                  <a:lnTo>
+                    <a:pt x="4502047" y="987075"/>
+                  </a:lnTo>
+                  <a:lnTo>
+                    <a:pt x="4572391" y="988613"/>
+                  </a:lnTo>
+                  <a:lnTo>
+                    <a:pt x="4642736" y="990143"/>
+                  </a:lnTo>
+                  <a:lnTo>
+                    <a:pt x="4713080" y="991663"/>
+                  </a:lnTo>
+                  <a:lnTo>
+                    <a:pt x="4783425" y="993176"/>
+                  </a:lnTo>
+                  <a:lnTo>
+                    <a:pt x="4853769" y="994679"/>
+                  </a:lnTo>
+                  <a:lnTo>
+                    <a:pt x="4924114" y="996174"/>
+                  </a:lnTo>
+                  <a:lnTo>
+                    <a:pt x="4994458" y="997661"/>
+                  </a:lnTo>
+                  <a:lnTo>
+                    <a:pt x="5064803" y="999139"/>
+                  </a:lnTo>
+                  <a:lnTo>
+                    <a:pt x="5135147" y="1000609"/>
+                  </a:lnTo>
+                  <a:lnTo>
+                    <a:pt x="5205492" y="1002070"/>
+                  </a:lnTo>
+                  <a:lnTo>
+                    <a:pt x="5275836" y="1003523"/>
+                  </a:lnTo>
+                  <a:lnTo>
+                    <a:pt x="5346181" y="1004968"/>
+                  </a:lnTo>
+                  <a:lnTo>
+                    <a:pt x="5416525" y="1006404"/>
+                  </a:lnTo>
+                  <a:lnTo>
+                    <a:pt x="5486870" y="1007832"/>
+                  </a:lnTo>
+                  <a:lnTo>
+                    <a:pt x="5557214" y="1009252"/>
+                  </a:lnTo>
+                  <a:lnTo>
+                    <a:pt x="5627559" y="1010665"/>
+                  </a:lnTo>
+                  <a:lnTo>
+                    <a:pt x="5697903" y="1012069"/>
+                  </a:lnTo>
+                  <a:lnTo>
+                    <a:pt x="5768248" y="1013465"/>
+                  </a:lnTo>
+                  <a:lnTo>
+                    <a:pt x="5838592" y="1014853"/>
+                  </a:lnTo>
+                  <a:lnTo>
+                    <a:pt x="5908937" y="1016233"/>
+                  </a:lnTo>
+                  <a:lnTo>
+                    <a:pt x="5979281" y="1017605"/>
+                  </a:lnTo>
+                  <a:lnTo>
+                    <a:pt x="6049626" y="1018970"/>
+                  </a:lnTo>
+                  <a:lnTo>
+                    <a:pt x="6119970" y="1020326"/>
+                  </a:lnTo>
+                  <a:lnTo>
+                    <a:pt x="6190315" y="1021675"/>
+                  </a:lnTo>
+                  <a:lnTo>
+                    <a:pt x="6260659" y="1023017"/>
+                  </a:lnTo>
+                  <a:lnTo>
+                    <a:pt x="6331004" y="1024350"/>
+                  </a:lnTo>
+                  <a:lnTo>
+                    <a:pt x="6401348" y="1025676"/>
+                  </a:lnTo>
+                  <a:lnTo>
+                    <a:pt x="6471693" y="1026995"/>
+                  </a:lnTo>
+                  <a:lnTo>
+                    <a:pt x="6542037" y="1028306"/>
+                  </a:lnTo>
+                  <a:lnTo>
+                    <a:pt x="6612382" y="1029609"/>
+                  </a:lnTo>
+                  <a:lnTo>
+                    <a:pt x="6682726" y="1030906"/>
+                  </a:lnTo>
+                  <a:lnTo>
+                    <a:pt x="6753071" y="1032194"/>
+                  </a:lnTo>
+                  <a:lnTo>
+                    <a:pt x="6823415" y="1033476"/>
+                  </a:lnTo>
+                  <a:lnTo>
+                    <a:pt x="6893760" y="1034750"/>
+                  </a:lnTo>
+                  <a:lnTo>
+                    <a:pt x="6964104" y="1036017"/>
+                  </a:lnTo>
+                  <a:lnTo>
+                    <a:pt x="6964104" y="1231873"/>
+                  </a:lnTo>
+                  <a:lnTo>
+                    <a:pt x="6893760" y="1230664"/>
+                  </a:lnTo>
+                  <a:lnTo>
+                    <a:pt x="6823415" y="1229398"/>
+                  </a:lnTo>
+                  <a:lnTo>
+                    <a:pt x="6753071" y="1228071"/>
+                  </a:lnTo>
+                  <a:lnTo>
+                    <a:pt x="6682726" y="1226681"/>
+                  </a:lnTo>
+                  <a:lnTo>
+                    <a:pt x="6612382" y="1225224"/>
+                  </a:lnTo>
+                  <a:lnTo>
+                    <a:pt x="6542037" y="1223698"/>
+                  </a:lnTo>
+                  <a:lnTo>
+                    <a:pt x="6471693" y="1222099"/>
+                  </a:lnTo>
+                  <a:lnTo>
+                    <a:pt x="6401348" y="1220424"/>
+                  </a:lnTo>
+                  <a:lnTo>
+                    <a:pt x="6331004" y="1218669"/>
+                  </a:lnTo>
+                  <a:lnTo>
+                    <a:pt x="6260659" y="1216830"/>
+                  </a:lnTo>
+                  <a:lnTo>
+                    <a:pt x="6190315" y="1214904"/>
+                  </a:lnTo>
+                  <a:lnTo>
+                    <a:pt x="6119970" y="1212885"/>
+                  </a:lnTo>
+                  <a:lnTo>
+                    <a:pt x="6049626" y="1210771"/>
+                  </a:lnTo>
+                  <a:lnTo>
+                    <a:pt x="5979281" y="1208555"/>
+                  </a:lnTo>
+                  <a:lnTo>
+                    <a:pt x="5908937" y="1206233"/>
+                  </a:lnTo>
+                  <a:lnTo>
+                    <a:pt x="5838592" y="1203801"/>
+                  </a:lnTo>
+                  <a:lnTo>
+                    <a:pt x="5768248" y="1201253"/>
+                  </a:lnTo>
+                  <a:lnTo>
+                    <a:pt x="5697903" y="1198583"/>
+                  </a:lnTo>
+                  <a:lnTo>
+                    <a:pt x="5627559" y="1195785"/>
+                  </a:lnTo>
+                  <a:lnTo>
+                    <a:pt x="5557214" y="1192855"/>
+                  </a:lnTo>
+                  <a:lnTo>
+                    <a:pt x="5486870" y="1189784"/>
+                  </a:lnTo>
+                  <a:lnTo>
+                    <a:pt x="5416525" y="1186567"/>
+                  </a:lnTo>
+                  <a:lnTo>
+                    <a:pt x="5346181" y="1183196"/>
+                  </a:lnTo>
+                  <a:lnTo>
+                    <a:pt x="5275836" y="1179664"/>
+                  </a:lnTo>
+                  <a:lnTo>
+                    <a:pt x="5205492" y="1175964"/>
+                  </a:lnTo>
+                  <a:lnTo>
+                    <a:pt x="5135147" y="1172087"/>
+                  </a:lnTo>
+                  <a:lnTo>
+                    <a:pt x="5064803" y="1168025"/>
+                  </a:lnTo>
+                  <a:lnTo>
+                    <a:pt x="4994458" y="1163770"/>
+                  </a:lnTo>
+                  <a:lnTo>
+                    <a:pt x="4924114" y="1159311"/>
+                  </a:lnTo>
+                  <a:lnTo>
+                    <a:pt x="4853769" y="1154640"/>
+                  </a:lnTo>
+                  <a:lnTo>
+                    <a:pt x="4783425" y="1149745"/>
+                  </a:lnTo>
+                  <a:lnTo>
+                    <a:pt x="4713080" y="1144617"/>
+                  </a:lnTo>
+                  <a:lnTo>
+                    <a:pt x="4642736" y="1139245"/>
+                  </a:lnTo>
+                  <a:lnTo>
+                    <a:pt x="4572391" y="1133616"/>
+                  </a:lnTo>
+                  <a:lnTo>
+                    <a:pt x="4502047" y="1127718"/>
+                  </a:lnTo>
+                  <a:lnTo>
+                    <a:pt x="4431702" y="1121539"/>
+                  </a:lnTo>
+                  <a:lnTo>
+                    <a:pt x="4361358" y="1115065"/>
+                  </a:lnTo>
+                  <a:lnTo>
+                    <a:pt x="4291013" y="1108282"/>
+                  </a:lnTo>
+                  <a:lnTo>
+                    <a:pt x="4220669" y="1101176"/>
+                  </a:lnTo>
+                  <a:lnTo>
+                    <a:pt x="4150324" y="1093730"/>
+                  </a:lnTo>
+                  <a:lnTo>
+                    <a:pt x="4079980" y="1085929"/>
+                  </a:lnTo>
+                  <a:lnTo>
+                    <a:pt x="4009635" y="1077755"/>
+                  </a:lnTo>
+                  <a:lnTo>
+                    <a:pt x="3939291" y="1069192"/>
+                  </a:lnTo>
+                  <a:lnTo>
+                    <a:pt x="3868946" y="1060220"/>
+                  </a:lnTo>
+                  <a:lnTo>
+                    <a:pt x="3798602" y="1050820"/>
+                  </a:lnTo>
+                  <a:lnTo>
+                    <a:pt x="3728257" y="1040971"/>
+                  </a:lnTo>
+                  <a:lnTo>
+                    <a:pt x="3657913" y="1030652"/>
+                  </a:lnTo>
+                  <a:lnTo>
+                    <a:pt x="3587569" y="1019841"/>
+                  </a:lnTo>
+                  <a:lnTo>
+                    <a:pt x="3517224" y="1008514"/>
+                  </a:lnTo>
+                  <a:lnTo>
+                    <a:pt x="3446880" y="996647"/>
+                  </a:lnTo>
+                  <a:lnTo>
+                    <a:pt x="3376535" y="984213"/>
+                  </a:lnTo>
+                  <a:lnTo>
+                    <a:pt x="3306191" y="971185"/>
+                  </a:lnTo>
+                  <a:lnTo>
+                    <a:pt x="3235846" y="957827"/>
+                  </a:lnTo>
+                  <a:lnTo>
+                    <a:pt x="3165502" y="956113"/>
+                  </a:lnTo>
+                  <a:lnTo>
+                    <a:pt x="3095157" y="954388"/>
+                  </a:lnTo>
+                  <a:lnTo>
+                    <a:pt x="3024813" y="952654"/>
+                  </a:lnTo>
+                  <a:lnTo>
+                    <a:pt x="2954468" y="950909"/>
+                  </a:lnTo>
+                  <a:lnTo>
+                    <a:pt x="2884124" y="949155"/>
+                  </a:lnTo>
+                  <a:lnTo>
+                    <a:pt x="2813779" y="947391"/>
+                  </a:lnTo>
+                  <a:lnTo>
+                    <a:pt x="2743435" y="945616"/>
+                  </a:lnTo>
+                  <a:lnTo>
+                    <a:pt x="2673090" y="943832"/>
+                  </a:lnTo>
+                  <a:lnTo>
+                    <a:pt x="2602746" y="942037"/>
+                  </a:lnTo>
+                  <a:lnTo>
+                    <a:pt x="2532401" y="940232"/>
+                  </a:lnTo>
+                  <a:lnTo>
+                    <a:pt x="2462057" y="938416"/>
+                  </a:lnTo>
+                  <a:lnTo>
+                    <a:pt x="2391712" y="936590"/>
+                  </a:lnTo>
+                  <a:lnTo>
+                    <a:pt x="2321368" y="934754"/>
+                  </a:lnTo>
+                  <a:lnTo>
+                    <a:pt x="2251023" y="932907"/>
+                  </a:lnTo>
+                  <a:lnTo>
+                    <a:pt x="2180679" y="931050"/>
+                  </a:lnTo>
+                  <a:lnTo>
+                    <a:pt x="2110334" y="929182"/>
+                  </a:lnTo>
+                  <a:lnTo>
+                    <a:pt x="2039990" y="927303"/>
+                  </a:lnTo>
+                  <a:lnTo>
+                    <a:pt x="1969645" y="925413"/>
+                  </a:lnTo>
+                  <a:lnTo>
+                    <a:pt x="1899301" y="923513"/>
+                  </a:lnTo>
+                  <a:lnTo>
+                    <a:pt x="1828956" y="921602"/>
+                  </a:lnTo>
+                  <a:lnTo>
+                    <a:pt x="1758612" y="919680"/>
+                  </a:lnTo>
+                  <a:lnTo>
+                    <a:pt x="1688267" y="917746"/>
+                  </a:lnTo>
+                  <a:lnTo>
+                    <a:pt x="1617923" y="915802"/>
+                  </a:lnTo>
+                  <a:lnTo>
+                    <a:pt x="1547578" y="913847"/>
+                  </a:lnTo>
+                  <a:lnTo>
+                    <a:pt x="1477234" y="911880"/>
+                  </a:lnTo>
+                  <a:lnTo>
+                    <a:pt x="1406889" y="909902"/>
+                  </a:lnTo>
+                  <a:lnTo>
+                    <a:pt x="1336545" y="907913"/>
+                  </a:lnTo>
+                  <a:lnTo>
+                    <a:pt x="1266200" y="905913"/>
+                  </a:lnTo>
+                  <a:lnTo>
+                    <a:pt x="1195856" y="903901"/>
+                  </a:lnTo>
+                  <a:lnTo>
+                    <a:pt x="1125511" y="901877"/>
+                  </a:lnTo>
+                  <a:lnTo>
+                    <a:pt x="1055167" y="899842"/>
+                  </a:lnTo>
+                  <a:lnTo>
+                    <a:pt x="984822" y="897795"/>
+                  </a:lnTo>
+                  <a:lnTo>
+                    <a:pt x="914478" y="895736"/>
+                  </a:lnTo>
+                  <a:lnTo>
+                    <a:pt x="844133" y="893666"/>
+                  </a:lnTo>
+                  <a:lnTo>
+                    <a:pt x="773789" y="891584"/>
+                  </a:lnTo>
+                  <a:lnTo>
+                    <a:pt x="703444" y="889490"/>
+                  </a:lnTo>
+                  <a:lnTo>
+                    <a:pt x="633100" y="887384"/>
+                  </a:lnTo>
+                  <a:lnTo>
+                    <a:pt x="562755" y="885266"/>
+                  </a:lnTo>
+                  <a:lnTo>
+                    <a:pt x="492411" y="883135"/>
+                  </a:lnTo>
+                  <a:lnTo>
+                    <a:pt x="422066" y="880993"/>
+                  </a:lnTo>
+                  <a:lnTo>
+                    <a:pt x="351722" y="878838"/>
+                  </a:lnTo>
+                  <a:lnTo>
+                    <a:pt x="281377" y="876671"/>
+                  </a:lnTo>
+                  <a:lnTo>
+                    <a:pt x="211033" y="874491"/>
+                  </a:lnTo>
+                  <a:lnTo>
+                    <a:pt x="140688" y="872299"/>
+                  </a:lnTo>
+                  <a:lnTo>
+                    <a:pt x="70344" y="870095"/>
+                  </a:lnTo>
+                  <a:lnTo>
+                    <a:pt x="0" y="867878"/>
                   </a:lnTo>
                   <a:close/>
                 </a:path>
@@ -3539,598 +3574,273 @@
         </p:sp>
         <p:sp>
           <p:nvSpPr>
-            <p:cNvPr id="21" name="pl21"/>
-            <p:cNvSpPr/>
-            <p:nvPr/>
-          </p:nvSpPr>
-          <p:spPr>
-            <a:xfrm>
-              <a:off x="2263839" y="2073503"/>
-              <a:ext cx="5998839" cy="2870836"/>
-            </a:xfrm>
-            <a:custGeom>
-              <a:avLst/>
-              <a:pathLst>
-                <a:path w="5998839" h="2870836">
-                  <a:moveTo>
-                    <a:pt x="0" y="0"/>
-                  </a:moveTo>
-                  <a:lnTo>
-                    <a:pt x="54170" y="121358"/>
-                  </a:lnTo>
-                  <a:lnTo>
-                    <a:pt x="125792" y="274506"/>
-                  </a:lnTo>
-                  <a:lnTo>
-                    <a:pt x="197415" y="420679"/>
-                  </a:lnTo>
-                  <a:lnTo>
-                    <a:pt x="269037" y="560194"/>
-                  </a:lnTo>
-                  <a:lnTo>
-                    <a:pt x="340660" y="693354"/>
-                  </a:lnTo>
-                  <a:lnTo>
-                    <a:pt x="412282" y="820449"/>
-                  </a:lnTo>
-                  <a:lnTo>
-                    <a:pt x="483905" y="941756"/>
-                  </a:lnTo>
-                  <a:lnTo>
-                    <a:pt x="555527" y="1057537"/>
-                  </a:lnTo>
-                  <a:lnTo>
-                    <a:pt x="627150" y="1168045"/>
-                  </a:lnTo>
-                  <a:lnTo>
-                    <a:pt x="698773" y="1273519"/>
-                  </a:lnTo>
-                  <a:lnTo>
-                    <a:pt x="770395" y="1374189"/>
-                  </a:lnTo>
-                  <a:lnTo>
-                    <a:pt x="842018" y="1470274"/>
-                  </a:lnTo>
-                  <a:lnTo>
-                    <a:pt x="913640" y="1561983"/>
-                  </a:lnTo>
-                  <a:lnTo>
-                    <a:pt x="985263" y="1649514"/>
-                  </a:lnTo>
-                  <a:lnTo>
-                    <a:pt x="1056885" y="1733059"/>
-                  </a:lnTo>
-                  <a:lnTo>
-                    <a:pt x="1128508" y="1812798"/>
-                  </a:lnTo>
-                  <a:lnTo>
-                    <a:pt x="1200130" y="1888905"/>
-                  </a:lnTo>
-                  <a:lnTo>
-                    <a:pt x="1271753" y="1961546"/>
-                  </a:lnTo>
-                  <a:lnTo>
-                    <a:pt x="1343375" y="2030879"/>
-                  </a:lnTo>
-                  <a:lnTo>
-                    <a:pt x="1414998" y="2097053"/>
-                  </a:lnTo>
-                  <a:lnTo>
-                    <a:pt x="1486620" y="2160213"/>
-                  </a:lnTo>
-                  <a:lnTo>
-                    <a:pt x="1558243" y="2220497"/>
-                  </a:lnTo>
-                  <a:lnTo>
-                    <a:pt x="1629865" y="2278035"/>
-                  </a:lnTo>
-                  <a:lnTo>
-                    <a:pt x="1701488" y="2332952"/>
-                  </a:lnTo>
-                  <a:lnTo>
-                    <a:pt x="1773110" y="2385368"/>
-                  </a:lnTo>
-                  <a:lnTo>
-                    <a:pt x="1844733" y="2435396"/>
-                  </a:lnTo>
-                  <a:lnTo>
-                    <a:pt x="1916355" y="2483146"/>
-                  </a:lnTo>
-                  <a:lnTo>
-                    <a:pt x="1987978" y="2528720"/>
-                  </a:lnTo>
-                  <a:lnTo>
-                    <a:pt x="2059601" y="2572219"/>
-                  </a:lnTo>
-                  <a:lnTo>
-                    <a:pt x="2131223" y="2613737"/>
-                  </a:lnTo>
-                  <a:lnTo>
-                    <a:pt x="2202846" y="2653364"/>
-                  </a:lnTo>
-                  <a:lnTo>
-                    <a:pt x="2274468" y="2658895"/>
-                  </a:lnTo>
-                  <a:lnTo>
-                    <a:pt x="2346091" y="2663592"/>
-                  </a:lnTo>
-                  <a:lnTo>
-                    <a:pt x="2417713" y="2668263"/>
-                  </a:lnTo>
-                  <a:lnTo>
-                    <a:pt x="2489336" y="2672907"/>
-                  </a:lnTo>
-                  <a:lnTo>
-                    <a:pt x="2560958" y="2677525"/>
-                  </a:lnTo>
-                  <a:lnTo>
-                    <a:pt x="2632581" y="2682116"/>
-                  </a:lnTo>
-                  <a:lnTo>
-                    <a:pt x="2704203" y="2686681"/>
-                  </a:lnTo>
-                  <a:lnTo>
-                    <a:pt x="2775826" y="2691221"/>
-                  </a:lnTo>
-                  <a:lnTo>
-                    <a:pt x="2847448" y="2695734"/>
-                  </a:lnTo>
-                  <a:lnTo>
-                    <a:pt x="2919071" y="2700222"/>
-                  </a:lnTo>
-                  <a:lnTo>
-                    <a:pt x="2990693" y="2704684"/>
-                  </a:lnTo>
-                  <a:lnTo>
-                    <a:pt x="3062316" y="2709121"/>
-                  </a:lnTo>
-                  <a:lnTo>
-                    <a:pt x="3133938" y="2713532"/>
-                  </a:lnTo>
-                  <a:lnTo>
-                    <a:pt x="3205561" y="2717918"/>
-                  </a:lnTo>
-                  <a:lnTo>
-                    <a:pt x="3277183" y="2722280"/>
-                  </a:lnTo>
-                  <a:lnTo>
-                    <a:pt x="3348806" y="2726616"/>
-                  </a:lnTo>
-                  <a:lnTo>
-                    <a:pt x="3420429" y="2730928"/>
-                  </a:lnTo>
-                  <a:lnTo>
-                    <a:pt x="3492051" y="2735215"/>
-                  </a:lnTo>
-                  <a:lnTo>
-                    <a:pt x="3563674" y="2739478"/>
-                  </a:lnTo>
-                  <a:lnTo>
-                    <a:pt x="3635296" y="2743717"/>
-                  </a:lnTo>
-                  <a:lnTo>
-                    <a:pt x="3706919" y="2747931"/>
-                  </a:lnTo>
-                  <a:lnTo>
-                    <a:pt x="3778541" y="2752122"/>
-                  </a:lnTo>
-                  <a:lnTo>
-                    <a:pt x="3850164" y="2756288"/>
-                  </a:lnTo>
-                  <a:lnTo>
-                    <a:pt x="3921786" y="2760431"/>
-                  </a:lnTo>
-                  <a:lnTo>
-                    <a:pt x="3993409" y="2764550"/>
-                  </a:lnTo>
-                  <a:lnTo>
-                    <a:pt x="4065031" y="2768646"/>
-                  </a:lnTo>
-                  <a:lnTo>
-                    <a:pt x="4136654" y="2772719"/>
-                  </a:lnTo>
-                  <a:lnTo>
-                    <a:pt x="4208276" y="2776768"/>
-                  </a:lnTo>
-                  <a:lnTo>
-                    <a:pt x="4279899" y="2780794"/>
-                  </a:lnTo>
-                  <a:lnTo>
-                    <a:pt x="4351521" y="2784797"/>
-                  </a:lnTo>
-                  <a:lnTo>
-                    <a:pt x="4423144" y="2788778"/>
-                  </a:lnTo>
-                  <a:lnTo>
-                    <a:pt x="4494766" y="2792736"/>
-                  </a:lnTo>
-                  <a:lnTo>
-                    <a:pt x="4566389" y="2796671"/>
-                  </a:lnTo>
-                  <a:lnTo>
-                    <a:pt x="4638011" y="2800584"/>
-                  </a:lnTo>
-                  <a:lnTo>
-                    <a:pt x="4709634" y="2804474"/>
-                  </a:lnTo>
-                  <a:lnTo>
-                    <a:pt x="4781257" y="2808343"/>
-                  </a:lnTo>
-                  <a:lnTo>
-                    <a:pt x="4852879" y="2812189"/>
-                  </a:lnTo>
-                  <a:lnTo>
-                    <a:pt x="4924502" y="2816014"/>
-                  </a:lnTo>
-                  <a:lnTo>
-                    <a:pt x="4996124" y="2819817"/>
-                  </a:lnTo>
-                  <a:lnTo>
-                    <a:pt x="5067747" y="2823598"/>
-                  </a:lnTo>
-                  <a:lnTo>
-                    <a:pt x="5139369" y="2827357"/>
-                  </a:lnTo>
-                  <a:lnTo>
-                    <a:pt x="5210992" y="2831095"/>
-                  </a:lnTo>
-                  <a:lnTo>
-                    <a:pt x="5282614" y="2834812"/>
-                  </a:lnTo>
-                  <a:lnTo>
-                    <a:pt x="5354237" y="2838508"/>
-                  </a:lnTo>
-                  <a:lnTo>
-                    <a:pt x="5425859" y="2842182"/>
-                  </a:lnTo>
-                  <a:lnTo>
-                    <a:pt x="5497482" y="2845836"/>
-                  </a:lnTo>
-                  <a:lnTo>
-                    <a:pt x="5569104" y="2849469"/>
-                  </a:lnTo>
-                  <a:lnTo>
-                    <a:pt x="5640727" y="2853081"/>
-                  </a:lnTo>
-                  <a:lnTo>
-                    <a:pt x="5712349" y="2856673"/>
-                  </a:lnTo>
-                  <a:lnTo>
-                    <a:pt x="5783972" y="2860244"/>
-                  </a:lnTo>
-                  <a:lnTo>
-                    <a:pt x="5855594" y="2863795"/>
-                  </a:lnTo>
-                  <a:lnTo>
-                    <a:pt x="5927217" y="2867325"/>
-                  </a:lnTo>
-                  <a:lnTo>
-                    <a:pt x="5998839" y="2870836"/>
-                  </a:lnTo>
-                </a:path>
-              </a:pathLst>
-            </a:custGeom>
-          </p:spPr>
-          <p:txBody>
-            <a:bodyPr/>
-            <a:lstStyle/>
-            <a:p/>
-          </p:txBody>
-        </p:sp>
-        <p:sp>
-          <p:nvSpPr>
             <p:cNvPr id="22" name="pl22"/>
             <p:cNvSpPr/>
             <p:nvPr/>
           </p:nvSpPr>
           <p:spPr>
             <a:xfrm>
-              <a:off x="1172049" y="4478420"/>
-              <a:ext cx="7090630" cy="1008642"/>
+              <a:off x="2307620" y="2143092"/>
+              <a:ext cx="5891796" cy="1036017"/>
             </a:xfrm>
             <a:custGeom>
               <a:avLst/>
               <a:pathLst>
-                <a:path w="7090630" h="1008642">
+                <a:path w="5891796" h="1036017">
                   <a:moveTo>
-                    <a:pt x="7090630" y="1008642"/>
+                    <a:pt x="0" y="0"/>
                   </a:moveTo>
                   <a:lnTo>
-                    <a:pt x="7019007" y="1005292"/>
-                  </a:lnTo>
-                  <a:lnTo>
-                    <a:pt x="6947385" y="1001783"/>
-                  </a:lnTo>
-                  <a:lnTo>
-                    <a:pt x="6875762" y="998106"/>
-                  </a:lnTo>
-                  <a:lnTo>
-                    <a:pt x="6804139" y="994254"/>
-                  </a:lnTo>
-                  <a:lnTo>
-                    <a:pt x="6732517" y="990218"/>
-                  </a:lnTo>
-                  <a:lnTo>
-                    <a:pt x="6660894" y="985989"/>
-                  </a:lnTo>
-                  <a:lnTo>
-                    <a:pt x="6589272" y="981559"/>
-                  </a:lnTo>
-                  <a:lnTo>
-                    <a:pt x="6517649" y="976917"/>
-                  </a:lnTo>
-                  <a:lnTo>
-                    <a:pt x="6446027" y="972054"/>
-                  </a:lnTo>
-                  <a:lnTo>
-                    <a:pt x="6374404" y="966958"/>
-                  </a:lnTo>
-                  <a:lnTo>
-                    <a:pt x="6302782" y="961620"/>
-                  </a:lnTo>
-                  <a:lnTo>
-                    <a:pt x="6231159" y="956027"/>
-                  </a:lnTo>
-                  <a:lnTo>
-                    <a:pt x="6159537" y="950166"/>
-                  </a:lnTo>
-                  <a:lnTo>
-                    <a:pt x="6087914" y="944026"/>
-                  </a:lnTo>
-                  <a:lnTo>
-                    <a:pt x="6016292" y="937593"/>
-                  </a:lnTo>
-                  <a:lnTo>
-                    <a:pt x="5944669" y="930854"/>
-                  </a:lnTo>
-                  <a:lnTo>
-                    <a:pt x="5873047" y="923792"/>
-                  </a:lnTo>
-                  <a:lnTo>
-                    <a:pt x="5801424" y="916394"/>
-                  </a:lnTo>
-                  <a:lnTo>
-                    <a:pt x="5729802" y="908642"/>
-                  </a:lnTo>
-                  <a:lnTo>
-                    <a:pt x="5658179" y="900521"/>
-                  </a:lnTo>
-                  <a:lnTo>
-                    <a:pt x="5586557" y="892011"/>
-                  </a:lnTo>
-                  <a:lnTo>
-                    <a:pt x="5514934" y="883096"/>
-                  </a:lnTo>
-                  <a:lnTo>
-                    <a:pt x="5443311" y="873756"/>
-                  </a:lnTo>
-                  <a:lnTo>
-                    <a:pt x="5371689" y="863969"/>
-                  </a:lnTo>
-                  <a:lnTo>
-                    <a:pt x="5300066" y="853716"/>
-                  </a:lnTo>
-                  <a:lnTo>
-                    <a:pt x="5228444" y="842974"/>
-                  </a:lnTo>
-                  <a:lnTo>
-                    <a:pt x="5156821" y="831718"/>
-                  </a:lnTo>
-                  <a:lnTo>
-                    <a:pt x="5085199" y="819926"/>
-                  </a:lnTo>
-                  <a:lnTo>
-                    <a:pt x="5013576" y="807571"/>
-                  </a:lnTo>
-                  <a:lnTo>
-                    <a:pt x="4941954" y="794626"/>
-                  </a:lnTo>
-                  <a:lnTo>
-                    <a:pt x="4870331" y="781064"/>
-                  </a:lnTo>
-                  <a:lnTo>
-                    <a:pt x="4798709" y="766854"/>
-                  </a:lnTo>
-                  <a:lnTo>
-                    <a:pt x="4727086" y="751966"/>
-                  </a:lnTo>
-                  <a:lnTo>
-                    <a:pt x="4655464" y="736368"/>
-                  </a:lnTo>
-                  <a:lnTo>
-                    <a:pt x="4583841" y="720026"/>
-                  </a:lnTo>
-                  <a:lnTo>
-                    <a:pt x="4512219" y="702903"/>
-                  </a:lnTo>
-                  <a:lnTo>
-                    <a:pt x="4440596" y="684964"/>
-                  </a:lnTo>
-                  <a:lnTo>
-                    <a:pt x="4368974" y="666168"/>
-                  </a:lnTo>
-                  <a:lnTo>
-                    <a:pt x="4297351" y="646475"/>
-                  </a:lnTo>
-                  <a:lnTo>
-                    <a:pt x="4225729" y="625843"/>
-                  </a:lnTo>
-                  <a:lnTo>
-                    <a:pt x="4154106" y="604226"/>
-                  </a:lnTo>
-                  <a:lnTo>
-                    <a:pt x="4082483" y="581577"/>
-                  </a:lnTo>
-                  <a:lnTo>
-                    <a:pt x="4010861" y="557848"/>
-                  </a:lnTo>
-                  <a:lnTo>
-                    <a:pt x="3939238" y="532986"/>
-                  </a:lnTo>
-                  <a:lnTo>
-                    <a:pt x="3867616" y="506938"/>
-                  </a:lnTo>
-                  <a:lnTo>
-                    <a:pt x="3795993" y="479647"/>
-                  </a:lnTo>
-                  <a:lnTo>
-                    <a:pt x="3724371" y="451053"/>
-                  </a:lnTo>
-                  <a:lnTo>
-                    <a:pt x="3652748" y="421095"/>
-                  </a:lnTo>
-                  <a:lnTo>
-                    <a:pt x="3581126" y="389708"/>
-                  </a:lnTo>
-                  <a:lnTo>
-                    <a:pt x="3509503" y="356822"/>
-                  </a:lnTo>
-                  <a:lnTo>
-                    <a:pt x="3437881" y="322367"/>
-                  </a:lnTo>
-                  <a:lnTo>
-                    <a:pt x="3366258" y="286268"/>
-                  </a:lnTo>
-                  <a:lnTo>
-                    <a:pt x="3294636" y="249253"/>
-                  </a:lnTo>
-                  <a:lnTo>
-                    <a:pt x="3223013" y="244501"/>
-                  </a:lnTo>
-                  <a:lnTo>
-                    <a:pt x="3151391" y="239723"/>
-                  </a:lnTo>
-                  <a:lnTo>
-                    <a:pt x="3079768" y="234917"/>
-                  </a:lnTo>
-                  <a:lnTo>
-                    <a:pt x="3008146" y="230083"/>
-                  </a:lnTo>
-                  <a:lnTo>
-                    <a:pt x="2936523" y="225222"/>
-                  </a:lnTo>
-                  <a:lnTo>
-                    <a:pt x="2864901" y="220333"/>
-                  </a:lnTo>
-                  <a:lnTo>
-                    <a:pt x="2793278" y="215415"/>
-                  </a:lnTo>
-                  <a:lnTo>
-                    <a:pt x="2721655" y="210470"/>
-                  </a:lnTo>
-                  <a:lnTo>
-                    <a:pt x="2650033" y="205497"/>
-                  </a:lnTo>
-                  <a:lnTo>
-                    <a:pt x="2578410" y="200495"/>
-                  </a:lnTo>
-                  <a:lnTo>
-                    <a:pt x="2506788" y="195464"/>
-                  </a:lnTo>
-                  <a:lnTo>
-                    <a:pt x="2435165" y="190404"/>
-                  </a:lnTo>
-                  <a:lnTo>
-                    <a:pt x="2363543" y="185316"/>
-                  </a:lnTo>
-                  <a:lnTo>
-                    <a:pt x="2291920" y="180198"/>
-                  </a:lnTo>
-                  <a:lnTo>
-                    <a:pt x="2220298" y="175051"/>
-                  </a:lnTo>
-                  <a:lnTo>
-                    <a:pt x="2148675" y="169875"/>
-                  </a:lnTo>
-                  <a:lnTo>
-                    <a:pt x="2077053" y="164669"/>
-                  </a:lnTo>
-                  <a:lnTo>
-                    <a:pt x="2005430" y="159433"/>
-                  </a:lnTo>
-                  <a:lnTo>
-                    <a:pt x="1933808" y="154167"/>
-                  </a:lnTo>
-                  <a:lnTo>
-                    <a:pt x="1862185" y="148871"/>
-                  </a:lnTo>
-                  <a:lnTo>
-                    <a:pt x="1790563" y="143544"/>
-                  </a:lnTo>
-                  <a:lnTo>
-                    <a:pt x="1718940" y="138187"/>
-                  </a:lnTo>
-                  <a:lnTo>
-                    <a:pt x="1647318" y="132800"/>
-                  </a:lnTo>
-                  <a:lnTo>
-                    <a:pt x="1575695" y="127381"/>
-                  </a:lnTo>
-                  <a:lnTo>
-                    <a:pt x="1504073" y="121932"/>
-                  </a:lnTo>
-                  <a:lnTo>
-                    <a:pt x="1432450" y="116451"/>
-                  </a:lnTo>
-                  <a:lnTo>
-                    <a:pt x="1360827" y="110939"/>
-                  </a:lnTo>
-                  <a:lnTo>
-                    <a:pt x="1289205" y="105395"/>
-                  </a:lnTo>
-                  <a:lnTo>
-                    <a:pt x="1217582" y="99820"/>
-                  </a:lnTo>
-                  <a:lnTo>
-                    <a:pt x="1145960" y="94213"/>
-                  </a:lnTo>
-                  <a:lnTo>
-                    <a:pt x="1074337" y="88573"/>
-                  </a:lnTo>
-                  <a:lnTo>
-                    <a:pt x="1002715" y="82901"/>
-                  </a:lnTo>
-                  <a:lnTo>
-                    <a:pt x="931092" y="77197"/>
-                  </a:lnTo>
-                  <a:lnTo>
-                    <a:pt x="859470" y="71460"/>
-                  </a:lnTo>
-                  <a:lnTo>
-                    <a:pt x="787847" y="65690"/>
-                  </a:lnTo>
-                  <a:lnTo>
-                    <a:pt x="716225" y="59888"/>
-                  </a:lnTo>
-                  <a:lnTo>
-                    <a:pt x="644602" y="54051"/>
-                  </a:lnTo>
-                  <a:lnTo>
-                    <a:pt x="572980" y="48182"/>
-                  </a:lnTo>
-                  <a:lnTo>
-                    <a:pt x="501357" y="42279"/>
-                  </a:lnTo>
-                  <a:lnTo>
-                    <a:pt x="429735" y="36342"/>
-                  </a:lnTo>
-                  <a:lnTo>
-                    <a:pt x="358112" y="30371"/>
-                  </a:lnTo>
-                  <a:lnTo>
-                    <a:pt x="286490" y="24366"/>
-                  </a:lnTo>
-                  <a:lnTo>
-                    <a:pt x="214867" y="18326"/>
-                  </a:lnTo>
-                  <a:lnTo>
-                    <a:pt x="143245" y="12252"/>
-                  </a:lnTo>
-                  <a:lnTo>
-                    <a:pt x="71622" y="6143"/>
-                  </a:lnTo>
-                  <a:lnTo>
-                    <a:pt x="0" y="0"/>
+                    <a:pt x="53203" y="43795"/>
+                  </a:lnTo>
+                  <a:lnTo>
+                    <a:pt x="123548" y="99062"/>
+                  </a:lnTo>
+                  <a:lnTo>
+                    <a:pt x="193892" y="151813"/>
+                  </a:lnTo>
+                  <a:lnTo>
+                    <a:pt x="264237" y="202160"/>
+                  </a:lnTo>
+                  <a:lnTo>
+                    <a:pt x="334581" y="250215"/>
+                  </a:lnTo>
+                  <a:lnTo>
+                    <a:pt x="404926" y="296081"/>
+                  </a:lnTo>
+                  <a:lnTo>
+                    <a:pt x="475270" y="339857"/>
+                  </a:lnTo>
+                  <a:lnTo>
+                    <a:pt x="545615" y="381640"/>
+                  </a:lnTo>
+                  <a:lnTo>
+                    <a:pt x="615959" y="421519"/>
+                  </a:lnTo>
+                  <a:lnTo>
+                    <a:pt x="686304" y="459583"/>
+                  </a:lnTo>
+                  <a:lnTo>
+                    <a:pt x="756648" y="495912"/>
+                  </a:lnTo>
+                  <a:lnTo>
+                    <a:pt x="826993" y="530587"/>
+                  </a:lnTo>
+                  <a:lnTo>
+                    <a:pt x="897337" y="563682"/>
+                  </a:lnTo>
+                  <a:lnTo>
+                    <a:pt x="967682" y="595270"/>
+                  </a:lnTo>
+                  <a:lnTo>
+                    <a:pt x="1038026" y="625420"/>
+                  </a:lnTo>
+                  <a:lnTo>
+                    <a:pt x="1108371" y="654196"/>
+                  </a:lnTo>
+                  <a:lnTo>
+                    <a:pt x="1178715" y="681661"/>
+                  </a:lnTo>
+                  <a:lnTo>
+                    <a:pt x="1249060" y="707876"/>
+                  </a:lnTo>
+                  <a:lnTo>
+                    <a:pt x="1319404" y="732896"/>
+                  </a:lnTo>
+                  <a:lnTo>
+                    <a:pt x="1389749" y="756777"/>
+                  </a:lnTo>
+                  <a:lnTo>
+                    <a:pt x="1460093" y="779570"/>
+                  </a:lnTo>
+                  <a:lnTo>
+                    <a:pt x="1530437" y="801325"/>
+                  </a:lnTo>
+                  <a:lnTo>
+                    <a:pt x="1600782" y="822089"/>
+                  </a:lnTo>
+                  <a:lnTo>
+                    <a:pt x="1671126" y="841907"/>
+                  </a:lnTo>
+                  <a:lnTo>
+                    <a:pt x="1741471" y="860823"/>
+                  </a:lnTo>
+                  <a:lnTo>
+                    <a:pt x="1811815" y="878877"/>
+                  </a:lnTo>
+                  <a:lnTo>
+                    <a:pt x="1882160" y="896109"/>
+                  </a:lnTo>
+                  <a:lnTo>
+                    <a:pt x="1952504" y="912555"/>
+                  </a:lnTo>
+                  <a:lnTo>
+                    <a:pt x="2022849" y="928253"/>
+                  </a:lnTo>
+                  <a:lnTo>
+                    <a:pt x="2093193" y="943236"/>
+                  </a:lnTo>
+                  <a:lnTo>
+                    <a:pt x="2163538" y="957536"/>
+                  </a:lnTo>
+                  <a:lnTo>
+                    <a:pt x="2233882" y="959532"/>
+                  </a:lnTo>
+                  <a:lnTo>
+                    <a:pt x="2304227" y="961227"/>
+                  </a:lnTo>
+                  <a:lnTo>
+                    <a:pt x="2374571" y="962913"/>
+                  </a:lnTo>
+                  <a:lnTo>
+                    <a:pt x="2444916" y="964589"/>
+                  </a:lnTo>
+                  <a:lnTo>
+                    <a:pt x="2515260" y="966255"/>
+                  </a:lnTo>
+                  <a:lnTo>
+                    <a:pt x="2585605" y="967912"/>
+                  </a:lnTo>
+                  <a:lnTo>
+                    <a:pt x="2655949" y="969560"/>
+                  </a:lnTo>
+                  <a:lnTo>
+                    <a:pt x="2726294" y="971198"/>
+                  </a:lnTo>
+                  <a:lnTo>
+                    <a:pt x="2796638" y="972827"/>
+                  </a:lnTo>
+                  <a:lnTo>
+                    <a:pt x="2866983" y="974446"/>
+                  </a:lnTo>
+                  <a:lnTo>
+                    <a:pt x="2937327" y="976056"/>
+                  </a:lnTo>
+                  <a:lnTo>
+                    <a:pt x="3007672" y="977658"/>
+                  </a:lnTo>
+                  <a:lnTo>
+                    <a:pt x="3078016" y="979250"/>
+                  </a:lnTo>
+                  <a:lnTo>
+                    <a:pt x="3148361" y="980833"/>
+                  </a:lnTo>
+                  <a:lnTo>
+                    <a:pt x="3218705" y="982406"/>
+                  </a:lnTo>
+                  <a:lnTo>
+                    <a:pt x="3289050" y="983971"/>
+                  </a:lnTo>
+                  <a:lnTo>
+                    <a:pt x="3359394" y="985527"/>
+                  </a:lnTo>
+                  <a:lnTo>
+                    <a:pt x="3429739" y="987075"/>
+                  </a:lnTo>
+                  <a:lnTo>
+                    <a:pt x="3500083" y="988613"/>
+                  </a:lnTo>
+                  <a:lnTo>
+                    <a:pt x="3570428" y="990143"/>
+                  </a:lnTo>
+                  <a:lnTo>
+                    <a:pt x="3640772" y="991663"/>
+                  </a:lnTo>
+                  <a:lnTo>
+                    <a:pt x="3711117" y="993176"/>
+                  </a:lnTo>
+                  <a:lnTo>
+                    <a:pt x="3781461" y="994679"/>
+                  </a:lnTo>
+                  <a:lnTo>
+                    <a:pt x="3851806" y="996174"/>
+                  </a:lnTo>
+                  <a:lnTo>
+                    <a:pt x="3922150" y="997661"/>
+                  </a:lnTo>
+                  <a:lnTo>
+                    <a:pt x="3992495" y="999139"/>
+                  </a:lnTo>
+                  <a:lnTo>
+                    <a:pt x="4062839" y="1000609"/>
+                  </a:lnTo>
+                  <a:lnTo>
+                    <a:pt x="4133184" y="1002070"/>
+                  </a:lnTo>
+                  <a:lnTo>
+                    <a:pt x="4203528" y="1003523"/>
+                  </a:lnTo>
+                  <a:lnTo>
+                    <a:pt x="4273873" y="1004968"/>
+                  </a:lnTo>
+                  <a:lnTo>
+                    <a:pt x="4344217" y="1006404"/>
+                  </a:lnTo>
+                  <a:lnTo>
+                    <a:pt x="4414562" y="1007832"/>
+                  </a:lnTo>
+                  <a:lnTo>
+                    <a:pt x="4484906" y="1009252"/>
+                  </a:lnTo>
+                  <a:lnTo>
+                    <a:pt x="4555251" y="1010665"/>
+                  </a:lnTo>
+                  <a:lnTo>
+                    <a:pt x="4625595" y="1012069"/>
+                  </a:lnTo>
+                  <a:lnTo>
+                    <a:pt x="4695940" y="1013465"/>
+                  </a:lnTo>
+                  <a:lnTo>
+                    <a:pt x="4766284" y="1014853"/>
+                  </a:lnTo>
+                  <a:lnTo>
+                    <a:pt x="4836629" y="1016233"/>
+                  </a:lnTo>
+                  <a:lnTo>
+                    <a:pt x="4906973" y="1017605"/>
+                  </a:lnTo>
+                  <a:lnTo>
+                    <a:pt x="4977318" y="1018970"/>
+                  </a:lnTo>
+                  <a:lnTo>
+                    <a:pt x="5047662" y="1020326"/>
+                  </a:lnTo>
+                  <a:lnTo>
+                    <a:pt x="5118007" y="1021675"/>
+                  </a:lnTo>
+                  <a:lnTo>
+                    <a:pt x="5188351" y="1023017"/>
+                  </a:lnTo>
+                  <a:lnTo>
+                    <a:pt x="5258695" y="1024350"/>
+                  </a:lnTo>
+                  <a:lnTo>
+                    <a:pt x="5329040" y="1025676"/>
+                  </a:lnTo>
+                  <a:lnTo>
+                    <a:pt x="5399384" y="1026995"/>
+                  </a:lnTo>
+                  <a:lnTo>
+                    <a:pt x="5469729" y="1028306"/>
+                  </a:lnTo>
+                  <a:lnTo>
+                    <a:pt x="5540073" y="1029609"/>
+                  </a:lnTo>
+                  <a:lnTo>
+                    <a:pt x="5610418" y="1030906"/>
+                  </a:lnTo>
+                  <a:lnTo>
+                    <a:pt x="5680762" y="1032194"/>
+                  </a:lnTo>
+                  <a:lnTo>
+                    <a:pt x="5751107" y="1033476"/>
+                  </a:lnTo>
+                  <a:lnTo>
+                    <a:pt x="5821451" y="1034750"/>
+                  </a:lnTo>
+                  <a:lnTo>
+                    <a:pt x="5891796" y="1036017"/>
                   </a:lnTo>
                 </a:path>
               </a:pathLst>
@@ -4150,312 +3860,637 @@
           </p:nvSpPr>
           <p:spPr>
             <a:xfrm>
-              <a:off x="1172049" y="2791801"/>
-              <a:ext cx="7090630" cy="2558039"/>
+              <a:off x="1235312" y="3010970"/>
+              <a:ext cx="6964104" cy="363995"/>
             </a:xfrm>
             <a:custGeom>
               <a:avLst/>
               <a:pathLst>
-                <a:path w="7090630" h="2558039">
+                <a:path w="6964104" h="363995">
+                  <a:moveTo>
+                    <a:pt x="6964104" y="363995"/>
+                  </a:moveTo>
+                  <a:lnTo>
+                    <a:pt x="6893760" y="362786"/>
+                  </a:lnTo>
+                  <a:lnTo>
+                    <a:pt x="6823415" y="361520"/>
+                  </a:lnTo>
+                  <a:lnTo>
+                    <a:pt x="6753071" y="360193"/>
+                  </a:lnTo>
+                  <a:lnTo>
+                    <a:pt x="6682726" y="358803"/>
+                  </a:lnTo>
+                  <a:lnTo>
+                    <a:pt x="6612382" y="357346"/>
+                  </a:lnTo>
+                  <a:lnTo>
+                    <a:pt x="6542037" y="355820"/>
+                  </a:lnTo>
+                  <a:lnTo>
+                    <a:pt x="6471693" y="354221"/>
+                  </a:lnTo>
+                  <a:lnTo>
+                    <a:pt x="6401348" y="352546"/>
+                  </a:lnTo>
+                  <a:lnTo>
+                    <a:pt x="6331004" y="350791"/>
+                  </a:lnTo>
+                  <a:lnTo>
+                    <a:pt x="6260659" y="348952"/>
+                  </a:lnTo>
+                  <a:lnTo>
+                    <a:pt x="6190315" y="347026"/>
+                  </a:lnTo>
+                  <a:lnTo>
+                    <a:pt x="6119970" y="345007"/>
+                  </a:lnTo>
+                  <a:lnTo>
+                    <a:pt x="6049626" y="342892"/>
+                  </a:lnTo>
+                  <a:lnTo>
+                    <a:pt x="5979281" y="340677"/>
+                  </a:lnTo>
+                  <a:lnTo>
+                    <a:pt x="5908937" y="338355"/>
+                  </a:lnTo>
+                  <a:lnTo>
+                    <a:pt x="5838592" y="335923"/>
+                  </a:lnTo>
+                  <a:lnTo>
+                    <a:pt x="5768248" y="333375"/>
+                  </a:lnTo>
+                  <a:lnTo>
+                    <a:pt x="5697903" y="330705"/>
+                  </a:lnTo>
+                  <a:lnTo>
+                    <a:pt x="5627559" y="327907"/>
+                  </a:lnTo>
+                  <a:lnTo>
+                    <a:pt x="5557214" y="324976"/>
+                  </a:lnTo>
+                  <a:lnTo>
+                    <a:pt x="5486870" y="321906"/>
+                  </a:lnTo>
+                  <a:lnTo>
+                    <a:pt x="5416525" y="318688"/>
+                  </a:lnTo>
+                  <a:lnTo>
+                    <a:pt x="5346181" y="315318"/>
+                  </a:lnTo>
+                  <a:lnTo>
+                    <a:pt x="5275836" y="311786"/>
+                  </a:lnTo>
+                  <a:lnTo>
+                    <a:pt x="5205492" y="308086"/>
+                  </a:lnTo>
+                  <a:lnTo>
+                    <a:pt x="5135147" y="304209"/>
+                  </a:lnTo>
+                  <a:lnTo>
+                    <a:pt x="5064803" y="300147"/>
+                  </a:lnTo>
+                  <a:lnTo>
+                    <a:pt x="4994458" y="295892"/>
+                  </a:lnTo>
+                  <a:lnTo>
+                    <a:pt x="4924114" y="291433"/>
+                  </a:lnTo>
+                  <a:lnTo>
+                    <a:pt x="4853769" y="286762"/>
+                  </a:lnTo>
+                  <a:lnTo>
+                    <a:pt x="4783425" y="281867"/>
+                  </a:lnTo>
+                  <a:lnTo>
+                    <a:pt x="4713080" y="276739"/>
+                  </a:lnTo>
+                  <a:lnTo>
+                    <a:pt x="4642736" y="271367"/>
+                  </a:lnTo>
+                  <a:lnTo>
+                    <a:pt x="4572391" y="265738"/>
+                  </a:lnTo>
+                  <a:lnTo>
+                    <a:pt x="4502047" y="259840"/>
+                  </a:lnTo>
+                  <a:lnTo>
+                    <a:pt x="4431702" y="253661"/>
+                  </a:lnTo>
+                  <a:lnTo>
+                    <a:pt x="4361358" y="247187"/>
+                  </a:lnTo>
+                  <a:lnTo>
+                    <a:pt x="4291013" y="240404"/>
+                  </a:lnTo>
+                  <a:lnTo>
+                    <a:pt x="4220669" y="233297"/>
+                  </a:lnTo>
+                  <a:lnTo>
+                    <a:pt x="4150324" y="225852"/>
+                  </a:lnTo>
+                  <a:lnTo>
+                    <a:pt x="4079980" y="218051"/>
+                  </a:lnTo>
+                  <a:lnTo>
+                    <a:pt x="4009635" y="209877"/>
+                  </a:lnTo>
+                  <a:lnTo>
+                    <a:pt x="3939291" y="201314"/>
+                  </a:lnTo>
+                  <a:lnTo>
+                    <a:pt x="3868946" y="192342"/>
+                  </a:lnTo>
+                  <a:lnTo>
+                    <a:pt x="3798602" y="182942"/>
+                  </a:lnTo>
+                  <a:lnTo>
+                    <a:pt x="3728257" y="173093"/>
+                  </a:lnTo>
+                  <a:lnTo>
+                    <a:pt x="3657913" y="162774"/>
+                  </a:lnTo>
+                  <a:lnTo>
+                    <a:pt x="3587569" y="151963"/>
+                  </a:lnTo>
+                  <a:lnTo>
+                    <a:pt x="3517224" y="140636"/>
+                  </a:lnTo>
+                  <a:lnTo>
+                    <a:pt x="3446880" y="128768"/>
+                  </a:lnTo>
+                  <a:lnTo>
+                    <a:pt x="3376535" y="116334"/>
+                  </a:lnTo>
+                  <a:lnTo>
+                    <a:pt x="3306191" y="103307"/>
+                  </a:lnTo>
+                  <a:lnTo>
+                    <a:pt x="3235846" y="89949"/>
+                  </a:lnTo>
+                  <a:lnTo>
+                    <a:pt x="3165502" y="88234"/>
+                  </a:lnTo>
+                  <a:lnTo>
+                    <a:pt x="3095157" y="86510"/>
+                  </a:lnTo>
+                  <a:lnTo>
+                    <a:pt x="3024813" y="84776"/>
+                  </a:lnTo>
+                  <a:lnTo>
+                    <a:pt x="2954468" y="83031"/>
+                  </a:lnTo>
+                  <a:lnTo>
+                    <a:pt x="2884124" y="81277"/>
+                  </a:lnTo>
+                  <a:lnTo>
+                    <a:pt x="2813779" y="79513"/>
+                  </a:lnTo>
+                  <a:lnTo>
+                    <a:pt x="2743435" y="77738"/>
+                  </a:lnTo>
+                  <a:lnTo>
+                    <a:pt x="2673090" y="75953"/>
+                  </a:lnTo>
+                  <a:lnTo>
+                    <a:pt x="2602746" y="74159"/>
+                  </a:lnTo>
+                  <a:lnTo>
+                    <a:pt x="2532401" y="72353"/>
+                  </a:lnTo>
+                  <a:lnTo>
+                    <a:pt x="2462057" y="70538"/>
+                  </a:lnTo>
+                  <a:lnTo>
+                    <a:pt x="2391712" y="68712"/>
+                  </a:lnTo>
+                  <a:lnTo>
+                    <a:pt x="2321368" y="66876"/>
+                  </a:lnTo>
+                  <a:lnTo>
+                    <a:pt x="2251023" y="65029"/>
+                  </a:lnTo>
+                  <a:lnTo>
+                    <a:pt x="2180679" y="63172"/>
+                  </a:lnTo>
+                  <a:lnTo>
+                    <a:pt x="2110334" y="61303"/>
+                  </a:lnTo>
+                  <a:lnTo>
+                    <a:pt x="2039990" y="59425"/>
+                  </a:lnTo>
+                  <a:lnTo>
+                    <a:pt x="1969645" y="57535"/>
+                  </a:lnTo>
+                  <a:lnTo>
+                    <a:pt x="1899301" y="55635"/>
+                  </a:lnTo>
+                  <a:lnTo>
+                    <a:pt x="1828956" y="53724"/>
+                  </a:lnTo>
+                  <a:lnTo>
+                    <a:pt x="1758612" y="51801"/>
+                  </a:lnTo>
+                  <a:lnTo>
+                    <a:pt x="1688267" y="49868"/>
+                  </a:lnTo>
+                  <a:lnTo>
+                    <a:pt x="1617923" y="47924"/>
+                  </a:lnTo>
+                  <a:lnTo>
+                    <a:pt x="1547578" y="45969"/>
+                  </a:lnTo>
+                  <a:lnTo>
+                    <a:pt x="1477234" y="44002"/>
+                  </a:lnTo>
+                  <a:lnTo>
+                    <a:pt x="1406889" y="42024"/>
+                  </a:lnTo>
+                  <a:lnTo>
+                    <a:pt x="1336545" y="40035"/>
+                  </a:lnTo>
+                  <a:lnTo>
+                    <a:pt x="1266200" y="38034"/>
+                  </a:lnTo>
+                  <a:lnTo>
+                    <a:pt x="1195856" y="36022"/>
+                  </a:lnTo>
+                  <a:lnTo>
+                    <a:pt x="1125511" y="33999"/>
+                  </a:lnTo>
+                  <a:lnTo>
+                    <a:pt x="1055167" y="31964"/>
+                  </a:lnTo>
+                  <a:lnTo>
+                    <a:pt x="984822" y="29917"/>
+                  </a:lnTo>
+                  <a:lnTo>
+                    <a:pt x="914478" y="27858"/>
+                  </a:lnTo>
+                  <a:lnTo>
+                    <a:pt x="844133" y="25788"/>
+                  </a:lnTo>
+                  <a:lnTo>
+                    <a:pt x="773789" y="23706"/>
+                  </a:lnTo>
+                  <a:lnTo>
+                    <a:pt x="703444" y="21612"/>
+                  </a:lnTo>
+                  <a:lnTo>
+                    <a:pt x="633100" y="19506"/>
+                  </a:lnTo>
+                  <a:lnTo>
+                    <a:pt x="562755" y="17387"/>
+                  </a:lnTo>
+                  <a:lnTo>
+                    <a:pt x="492411" y="15257"/>
+                  </a:lnTo>
+                  <a:lnTo>
+                    <a:pt x="422066" y="13115"/>
+                  </a:lnTo>
+                  <a:lnTo>
+                    <a:pt x="351722" y="10960"/>
+                  </a:lnTo>
+                  <a:lnTo>
+                    <a:pt x="281377" y="8793"/>
+                  </a:lnTo>
+                  <a:lnTo>
+                    <a:pt x="211033" y="6613"/>
+                  </a:lnTo>
+                  <a:lnTo>
+                    <a:pt x="140688" y="4421"/>
+                  </a:lnTo>
+                  <a:lnTo>
+                    <a:pt x="70344" y="2217"/>
+                  </a:lnTo>
+                  <a:lnTo>
+                    <a:pt x="0" y="0"/>
+                  </a:lnTo>
+                </a:path>
+              </a:pathLst>
+            </a:custGeom>
+          </p:spPr>
+          <p:txBody>
+            <a:bodyPr/>
+            <a:lstStyle/>
+            <a:p/>
+          </p:txBody>
+        </p:sp>
+        <p:sp>
+          <p:nvSpPr>
+            <p:cNvPr id="24" name="pl24"/>
+            <p:cNvSpPr/>
+            <p:nvPr/>
+          </p:nvSpPr>
+          <p:spPr>
+            <a:xfrm>
+              <a:off x="1235312" y="2402309"/>
+              <a:ext cx="6964104" cy="923136"/>
+            </a:xfrm>
+            <a:custGeom>
+              <a:avLst/>
+              <a:pathLst>
+                <a:path w="6964104" h="923136">
                   <a:moveTo>
                     <a:pt x="0" y="0"/>
                   </a:moveTo>
                   <a:lnTo>
-                    <a:pt x="71622" y="71417"/>
-                  </a:lnTo>
-                  <a:lnTo>
-                    <a:pt x="143245" y="140990"/>
-                  </a:lnTo>
-                  <a:lnTo>
-                    <a:pt x="214867" y="208767"/>
-                  </a:lnTo>
-                  <a:lnTo>
-                    <a:pt x="286490" y="274793"/>
-                  </a:lnTo>
-                  <a:lnTo>
-                    <a:pt x="358112" y="339114"/>
-                  </a:lnTo>
-                  <a:lnTo>
-                    <a:pt x="429735" y="401774"/>
-                  </a:lnTo>
-                  <a:lnTo>
-                    <a:pt x="501357" y="462816"/>
-                  </a:lnTo>
-                  <a:lnTo>
-                    <a:pt x="572980" y="522282"/>
-                  </a:lnTo>
-                  <a:lnTo>
-                    <a:pt x="644602" y="580211"/>
-                  </a:lnTo>
-                  <a:lnTo>
-                    <a:pt x="716225" y="636645"/>
-                  </a:lnTo>
-                  <a:lnTo>
-                    <a:pt x="787847" y="691621"/>
-                  </a:lnTo>
-                  <a:lnTo>
-                    <a:pt x="859470" y="745178"/>
-                  </a:lnTo>
-                  <a:lnTo>
-                    <a:pt x="931092" y="797351"/>
-                  </a:lnTo>
-                  <a:lnTo>
-                    <a:pt x="1002715" y="848177"/>
-                  </a:lnTo>
-                  <a:lnTo>
-                    <a:pt x="1074337" y="897691"/>
-                  </a:lnTo>
-                  <a:lnTo>
-                    <a:pt x="1145960" y="945925"/>
-                  </a:lnTo>
-                  <a:lnTo>
-                    <a:pt x="1217582" y="992915"/>
-                  </a:lnTo>
-                  <a:lnTo>
-                    <a:pt x="1289205" y="1038690"/>
-                  </a:lnTo>
-                  <a:lnTo>
-                    <a:pt x="1360827" y="1083284"/>
-                  </a:lnTo>
-                  <a:lnTo>
-                    <a:pt x="1432450" y="1126726"/>
-                  </a:lnTo>
-                  <a:lnTo>
-                    <a:pt x="1504073" y="1169045"/>
-                  </a:lnTo>
-                  <a:lnTo>
-                    <a:pt x="1575695" y="1210273"/>
-                  </a:lnTo>
-                  <a:lnTo>
-                    <a:pt x="1647318" y="1250435"/>
-                  </a:lnTo>
-                  <a:lnTo>
-                    <a:pt x="1718940" y="1289560"/>
-                  </a:lnTo>
-                  <a:lnTo>
-                    <a:pt x="1790563" y="1327675"/>
-                  </a:lnTo>
-                  <a:lnTo>
-                    <a:pt x="1862185" y="1364805"/>
-                  </a:lnTo>
-                  <a:lnTo>
-                    <a:pt x="1933808" y="1400977"/>
-                  </a:lnTo>
-                  <a:lnTo>
-                    <a:pt x="2005430" y="1436214"/>
-                  </a:lnTo>
-                  <a:lnTo>
-                    <a:pt x="2077053" y="1470542"/>
-                  </a:lnTo>
-                  <a:lnTo>
-                    <a:pt x="2148675" y="1503983"/>
-                  </a:lnTo>
-                  <a:lnTo>
-                    <a:pt x="2220298" y="1536560"/>
-                  </a:lnTo>
-                  <a:lnTo>
-                    <a:pt x="2291920" y="1568296"/>
-                  </a:lnTo>
-                  <a:lnTo>
-                    <a:pt x="2363543" y="1599212"/>
-                  </a:lnTo>
-                  <a:lnTo>
-                    <a:pt x="2435165" y="1629330"/>
-                  </a:lnTo>
-                  <a:lnTo>
-                    <a:pt x="2506788" y="1658671"/>
-                  </a:lnTo>
-                  <a:lnTo>
-                    <a:pt x="2578410" y="1687253"/>
-                  </a:lnTo>
-                  <a:lnTo>
-                    <a:pt x="2650033" y="1715097"/>
-                  </a:lnTo>
-                  <a:lnTo>
-                    <a:pt x="2721655" y="1742223"/>
-                  </a:lnTo>
-                  <a:lnTo>
-                    <a:pt x="2793278" y="1768647"/>
-                  </a:lnTo>
-                  <a:lnTo>
-                    <a:pt x="2864901" y="1794390"/>
-                  </a:lnTo>
-                  <a:lnTo>
-                    <a:pt x="2936523" y="1819467"/>
-                  </a:lnTo>
-                  <a:lnTo>
-                    <a:pt x="3008146" y="1843897"/>
-                  </a:lnTo>
-                  <a:lnTo>
-                    <a:pt x="3079768" y="1867696"/>
-                  </a:lnTo>
-                  <a:lnTo>
-                    <a:pt x="3151391" y="1890881"/>
-                  </a:lnTo>
-                  <a:lnTo>
-                    <a:pt x="3223013" y="1913466"/>
-                  </a:lnTo>
-                  <a:lnTo>
-                    <a:pt x="3294636" y="1935469"/>
-                  </a:lnTo>
-                  <a:lnTo>
-                    <a:pt x="3366258" y="1956903"/>
-                  </a:lnTo>
-                  <a:lnTo>
-                    <a:pt x="3437881" y="1977784"/>
-                  </a:lnTo>
-                  <a:lnTo>
-                    <a:pt x="3509503" y="1998125"/>
-                  </a:lnTo>
-                  <a:lnTo>
-                    <a:pt x="3581126" y="2017941"/>
-                  </a:lnTo>
-                  <a:lnTo>
-                    <a:pt x="3652748" y="2037246"/>
-                  </a:lnTo>
-                  <a:lnTo>
-                    <a:pt x="3724371" y="2056051"/>
-                  </a:lnTo>
-                  <a:lnTo>
-                    <a:pt x="3795993" y="2074371"/>
-                  </a:lnTo>
-                  <a:lnTo>
-                    <a:pt x="3867616" y="2092219"/>
-                  </a:lnTo>
-                  <a:lnTo>
-                    <a:pt x="3939238" y="2109605"/>
-                  </a:lnTo>
-                  <a:lnTo>
-                    <a:pt x="4010861" y="2126542"/>
-                  </a:lnTo>
-                  <a:lnTo>
-                    <a:pt x="4082483" y="2143042"/>
-                  </a:lnTo>
-                  <a:lnTo>
-                    <a:pt x="4154106" y="2159115"/>
-                  </a:lnTo>
-                  <a:lnTo>
-                    <a:pt x="4225729" y="2174774"/>
-                  </a:lnTo>
-                  <a:lnTo>
-                    <a:pt x="4297351" y="2190028"/>
-                  </a:lnTo>
-                  <a:lnTo>
-                    <a:pt x="4368974" y="2204888"/>
-                  </a:lnTo>
-                  <a:lnTo>
-                    <a:pt x="4440596" y="2219364"/>
-                  </a:lnTo>
-                  <a:lnTo>
-                    <a:pt x="4512219" y="2233467"/>
-                  </a:lnTo>
-                  <a:lnTo>
-                    <a:pt x="4583841" y="2247205"/>
-                  </a:lnTo>
-                  <a:lnTo>
-                    <a:pt x="4655464" y="2260589"/>
-                  </a:lnTo>
-                  <a:lnTo>
-                    <a:pt x="4727086" y="2273627"/>
-                  </a:lnTo>
-                  <a:lnTo>
-                    <a:pt x="4798709" y="2286328"/>
-                  </a:lnTo>
-                  <a:lnTo>
-                    <a:pt x="4870331" y="2298702"/>
-                  </a:lnTo>
-                  <a:lnTo>
-                    <a:pt x="4941954" y="2310755"/>
-                  </a:lnTo>
-                  <a:lnTo>
-                    <a:pt x="5013576" y="2322498"/>
-                  </a:lnTo>
-                  <a:lnTo>
-                    <a:pt x="5085199" y="2333937"/>
-                  </a:lnTo>
-                  <a:lnTo>
-                    <a:pt x="5156821" y="2345081"/>
-                  </a:lnTo>
-                  <a:lnTo>
-                    <a:pt x="5228444" y="2355937"/>
-                  </a:lnTo>
-                  <a:lnTo>
-                    <a:pt x="5300066" y="2366512"/>
-                  </a:lnTo>
-                  <a:lnTo>
-                    <a:pt x="5371689" y="2376815"/>
-                  </a:lnTo>
-                  <a:lnTo>
-                    <a:pt x="5443311" y="2386851"/>
-                  </a:lnTo>
-                  <a:lnTo>
-                    <a:pt x="5514934" y="2396628"/>
-                  </a:lnTo>
-                  <a:lnTo>
-                    <a:pt x="5586557" y="2406153"/>
-                  </a:lnTo>
-                  <a:lnTo>
-                    <a:pt x="5658179" y="2415432"/>
-                  </a:lnTo>
-                  <a:lnTo>
-                    <a:pt x="5729802" y="2424471"/>
-                  </a:lnTo>
-                  <a:lnTo>
-                    <a:pt x="5801424" y="2433277"/>
-                  </a:lnTo>
-                  <a:lnTo>
-                    <a:pt x="5873047" y="2441855"/>
-                  </a:lnTo>
-                  <a:lnTo>
-                    <a:pt x="5944669" y="2450212"/>
-                  </a:lnTo>
-                  <a:lnTo>
-                    <a:pt x="6016292" y="2458353"/>
-                  </a:lnTo>
-                  <a:lnTo>
-                    <a:pt x="6087914" y="2466284"/>
-                  </a:lnTo>
-                  <a:lnTo>
-                    <a:pt x="6159537" y="2474010"/>
-                  </a:lnTo>
-                  <a:lnTo>
-                    <a:pt x="6231159" y="2481536"/>
-                  </a:lnTo>
-                  <a:lnTo>
-                    <a:pt x="6302782" y="2488868"/>
-                  </a:lnTo>
-                  <a:lnTo>
-                    <a:pt x="6374404" y="2496011"/>
-                  </a:lnTo>
-                  <a:lnTo>
-                    <a:pt x="6446027" y="2502969"/>
-                  </a:lnTo>
-                  <a:lnTo>
-                    <a:pt x="6517649" y="2509747"/>
-                  </a:lnTo>
-                  <a:lnTo>
-                    <a:pt x="6589272" y="2516351"/>
-                  </a:lnTo>
-                  <a:lnTo>
-                    <a:pt x="6660894" y="2522784"/>
-                  </a:lnTo>
-                  <a:lnTo>
-                    <a:pt x="6732517" y="2529051"/>
-                  </a:lnTo>
-                  <a:lnTo>
-                    <a:pt x="6804139" y="2535156"/>
-                  </a:lnTo>
-                  <a:lnTo>
-                    <a:pt x="6875762" y="2541103"/>
-                  </a:lnTo>
-                  <a:lnTo>
-                    <a:pt x="6947385" y="2546897"/>
-                  </a:lnTo>
-                  <a:lnTo>
-                    <a:pt x="7019007" y="2552541"/>
-                  </a:lnTo>
-                  <a:lnTo>
-                    <a:pt x="7090630" y="2558039"/>
+                    <a:pt x="70344" y="25772"/>
+                  </a:lnTo>
+                  <a:lnTo>
+                    <a:pt x="140688" y="50880"/>
+                  </a:lnTo>
+                  <a:lnTo>
+                    <a:pt x="211033" y="75339"/>
+                  </a:lnTo>
+                  <a:lnTo>
+                    <a:pt x="281377" y="99166"/>
+                  </a:lnTo>
+                  <a:lnTo>
+                    <a:pt x="351722" y="122378"/>
+                  </a:lnTo>
+                  <a:lnTo>
+                    <a:pt x="422066" y="144991"/>
+                  </a:lnTo>
+                  <a:lnTo>
+                    <a:pt x="492411" y="167019"/>
+                  </a:lnTo>
+                  <a:lnTo>
+                    <a:pt x="562755" y="188479"/>
+                  </a:lnTo>
+                  <a:lnTo>
+                    <a:pt x="633100" y="209384"/>
+                  </a:lnTo>
+                  <a:lnTo>
+                    <a:pt x="703444" y="229750"/>
+                  </a:lnTo>
+                  <a:lnTo>
+                    <a:pt x="773789" y="249589"/>
+                  </a:lnTo>
+                  <a:lnTo>
+                    <a:pt x="844133" y="268917"/>
+                  </a:lnTo>
+                  <a:lnTo>
+                    <a:pt x="914478" y="287745"/>
+                  </a:lnTo>
+                  <a:lnTo>
+                    <a:pt x="984822" y="306087"/>
+                  </a:lnTo>
+                  <a:lnTo>
+                    <a:pt x="1055167" y="323955"/>
+                  </a:lnTo>
+                  <a:lnTo>
+                    <a:pt x="1125511" y="341362"/>
+                  </a:lnTo>
+                  <a:lnTo>
+                    <a:pt x="1195856" y="358319"/>
+                  </a:lnTo>
+                  <a:lnTo>
+                    <a:pt x="1266200" y="374839"/>
+                  </a:lnTo>
+                  <a:lnTo>
+                    <a:pt x="1336545" y="390931"/>
+                  </a:lnTo>
+                  <a:lnTo>
+                    <a:pt x="1406889" y="406608"/>
+                  </a:lnTo>
+                  <a:lnTo>
+                    <a:pt x="1477234" y="421881"/>
+                  </a:lnTo>
+                  <a:lnTo>
+                    <a:pt x="1547578" y="436759"/>
+                  </a:lnTo>
+                  <a:lnTo>
+                    <a:pt x="1617923" y="451252"/>
+                  </a:lnTo>
+                  <a:lnTo>
+                    <a:pt x="1688267" y="465372"/>
+                  </a:lnTo>
+                  <a:lnTo>
+                    <a:pt x="1758612" y="479126"/>
+                  </a:lnTo>
+                  <a:lnTo>
+                    <a:pt x="1828956" y="492526"/>
+                  </a:lnTo>
+                  <a:lnTo>
+                    <a:pt x="1899301" y="505579"/>
+                  </a:lnTo>
+                  <a:lnTo>
+                    <a:pt x="1969645" y="518296"/>
+                  </a:lnTo>
+                  <a:lnTo>
+                    <a:pt x="2039990" y="530684"/>
+                  </a:lnTo>
+                  <a:lnTo>
+                    <a:pt x="2110334" y="542752"/>
+                  </a:lnTo>
+                  <a:lnTo>
+                    <a:pt x="2180679" y="554508"/>
+                  </a:lnTo>
+                  <a:lnTo>
+                    <a:pt x="2251023" y="565961"/>
+                  </a:lnTo>
+                  <a:lnTo>
+                    <a:pt x="2321368" y="577118"/>
+                  </a:lnTo>
+                  <a:lnTo>
+                    <a:pt x="2391712" y="587987"/>
+                  </a:lnTo>
+                  <a:lnTo>
+                    <a:pt x="2462057" y="598575"/>
+                  </a:lnTo>
+                  <a:lnTo>
+                    <a:pt x="2532401" y="608890"/>
+                  </a:lnTo>
+                  <a:lnTo>
+                    <a:pt x="2602746" y="618938"/>
+                  </a:lnTo>
+                  <a:lnTo>
+                    <a:pt x="2673090" y="628727"/>
+                  </a:lnTo>
+                  <a:lnTo>
+                    <a:pt x="2743435" y="638263"/>
+                  </a:lnTo>
+                  <a:lnTo>
+                    <a:pt x="2813779" y="647553"/>
+                  </a:lnTo>
+                  <a:lnTo>
+                    <a:pt x="2884124" y="656603"/>
+                  </a:lnTo>
+                  <a:lnTo>
+                    <a:pt x="2954468" y="665419"/>
+                  </a:lnTo>
+                  <a:lnTo>
+                    <a:pt x="3024813" y="674007"/>
+                  </a:lnTo>
+                  <a:lnTo>
+                    <a:pt x="3095157" y="682374"/>
+                  </a:lnTo>
+                  <a:lnTo>
+                    <a:pt x="3165502" y="690525"/>
+                  </a:lnTo>
+                  <a:lnTo>
+                    <a:pt x="3235846" y="698465"/>
+                  </a:lnTo>
+                  <a:lnTo>
+                    <a:pt x="3306191" y="706200"/>
+                  </a:lnTo>
+                  <a:lnTo>
+                    <a:pt x="3376535" y="713735"/>
+                  </a:lnTo>
+                  <a:lnTo>
+                    <a:pt x="3446880" y="721076"/>
+                  </a:lnTo>
+                  <a:lnTo>
+                    <a:pt x="3517224" y="728227"/>
+                  </a:lnTo>
+                  <a:lnTo>
+                    <a:pt x="3587569" y="735194"/>
+                  </a:lnTo>
+                  <a:lnTo>
+                    <a:pt x="3657913" y="741980"/>
+                  </a:lnTo>
+                  <a:lnTo>
+                    <a:pt x="3728257" y="748592"/>
+                  </a:lnTo>
+                  <a:lnTo>
+                    <a:pt x="3798602" y="755032"/>
+                  </a:lnTo>
+                  <a:lnTo>
+                    <a:pt x="3868946" y="761306"/>
+                  </a:lnTo>
+                  <a:lnTo>
+                    <a:pt x="3939291" y="767419"/>
+                  </a:lnTo>
+                  <a:lnTo>
+                    <a:pt x="4009635" y="773373"/>
+                  </a:lnTo>
+                  <a:lnTo>
+                    <a:pt x="4079980" y="779174"/>
+                  </a:lnTo>
+                  <a:lnTo>
+                    <a:pt x="4150324" y="784824"/>
+                  </a:lnTo>
+                  <a:lnTo>
+                    <a:pt x="4220669" y="790329"/>
+                  </a:lnTo>
+                  <a:lnTo>
+                    <a:pt x="4291013" y="795692"/>
+                  </a:lnTo>
+                  <a:lnTo>
+                    <a:pt x="4361358" y="800916"/>
+                  </a:lnTo>
+                  <a:lnTo>
+                    <a:pt x="4431702" y="806005"/>
+                  </a:lnTo>
+                  <a:lnTo>
+                    <a:pt x="4502047" y="810963"/>
+                  </a:lnTo>
+                  <a:lnTo>
+                    <a:pt x="4572391" y="815793"/>
+                  </a:lnTo>
+                  <a:lnTo>
+                    <a:pt x="4642736" y="820498"/>
+                  </a:lnTo>
+                  <a:lnTo>
+                    <a:pt x="4713080" y="825082"/>
+                  </a:lnTo>
+                  <a:lnTo>
+                    <a:pt x="4783425" y="829547"/>
+                  </a:lnTo>
+                  <a:lnTo>
+                    <a:pt x="4853769" y="833897"/>
+                  </a:lnTo>
+                  <a:lnTo>
+                    <a:pt x="4924114" y="838134"/>
+                  </a:lnTo>
+                  <a:lnTo>
+                    <a:pt x="4994458" y="842263"/>
+                  </a:lnTo>
+                  <a:lnTo>
+                    <a:pt x="5064803" y="846284"/>
+                  </a:lnTo>
+                  <a:lnTo>
+                    <a:pt x="5135147" y="850202"/>
+                  </a:lnTo>
+                  <a:lnTo>
+                    <a:pt x="5205492" y="854018"/>
+                  </a:lnTo>
+                  <a:lnTo>
+                    <a:pt x="5275836" y="857736"/>
+                  </a:lnTo>
+                  <a:lnTo>
+                    <a:pt x="5346181" y="861358"/>
+                  </a:lnTo>
+                  <a:lnTo>
+                    <a:pt x="5416525" y="864887"/>
+                  </a:lnTo>
+                  <a:lnTo>
+                    <a:pt x="5486870" y="868324"/>
+                  </a:lnTo>
+                  <a:lnTo>
+                    <a:pt x="5557214" y="871672"/>
+                  </a:lnTo>
+                  <a:lnTo>
+                    <a:pt x="5627559" y="874934"/>
+                  </a:lnTo>
+                  <a:lnTo>
+                    <a:pt x="5697903" y="878112"/>
+                  </a:lnTo>
+                  <a:lnTo>
+                    <a:pt x="5768248" y="881208"/>
+                  </a:lnTo>
+                  <a:lnTo>
+                    <a:pt x="5838592" y="884224"/>
+                  </a:lnTo>
+                  <a:lnTo>
+                    <a:pt x="5908937" y="887161"/>
+                  </a:lnTo>
+                  <a:lnTo>
+                    <a:pt x="5979281" y="890023"/>
+                  </a:lnTo>
+                  <a:lnTo>
+                    <a:pt x="6049626" y="892812"/>
+                  </a:lnTo>
+                  <a:lnTo>
+                    <a:pt x="6119970" y="895528"/>
+                  </a:lnTo>
+                  <a:lnTo>
+                    <a:pt x="6190315" y="898174"/>
+                  </a:lnTo>
+                  <a:lnTo>
+                    <a:pt x="6260659" y="900751"/>
+                  </a:lnTo>
+                  <a:lnTo>
+                    <a:pt x="6331004" y="903262"/>
+                  </a:lnTo>
+                  <a:lnTo>
+                    <a:pt x="6401348" y="905708"/>
+                  </a:lnTo>
+                  <a:lnTo>
+                    <a:pt x="6471693" y="908091"/>
+                  </a:lnTo>
+                  <a:lnTo>
+                    <a:pt x="6542037" y="910413"/>
+                  </a:lnTo>
+                  <a:lnTo>
+                    <a:pt x="6612382" y="912675"/>
+                  </a:lnTo>
+                  <a:lnTo>
+                    <a:pt x="6682726" y="914878"/>
+                  </a:lnTo>
+                  <a:lnTo>
+                    <a:pt x="6753071" y="917024"/>
+                  </a:lnTo>
+                  <a:lnTo>
+                    <a:pt x="6823415" y="919115"/>
+                  </a:lnTo>
+                  <a:lnTo>
+                    <a:pt x="6893760" y="921152"/>
+                  </a:lnTo>
+                  <a:lnTo>
+                    <a:pt x="6964104" y="923136"/>
                   </a:lnTo>
                 </a:path>
               </a:pathLst>
@@ -4478,27 +4513,27 @@
         </p:sp>
         <p:sp>
           <p:nvSpPr>
-            <p:cNvPr id="24" name="pl24"/>
+            <p:cNvPr id="25" name="pl25"/>
             <p:cNvSpPr/>
             <p:nvPr/>
           </p:nvSpPr>
           <p:spPr>
             <a:xfrm>
-              <a:off x="817517" y="4727786"/>
-              <a:ext cx="7799693" cy="0"/>
+              <a:off x="887106" y="3100960"/>
+              <a:ext cx="7660515" cy="0"/>
             </a:xfrm>
             <a:custGeom>
               <a:avLst/>
               <a:pathLst>
-                <a:path w="7799693" h="0">
+                <a:path w="7660515" h="0">
                   <a:moveTo>
                     <a:pt x="0" y="0"/>
                   </a:moveTo>
                   <a:lnTo>
-                    <a:pt x="7799693" y="0"/>
-                  </a:lnTo>
-                  <a:lnTo>
-                    <a:pt x="7799693" y="0"/>
+                    <a:pt x="7660515" y="0"/>
+                  </a:lnTo>
+                  <a:lnTo>
+                    <a:pt x="7660515" y="0"/>
                   </a:lnTo>
                 </a:path>
               </a:pathLst>
@@ -4521,21 +4556,21 @@
         </p:sp>
         <p:sp>
           <p:nvSpPr>
-            <p:cNvPr id="25" name="pl25"/>
+            <p:cNvPr id="26" name="pl26"/>
             <p:cNvSpPr/>
             <p:nvPr/>
           </p:nvSpPr>
           <p:spPr>
             <a:xfrm>
-              <a:off x="4468386" y="2073503"/>
-              <a:ext cx="0" cy="3649639"/>
+              <a:off x="4472829" y="2143092"/>
+              <a:ext cx="0" cy="1317069"/>
             </a:xfrm>
             <a:custGeom>
               <a:avLst/>
               <a:pathLst>
-                <a:path w="0" h="3649639">
+                <a:path w="0" h="1317069">
                   <a:moveTo>
-                    <a:pt x="0" y="3649639"/>
+                    <a:pt x="0" y="1317069"/>
                   </a:moveTo>
                   <a:lnTo>
                     <a:pt x="0" y="0"/>
@@ -4564,13 +4599,13 @@
         </p:sp>
         <p:sp>
           <p:nvSpPr>
-            <p:cNvPr id="26" name="tx26"/>
+            <p:cNvPr id="27" name="tx27"/>
             <p:cNvSpPr/>
             <p:nvPr/>
           </p:nvSpPr>
           <p:spPr>
             <a:xfrm>
-              <a:off x="692708" y="5517199"/>
+              <a:off x="762297" y="3360243"/>
               <a:ext cx="62179" cy="80101"/>
             </a:xfrm>
             <a:prstGeom prst="rect">
@@ -4610,13 +4645,13 @@
         </p:sp>
         <p:sp>
           <p:nvSpPr>
-            <p:cNvPr id="27" name="tx27"/>
+            <p:cNvPr id="28" name="tx28"/>
             <p:cNvSpPr/>
             <p:nvPr/>
           </p:nvSpPr>
           <p:spPr>
             <a:xfrm>
-              <a:off x="692708" y="4687735"/>
+              <a:off x="762297" y="3060909"/>
               <a:ext cx="62179" cy="80101"/>
             </a:xfrm>
             <a:prstGeom prst="rect">
@@ -4656,13 +4691,13 @@
         </p:sp>
         <p:sp>
           <p:nvSpPr>
-            <p:cNvPr id="28" name="tx28"/>
+            <p:cNvPr id="29" name="tx29"/>
             <p:cNvSpPr/>
             <p:nvPr/>
           </p:nvSpPr>
           <p:spPr>
             <a:xfrm>
-              <a:off x="692708" y="3858272"/>
+              <a:off x="762297" y="2761575"/>
               <a:ext cx="62179" cy="80101"/>
             </a:xfrm>
             <a:prstGeom prst="rect">
@@ -4702,13 +4737,13 @@
         </p:sp>
         <p:sp>
           <p:nvSpPr>
-            <p:cNvPr id="29" name="tx29"/>
+            <p:cNvPr id="30" name="tx30"/>
             <p:cNvSpPr/>
             <p:nvPr/>
           </p:nvSpPr>
           <p:spPr>
             <a:xfrm>
-              <a:off x="692708" y="3028808"/>
+              <a:off x="762297" y="2462242"/>
               <a:ext cx="62179" cy="80101"/>
             </a:xfrm>
             <a:prstGeom prst="rect">
@@ -4748,13 +4783,13 @@
         </p:sp>
         <p:sp>
           <p:nvSpPr>
-            <p:cNvPr id="30" name="tx30"/>
+            <p:cNvPr id="31" name="tx31"/>
             <p:cNvSpPr/>
             <p:nvPr/>
           </p:nvSpPr>
           <p:spPr>
             <a:xfrm>
-              <a:off x="692708" y="2199345"/>
+              <a:off x="762297" y="2162908"/>
               <a:ext cx="62179" cy="80101"/>
             </a:xfrm>
             <a:prstGeom prst="rect">
@@ -4794,13 +4829,13 @@
         </p:sp>
         <p:sp>
           <p:nvSpPr>
-            <p:cNvPr id="31" name="tx31"/>
+            <p:cNvPr id="32" name="tx32"/>
             <p:cNvSpPr/>
             <p:nvPr/>
           </p:nvSpPr>
           <p:spPr>
             <a:xfrm>
-              <a:off x="2478335" y="5785772"/>
+              <a:off x="2516846" y="3522791"/>
               <a:ext cx="161574" cy="80101"/>
             </a:xfrm>
             <a:prstGeom prst="rect">
@@ -4840,13 +4875,13 @@
         </p:sp>
         <p:sp>
           <p:nvSpPr>
-            <p:cNvPr id="32" name="tx32"/>
+            <p:cNvPr id="33" name="tx33"/>
             <p:cNvSpPr/>
             <p:nvPr/>
           </p:nvSpPr>
           <p:spPr>
             <a:xfrm>
-              <a:off x="4582608" y="5785772"/>
+              <a:off x="4584458" y="3522791"/>
               <a:ext cx="62179" cy="80101"/>
             </a:xfrm>
             <a:prstGeom prst="rect">
@@ -4886,13 +4921,13 @@
         </p:sp>
         <p:sp>
           <p:nvSpPr>
-            <p:cNvPr id="33" name="tx33"/>
+            <p:cNvPr id="34" name="tx34"/>
             <p:cNvSpPr/>
             <p:nvPr/>
           </p:nvSpPr>
           <p:spPr>
             <a:xfrm>
-              <a:off x="6606094" y="5785772"/>
+              <a:off x="6571282" y="3522791"/>
               <a:ext cx="124358" cy="80101"/>
             </a:xfrm>
             <a:prstGeom prst="rect">
@@ -4932,13 +4967,13 @@
         </p:sp>
         <p:sp>
           <p:nvSpPr>
-            <p:cNvPr id="34" name="tx34"/>
+            <p:cNvPr id="35" name="tx35"/>
             <p:cNvSpPr/>
             <p:nvPr/>
           </p:nvSpPr>
           <p:spPr>
             <a:xfrm>
-              <a:off x="2928340" y="5925448"/>
+              <a:off x="2928340" y="3662467"/>
               <a:ext cx="3578047" cy="100218"/>
             </a:xfrm>
             <a:prstGeom prst="rect">
@@ -4978,13 +5013,13 @@
         </p:sp>
         <p:sp>
           <p:nvSpPr>
-            <p:cNvPr id="35" name="tx35"/>
+            <p:cNvPr id="36" name="tx36"/>
             <p:cNvSpPr/>
             <p:nvPr/>
           </p:nvSpPr>
           <p:spPr>
             <a:xfrm rot="-5400000">
-              <a:off x="68446" y="3848213"/>
+              <a:off x="138035" y="2751517"/>
               <a:ext cx="1016904" cy="100218"/>
             </a:xfrm>
             <a:prstGeom prst="rect">
@@ -5024,13 +5059,13 @@
         </p:sp>
         <p:sp>
           <p:nvSpPr>
-            <p:cNvPr id="36" name="tx36"/>
+            <p:cNvPr id="37" name="tx37"/>
             <p:cNvSpPr/>
             <p:nvPr/>
           </p:nvSpPr>
           <p:spPr>
             <a:xfrm>
-              <a:off x="817517" y="1896563"/>
+              <a:off x="887106" y="1966152"/>
               <a:ext cx="6985375" cy="82021"/>
             </a:xfrm>
             <a:prstGeom prst="rect">
@@ -5070,13 +5105,3656 @@
         </p:sp>
         <p:sp>
           <p:nvSpPr>
-            <p:cNvPr id="37" name="tx37"/>
+            <p:cNvPr id="38" name="tx38"/>
             <p:cNvSpPr/>
             <p:nvPr/>
           </p:nvSpPr>
           <p:spPr>
             <a:xfrm>
-              <a:off x="817517" y="1669789"/>
+              <a:off x="887106" y="1739378"/>
+              <a:ext cx="2913186" cy="120152"/>
+            </a:xfrm>
+            <a:prstGeom prst="rect">
+              <a:avLst/>
+            </a:prstGeom>
+            <a:noFill/>
+          </p:spPr>
+          <p:txBody>
+            <a:bodyPr lIns="0" rIns="0" tIns="0" bIns="0" anchorCtr="1" anchor="ctr" wrap="none"/>
+            <a:lstStyle/>
+            <a:p>
+              <a:pPr algn="l" marL="0" marR="0" indent="0">
+                <a:lnSpc>
+                  <a:spcPts val="1320"/>
+                </a:lnSpc>
+                <a:spcBef>
+                  <a:spcPts val="0"/>
+                </a:spcBef>
+                <a:spcAft>
+                  <a:spcPts val="0"/>
+                </a:spcAft>
+              </a:pPr>
+              <a:r>
+                <a:rPr sz="1320">
+                  <a:solidFill>
+                    <a:srgbClr val="000000">
+                      <a:alpha val="100000"/>
+                    </a:srgbClr>
+                  </a:solidFill>
+                  <a:latin typeface="Helvetica"/>
+                  <a:cs typeface="Helvetica"/>
+                </a:rPr>
+                <a:t>Anemia Grade 3 (Carboplatin AUC ≥ 3)</a:t>
+              </a:r>
+            </a:p>
+          </p:txBody>
+        </p:sp>
+        <p:sp>
+          <p:nvSpPr>
+            <p:cNvPr id="39" name="pl39"/>
+            <p:cNvSpPr/>
+            <p:nvPr/>
+          </p:nvSpPr>
+          <p:spPr>
+            <a:xfrm>
+              <a:off x="887106" y="5444019"/>
+              <a:ext cx="7660515" cy="0"/>
+            </a:xfrm>
+            <a:custGeom>
+              <a:avLst/>
+              <a:pathLst>
+                <a:path w="7660515" h="0">
+                  <a:moveTo>
+                    <a:pt x="0" y="0"/>
+                  </a:moveTo>
+                  <a:lnTo>
+                    <a:pt x="7660515" y="0"/>
+                  </a:lnTo>
+                  <a:lnTo>
+                    <a:pt x="7660515" y="0"/>
+                  </a:lnTo>
+                </a:path>
+              </a:pathLst>
+            </a:custGeom>
+            <a:ln w="6775" cap="flat">
+              <a:solidFill>
+                <a:srgbClr val="EBEBEB">
+                  <a:alpha val="100000"/>
+                </a:srgbClr>
+              </a:solidFill>
+              <a:prstDash val="solid"/>
+              <a:round/>
+            </a:ln>
+          </p:spPr>
+          <p:txBody>
+            <a:bodyPr/>
+            <a:lstStyle/>
+            <a:p/>
+          </p:txBody>
+        </p:sp>
+        <p:sp>
+          <p:nvSpPr>
+            <p:cNvPr id="40" name="pl40"/>
+            <p:cNvSpPr/>
+            <p:nvPr/>
+          </p:nvSpPr>
+          <p:spPr>
+            <a:xfrm>
+              <a:off x="887106" y="5144686"/>
+              <a:ext cx="7660515" cy="0"/>
+            </a:xfrm>
+            <a:custGeom>
+              <a:avLst/>
+              <a:pathLst>
+                <a:path w="7660515" h="0">
+                  <a:moveTo>
+                    <a:pt x="0" y="0"/>
+                  </a:moveTo>
+                  <a:lnTo>
+                    <a:pt x="7660515" y="0"/>
+                  </a:lnTo>
+                  <a:lnTo>
+                    <a:pt x="7660515" y="0"/>
+                  </a:lnTo>
+                </a:path>
+              </a:pathLst>
+            </a:custGeom>
+            <a:ln w="6775" cap="flat">
+              <a:solidFill>
+                <a:srgbClr val="EBEBEB">
+                  <a:alpha val="100000"/>
+                </a:srgbClr>
+              </a:solidFill>
+              <a:prstDash val="solid"/>
+              <a:round/>
+            </a:ln>
+          </p:spPr>
+          <p:txBody>
+            <a:bodyPr/>
+            <a:lstStyle/>
+            <a:p/>
+          </p:txBody>
+        </p:sp>
+        <p:sp>
+          <p:nvSpPr>
+            <p:cNvPr id="41" name="pl41"/>
+            <p:cNvSpPr/>
+            <p:nvPr/>
+          </p:nvSpPr>
+          <p:spPr>
+            <a:xfrm>
+              <a:off x="887106" y="4845352"/>
+              <a:ext cx="7660515" cy="0"/>
+            </a:xfrm>
+            <a:custGeom>
+              <a:avLst/>
+              <a:pathLst>
+                <a:path w="7660515" h="0">
+                  <a:moveTo>
+                    <a:pt x="0" y="0"/>
+                  </a:moveTo>
+                  <a:lnTo>
+                    <a:pt x="7660515" y="0"/>
+                  </a:lnTo>
+                  <a:lnTo>
+                    <a:pt x="7660515" y="0"/>
+                  </a:lnTo>
+                </a:path>
+              </a:pathLst>
+            </a:custGeom>
+            <a:ln w="6775" cap="flat">
+              <a:solidFill>
+                <a:srgbClr val="EBEBEB">
+                  <a:alpha val="100000"/>
+                </a:srgbClr>
+              </a:solidFill>
+              <a:prstDash val="solid"/>
+              <a:round/>
+            </a:ln>
+          </p:spPr>
+          <p:txBody>
+            <a:bodyPr/>
+            <a:lstStyle/>
+            <a:p/>
+          </p:txBody>
+        </p:sp>
+        <p:sp>
+          <p:nvSpPr>
+            <p:cNvPr id="42" name="pl42"/>
+            <p:cNvSpPr/>
+            <p:nvPr/>
+          </p:nvSpPr>
+          <p:spPr>
+            <a:xfrm>
+              <a:off x="887106" y="4546018"/>
+              <a:ext cx="7660515" cy="0"/>
+            </a:xfrm>
+            <a:custGeom>
+              <a:avLst/>
+              <a:pathLst>
+                <a:path w="7660515" h="0">
+                  <a:moveTo>
+                    <a:pt x="0" y="0"/>
+                  </a:moveTo>
+                  <a:lnTo>
+                    <a:pt x="7660515" y="0"/>
+                  </a:lnTo>
+                  <a:lnTo>
+                    <a:pt x="7660515" y="0"/>
+                  </a:lnTo>
+                </a:path>
+              </a:pathLst>
+            </a:custGeom>
+            <a:ln w="6775" cap="flat">
+              <a:solidFill>
+                <a:srgbClr val="EBEBEB">
+                  <a:alpha val="100000"/>
+                </a:srgbClr>
+              </a:solidFill>
+              <a:prstDash val="solid"/>
+              <a:round/>
+            </a:ln>
+          </p:spPr>
+          <p:txBody>
+            <a:bodyPr/>
+            <a:lstStyle/>
+            <a:p/>
+          </p:txBody>
+        </p:sp>
+        <p:sp>
+          <p:nvSpPr>
+            <p:cNvPr id="43" name="pl43"/>
+            <p:cNvSpPr/>
+            <p:nvPr/>
+          </p:nvSpPr>
+          <p:spPr>
+            <a:xfrm>
+              <a:off x="983303" y="4336484"/>
+              <a:ext cx="0" cy="1317069"/>
+            </a:xfrm>
+            <a:custGeom>
+              <a:avLst/>
+              <a:pathLst>
+                <a:path w="0" h="1317069">
+                  <a:moveTo>
+                    <a:pt x="0" y="1317069"/>
+                  </a:moveTo>
+                  <a:lnTo>
+                    <a:pt x="0" y="0"/>
+                  </a:lnTo>
+                  <a:lnTo>
+                    <a:pt x="0" y="0"/>
+                  </a:lnTo>
+                </a:path>
+              </a:pathLst>
+            </a:custGeom>
+            <a:ln w="6775" cap="flat">
+              <a:solidFill>
+                <a:srgbClr val="EBEBEB">
+                  <a:alpha val="100000"/>
+                </a:srgbClr>
+              </a:solidFill>
+              <a:prstDash val="solid"/>
+              <a:round/>
+            </a:ln>
+          </p:spPr>
+          <p:txBody>
+            <a:bodyPr/>
+            <a:lstStyle/>
+            <a:p/>
+          </p:txBody>
+        </p:sp>
+        <p:sp>
+          <p:nvSpPr>
+            <p:cNvPr id="44" name="pl44"/>
+            <p:cNvSpPr/>
+            <p:nvPr/>
+          </p:nvSpPr>
+          <p:spPr>
+            <a:xfrm>
+              <a:off x="1790468" y="4336484"/>
+              <a:ext cx="0" cy="1317069"/>
+            </a:xfrm>
+            <a:custGeom>
+              <a:avLst/>
+              <a:pathLst>
+                <a:path w="0" h="1317069">
+                  <a:moveTo>
+                    <a:pt x="0" y="1317069"/>
+                  </a:moveTo>
+                  <a:lnTo>
+                    <a:pt x="0" y="0"/>
+                  </a:lnTo>
+                  <a:lnTo>
+                    <a:pt x="0" y="0"/>
+                  </a:lnTo>
+                </a:path>
+              </a:pathLst>
+            </a:custGeom>
+            <a:ln w="6775" cap="flat">
+              <a:solidFill>
+                <a:srgbClr val="EBEBEB">
+                  <a:alpha val="100000"/>
+                </a:srgbClr>
+              </a:solidFill>
+              <a:prstDash val="solid"/>
+              <a:round/>
+            </a:ln>
+          </p:spPr>
+          <p:txBody>
+            <a:bodyPr/>
+            <a:lstStyle/>
+            <a:p/>
+          </p:txBody>
+        </p:sp>
+        <p:sp>
+          <p:nvSpPr>
+            <p:cNvPr id="45" name="pl45"/>
+            <p:cNvSpPr/>
+            <p:nvPr/>
+          </p:nvSpPr>
+          <p:spPr>
+            <a:xfrm>
+              <a:off x="2597634" y="4336484"/>
+              <a:ext cx="0" cy="1317069"/>
+            </a:xfrm>
+            <a:custGeom>
+              <a:avLst/>
+              <a:pathLst>
+                <a:path w="0" h="1317069">
+                  <a:moveTo>
+                    <a:pt x="0" y="1317069"/>
+                  </a:moveTo>
+                  <a:lnTo>
+                    <a:pt x="0" y="0"/>
+                  </a:lnTo>
+                  <a:lnTo>
+                    <a:pt x="0" y="0"/>
+                  </a:lnTo>
+                </a:path>
+              </a:pathLst>
+            </a:custGeom>
+            <a:ln w="6775" cap="flat">
+              <a:solidFill>
+                <a:srgbClr val="EBEBEB">
+                  <a:alpha val="100000"/>
+                </a:srgbClr>
+              </a:solidFill>
+              <a:prstDash val="solid"/>
+              <a:round/>
+            </a:ln>
+          </p:spPr>
+          <p:txBody>
+            <a:bodyPr/>
+            <a:lstStyle/>
+            <a:p/>
+          </p:txBody>
+        </p:sp>
+        <p:sp>
+          <p:nvSpPr>
+            <p:cNvPr id="46" name="pl46"/>
+            <p:cNvSpPr/>
+            <p:nvPr/>
+          </p:nvSpPr>
+          <p:spPr>
+            <a:xfrm>
+              <a:off x="3404799" y="4336484"/>
+              <a:ext cx="0" cy="1317069"/>
+            </a:xfrm>
+            <a:custGeom>
+              <a:avLst/>
+              <a:pathLst>
+                <a:path w="0" h="1317069">
+                  <a:moveTo>
+                    <a:pt x="0" y="1317069"/>
+                  </a:moveTo>
+                  <a:lnTo>
+                    <a:pt x="0" y="0"/>
+                  </a:lnTo>
+                  <a:lnTo>
+                    <a:pt x="0" y="0"/>
+                  </a:lnTo>
+                </a:path>
+              </a:pathLst>
+            </a:custGeom>
+            <a:ln w="6775" cap="flat">
+              <a:solidFill>
+                <a:srgbClr val="EBEBEB">
+                  <a:alpha val="100000"/>
+                </a:srgbClr>
+              </a:solidFill>
+              <a:prstDash val="solid"/>
+              <a:round/>
+            </a:ln>
+          </p:spPr>
+          <p:txBody>
+            <a:bodyPr/>
+            <a:lstStyle/>
+            <a:p/>
+          </p:txBody>
+        </p:sp>
+        <p:sp>
+          <p:nvSpPr>
+            <p:cNvPr id="47" name="pl47"/>
+            <p:cNvSpPr/>
+            <p:nvPr/>
+          </p:nvSpPr>
+          <p:spPr>
+            <a:xfrm>
+              <a:off x="4211965" y="4336484"/>
+              <a:ext cx="0" cy="1317069"/>
+            </a:xfrm>
+            <a:custGeom>
+              <a:avLst/>
+              <a:pathLst>
+                <a:path w="0" h="1317069">
+                  <a:moveTo>
+                    <a:pt x="0" y="1317069"/>
+                  </a:moveTo>
+                  <a:lnTo>
+                    <a:pt x="0" y="0"/>
+                  </a:lnTo>
+                  <a:lnTo>
+                    <a:pt x="0" y="0"/>
+                  </a:lnTo>
+                </a:path>
+              </a:pathLst>
+            </a:custGeom>
+            <a:ln w="6775" cap="flat">
+              <a:solidFill>
+                <a:srgbClr val="EBEBEB">
+                  <a:alpha val="100000"/>
+                </a:srgbClr>
+              </a:solidFill>
+              <a:prstDash val="solid"/>
+              <a:round/>
+            </a:ln>
+          </p:spPr>
+          <p:txBody>
+            <a:bodyPr/>
+            <a:lstStyle/>
+            <a:p/>
+          </p:txBody>
+        </p:sp>
+        <p:sp>
+          <p:nvSpPr>
+            <p:cNvPr id="48" name="pl48"/>
+            <p:cNvSpPr/>
+            <p:nvPr/>
+          </p:nvSpPr>
+          <p:spPr>
+            <a:xfrm>
+              <a:off x="5019130" y="4336484"/>
+              <a:ext cx="0" cy="1317069"/>
+            </a:xfrm>
+            <a:custGeom>
+              <a:avLst/>
+              <a:pathLst>
+                <a:path w="0" h="1317069">
+                  <a:moveTo>
+                    <a:pt x="0" y="1317069"/>
+                  </a:moveTo>
+                  <a:lnTo>
+                    <a:pt x="0" y="0"/>
+                  </a:lnTo>
+                  <a:lnTo>
+                    <a:pt x="0" y="0"/>
+                  </a:lnTo>
+                </a:path>
+              </a:pathLst>
+            </a:custGeom>
+            <a:ln w="6775" cap="flat">
+              <a:solidFill>
+                <a:srgbClr val="EBEBEB">
+                  <a:alpha val="100000"/>
+                </a:srgbClr>
+              </a:solidFill>
+              <a:prstDash val="solid"/>
+              <a:round/>
+            </a:ln>
+          </p:spPr>
+          <p:txBody>
+            <a:bodyPr/>
+            <a:lstStyle/>
+            <a:p/>
+          </p:txBody>
+        </p:sp>
+        <p:sp>
+          <p:nvSpPr>
+            <p:cNvPr id="49" name="pl49"/>
+            <p:cNvSpPr/>
+            <p:nvPr/>
+          </p:nvSpPr>
+          <p:spPr>
+            <a:xfrm>
+              <a:off x="5826296" y="4336484"/>
+              <a:ext cx="0" cy="1317069"/>
+            </a:xfrm>
+            <a:custGeom>
+              <a:avLst/>
+              <a:pathLst>
+                <a:path w="0" h="1317069">
+                  <a:moveTo>
+                    <a:pt x="0" y="1317069"/>
+                  </a:moveTo>
+                  <a:lnTo>
+                    <a:pt x="0" y="0"/>
+                  </a:lnTo>
+                  <a:lnTo>
+                    <a:pt x="0" y="0"/>
+                  </a:lnTo>
+                </a:path>
+              </a:pathLst>
+            </a:custGeom>
+            <a:ln w="6775" cap="flat">
+              <a:solidFill>
+                <a:srgbClr val="EBEBEB">
+                  <a:alpha val="100000"/>
+                </a:srgbClr>
+              </a:solidFill>
+              <a:prstDash val="solid"/>
+              <a:round/>
+            </a:ln>
+          </p:spPr>
+          <p:txBody>
+            <a:bodyPr/>
+            <a:lstStyle/>
+            <a:p/>
+          </p:txBody>
+        </p:sp>
+        <p:sp>
+          <p:nvSpPr>
+            <p:cNvPr id="50" name="pl50"/>
+            <p:cNvSpPr/>
+            <p:nvPr/>
+          </p:nvSpPr>
+          <p:spPr>
+            <a:xfrm>
+              <a:off x="6633461" y="4336484"/>
+              <a:ext cx="0" cy="1317069"/>
+            </a:xfrm>
+            <a:custGeom>
+              <a:avLst/>
+              <a:pathLst>
+                <a:path w="0" h="1317069">
+                  <a:moveTo>
+                    <a:pt x="0" y="1317069"/>
+                  </a:moveTo>
+                  <a:lnTo>
+                    <a:pt x="0" y="0"/>
+                  </a:lnTo>
+                  <a:lnTo>
+                    <a:pt x="0" y="0"/>
+                  </a:lnTo>
+                </a:path>
+              </a:pathLst>
+            </a:custGeom>
+            <a:ln w="6775" cap="flat">
+              <a:solidFill>
+                <a:srgbClr val="EBEBEB">
+                  <a:alpha val="100000"/>
+                </a:srgbClr>
+              </a:solidFill>
+              <a:prstDash val="solid"/>
+              <a:round/>
+            </a:ln>
+          </p:spPr>
+          <p:txBody>
+            <a:bodyPr/>
+            <a:lstStyle/>
+            <a:p/>
+          </p:txBody>
+        </p:sp>
+        <p:sp>
+          <p:nvSpPr>
+            <p:cNvPr id="51" name="pl51"/>
+            <p:cNvSpPr/>
+            <p:nvPr/>
+          </p:nvSpPr>
+          <p:spPr>
+            <a:xfrm>
+              <a:off x="7440627" y="4336484"/>
+              <a:ext cx="0" cy="1317069"/>
+            </a:xfrm>
+            <a:custGeom>
+              <a:avLst/>
+              <a:pathLst>
+                <a:path w="0" h="1317069">
+                  <a:moveTo>
+                    <a:pt x="0" y="1317069"/>
+                  </a:moveTo>
+                  <a:lnTo>
+                    <a:pt x="0" y="0"/>
+                  </a:lnTo>
+                  <a:lnTo>
+                    <a:pt x="0" y="0"/>
+                  </a:lnTo>
+                </a:path>
+              </a:pathLst>
+            </a:custGeom>
+            <a:ln w="6775" cap="flat">
+              <a:solidFill>
+                <a:srgbClr val="EBEBEB">
+                  <a:alpha val="100000"/>
+                </a:srgbClr>
+              </a:solidFill>
+              <a:prstDash val="solid"/>
+              <a:round/>
+            </a:ln>
+          </p:spPr>
+          <p:txBody>
+            <a:bodyPr/>
+            <a:lstStyle/>
+            <a:p/>
+          </p:txBody>
+        </p:sp>
+        <p:sp>
+          <p:nvSpPr>
+            <p:cNvPr id="52" name="pl52"/>
+            <p:cNvSpPr/>
+            <p:nvPr/>
+          </p:nvSpPr>
+          <p:spPr>
+            <a:xfrm>
+              <a:off x="8247792" y="4336484"/>
+              <a:ext cx="0" cy="1317069"/>
+            </a:xfrm>
+            <a:custGeom>
+              <a:avLst/>
+              <a:pathLst>
+                <a:path w="0" h="1317069">
+                  <a:moveTo>
+                    <a:pt x="0" y="1317069"/>
+                  </a:moveTo>
+                  <a:lnTo>
+                    <a:pt x="0" y="0"/>
+                  </a:lnTo>
+                  <a:lnTo>
+                    <a:pt x="0" y="0"/>
+                  </a:lnTo>
+                </a:path>
+              </a:pathLst>
+            </a:custGeom>
+            <a:ln w="6775" cap="flat">
+              <a:solidFill>
+                <a:srgbClr val="EBEBEB">
+                  <a:alpha val="100000"/>
+                </a:srgbClr>
+              </a:solidFill>
+              <a:prstDash val="solid"/>
+              <a:round/>
+            </a:ln>
+          </p:spPr>
+          <p:txBody>
+            <a:bodyPr/>
+            <a:lstStyle/>
+            <a:p/>
+          </p:txBody>
+        </p:sp>
+        <p:sp>
+          <p:nvSpPr>
+            <p:cNvPr id="53" name="pl53"/>
+            <p:cNvSpPr/>
+            <p:nvPr/>
+          </p:nvSpPr>
+          <p:spPr>
+            <a:xfrm>
+              <a:off x="887106" y="5593686"/>
+              <a:ext cx="7660515" cy="0"/>
+            </a:xfrm>
+            <a:custGeom>
+              <a:avLst/>
+              <a:pathLst>
+                <a:path w="7660515" h="0">
+                  <a:moveTo>
+                    <a:pt x="0" y="0"/>
+                  </a:moveTo>
+                  <a:lnTo>
+                    <a:pt x="7660515" y="0"/>
+                  </a:lnTo>
+                  <a:lnTo>
+                    <a:pt x="7660515" y="0"/>
+                  </a:lnTo>
+                </a:path>
+              </a:pathLst>
+            </a:custGeom>
+            <a:ln w="13550" cap="flat">
+              <a:solidFill>
+                <a:srgbClr val="EBEBEB">
+                  <a:alpha val="100000"/>
+                </a:srgbClr>
+              </a:solidFill>
+              <a:prstDash val="solid"/>
+              <a:round/>
+            </a:ln>
+          </p:spPr>
+          <p:txBody>
+            <a:bodyPr/>
+            <a:lstStyle/>
+            <a:p/>
+          </p:txBody>
+        </p:sp>
+        <p:sp>
+          <p:nvSpPr>
+            <p:cNvPr id="54" name="pl54"/>
+            <p:cNvSpPr/>
+            <p:nvPr/>
+          </p:nvSpPr>
+          <p:spPr>
+            <a:xfrm>
+              <a:off x="887106" y="5294352"/>
+              <a:ext cx="7660515" cy="0"/>
+            </a:xfrm>
+            <a:custGeom>
+              <a:avLst/>
+              <a:pathLst>
+                <a:path w="7660515" h="0">
+                  <a:moveTo>
+                    <a:pt x="0" y="0"/>
+                  </a:moveTo>
+                  <a:lnTo>
+                    <a:pt x="7660515" y="0"/>
+                  </a:lnTo>
+                  <a:lnTo>
+                    <a:pt x="7660515" y="0"/>
+                  </a:lnTo>
+                </a:path>
+              </a:pathLst>
+            </a:custGeom>
+            <a:ln w="13550" cap="flat">
+              <a:solidFill>
+                <a:srgbClr val="EBEBEB">
+                  <a:alpha val="100000"/>
+                </a:srgbClr>
+              </a:solidFill>
+              <a:prstDash val="solid"/>
+              <a:round/>
+            </a:ln>
+          </p:spPr>
+          <p:txBody>
+            <a:bodyPr/>
+            <a:lstStyle/>
+            <a:p/>
+          </p:txBody>
+        </p:sp>
+        <p:sp>
+          <p:nvSpPr>
+            <p:cNvPr id="55" name="pl55"/>
+            <p:cNvSpPr/>
+            <p:nvPr/>
+          </p:nvSpPr>
+          <p:spPr>
+            <a:xfrm>
+              <a:off x="887106" y="4995019"/>
+              <a:ext cx="7660515" cy="0"/>
+            </a:xfrm>
+            <a:custGeom>
+              <a:avLst/>
+              <a:pathLst>
+                <a:path w="7660515" h="0">
+                  <a:moveTo>
+                    <a:pt x="0" y="0"/>
+                  </a:moveTo>
+                  <a:lnTo>
+                    <a:pt x="7660515" y="0"/>
+                  </a:lnTo>
+                  <a:lnTo>
+                    <a:pt x="7660515" y="0"/>
+                  </a:lnTo>
+                </a:path>
+              </a:pathLst>
+            </a:custGeom>
+            <a:ln w="13550" cap="flat">
+              <a:solidFill>
+                <a:srgbClr val="EBEBEB">
+                  <a:alpha val="100000"/>
+                </a:srgbClr>
+              </a:solidFill>
+              <a:prstDash val="solid"/>
+              <a:round/>
+            </a:ln>
+          </p:spPr>
+          <p:txBody>
+            <a:bodyPr/>
+            <a:lstStyle/>
+            <a:p/>
+          </p:txBody>
+        </p:sp>
+        <p:sp>
+          <p:nvSpPr>
+            <p:cNvPr id="56" name="pl56"/>
+            <p:cNvSpPr/>
+            <p:nvPr/>
+          </p:nvSpPr>
+          <p:spPr>
+            <a:xfrm>
+              <a:off x="887106" y="4695685"/>
+              <a:ext cx="7660515" cy="0"/>
+            </a:xfrm>
+            <a:custGeom>
+              <a:avLst/>
+              <a:pathLst>
+                <a:path w="7660515" h="0">
+                  <a:moveTo>
+                    <a:pt x="0" y="0"/>
+                  </a:moveTo>
+                  <a:lnTo>
+                    <a:pt x="7660515" y="0"/>
+                  </a:lnTo>
+                  <a:lnTo>
+                    <a:pt x="7660515" y="0"/>
+                  </a:lnTo>
+                </a:path>
+              </a:pathLst>
+            </a:custGeom>
+            <a:ln w="13550" cap="flat">
+              <a:solidFill>
+                <a:srgbClr val="EBEBEB">
+                  <a:alpha val="100000"/>
+                </a:srgbClr>
+              </a:solidFill>
+              <a:prstDash val="solid"/>
+              <a:round/>
+            </a:ln>
+          </p:spPr>
+          <p:txBody>
+            <a:bodyPr/>
+            <a:lstStyle/>
+            <a:p/>
+          </p:txBody>
+        </p:sp>
+        <p:sp>
+          <p:nvSpPr>
+            <p:cNvPr id="57" name="pl57"/>
+            <p:cNvSpPr/>
+            <p:nvPr/>
+          </p:nvSpPr>
+          <p:spPr>
+            <a:xfrm>
+              <a:off x="887106" y="4396351"/>
+              <a:ext cx="7660515" cy="0"/>
+            </a:xfrm>
+            <a:custGeom>
+              <a:avLst/>
+              <a:pathLst>
+                <a:path w="7660515" h="0">
+                  <a:moveTo>
+                    <a:pt x="0" y="0"/>
+                  </a:moveTo>
+                  <a:lnTo>
+                    <a:pt x="7660515" y="0"/>
+                  </a:lnTo>
+                  <a:lnTo>
+                    <a:pt x="7660515" y="0"/>
+                  </a:lnTo>
+                </a:path>
+              </a:pathLst>
+            </a:custGeom>
+            <a:ln w="13550" cap="flat">
+              <a:solidFill>
+                <a:srgbClr val="EBEBEB">
+                  <a:alpha val="100000"/>
+                </a:srgbClr>
+              </a:solidFill>
+              <a:prstDash val="solid"/>
+              <a:round/>
+            </a:ln>
+          </p:spPr>
+          <p:txBody>
+            <a:bodyPr/>
+            <a:lstStyle/>
+            <a:p/>
+          </p:txBody>
+        </p:sp>
+        <p:sp>
+          <p:nvSpPr>
+            <p:cNvPr id="58" name="pl58"/>
+            <p:cNvSpPr/>
+            <p:nvPr/>
+          </p:nvSpPr>
+          <p:spPr>
+            <a:xfrm>
+              <a:off x="1386885" y="4336484"/>
+              <a:ext cx="0" cy="1317069"/>
+            </a:xfrm>
+            <a:custGeom>
+              <a:avLst/>
+              <a:pathLst>
+                <a:path w="0" h="1317069">
+                  <a:moveTo>
+                    <a:pt x="0" y="1317069"/>
+                  </a:moveTo>
+                  <a:lnTo>
+                    <a:pt x="0" y="0"/>
+                  </a:lnTo>
+                  <a:lnTo>
+                    <a:pt x="0" y="0"/>
+                  </a:lnTo>
+                </a:path>
+              </a:pathLst>
+            </a:custGeom>
+            <a:ln w="13550" cap="flat">
+              <a:solidFill>
+                <a:srgbClr val="EBEBEB">
+                  <a:alpha val="100000"/>
+                </a:srgbClr>
+              </a:solidFill>
+              <a:prstDash val="solid"/>
+              <a:round/>
+            </a:ln>
+          </p:spPr>
+          <p:txBody>
+            <a:bodyPr/>
+            <a:lstStyle/>
+            <a:p/>
+          </p:txBody>
+        </p:sp>
+        <p:sp>
+          <p:nvSpPr>
+            <p:cNvPr id="59" name="pl59"/>
+            <p:cNvSpPr/>
+            <p:nvPr/>
+          </p:nvSpPr>
+          <p:spPr>
+            <a:xfrm>
+              <a:off x="2194051" y="4336484"/>
+              <a:ext cx="0" cy="1317069"/>
+            </a:xfrm>
+            <a:custGeom>
+              <a:avLst/>
+              <a:pathLst>
+                <a:path w="0" h="1317069">
+                  <a:moveTo>
+                    <a:pt x="0" y="1317069"/>
+                  </a:moveTo>
+                  <a:lnTo>
+                    <a:pt x="0" y="0"/>
+                  </a:lnTo>
+                  <a:lnTo>
+                    <a:pt x="0" y="0"/>
+                  </a:lnTo>
+                </a:path>
+              </a:pathLst>
+            </a:custGeom>
+            <a:ln w="13550" cap="flat">
+              <a:solidFill>
+                <a:srgbClr val="EBEBEB">
+                  <a:alpha val="100000"/>
+                </a:srgbClr>
+              </a:solidFill>
+              <a:prstDash val="solid"/>
+              <a:round/>
+            </a:ln>
+          </p:spPr>
+          <p:txBody>
+            <a:bodyPr/>
+            <a:lstStyle/>
+            <a:p/>
+          </p:txBody>
+        </p:sp>
+        <p:sp>
+          <p:nvSpPr>
+            <p:cNvPr id="60" name="pl60"/>
+            <p:cNvSpPr/>
+            <p:nvPr/>
+          </p:nvSpPr>
+          <p:spPr>
+            <a:xfrm>
+              <a:off x="3001216" y="4336484"/>
+              <a:ext cx="0" cy="1317069"/>
+            </a:xfrm>
+            <a:custGeom>
+              <a:avLst/>
+              <a:pathLst>
+                <a:path w="0" h="1317069">
+                  <a:moveTo>
+                    <a:pt x="0" y="1317069"/>
+                  </a:moveTo>
+                  <a:lnTo>
+                    <a:pt x="0" y="0"/>
+                  </a:lnTo>
+                  <a:lnTo>
+                    <a:pt x="0" y="0"/>
+                  </a:lnTo>
+                </a:path>
+              </a:pathLst>
+            </a:custGeom>
+            <a:ln w="13550" cap="flat">
+              <a:solidFill>
+                <a:srgbClr val="EBEBEB">
+                  <a:alpha val="100000"/>
+                </a:srgbClr>
+              </a:solidFill>
+              <a:prstDash val="solid"/>
+              <a:round/>
+            </a:ln>
+          </p:spPr>
+          <p:txBody>
+            <a:bodyPr/>
+            <a:lstStyle/>
+            <a:p/>
+          </p:txBody>
+        </p:sp>
+        <p:sp>
+          <p:nvSpPr>
+            <p:cNvPr id="61" name="pl61"/>
+            <p:cNvSpPr/>
+            <p:nvPr/>
+          </p:nvSpPr>
+          <p:spPr>
+            <a:xfrm>
+              <a:off x="3808382" y="4336484"/>
+              <a:ext cx="0" cy="1317069"/>
+            </a:xfrm>
+            <a:custGeom>
+              <a:avLst/>
+              <a:pathLst>
+                <a:path w="0" h="1317069">
+                  <a:moveTo>
+                    <a:pt x="0" y="1317069"/>
+                  </a:moveTo>
+                  <a:lnTo>
+                    <a:pt x="0" y="0"/>
+                  </a:lnTo>
+                  <a:lnTo>
+                    <a:pt x="0" y="0"/>
+                  </a:lnTo>
+                </a:path>
+              </a:pathLst>
+            </a:custGeom>
+            <a:ln w="13550" cap="flat">
+              <a:solidFill>
+                <a:srgbClr val="EBEBEB">
+                  <a:alpha val="100000"/>
+                </a:srgbClr>
+              </a:solidFill>
+              <a:prstDash val="solid"/>
+              <a:round/>
+            </a:ln>
+          </p:spPr>
+          <p:txBody>
+            <a:bodyPr/>
+            <a:lstStyle/>
+            <a:p/>
+          </p:txBody>
+        </p:sp>
+        <p:sp>
+          <p:nvSpPr>
+            <p:cNvPr id="62" name="pl62"/>
+            <p:cNvSpPr/>
+            <p:nvPr/>
+          </p:nvSpPr>
+          <p:spPr>
+            <a:xfrm>
+              <a:off x="4615547" y="4336484"/>
+              <a:ext cx="0" cy="1317069"/>
+            </a:xfrm>
+            <a:custGeom>
+              <a:avLst/>
+              <a:pathLst>
+                <a:path w="0" h="1317069">
+                  <a:moveTo>
+                    <a:pt x="0" y="1317069"/>
+                  </a:moveTo>
+                  <a:lnTo>
+                    <a:pt x="0" y="0"/>
+                  </a:lnTo>
+                  <a:lnTo>
+                    <a:pt x="0" y="0"/>
+                  </a:lnTo>
+                </a:path>
+              </a:pathLst>
+            </a:custGeom>
+            <a:ln w="13550" cap="flat">
+              <a:solidFill>
+                <a:srgbClr val="EBEBEB">
+                  <a:alpha val="100000"/>
+                </a:srgbClr>
+              </a:solidFill>
+              <a:prstDash val="solid"/>
+              <a:round/>
+            </a:ln>
+          </p:spPr>
+          <p:txBody>
+            <a:bodyPr/>
+            <a:lstStyle/>
+            <a:p/>
+          </p:txBody>
+        </p:sp>
+        <p:sp>
+          <p:nvSpPr>
+            <p:cNvPr id="63" name="pl63"/>
+            <p:cNvSpPr/>
+            <p:nvPr/>
+          </p:nvSpPr>
+          <p:spPr>
+            <a:xfrm>
+              <a:off x="5422713" y="4336484"/>
+              <a:ext cx="0" cy="1317069"/>
+            </a:xfrm>
+            <a:custGeom>
+              <a:avLst/>
+              <a:pathLst>
+                <a:path w="0" h="1317069">
+                  <a:moveTo>
+                    <a:pt x="0" y="1317069"/>
+                  </a:moveTo>
+                  <a:lnTo>
+                    <a:pt x="0" y="0"/>
+                  </a:lnTo>
+                  <a:lnTo>
+                    <a:pt x="0" y="0"/>
+                  </a:lnTo>
+                </a:path>
+              </a:pathLst>
+            </a:custGeom>
+            <a:ln w="13550" cap="flat">
+              <a:solidFill>
+                <a:srgbClr val="EBEBEB">
+                  <a:alpha val="100000"/>
+                </a:srgbClr>
+              </a:solidFill>
+              <a:prstDash val="solid"/>
+              <a:round/>
+            </a:ln>
+          </p:spPr>
+          <p:txBody>
+            <a:bodyPr/>
+            <a:lstStyle/>
+            <a:p/>
+          </p:txBody>
+        </p:sp>
+        <p:sp>
+          <p:nvSpPr>
+            <p:cNvPr id="64" name="pl64"/>
+            <p:cNvSpPr/>
+            <p:nvPr/>
+          </p:nvSpPr>
+          <p:spPr>
+            <a:xfrm>
+              <a:off x="6229878" y="4336484"/>
+              <a:ext cx="0" cy="1317069"/>
+            </a:xfrm>
+            <a:custGeom>
+              <a:avLst/>
+              <a:pathLst>
+                <a:path w="0" h="1317069">
+                  <a:moveTo>
+                    <a:pt x="0" y="1317069"/>
+                  </a:moveTo>
+                  <a:lnTo>
+                    <a:pt x="0" y="0"/>
+                  </a:lnTo>
+                  <a:lnTo>
+                    <a:pt x="0" y="0"/>
+                  </a:lnTo>
+                </a:path>
+              </a:pathLst>
+            </a:custGeom>
+            <a:ln w="13550" cap="flat">
+              <a:solidFill>
+                <a:srgbClr val="EBEBEB">
+                  <a:alpha val="100000"/>
+                </a:srgbClr>
+              </a:solidFill>
+              <a:prstDash val="solid"/>
+              <a:round/>
+            </a:ln>
+          </p:spPr>
+          <p:txBody>
+            <a:bodyPr/>
+            <a:lstStyle/>
+            <a:p/>
+          </p:txBody>
+        </p:sp>
+        <p:sp>
+          <p:nvSpPr>
+            <p:cNvPr id="65" name="pl65"/>
+            <p:cNvSpPr/>
+            <p:nvPr/>
+          </p:nvSpPr>
+          <p:spPr>
+            <a:xfrm>
+              <a:off x="7037044" y="4336484"/>
+              <a:ext cx="0" cy="1317069"/>
+            </a:xfrm>
+            <a:custGeom>
+              <a:avLst/>
+              <a:pathLst>
+                <a:path w="0" h="1317069">
+                  <a:moveTo>
+                    <a:pt x="0" y="1317069"/>
+                  </a:moveTo>
+                  <a:lnTo>
+                    <a:pt x="0" y="0"/>
+                  </a:lnTo>
+                  <a:lnTo>
+                    <a:pt x="0" y="0"/>
+                  </a:lnTo>
+                </a:path>
+              </a:pathLst>
+            </a:custGeom>
+            <a:ln w="13550" cap="flat">
+              <a:solidFill>
+                <a:srgbClr val="EBEBEB">
+                  <a:alpha val="100000"/>
+                </a:srgbClr>
+              </a:solidFill>
+              <a:prstDash val="solid"/>
+              <a:round/>
+            </a:ln>
+          </p:spPr>
+          <p:txBody>
+            <a:bodyPr/>
+            <a:lstStyle/>
+            <a:p/>
+          </p:txBody>
+        </p:sp>
+        <p:sp>
+          <p:nvSpPr>
+            <p:cNvPr id="66" name="pl66"/>
+            <p:cNvSpPr/>
+            <p:nvPr/>
+          </p:nvSpPr>
+          <p:spPr>
+            <a:xfrm>
+              <a:off x="7844209" y="4336484"/>
+              <a:ext cx="0" cy="1317069"/>
+            </a:xfrm>
+            <a:custGeom>
+              <a:avLst/>
+              <a:pathLst>
+                <a:path w="0" h="1317069">
+                  <a:moveTo>
+                    <a:pt x="0" y="1317069"/>
+                  </a:moveTo>
+                  <a:lnTo>
+                    <a:pt x="0" y="0"/>
+                  </a:lnTo>
+                  <a:lnTo>
+                    <a:pt x="0" y="0"/>
+                  </a:lnTo>
+                </a:path>
+              </a:pathLst>
+            </a:custGeom>
+            <a:ln w="13550" cap="flat">
+              <a:solidFill>
+                <a:srgbClr val="EBEBEB">
+                  <a:alpha val="100000"/>
+                </a:srgbClr>
+              </a:solidFill>
+              <a:prstDash val="solid"/>
+              <a:round/>
+            </a:ln>
+          </p:spPr>
+          <p:txBody>
+            <a:bodyPr/>
+            <a:lstStyle/>
+            <a:p/>
+          </p:txBody>
+        </p:sp>
+        <p:sp>
+          <p:nvSpPr>
+            <p:cNvPr id="67" name="pg67"/>
+            <p:cNvSpPr/>
+            <p:nvPr/>
+          </p:nvSpPr>
+          <p:spPr>
+            <a:xfrm>
+              <a:off x="1235312" y="4336484"/>
+              <a:ext cx="6964104" cy="1231873"/>
+            </a:xfrm>
+            <a:custGeom>
+              <a:avLst/>
+              <a:pathLst>
+                <a:path w="6964104" h="1231873">
+                  <a:moveTo>
+                    <a:pt x="1072308" y="0"/>
+                  </a:moveTo>
+                  <a:lnTo>
+                    <a:pt x="1125511" y="43795"/>
+                  </a:lnTo>
+                  <a:lnTo>
+                    <a:pt x="1195856" y="99062"/>
+                  </a:lnTo>
+                  <a:lnTo>
+                    <a:pt x="1266200" y="151813"/>
+                  </a:lnTo>
+                  <a:lnTo>
+                    <a:pt x="1336545" y="202160"/>
+                  </a:lnTo>
+                  <a:lnTo>
+                    <a:pt x="1406889" y="250215"/>
+                  </a:lnTo>
+                  <a:lnTo>
+                    <a:pt x="1477234" y="296081"/>
+                  </a:lnTo>
+                  <a:lnTo>
+                    <a:pt x="1547578" y="339857"/>
+                  </a:lnTo>
+                  <a:lnTo>
+                    <a:pt x="1617923" y="381640"/>
+                  </a:lnTo>
+                  <a:lnTo>
+                    <a:pt x="1688267" y="421519"/>
+                  </a:lnTo>
+                  <a:lnTo>
+                    <a:pt x="1758612" y="459583"/>
+                  </a:lnTo>
+                  <a:lnTo>
+                    <a:pt x="1828956" y="495912"/>
+                  </a:lnTo>
+                  <a:lnTo>
+                    <a:pt x="1899301" y="530587"/>
+                  </a:lnTo>
+                  <a:lnTo>
+                    <a:pt x="1969645" y="563682"/>
+                  </a:lnTo>
+                  <a:lnTo>
+                    <a:pt x="2039990" y="595270"/>
+                  </a:lnTo>
+                  <a:lnTo>
+                    <a:pt x="2110334" y="625420"/>
+                  </a:lnTo>
+                  <a:lnTo>
+                    <a:pt x="2180679" y="654196"/>
+                  </a:lnTo>
+                  <a:lnTo>
+                    <a:pt x="2251023" y="681661"/>
+                  </a:lnTo>
+                  <a:lnTo>
+                    <a:pt x="2321368" y="707876"/>
+                  </a:lnTo>
+                  <a:lnTo>
+                    <a:pt x="2391712" y="732896"/>
+                  </a:lnTo>
+                  <a:lnTo>
+                    <a:pt x="2462057" y="756777"/>
+                  </a:lnTo>
+                  <a:lnTo>
+                    <a:pt x="2532401" y="779570"/>
+                  </a:lnTo>
+                  <a:lnTo>
+                    <a:pt x="2602746" y="801325"/>
+                  </a:lnTo>
+                  <a:lnTo>
+                    <a:pt x="2673090" y="822089"/>
+                  </a:lnTo>
+                  <a:lnTo>
+                    <a:pt x="2743435" y="841907"/>
+                  </a:lnTo>
+                  <a:lnTo>
+                    <a:pt x="2813779" y="860823"/>
+                  </a:lnTo>
+                  <a:lnTo>
+                    <a:pt x="2884124" y="878877"/>
+                  </a:lnTo>
+                  <a:lnTo>
+                    <a:pt x="2954468" y="896109"/>
+                  </a:lnTo>
+                  <a:lnTo>
+                    <a:pt x="3024813" y="912555"/>
+                  </a:lnTo>
+                  <a:lnTo>
+                    <a:pt x="3095157" y="928253"/>
+                  </a:lnTo>
+                  <a:lnTo>
+                    <a:pt x="3165502" y="943236"/>
+                  </a:lnTo>
+                  <a:lnTo>
+                    <a:pt x="3235846" y="957536"/>
+                  </a:lnTo>
+                  <a:lnTo>
+                    <a:pt x="3306191" y="959532"/>
+                  </a:lnTo>
+                  <a:lnTo>
+                    <a:pt x="3376535" y="961227"/>
+                  </a:lnTo>
+                  <a:lnTo>
+                    <a:pt x="3446880" y="962913"/>
+                  </a:lnTo>
+                  <a:lnTo>
+                    <a:pt x="3517224" y="964589"/>
+                  </a:lnTo>
+                  <a:lnTo>
+                    <a:pt x="3587569" y="966255"/>
+                  </a:lnTo>
+                  <a:lnTo>
+                    <a:pt x="3657913" y="967912"/>
+                  </a:lnTo>
+                  <a:lnTo>
+                    <a:pt x="3728257" y="969560"/>
+                  </a:lnTo>
+                  <a:lnTo>
+                    <a:pt x="3798602" y="971198"/>
+                  </a:lnTo>
+                  <a:lnTo>
+                    <a:pt x="3868946" y="972827"/>
+                  </a:lnTo>
+                  <a:lnTo>
+                    <a:pt x="3939291" y="974446"/>
+                  </a:lnTo>
+                  <a:lnTo>
+                    <a:pt x="4009635" y="976056"/>
+                  </a:lnTo>
+                  <a:lnTo>
+                    <a:pt x="4079980" y="977658"/>
+                  </a:lnTo>
+                  <a:lnTo>
+                    <a:pt x="4150324" y="979250"/>
+                  </a:lnTo>
+                  <a:lnTo>
+                    <a:pt x="4220669" y="980833"/>
+                  </a:lnTo>
+                  <a:lnTo>
+                    <a:pt x="4291013" y="982406"/>
+                  </a:lnTo>
+                  <a:lnTo>
+                    <a:pt x="4361358" y="983971"/>
+                  </a:lnTo>
+                  <a:lnTo>
+                    <a:pt x="4431702" y="985527"/>
+                  </a:lnTo>
+                  <a:lnTo>
+                    <a:pt x="4502047" y="987075"/>
+                  </a:lnTo>
+                  <a:lnTo>
+                    <a:pt x="4572391" y="988613"/>
+                  </a:lnTo>
+                  <a:lnTo>
+                    <a:pt x="4642736" y="990143"/>
+                  </a:lnTo>
+                  <a:lnTo>
+                    <a:pt x="4713080" y="991663"/>
+                  </a:lnTo>
+                  <a:lnTo>
+                    <a:pt x="4783425" y="993176"/>
+                  </a:lnTo>
+                  <a:lnTo>
+                    <a:pt x="4853769" y="994679"/>
+                  </a:lnTo>
+                  <a:lnTo>
+                    <a:pt x="4924114" y="996174"/>
+                  </a:lnTo>
+                  <a:lnTo>
+                    <a:pt x="4994458" y="997661"/>
+                  </a:lnTo>
+                  <a:lnTo>
+                    <a:pt x="5064803" y="999139"/>
+                  </a:lnTo>
+                  <a:lnTo>
+                    <a:pt x="5135147" y="1000609"/>
+                  </a:lnTo>
+                  <a:lnTo>
+                    <a:pt x="5205492" y="1002070"/>
+                  </a:lnTo>
+                  <a:lnTo>
+                    <a:pt x="5275836" y="1003523"/>
+                  </a:lnTo>
+                  <a:lnTo>
+                    <a:pt x="5346181" y="1004968"/>
+                  </a:lnTo>
+                  <a:lnTo>
+                    <a:pt x="5416525" y="1006404"/>
+                  </a:lnTo>
+                  <a:lnTo>
+                    <a:pt x="5486870" y="1007832"/>
+                  </a:lnTo>
+                  <a:lnTo>
+                    <a:pt x="5557214" y="1009252"/>
+                  </a:lnTo>
+                  <a:lnTo>
+                    <a:pt x="5627559" y="1010665"/>
+                  </a:lnTo>
+                  <a:lnTo>
+                    <a:pt x="5697903" y="1012069"/>
+                  </a:lnTo>
+                  <a:lnTo>
+                    <a:pt x="5768248" y="1013465"/>
+                  </a:lnTo>
+                  <a:lnTo>
+                    <a:pt x="5838592" y="1014853"/>
+                  </a:lnTo>
+                  <a:lnTo>
+                    <a:pt x="5908937" y="1016233"/>
+                  </a:lnTo>
+                  <a:lnTo>
+                    <a:pt x="5979281" y="1017605"/>
+                  </a:lnTo>
+                  <a:lnTo>
+                    <a:pt x="6049626" y="1018970"/>
+                  </a:lnTo>
+                  <a:lnTo>
+                    <a:pt x="6119970" y="1020326"/>
+                  </a:lnTo>
+                  <a:lnTo>
+                    <a:pt x="6190315" y="1021675"/>
+                  </a:lnTo>
+                  <a:lnTo>
+                    <a:pt x="6260659" y="1023017"/>
+                  </a:lnTo>
+                  <a:lnTo>
+                    <a:pt x="6331004" y="1024350"/>
+                  </a:lnTo>
+                  <a:lnTo>
+                    <a:pt x="6401348" y="1025676"/>
+                  </a:lnTo>
+                  <a:lnTo>
+                    <a:pt x="6471693" y="1026995"/>
+                  </a:lnTo>
+                  <a:lnTo>
+                    <a:pt x="6542037" y="1028306"/>
+                  </a:lnTo>
+                  <a:lnTo>
+                    <a:pt x="6612382" y="1029609"/>
+                  </a:lnTo>
+                  <a:lnTo>
+                    <a:pt x="6682726" y="1030906"/>
+                  </a:lnTo>
+                  <a:lnTo>
+                    <a:pt x="6753071" y="1032194"/>
+                  </a:lnTo>
+                  <a:lnTo>
+                    <a:pt x="6823415" y="1033476"/>
+                  </a:lnTo>
+                  <a:lnTo>
+                    <a:pt x="6893760" y="1034750"/>
+                  </a:lnTo>
+                  <a:lnTo>
+                    <a:pt x="6964104" y="1036017"/>
+                  </a:lnTo>
+                  <a:lnTo>
+                    <a:pt x="6964104" y="1231873"/>
+                  </a:lnTo>
+                  <a:lnTo>
+                    <a:pt x="6893760" y="1230664"/>
+                  </a:lnTo>
+                  <a:lnTo>
+                    <a:pt x="6823415" y="1229398"/>
+                  </a:lnTo>
+                  <a:lnTo>
+                    <a:pt x="6753071" y="1228071"/>
+                  </a:lnTo>
+                  <a:lnTo>
+                    <a:pt x="6682726" y="1226681"/>
+                  </a:lnTo>
+                  <a:lnTo>
+                    <a:pt x="6612382" y="1225224"/>
+                  </a:lnTo>
+                  <a:lnTo>
+                    <a:pt x="6542037" y="1223698"/>
+                  </a:lnTo>
+                  <a:lnTo>
+                    <a:pt x="6471693" y="1222099"/>
+                  </a:lnTo>
+                  <a:lnTo>
+                    <a:pt x="6401348" y="1220424"/>
+                  </a:lnTo>
+                  <a:lnTo>
+                    <a:pt x="6331004" y="1218669"/>
+                  </a:lnTo>
+                  <a:lnTo>
+                    <a:pt x="6260659" y="1216830"/>
+                  </a:lnTo>
+                  <a:lnTo>
+                    <a:pt x="6190315" y="1214904"/>
+                  </a:lnTo>
+                  <a:lnTo>
+                    <a:pt x="6119970" y="1212885"/>
+                  </a:lnTo>
+                  <a:lnTo>
+                    <a:pt x="6049626" y="1210771"/>
+                  </a:lnTo>
+                  <a:lnTo>
+                    <a:pt x="5979281" y="1208555"/>
+                  </a:lnTo>
+                  <a:lnTo>
+                    <a:pt x="5908937" y="1206233"/>
+                  </a:lnTo>
+                  <a:lnTo>
+                    <a:pt x="5838592" y="1203801"/>
+                  </a:lnTo>
+                  <a:lnTo>
+                    <a:pt x="5768248" y="1201253"/>
+                  </a:lnTo>
+                  <a:lnTo>
+                    <a:pt x="5697903" y="1198583"/>
+                  </a:lnTo>
+                  <a:lnTo>
+                    <a:pt x="5627559" y="1195785"/>
+                  </a:lnTo>
+                  <a:lnTo>
+                    <a:pt x="5557214" y="1192855"/>
+                  </a:lnTo>
+                  <a:lnTo>
+                    <a:pt x="5486870" y="1189784"/>
+                  </a:lnTo>
+                  <a:lnTo>
+                    <a:pt x="5416525" y="1186567"/>
+                  </a:lnTo>
+                  <a:lnTo>
+                    <a:pt x="5346181" y="1183196"/>
+                  </a:lnTo>
+                  <a:lnTo>
+                    <a:pt x="5275836" y="1179664"/>
+                  </a:lnTo>
+                  <a:lnTo>
+                    <a:pt x="5205492" y="1175964"/>
+                  </a:lnTo>
+                  <a:lnTo>
+                    <a:pt x="5135147" y="1172087"/>
+                  </a:lnTo>
+                  <a:lnTo>
+                    <a:pt x="5064803" y="1168025"/>
+                  </a:lnTo>
+                  <a:lnTo>
+                    <a:pt x="4994458" y="1163770"/>
+                  </a:lnTo>
+                  <a:lnTo>
+                    <a:pt x="4924114" y="1159311"/>
+                  </a:lnTo>
+                  <a:lnTo>
+                    <a:pt x="4853769" y="1154640"/>
+                  </a:lnTo>
+                  <a:lnTo>
+                    <a:pt x="4783425" y="1149745"/>
+                  </a:lnTo>
+                  <a:lnTo>
+                    <a:pt x="4713080" y="1144617"/>
+                  </a:lnTo>
+                  <a:lnTo>
+                    <a:pt x="4642736" y="1139245"/>
+                  </a:lnTo>
+                  <a:lnTo>
+                    <a:pt x="4572391" y="1133616"/>
+                  </a:lnTo>
+                  <a:lnTo>
+                    <a:pt x="4502047" y="1127718"/>
+                  </a:lnTo>
+                  <a:lnTo>
+                    <a:pt x="4431702" y="1121539"/>
+                  </a:lnTo>
+                  <a:lnTo>
+                    <a:pt x="4361358" y="1115065"/>
+                  </a:lnTo>
+                  <a:lnTo>
+                    <a:pt x="4291013" y="1108282"/>
+                  </a:lnTo>
+                  <a:lnTo>
+                    <a:pt x="4220669" y="1101176"/>
+                  </a:lnTo>
+                  <a:lnTo>
+                    <a:pt x="4150324" y="1093730"/>
+                  </a:lnTo>
+                  <a:lnTo>
+                    <a:pt x="4079980" y="1085929"/>
+                  </a:lnTo>
+                  <a:lnTo>
+                    <a:pt x="4009635" y="1077755"/>
+                  </a:lnTo>
+                  <a:lnTo>
+                    <a:pt x="3939291" y="1069192"/>
+                  </a:lnTo>
+                  <a:lnTo>
+                    <a:pt x="3868946" y="1060220"/>
+                  </a:lnTo>
+                  <a:lnTo>
+                    <a:pt x="3798602" y="1050820"/>
+                  </a:lnTo>
+                  <a:lnTo>
+                    <a:pt x="3728257" y="1040971"/>
+                  </a:lnTo>
+                  <a:lnTo>
+                    <a:pt x="3657913" y="1030652"/>
+                  </a:lnTo>
+                  <a:lnTo>
+                    <a:pt x="3587569" y="1019841"/>
+                  </a:lnTo>
+                  <a:lnTo>
+                    <a:pt x="3517224" y="1008514"/>
+                  </a:lnTo>
+                  <a:lnTo>
+                    <a:pt x="3446880" y="996647"/>
+                  </a:lnTo>
+                  <a:lnTo>
+                    <a:pt x="3376535" y="984213"/>
+                  </a:lnTo>
+                  <a:lnTo>
+                    <a:pt x="3306191" y="971185"/>
+                  </a:lnTo>
+                  <a:lnTo>
+                    <a:pt x="3235846" y="957827"/>
+                  </a:lnTo>
+                  <a:lnTo>
+                    <a:pt x="3165502" y="956113"/>
+                  </a:lnTo>
+                  <a:lnTo>
+                    <a:pt x="3095157" y="954388"/>
+                  </a:lnTo>
+                  <a:lnTo>
+                    <a:pt x="3024813" y="952654"/>
+                  </a:lnTo>
+                  <a:lnTo>
+                    <a:pt x="2954468" y="950909"/>
+                  </a:lnTo>
+                  <a:lnTo>
+                    <a:pt x="2884124" y="949155"/>
+                  </a:lnTo>
+                  <a:lnTo>
+                    <a:pt x="2813779" y="947391"/>
+                  </a:lnTo>
+                  <a:lnTo>
+                    <a:pt x="2743435" y="945616"/>
+                  </a:lnTo>
+                  <a:lnTo>
+                    <a:pt x="2673090" y="943832"/>
+                  </a:lnTo>
+                  <a:lnTo>
+                    <a:pt x="2602746" y="942037"/>
+                  </a:lnTo>
+                  <a:lnTo>
+                    <a:pt x="2532401" y="940232"/>
+                  </a:lnTo>
+                  <a:lnTo>
+                    <a:pt x="2462057" y="938416"/>
+                  </a:lnTo>
+                  <a:lnTo>
+                    <a:pt x="2391712" y="936590"/>
+                  </a:lnTo>
+                  <a:lnTo>
+                    <a:pt x="2321368" y="934754"/>
+                  </a:lnTo>
+                  <a:lnTo>
+                    <a:pt x="2251023" y="932907"/>
+                  </a:lnTo>
+                  <a:lnTo>
+                    <a:pt x="2180679" y="931050"/>
+                  </a:lnTo>
+                  <a:lnTo>
+                    <a:pt x="2110334" y="929182"/>
+                  </a:lnTo>
+                  <a:lnTo>
+                    <a:pt x="2039990" y="927303"/>
+                  </a:lnTo>
+                  <a:lnTo>
+                    <a:pt x="1969645" y="925413"/>
+                  </a:lnTo>
+                  <a:lnTo>
+                    <a:pt x="1899301" y="923513"/>
+                  </a:lnTo>
+                  <a:lnTo>
+                    <a:pt x="1828956" y="921602"/>
+                  </a:lnTo>
+                  <a:lnTo>
+                    <a:pt x="1758612" y="919680"/>
+                  </a:lnTo>
+                  <a:lnTo>
+                    <a:pt x="1688267" y="917746"/>
+                  </a:lnTo>
+                  <a:lnTo>
+                    <a:pt x="1617923" y="915802"/>
+                  </a:lnTo>
+                  <a:lnTo>
+                    <a:pt x="1547578" y="913847"/>
+                  </a:lnTo>
+                  <a:lnTo>
+                    <a:pt x="1477234" y="911880"/>
+                  </a:lnTo>
+                  <a:lnTo>
+                    <a:pt x="1406889" y="909902"/>
+                  </a:lnTo>
+                  <a:lnTo>
+                    <a:pt x="1336545" y="907913"/>
+                  </a:lnTo>
+                  <a:lnTo>
+                    <a:pt x="1266200" y="905913"/>
+                  </a:lnTo>
+                  <a:lnTo>
+                    <a:pt x="1195856" y="903901"/>
+                  </a:lnTo>
+                  <a:lnTo>
+                    <a:pt x="1125511" y="901877"/>
+                  </a:lnTo>
+                  <a:lnTo>
+                    <a:pt x="1055167" y="899842"/>
+                  </a:lnTo>
+                  <a:lnTo>
+                    <a:pt x="984822" y="897795"/>
+                  </a:lnTo>
+                  <a:lnTo>
+                    <a:pt x="914478" y="895736"/>
+                  </a:lnTo>
+                  <a:lnTo>
+                    <a:pt x="844133" y="893666"/>
+                  </a:lnTo>
+                  <a:lnTo>
+                    <a:pt x="773789" y="891584"/>
+                  </a:lnTo>
+                  <a:lnTo>
+                    <a:pt x="703444" y="889490"/>
+                  </a:lnTo>
+                  <a:lnTo>
+                    <a:pt x="633100" y="887384"/>
+                  </a:lnTo>
+                  <a:lnTo>
+                    <a:pt x="562755" y="885266"/>
+                  </a:lnTo>
+                  <a:lnTo>
+                    <a:pt x="492411" y="883135"/>
+                  </a:lnTo>
+                  <a:lnTo>
+                    <a:pt x="422066" y="880993"/>
+                  </a:lnTo>
+                  <a:lnTo>
+                    <a:pt x="351722" y="878838"/>
+                  </a:lnTo>
+                  <a:lnTo>
+                    <a:pt x="281377" y="876671"/>
+                  </a:lnTo>
+                  <a:lnTo>
+                    <a:pt x="211033" y="874491"/>
+                  </a:lnTo>
+                  <a:lnTo>
+                    <a:pt x="140688" y="872299"/>
+                  </a:lnTo>
+                  <a:lnTo>
+                    <a:pt x="70344" y="870095"/>
+                  </a:lnTo>
+                  <a:lnTo>
+                    <a:pt x="0" y="867878"/>
+                  </a:lnTo>
+                  <a:close/>
+                </a:path>
+              </a:pathLst>
+            </a:custGeom>
+            <a:solidFill>
+              <a:srgbClr val="FF8C00">
+                <a:alpha val="20000"/>
+              </a:srgbClr>
+            </a:solidFill>
+          </p:spPr>
+          <p:txBody>
+            <a:bodyPr/>
+            <a:lstStyle/>
+            <a:p/>
+          </p:txBody>
+        </p:sp>
+        <p:sp>
+          <p:nvSpPr>
+            <p:cNvPr id="68" name="pl68"/>
+            <p:cNvSpPr/>
+            <p:nvPr/>
+          </p:nvSpPr>
+          <p:spPr>
+            <a:xfrm>
+              <a:off x="2307620" y="4336484"/>
+              <a:ext cx="5891796" cy="1036017"/>
+            </a:xfrm>
+            <a:custGeom>
+              <a:avLst/>
+              <a:pathLst>
+                <a:path w="5891796" h="1036017">
+                  <a:moveTo>
+                    <a:pt x="0" y="0"/>
+                  </a:moveTo>
+                  <a:lnTo>
+                    <a:pt x="53203" y="43795"/>
+                  </a:lnTo>
+                  <a:lnTo>
+                    <a:pt x="123548" y="99062"/>
+                  </a:lnTo>
+                  <a:lnTo>
+                    <a:pt x="193892" y="151813"/>
+                  </a:lnTo>
+                  <a:lnTo>
+                    <a:pt x="264237" y="202160"/>
+                  </a:lnTo>
+                  <a:lnTo>
+                    <a:pt x="334581" y="250215"/>
+                  </a:lnTo>
+                  <a:lnTo>
+                    <a:pt x="404926" y="296081"/>
+                  </a:lnTo>
+                  <a:lnTo>
+                    <a:pt x="475270" y="339857"/>
+                  </a:lnTo>
+                  <a:lnTo>
+                    <a:pt x="545615" y="381640"/>
+                  </a:lnTo>
+                  <a:lnTo>
+                    <a:pt x="615959" y="421519"/>
+                  </a:lnTo>
+                  <a:lnTo>
+                    <a:pt x="686304" y="459583"/>
+                  </a:lnTo>
+                  <a:lnTo>
+                    <a:pt x="756648" y="495912"/>
+                  </a:lnTo>
+                  <a:lnTo>
+                    <a:pt x="826993" y="530587"/>
+                  </a:lnTo>
+                  <a:lnTo>
+                    <a:pt x="897337" y="563682"/>
+                  </a:lnTo>
+                  <a:lnTo>
+                    <a:pt x="967682" y="595270"/>
+                  </a:lnTo>
+                  <a:lnTo>
+                    <a:pt x="1038026" y="625420"/>
+                  </a:lnTo>
+                  <a:lnTo>
+                    <a:pt x="1108371" y="654196"/>
+                  </a:lnTo>
+                  <a:lnTo>
+                    <a:pt x="1178715" y="681661"/>
+                  </a:lnTo>
+                  <a:lnTo>
+                    <a:pt x="1249060" y="707876"/>
+                  </a:lnTo>
+                  <a:lnTo>
+                    <a:pt x="1319404" y="732896"/>
+                  </a:lnTo>
+                  <a:lnTo>
+                    <a:pt x="1389749" y="756777"/>
+                  </a:lnTo>
+                  <a:lnTo>
+                    <a:pt x="1460093" y="779570"/>
+                  </a:lnTo>
+                  <a:lnTo>
+                    <a:pt x="1530437" y="801325"/>
+                  </a:lnTo>
+                  <a:lnTo>
+                    <a:pt x="1600782" y="822089"/>
+                  </a:lnTo>
+                  <a:lnTo>
+                    <a:pt x="1671126" y="841907"/>
+                  </a:lnTo>
+                  <a:lnTo>
+                    <a:pt x="1741471" y="860823"/>
+                  </a:lnTo>
+                  <a:lnTo>
+                    <a:pt x="1811815" y="878877"/>
+                  </a:lnTo>
+                  <a:lnTo>
+                    <a:pt x="1882160" y="896109"/>
+                  </a:lnTo>
+                  <a:lnTo>
+                    <a:pt x="1952504" y="912555"/>
+                  </a:lnTo>
+                  <a:lnTo>
+                    <a:pt x="2022849" y="928253"/>
+                  </a:lnTo>
+                  <a:lnTo>
+                    <a:pt x="2093193" y="943236"/>
+                  </a:lnTo>
+                  <a:lnTo>
+                    <a:pt x="2163538" y="957536"/>
+                  </a:lnTo>
+                  <a:lnTo>
+                    <a:pt x="2233882" y="959532"/>
+                  </a:lnTo>
+                  <a:lnTo>
+                    <a:pt x="2304227" y="961227"/>
+                  </a:lnTo>
+                  <a:lnTo>
+                    <a:pt x="2374571" y="962913"/>
+                  </a:lnTo>
+                  <a:lnTo>
+                    <a:pt x="2444916" y="964589"/>
+                  </a:lnTo>
+                  <a:lnTo>
+                    <a:pt x="2515260" y="966255"/>
+                  </a:lnTo>
+                  <a:lnTo>
+                    <a:pt x="2585605" y="967912"/>
+                  </a:lnTo>
+                  <a:lnTo>
+                    <a:pt x="2655949" y="969560"/>
+                  </a:lnTo>
+                  <a:lnTo>
+                    <a:pt x="2726294" y="971198"/>
+                  </a:lnTo>
+                  <a:lnTo>
+                    <a:pt x="2796638" y="972827"/>
+                  </a:lnTo>
+                  <a:lnTo>
+                    <a:pt x="2866983" y="974446"/>
+                  </a:lnTo>
+                  <a:lnTo>
+                    <a:pt x="2937327" y="976056"/>
+                  </a:lnTo>
+                  <a:lnTo>
+                    <a:pt x="3007672" y="977658"/>
+                  </a:lnTo>
+                  <a:lnTo>
+                    <a:pt x="3078016" y="979250"/>
+                  </a:lnTo>
+                  <a:lnTo>
+                    <a:pt x="3148361" y="980833"/>
+                  </a:lnTo>
+                  <a:lnTo>
+                    <a:pt x="3218705" y="982406"/>
+                  </a:lnTo>
+                  <a:lnTo>
+                    <a:pt x="3289050" y="983971"/>
+                  </a:lnTo>
+                  <a:lnTo>
+                    <a:pt x="3359394" y="985527"/>
+                  </a:lnTo>
+                  <a:lnTo>
+                    <a:pt x="3429739" y="987075"/>
+                  </a:lnTo>
+                  <a:lnTo>
+                    <a:pt x="3500083" y="988613"/>
+                  </a:lnTo>
+                  <a:lnTo>
+                    <a:pt x="3570428" y="990143"/>
+                  </a:lnTo>
+                  <a:lnTo>
+                    <a:pt x="3640772" y="991663"/>
+                  </a:lnTo>
+                  <a:lnTo>
+                    <a:pt x="3711117" y="993176"/>
+                  </a:lnTo>
+                  <a:lnTo>
+                    <a:pt x="3781461" y="994679"/>
+                  </a:lnTo>
+                  <a:lnTo>
+                    <a:pt x="3851806" y="996174"/>
+                  </a:lnTo>
+                  <a:lnTo>
+                    <a:pt x="3922150" y="997661"/>
+                  </a:lnTo>
+                  <a:lnTo>
+                    <a:pt x="3992495" y="999139"/>
+                  </a:lnTo>
+                  <a:lnTo>
+                    <a:pt x="4062839" y="1000609"/>
+                  </a:lnTo>
+                  <a:lnTo>
+                    <a:pt x="4133184" y="1002070"/>
+                  </a:lnTo>
+                  <a:lnTo>
+                    <a:pt x="4203528" y="1003523"/>
+                  </a:lnTo>
+                  <a:lnTo>
+                    <a:pt x="4273873" y="1004968"/>
+                  </a:lnTo>
+                  <a:lnTo>
+                    <a:pt x="4344217" y="1006404"/>
+                  </a:lnTo>
+                  <a:lnTo>
+                    <a:pt x="4414562" y="1007832"/>
+                  </a:lnTo>
+                  <a:lnTo>
+                    <a:pt x="4484906" y="1009252"/>
+                  </a:lnTo>
+                  <a:lnTo>
+                    <a:pt x="4555251" y="1010665"/>
+                  </a:lnTo>
+                  <a:lnTo>
+                    <a:pt x="4625595" y="1012069"/>
+                  </a:lnTo>
+                  <a:lnTo>
+                    <a:pt x="4695940" y="1013465"/>
+                  </a:lnTo>
+                  <a:lnTo>
+                    <a:pt x="4766284" y="1014853"/>
+                  </a:lnTo>
+                  <a:lnTo>
+                    <a:pt x="4836629" y="1016233"/>
+                  </a:lnTo>
+                  <a:lnTo>
+                    <a:pt x="4906973" y="1017605"/>
+                  </a:lnTo>
+                  <a:lnTo>
+                    <a:pt x="4977318" y="1018970"/>
+                  </a:lnTo>
+                  <a:lnTo>
+                    <a:pt x="5047662" y="1020326"/>
+                  </a:lnTo>
+                  <a:lnTo>
+                    <a:pt x="5118007" y="1021675"/>
+                  </a:lnTo>
+                  <a:lnTo>
+                    <a:pt x="5188351" y="1023017"/>
+                  </a:lnTo>
+                  <a:lnTo>
+                    <a:pt x="5258695" y="1024350"/>
+                  </a:lnTo>
+                  <a:lnTo>
+                    <a:pt x="5329040" y="1025676"/>
+                  </a:lnTo>
+                  <a:lnTo>
+                    <a:pt x="5399384" y="1026995"/>
+                  </a:lnTo>
+                  <a:lnTo>
+                    <a:pt x="5469729" y="1028306"/>
+                  </a:lnTo>
+                  <a:lnTo>
+                    <a:pt x="5540073" y="1029609"/>
+                  </a:lnTo>
+                  <a:lnTo>
+                    <a:pt x="5610418" y="1030906"/>
+                  </a:lnTo>
+                  <a:lnTo>
+                    <a:pt x="5680762" y="1032194"/>
+                  </a:lnTo>
+                  <a:lnTo>
+                    <a:pt x="5751107" y="1033476"/>
+                  </a:lnTo>
+                  <a:lnTo>
+                    <a:pt x="5821451" y="1034750"/>
+                  </a:lnTo>
+                  <a:lnTo>
+                    <a:pt x="5891796" y="1036017"/>
+                  </a:lnTo>
+                </a:path>
+              </a:pathLst>
+            </a:custGeom>
+          </p:spPr>
+          <p:txBody>
+            <a:bodyPr/>
+            <a:lstStyle/>
+            <a:p/>
+          </p:txBody>
+        </p:sp>
+        <p:sp>
+          <p:nvSpPr>
+            <p:cNvPr id="69" name="pl69"/>
+            <p:cNvSpPr/>
+            <p:nvPr/>
+          </p:nvSpPr>
+          <p:spPr>
+            <a:xfrm>
+              <a:off x="1235312" y="5204362"/>
+              <a:ext cx="6964104" cy="363995"/>
+            </a:xfrm>
+            <a:custGeom>
+              <a:avLst/>
+              <a:pathLst>
+                <a:path w="6964104" h="363995">
+                  <a:moveTo>
+                    <a:pt x="6964104" y="363995"/>
+                  </a:moveTo>
+                  <a:lnTo>
+                    <a:pt x="6893760" y="362786"/>
+                  </a:lnTo>
+                  <a:lnTo>
+                    <a:pt x="6823415" y="361520"/>
+                  </a:lnTo>
+                  <a:lnTo>
+                    <a:pt x="6753071" y="360193"/>
+                  </a:lnTo>
+                  <a:lnTo>
+                    <a:pt x="6682726" y="358803"/>
+                  </a:lnTo>
+                  <a:lnTo>
+                    <a:pt x="6612382" y="357346"/>
+                  </a:lnTo>
+                  <a:lnTo>
+                    <a:pt x="6542037" y="355820"/>
+                  </a:lnTo>
+                  <a:lnTo>
+                    <a:pt x="6471693" y="354221"/>
+                  </a:lnTo>
+                  <a:lnTo>
+                    <a:pt x="6401348" y="352546"/>
+                  </a:lnTo>
+                  <a:lnTo>
+                    <a:pt x="6331004" y="350791"/>
+                  </a:lnTo>
+                  <a:lnTo>
+                    <a:pt x="6260659" y="348952"/>
+                  </a:lnTo>
+                  <a:lnTo>
+                    <a:pt x="6190315" y="347026"/>
+                  </a:lnTo>
+                  <a:lnTo>
+                    <a:pt x="6119970" y="345007"/>
+                  </a:lnTo>
+                  <a:lnTo>
+                    <a:pt x="6049626" y="342892"/>
+                  </a:lnTo>
+                  <a:lnTo>
+                    <a:pt x="5979281" y="340677"/>
+                  </a:lnTo>
+                  <a:lnTo>
+                    <a:pt x="5908937" y="338355"/>
+                  </a:lnTo>
+                  <a:lnTo>
+                    <a:pt x="5838592" y="335923"/>
+                  </a:lnTo>
+                  <a:lnTo>
+                    <a:pt x="5768248" y="333375"/>
+                  </a:lnTo>
+                  <a:lnTo>
+                    <a:pt x="5697903" y="330705"/>
+                  </a:lnTo>
+                  <a:lnTo>
+                    <a:pt x="5627559" y="327907"/>
+                  </a:lnTo>
+                  <a:lnTo>
+                    <a:pt x="5557214" y="324976"/>
+                  </a:lnTo>
+                  <a:lnTo>
+                    <a:pt x="5486870" y="321906"/>
+                  </a:lnTo>
+                  <a:lnTo>
+                    <a:pt x="5416525" y="318688"/>
+                  </a:lnTo>
+                  <a:lnTo>
+                    <a:pt x="5346181" y="315318"/>
+                  </a:lnTo>
+                  <a:lnTo>
+                    <a:pt x="5275836" y="311786"/>
+                  </a:lnTo>
+                  <a:lnTo>
+                    <a:pt x="5205492" y="308086"/>
+                  </a:lnTo>
+                  <a:lnTo>
+                    <a:pt x="5135147" y="304209"/>
+                  </a:lnTo>
+                  <a:lnTo>
+                    <a:pt x="5064803" y="300147"/>
+                  </a:lnTo>
+                  <a:lnTo>
+                    <a:pt x="4994458" y="295892"/>
+                  </a:lnTo>
+                  <a:lnTo>
+                    <a:pt x="4924114" y="291433"/>
+                  </a:lnTo>
+                  <a:lnTo>
+                    <a:pt x="4853769" y="286762"/>
+                  </a:lnTo>
+                  <a:lnTo>
+                    <a:pt x="4783425" y="281867"/>
+                  </a:lnTo>
+                  <a:lnTo>
+                    <a:pt x="4713080" y="276739"/>
+                  </a:lnTo>
+                  <a:lnTo>
+                    <a:pt x="4642736" y="271367"/>
+                  </a:lnTo>
+                  <a:lnTo>
+                    <a:pt x="4572391" y="265738"/>
+                  </a:lnTo>
+                  <a:lnTo>
+                    <a:pt x="4502047" y="259840"/>
+                  </a:lnTo>
+                  <a:lnTo>
+                    <a:pt x="4431702" y="253661"/>
+                  </a:lnTo>
+                  <a:lnTo>
+                    <a:pt x="4361358" y="247187"/>
+                  </a:lnTo>
+                  <a:lnTo>
+                    <a:pt x="4291013" y="240404"/>
+                  </a:lnTo>
+                  <a:lnTo>
+                    <a:pt x="4220669" y="233297"/>
+                  </a:lnTo>
+                  <a:lnTo>
+                    <a:pt x="4150324" y="225852"/>
+                  </a:lnTo>
+                  <a:lnTo>
+                    <a:pt x="4079980" y="218051"/>
+                  </a:lnTo>
+                  <a:lnTo>
+                    <a:pt x="4009635" y="209877"/>
+                  </a:lnTo>
+                  <a:lnTo>
+                    <a:pt x="3939291" y="201314"/>
+                  </a:lnTo>
+                  <a:lnTo>
+                    <a:pt x="3868946" y="192342"/>
+                  </a:lnTo>
+                  <a:lnTo>
+                    <a:pt x="3798602" y="182942"/>
+                  </a:lnTo>
+                  <a:lnTo>
+                    <a:pt x="3728257" y="173093"/>
+                  </a:lnTo>
+                  <a:lnTo>
+                    <a:pt x="3657913" y="162774"/>
+                  </a:lnTo>
+                  <a:lnTo>
+                    <a:pt x="3587569" y="151963"/>
+                  </a:lnTo>
+                  <a:lnTo>
+                    <a:pt x="3517224" y="140636"/>
+                  </a:lnTo>
+                  <a:lnTo>
+                    <a:pt x="3446880" y="128768"/>
+                  </a:lnTo>
+                  <a:lnTo>
+                    <a:pt x="3376535" y="116334"/>
+                  </a:lnTo>
+                  <a:lnTo>
+                    <a:pt x="3306191" y="103307"/>
+                  </a:lnTo>
+                  <a:lnTo>
+                    <a:pt x="3235846" y="89949"/>
+                  </a:lnTo>
+                  <a:lnTo>
+                    <a:pt x="3165502" y="88234"/>
+                  </a:lnTo>
+                  <a:lnTo>
+                    <a:pt x="3095157" y="86510"/>
+                  </a:lnTo>
+                  <a:lnTo>
+                    <a:pt x="3024813" y="84776"/>
+                  </a:lnTo>
+                  <a:lnTo>
+                    <a:pt x="2954468" y="83031"/>
+                  </a:lnTo>
+                  <a:lnTo>
+                    <a:pt x="2884124" y="81277"/>
+                  </a:lnTo>
+                  <a:lnTo>
+                    <a:pt x="2813779" y="79513"/>
+                  </a:lnTo>
+                  <a:lnTo>
+                    <a:pt x="2743435" y="77738"/>
+                  </a:lnTo>
+                  <a:lnTo>
+                    <a:pt x="2673090" y="75953"/>
+                  </a:lnTo>
+                  <a:lnTo>
+                    <a:pt x="2602746" y="74159"/>
+                  </a:lnTo>
+                  <a:lnTo>
+                    <a:pt x="2532401" y="72353"/>
+                  </a:lnTo>
+                  <a:lnTo>
+                    <a:pt x="2462057" y="70538"/>
+                  </a:lnTo>
+                  <a:lnTo>
+                    <a:pt x="2391712" y="68712"/>
+                  </a:lnTo>
+                  <a:lnTo>
+                    <a:pt x="2321368" y="66876"/>
+                  </a:lnTo>
+                  <a:lnTo>
+                    <a:pt x="2251023" y="65029"/>
+                  </a:lnTo>
+                  <a:lnTo>
+                    <a:pt x="2180679" y="63172"/>
+                  </a:lnTo>
+                  <a:lnTo>
+                    <a:pt x="2110334" y="61303"/>
+                  </a:lnTo>
+                  <a:lnTo>
+                    <a:pt x="2039990" y="59425"/>
+                  </a:lnTo>
+                  <a:lnTo>
+                    <a:pt x="1969645" y="57535"/>
+                  </a:lnTo>
+                  <a:lnTo>
+                    <a:pt x="1899301" y="55635"/>
+                  </a:lnTo>
+                  <a:lnTo>
+                    <a:pt x="1828956" y="53724"/>
+                  </a:lnTo>
+                  <a:lnTo>
+                    <a:pt x="1758612" y="51801"/>
+                  </a:lnTo>
+                  <a:lnTo>
+                    <a:pt x="1688267" y="49868"/>
+                  </a:lnTo>
+                  <a:lnTo>
+                    <a:pt x="1617923" y="47924"/>
+                  </a:lnTo>
+                  <a:lnTo>
+                    <a:pt x="1547578" y="45969"/>
+                  </a:lnTo>
+                  <a:lnTo>
+                    <a:pt x="1477234" y="44002"/>
+                  </a:lnTo>
+                  <a:lnTo>
+                    <a:pt x="1406889" y="42024"/>
+                  </a:lnTo>
+                  <a:lnTo>
+                    <a:pt x="1336545" y="40035"/>
+                  </a:lnTo>
+                  <a:lnTo>
+                    <a:pt x="1266200" y="38034"/>
+                  </a:lnTo>
+                  <a:lnTo>
+                    <a:pt x="1195856" y="36022"/>
+                  </a:lnTo>
+                  <a:lnTo>
+                    <a:pt x="1125511" y="33999"/>
+                  </a:lnTo>
+                  <a:lnTo>
+                    <a:pt x="1055167" y="31964"/>
+                  </a:lnTo>
+                  <a:lnTo>
+                    <a:pt x="984822" y="29917"/>
+                  </a:lnTo>
+                  <a:lnTo>
+                    <a:pt x="914478" y="27858"/>
+                  </a:lnTo>
+                  <a:lnTo>
+                    <a:pt x="844133" y="25788"/>
+                  </a:lnTo>
+                  <a:lnTo>
+                    <a:pt x="773789" y="23706"/>
+                  </a:lnTo>
+                  <a:lnTo>
+                    <a:pt x="703444" y="21612"/>
+                  </a:lnTo>
+                  <a:lnTo>
+                    <a:pt x="633100" y="19506"/>
+                  </a:lnTo>
+                  <a:lnTo>
+                    <a:pt x="562755" y="17387"/>
+                  </a:lnTo>
+                  <a:lnTo>
+                    <a:pt x="492411" y="15257"/>
+                  </a:lnTo>
+                  <a:lnTo>
+                    <a:pt x="422066" y="13115"/>
+                  </a:lnTo>
+                  <a:lnTo>
+                    <a:pt x="351722" y="10960"/>
+                  </a:lnTo>
+                  <a:lnTo>
+                    <a:pt x="281377" y="8793"/>
+                  </a:lnTo>
+                  <a:lnTo>
+                    <a:pt x="211033" y="6613"/>
+                  </a:lnTo>
+                  <a:lnTo>
+                    <a:pt x="140688" y="4421"/>
+                  </a:lnTo>
+                  <a:lnTo>
+                    <a:pt x="70344" y="2217"/>
+                  </a:lnTo>
+                  <a:lnTo>
+                    <a:pt x="0" y="0"/>
+                  </a:lnTo>
+                </a:path>
+              </a:pathLst>
+            </a:custGeom>
+          </p:spPr>
+          <p:txBody>
+            <a:bodyPr/>
+            <a:lstStyle/>
+            <a:p/>
+          </p:txBody>
+        </p:sp>
+        <p:sp>
+          <p:nvSpPr>
+            <p:cNvPr id="70" name="pl70"/>
+            <p:cNvSpPr/>
+            <p:nvPr/>
+          </p:nvSpPr>
+          <p:spPr>
+            <a:xfrm>
+              <a:off x="1235312" y="4595701"/>
+              <a:ext cx="6964104" cy="923136"/>
+            </a:xfrm>
+            <a:custGeom>
+              <a:avLst/>
+              <a:pathLst>
+                <a:path w="6964104" h="923136">
+                  <a:moveTo>
+                    <a:pt x="0" y="0"/>
+                  </a:moveTo>
+                  <a:lnTo>
+                    <a:pt x="70344" y="25772"/>
+                  </a:lnTo>
+                  <a:lnTo>
+                    <a:pt x="140688" y="50880"/>
+                  </a:lnTo>
+                  <a:lnTo>
+                    <a:pt x="211033" y="75339"/>
+                  </a:lnTo>
+                  <a:lnTo>
+                    <a:pt x="281377" y="99166"/>
+                  </a:lnTo>
+                  <a:lnTo>
+                    <a:pt x="351722" y="122378"/>
+                  </a:lnTo>
+                  <a:lnTo>
+                    <a:pt x="422066" y="144991"/>
+                  </a:lnTo>
+                  <a:lnTo>
+                    <a:pt x="492411" y="167019"/>
+                  </a:lnTo>
+                  <a:lnTo>
+                    <a:pt x="562755" y="188479"/>
+                  </a:lnTo>
+                  <a:lnTo>
+                    <a:pt x="633100" y="209384"/>
+                  </a:lnTo>
+                  <a:lnTo>
+                    <a:pt x="703444" y="229750"/>
+                  </a:lnTo>
+                  <a:lnTo>
+                    <a:pt x="773789" y="249589"/>
+                  </a:lnTo>
+                  <a:lnTo>
+                    <a:pt x="844133" y="268917"/>
+                  </a:lnTo>
+                  <a:lnTo>
+                    <a:pt x="914478" y="287745"/>
+                  </a:lnTo>
+                  <a:lnTo>
+                    <a:pt x="984822" y="306087"/>
+                  </a:lnTo>
+                  <a:lnTo>
+                    <a:pt x="1055167" y="323955"/>
+                  </a:lnTo>
+                  <a:lnTo>
+                    <a:pt x="1125511" y="341362"/>
+                  </a:lnTo>
+                  <a:lnTo>
+                    <a:pt x="1195856" y="358319"/>
+                  </a:lnTo>
+                  <a:lnTo>
+                    <a:pt x="1266200" y="374839"/>
+                  </a:lnTo>
+                  <a:lnTo>
+                    <a:pt x="1336545" y="390931"/>
+                  </a:lnTo>
+                  <a:lnTo>
+                    <a:pt x="1406889" y="406608"/>
+                  </a:lnTo>
+                  <a:lnTo>
+                    <a:pt x="1477234" y="421881"/>
+                  </a:lnTo>
+                  <a:lnTo>
+                    <a:pt x="1547578" y="436759"/>
+                  </a:lnTo>
+                  <a:lnTo>
+                    <a:pt x="1617923" y="451252"/>
+                  </a:lnTo>
+                  <a:lnTo>
+                    <a:pt x="1688267" y="465372"/>
+                  </a:lnTo>
+                  <a:lnTo>
+                    <a:pt x="1758612" y="479126"/>
+                  </a:lnTo>
+                  <a:lnTo>
+                    <a:pt x="1828956" y="492526"/>
+                  </a:lnTo>
+                  <a:lnTo>
+                    <a:pt x="1899301" y="505579"/>
+                  </a:lnTo>
+                  <a:lnTo>
+                    <a:pt x="1969645" y="518296"/>
+                  </a:lnTo>
+                  <a:lnTo>
+                    <a:pt x="2039990" y="530684"/>
+                  </a:lnTo>
+                  <a:lnTo>
+                    <a:pt x="2110334" y="542752"/>
+                  </a:lnTo>
+                  <a:lnTo>
+                    <a:pt x="2180679" y="554508"/>
+                  </a:lnTo>
+                  <a:lnTo>
+                    <a:pt x="2251023" y="565961"/>
+                  </a:lnTo>
+                  <a:lnTo>
+                    <a:pt x="2321368" y="577118"/>
+                  </a:lnTo>
+                  <a:lnTo>
+                    <a:pt x="2391712" y="587987"/>
+                  </a:lnTo>
+                  <a:lnTo>
+                    <a:pt x="2462057" y="598575"/>
+                  </a:lnTo>
+                  <a:lnTo>
+                    <a:pt x="2532401" y="608890"/>
+                  </a:lnTo>
+                  <a:lnTo>
+                    <a:pt x="2602746" y="618938"/>
+                  </a:lnTo>
+                  <a:lnTo>
+                    <a:pt x="2673090" y="628727"/>
+                  </a:lnTo>
+                  <a:lnTo>
+                    <a:pt x="2743435" y="638263"/>
+                  </a:lnTo>
+                  <a:lnTo>
+                    <a:pt x="2813779" y="647553"/>
+                  </a:lnTo>
+                  <a:lnTo>
+                    <a:pt x="2884124" y="656603"/>
+                  </a:lnTo>
+                  <a:lnTo>
+                    <a:pt x="2954468" y="665419"/>
+                  </a:lnTo>
+                  <a:lnTo>
+                    <a:pt x="3024813" y="674007"/>
+                  </a:lnTo>
+                  <a:lnTo>
+                    <a:pt x="3095157" y="682374"/>
+                  </a:lnTo>
+                  <a:lnTo>
+                    <a:pt x="3165502" y="690525"/>
+                  </a:lnTo>
+                  <a:lnTo>
+                    <a:pt x="3235846" y="698465"/>
+                  </a:lnTo>
+                  <a:lnTo>
+                    <a:pt x="3306191" y="706200"/>
+                  </a:lnTo>
+                  <a:lnTo>
+                    <a:pt x="3376535" y="713735"/>
+                  </a:lnTo>
+                  <a:lnTo>
+                    <a:pt x="3446880" y="721076"/>
+                  </a:lnTo>
+                  <a:lnTo>
+                    <a:pt x="3517224" y="728227"/>
+                  </a:lnTo>
+                  <a:lnTo>
+                    <a:pt x="3587569" y="735194"/>
+                  </a:lnTo>
+                  <a:lnTo>
+                    <a:pt x="3657913" y="741980"/>
+                  </a:lnTo>
+                  <a:lnTo>
+                    <a:pt x="3728257" y="748592"/>
+                  </a:lnTo>
+                  <a:lnTo>
+                    <a:pt x="3798602" y="755032"/>
+                  </a:lnTo>
+                  <a:lnTo>
+                    <a:pt x="3868946" y="761306"/>
+                  </a:lnTo>
+                  <a:lnTo>
+                    <a:pt x="3939291" y="767419"/>
+                  </a:lnTo>
+                  <a:lnTo>
+                    <a:pt x="4009635" y="773373"/>
+                  </a:lnTo>
+                  <a:lnTo>
+                    <a:pt x="4079980" y="779174"/>
+                  </a:lnTo>
+                  <a:lnTo>
+                    <a:pt x="4150324" y="784824"/>
+                  </a:lnTo>
+                  <a:lnTo>
+                    <a:pt x="4220669" y="790329"/>
+                  </a:lnTo>
+                  <a:lnTo>
+                    <a:pt x="4291013" y="795692"/>
+                  </a:lnTo>
+                  <a:lnTo>
+                    <a:pt x="4361358" y="800916"/>
+                  </a:lnTo>
+                  <a:lnTo>
+                    <a:pt x="4431702" y="806005"/>
+                  </a:lnTo>
+                  <a:lnTo>
+                    <a:pt x="4502047" y="810963"/>
+                  </a:lnTo>
+                  <a:lnTo>
+                    <a:pt x="4572391" y="815793"/>
+                  </a:lnTo>
+                  <a:lnTo>
+                    <a:pt x="4642736" y="820498"/>
+                  </a:lnTo>
+                  <a:lnTo>
+                    <a:pt x="4713080" y="825082"/>
+                  </a:lnTo>
+                  <a:lnTo>
+                    <a:pt x="4783425" y="829547"/>
+                  </a:lnTo>
+                  <a:lnTo>
+                    <a:pt x="4853769" y="833897"/>
+                  </a:lnTo>
+                  <a:lnTo>
+                    <a:pt x="4924114" y="838134"/>
+                  </a:lnTo>
+                  <a:lnTo>
+                    <a:pt x="4994458" y="842263"/>
+                  </a:lnTo>
+                  <a:lnTo>
+                    <a:pt x="5064803" y="846284"/>
+                  </a:lnTo>
+                  <a:lnTo>
+                    <a:pt x="5135147" y="850202"/>
+                  </a:lnTo>
+                  <a:lnTo>
+                    <a:pt x="5205492" y="854018"/>
+                  </a:lnTo>
+                  <a:lnTo>
+                    <a:pt x="5275836" y="857736"/>
+                  </a:lnTo>
+                  <a:lnTo>
+                    <a:pt x="5346181" y="861358"/>
+                  </a:lnTo>
+                  <a:lnTo>
+                    <a:pt x="5416525" y="864887"/>
+                  </a:lnTo>
+                  <a:lnTo>
+                    <a:pt x="5486870" y="868324"/>
+                  </a:lnTo>
+                  <a:lnTo>
+                    <a:pt x="5557214" y="871672"/>
+                  </a:lnTo>
+                  <a:lnTo>
+                    <a:pt x="5627559" y="874934"/>
+                  </a:lnTo>
+                  <a:lnTo>
+                    <a:pt x="5697903" y="878112"/>
+                  </a:lnTo>
+                  <a:lnTo>
+                    <a:pt x="5768248" y="881208"/>
+                  </a:lnTo>
+                  <a:lnTo>
+                    <a:pt x="5838592" y="884224"/>
+                  </a:lnTo>
+                  <a:lnTo>
+                    <a:pt x="5908937" y="887161"/>
+                  </a:lnTo>
+                  <a:lnTo>
+                    <a:pt x="5979281" y="890023"/>
+                  </a:lnTo>
+                  <a:lnTo>
+                    <a:pt x="6049626" y="892812"/>
+                  </a:lnTo>
+                  <a:lnTo>
+                    <a:pt x="6119970" y="895528"/>
+                  </a:lnTo>
+                  <a:lnTo>
+                    <a:pt x="6190315" y="898174"/>
+                  </a:lnTo>
+                  <a:lnTo>
+                    <a:pt x="6260659" y="900751"/>
+                  </a:lnTo>
+                  <a:lnTo>
+                    <a:pt x="6331004" y="903262"/>
+                  </a:lnTo>
+                  <a:lnTo>
+                    <a:pt x="6401348" y="905708"/>
+                  </a:lnTo>
+                  <a:lnTo>
+                    <a:pt x="6471693" y="908091"/>
+                  </a:lnTo>
+                  <a:lnTo>
+                    <a:pt x="6542037" y="910413"/>
+                  </a:lnTo>
+                  <a:lnTo>
+                    <a:pt x="6612382" y="912675"/>
+                  </a:lnTo>
+                  <a:lnTo>
+                    <a:pt x="6682726" y="914878"/>
+                  </a:lnTo>
+                  <a:lnTo>
+                    <a:pt x="6753071" y="917024"/>
+                  </a:lnTo>
+                  <a:lnTo>
+                    <a:pt x="6823415" y="919115"/>
+                  </a:lnTo>
+                  <a:lnTo>
+                    <a:pt x="6893760" y="921152"/>
+                  </a:lnTo>
+                  <a:lnTo>
+                    <a:pt x="6964104" y="923136"/>
+                  </a:lnTo>
+                </a:path>
+              </a:pathLst>
+            </a:custGeom>
+            <a:ln w="27101" cap="flat">
+              <a:solidFill>
+                <a:srgbClr val="FF8C00">
+                  <a:alpha val="100000"/>
+                </a:srgbClr>
+              </a:solidFill>
+              <a:prstDash val="solid"/>
+              <a:round/>
+            </a:ln>
+          </p:spPr>
+          <p:txBody>
+            <a:bodyPr/>
+            <a:lstStyle/>
+            <a:p/>
+          </p:txBody>
+        </p:sp>
+        <p:sp>
+          <p:nvSpPr>
+            <p:cNvPr id="71" name="pl71"/>
+            <p:cNvSpPr/>
+            <p:nvPr/>
+          </p:nvSpPr>
+          <p:spPr>
+            <a:xfrm>
+              <a:off x="887106" y="5294352"/>
+              <a:ext cx="7660515" cy="0"/>
+            </a:xfrm>
+            <a:custGeom>
+              <a:avLst/>
+              <a:pathLst>
+                <a:path w="7660515" h="0">
+                  <a:moveTo>
+                    <a:pt x="0" y="0"/>
+                  </a:moveTo>
+                  <a:lnTo>
+                    <a:pt x="7660515" y="0"/>
+                  </a:lnTo>
+                  <a:lnTo>
+                    <a:pt x="7660515" y="0"/>
+                  </a:lnTo>
+                </a:path>
+              </a:pathLst>
+            </a:custGeom>
+            <a:ln w="13550" cap="flat">
+              <a:solidFill>
+                <a:srgbClr val="7F7F7F">
+                  <a:alpha val="100000"/>
+                </a:srgbClr>
+              </a:solidFill>
+              <a:prstDash val="dash"/>
+              <a:round/>
+            </a:ln>
+          </p:spPr>
+          <p:txBody>
+            <a:bodyPr/>
+            <a:lstStyle/>
+            <a:p/>
+          </p:txBody>
+        </p:sp>
+        <p:sp>
+          <p:nvSpPr>
+            <p:cNvPr id="72" name="pl72"/>
+            <p:cNvSpPr/>
+            <p:nvPr/>
+          </p:nvSpPr>
+          <p:spPr>
+            <a:xfrm>
+              <a:off x="4472829" y="4336484"/>
+              <a:ext cx="0" cy="1317069"/>
+            </a:xfrm>
+            <a:custGeom>
+              <a:avLst/>
+              <a:pathLst>
+                <a:path w="0" h="1317069">
+                  <a:moveTo>
+                    <a:pt x="0" y="1317069"/>
+                  </a:moveTo>
+                  <a:lnTo>
+                    <a:pt x="0" y="0"/>
+                  </a:lnTo>
+                  <a:lnTo>
+                    <a:pt x="0" y="0"/>
+                  </a:lnTo>
+                </a:path>
+              </a:pathLst>
+            </a:custGeom>
+            <a:ln w="13550" cap="flat">
+              <a:solidFill>
+                <a:srgbClr val="666666">
+                  <a:alpha val="100000"/>
+                </a:srgbClr>
+              </a:solidFill>
+              <a:prstDash val="dot"/>
+              <a:round/>
+            </a:ln>
+          </p:spPr>
+          <p:txBody>
+            <a:bodyPr/>
+            <a:lstStyle/>
+            <a:p/>
+          </p:txBody>
+        </p:sp>
+        <p:sp>
+          <p:nvSpPr>
+            <p:cNvPr id="73" name="tx73"/>
+            <p:cNvSpPr/>
+            <p:nvPr/>
+          </p:nvSpPr>
+          <p:spPr>
+            <a:xfrm>
+              <a:off x="762297" y="5553636"/>
+              <a:ext cx="62179" cy="80101"/>
+            </a:xfrm>
+            <a:prstGeom prst="rect">
+              <a:avLst/>
+            </a:prstGeom>
+            <a:noFill/>
+          </p:spPr>
+          <p:txBody>
+            <a:bodyPr lIns="0" rIns="0" tIns="0" bIns="0" anchorCtr="1" anchor="ctr" wrap="none"/>
+            <a:lstStyle/>
+            <a:p>
+              <a:pPr algn="l" marL="0" marR="0" indent="0">
+                <a:lnSpc>
+                  <a:spcPts val="880"/>
+                </a:lnSpc>
+                <a:spcBef>
+                  <a:spcPts val="0"/>
+                </a:spcBef>
+                <a:spcAft>
+                  <a:spcPts val="0"/>
+                </a:spcAft>
+              </a:pPr>
+              <a:r>
+                <a:rPr sz="880">
+                  <a:solidFill>
+                    <a:srgbClr val="4D4D4D">
+                      <a:alpha val="100000"/>
+                    </a:srgbClr>
+                  </a:solidFill>
+                  <a:latin typeface="Helvetica"/>
+                  <a:cs typeface="Helvetica"/>
+                </a:rPr>
+                <a:t>0</a:t>
+              </a:r>
+            </a:p>
+          </p:txBody>
+        </p:sp>
+        <p:sp>
+          <p:nvSpPr>
+            <p:cNvPr id="74" name="tx74"/>
+            <p:cNvSpPr/>
+            <p:nvPr/>
+          </p:nvSpPr>
+          <p:spPr>
+            <a:xfrm>
+              <a:off x="762297" y="5254302"/>
+              <a:ext cx="62179" cy="80101"/>
+            </a:xfrm>
+            <a:prstGeom prst="rect">
+              <a:avLst/>
+            </a:prstGeom>
+            <a:noFill/>
+          </p:spPr>
+          <p:txBody>
+            <a:bodyPr lIns="0" rIns="0" tIns="0" bIns="0" anchorCtr="1" anchor="ctr" wrap="none"/>
+            <a:lstStyle/>
+            <a:p>
+              <a:pPr algn="l" marL="0" marR="0" indent="0">
+                <a:lnSpc>
+                  <a:spcPts val="880"/>
+                </a:lnSpc>
+                <a:spcBef>
+                  <a:spcPts val="0"/>
+                </a:spcBef>
+                <a:spcAft>
+                  <a:spcPts val="0"/>
+                </a:spcAft>
+              </a:pPr>
+              <a:r>
+                <a:rPr sz="880">
+                  <a:solidFill>
+                    <a:srgbClr val="4D4D4D">
+                      <a:alpha val="100000"/>
+                    </a:srgbClr>
+                  </a:solidFill>
+                  <a:latin typeface="Helvetica"/>
+                  <a:cs typeface="Helvetica"/>
+                </a:rPr>
+                <a:t>1</a:t>
+              </a:r>
+            </a:p>
+          </p:txBody>
+        </p:sp>
+        <p:sp>
+          <p:nvSpPr>
+            <p:cNvPr id="75" name="tx75"/>
+            <p:cNvSpPr/>
+            <p:nvPr/>
+          </p:nvSpPr>
+          <p:spPr>
+            <a:xfrm>
+              <a:off x="762297" y="4954968"/>
+              <a:ext cx="62179" cy="80101"/>
+            </a:xfrm>
+            <a:prstGeom prst="rect">
+              <a:avLst/>
+            </a:prstGeom>
+            <a:noFill/>
+          </p:spPr>
+          <p:txBody>
+            <a:bodyPr lIns="0" rIns="0" tIns="0" bIns="0" anchorCtr="1" anchor="ctr" wrap="none"/>
+            <a:lstStyle/>
+            <a:p>
+              <a:pPr algn="l" marL="0" marR="0" indent="0">
+                <a:lnSpc>
+                  <a:spcPts val="880"/>
+                </a:lnSpc>
+                <a:spcBef>
+                  <a:spcPts val="0"/>
+                </a:spcBef>
+                <a:spcAft>
+                  <a:spcPts val="0"/>
+                </a:spcAft>
+              </a:pPr>
+              <a:r>
+                <a:rPr sz="880">
+                  <a:solidFill>
+                    <a:srgbClr val="4D4D4D">
+                      <a:alpha val="100000"/>
+                    </a:srgbClr>
+                  </a:solidFill>
+                  <a:latin typeface="Helvetica"/>
+                  <a:cs typeface="Helvetica"/>
+                </a:rPr>
+                <a:t>2</a:t>
+              </a:r>
+            </a:p>
+          </p:txBody>
+        </p:sp>
+        <p:sp>
+          <p:nvSpPr>
+            <p:cNvPr id="76" name="tx76"/>
+            <p:cNvSpPr/>
+            <p:nvPr/>
+          </p:nvSpPr>
+          <p:spPr>
+            <a:xfrm>
+              <a:off x="762297" y="4655634"/>
+              <a:ext cx="62179" cy="80101"/>
+            </a:xfrm>
+            <a:prstGeom prst="rect">
+              <a:avLst/>
+            </a:prstGeom>
+            <a:noFill/>
+          </p:spPr>
+          <p:txBody>
+            <a:bodyPr lIns="0" rIns="0" tIns="0" bIns="0" anchorCtr="1" anchor="ctr" wrap="none"/>
+            <a:lstStyle/>
+            <a:p>
+              <a:pPr algn="l" marL="0" marR="0" indent="0">
+                <a:lnSpc>
+                  <a:spcPts val="880"/>
+                </a:lnSpc>
+                <a:spcBef>
+                  <a:spcPts val="0"/>
+                </a:spcBef>
+                <a:spcAft>
+                  <a:spcPts val="0"/>
+                </a:spcAft>
+              </a:pPr>
+              <a:r>
+                <a:rPr sz="880">
+                  <a:solidFill>
+                    <a:srgbClr val="4D4D4D">
+                      <a:alpha val="100000"/>
+                    </a:srgbClr>
+                  </a:solidFill>
+                  <a:latin typeface="Helvetica"/>
+                  <a:cs typeface="Helvetica"/>
+                </a:rPr>
+                <a:t>3</a:t>
+              </a:r>
+            </a:p>
+          </p:txBody>
+        </p:sp>
+        <p:sp>
+          <p:nvSpPr>
+            <p:cNvPr id="77" name="tx77"/>
+            <p:cNvSpPr/>
+            <p:nvPr/>
+          </p:nvSpPr>
+          <p:spPr>
+            <a:xfrm>
+              <a:off x="762297" y="4356300"/>
+              <a:ext cx="62179" cy="80101"/>
+            </a:xfrm>
+            <a:prstGeom prst="rect">
+              <a:avLst/>
+            </a:prstGeom>
+            <a:noFill/>
+          </p:spPr>
+          <p:txBody>
+            <a:bodyPr lIns="0" rIns="0" tIns="0" bIns="0" anchorCtr="1" anchor="ctr" wrap="none"/>
+            <a:lstStyle/>
+            <a:p>
+              <a:pPr algn="l" marL="0" marR="0" indent="0">
+                <a:lnSpc>
+                  <a:spcPts val="880"/>
+                </a:lnSpc>
+                <a:spcBef>
+                  <a:spcPts val="0"/>
+                </a:spcBef>
+                <a:spcAft>
+                  <a:spcPts val="0"/>
+                </a:spcAft>
+              </a:pPr>
+              <a:r>
+                <a:rPr sz="880">
+                  <a:solidFill>
+                    <a:srgbClr val="4D4D4D">
+                      <a:alpha val="100000"/>
+                    </a:srgbClr>
+                  </a:solidFill>
+                  <a:latin typeface="Helvetica"/>
+                  <a:cs typeface="Helvetica"/>
+                </a:rPr>
+                <a:t>4</a:t>
+              </a:r>
+            </a:p>
+          </p:txBody>
+        </p:sp>
+        <p:sp>
+          <p:nvSpPr>
+            <p:cNvPr id="78" name="tx78"/>
+            <p:cNvSpPr/>
+            <p:nvPr/>
+          </p:nvSpPr>
+          <p:spPr>
+            <a:xfrm>
+              <a:off x="1306098" y="5716183"/>
+              <a:ext cx="161574" cy="80101"/>
+            </a:xfrm>
+            <a:prstGeom prst="rect">
+              <a:avLst/>
+            </a:prstGeom>
+            <a:noFill/>
+          </p:spPr>
+          <p:txBody>
+            <a:bodyPr lIns="0" rIns="0" tIns="0" bIns="0" anchorCtr="1" anchor="ctr" wrap="none"/>
+            <a:lstStyle/>
+            <a:p>
+              <a:pPr algn="l" marL="0" marR="0" indent="0">
+                <a:lnSpc>
+                  <a:spcPts val="880"/>
+                </a:lnSpc>
+                <a:spcBef>
+                  <a:spcPts val="0"/>
+                </a:spcBef>
+                <a:spcAft>
+                  <a:spcPts val="0"/>
+                </a:spcAft>
+              </a:pPr>
+              <a:r>
+                <a:rPr sz="880">
+                  <a:solidFill>
+                    <a:srgbClr val="4D4D4D">
+                      <a:alpha val="100000"/>
+                    </a:srgbClr>
+                  </a:solidFill>
+                  <a:latin typeface="Helvetica"/>
+                  <a:cs typeface="Helvetica"/>
+                </a:rPr>
+                <a:t>-40</a:t>
+              </a:r>
+            </a:p>
+          </p:txBody>
+        </p:sp>
+        <p:sp>
+          <p:nvSpPr>
+            <p:cNvPr id="79" name="tx79"/>
+            <p:cNvSpPr/>
+            <p:nvPr/>
+          </p:nvSpPr>
+          <p:spPr>
+            <a:xfrm>
+              <a:off x="2113264" y="5716183"/>
+              <a:ext cx="161574" cy="80101"/>
+            </a:xfrm>
+            <a:prstGeom prst="rect">
+              <a:avLst/>
+            </a:prstGeom>
+            <a:noFill/>
+          </p:spPr>
+          <p:txBody>
+            <a:bodyPr lIns="0" rIns="0" tIns="0" bIns="0" anchorCtr="1" anchor="ctr" wrap="none"/>
+            <a:lstStyle/>
+            <a:p>
+              <a:pPr algn="l" marL="0" marR="0" indent="0">
+                <a:lnSpc>
+                  <a:spcPts val="880"/>
+                </a:lnSpc>
+                <a:spcBef>
+                  <a:spcPts val="0"/>
+                </a:spcBef>
+                <a:spcAft>
+                  <a:spcPts val="0"/>
+                </a:spcAft>
+              </a:pPr>
+              <a:r>
+                <a:rPr sz="880">
+                  <a:solidFill>
+                    <a:srgbClr val="4D4D4D">
+                      <a:alpha val="100000"/>
+                    </a:srgbClr>
+                  </a:solidFill>
+                  <a:latin typeface="Helvetica"/>
+                  <a:cs typeface="Helvetica"/>
+                </a:rPr>
+                <a:t>-30</a:t>
+              </a:r>
+            </a:p>
+          </p:txBody>
+        </p:sp>
+        <p:sp>
+          <p:nvSpPr>
+            <p:cNvPr id="80" name="tx80"/>
+            <p:cNvSpPr/>
+            <p:nvPr/>
+          </p:nvSpPr>
+          <p:spPr>
+            <a:xfrm>
+              <a:off x="2920429" y="5716183"/>
+              <a:ext cx="161574" cy="80101"/>
+            </a:xfrm>
+            <a:prstGeom prst="rect">
+              <a:avLst/>
+            </a:prstGeom>
+            <a:noFill/>
+          </p:spPr>
+          <p:txBody>
+            <a:bodyPr lIns="0" rIns="0" tIns="0" bIns="0" anchorCtr="1" anchor="ctr" wrap="none"/>
+            <a:lstStyle/>
+            <a:p>
+              <a:pPr algn="l" marL="0" marR="0" indent="0">
+                <a:lnSpc>
+                  <a:spcPts val="880"/>
+                </a:lnSpc>
+                <a:spcBef>
+                  <a:spcPts val="0"/>
+                </a:spcBef>
+                <a:spcAft>
+                  <a:spcPts val="0"/>
+                </a:spcAft>
+              </a:pPr>
+              <a:r>
+                <a:rPr sz="880">
+                  <a:solidFill>
+                    <a:srgbClr val="4D4D4D">
+                      <a:alpha val="100000"/>
+                    </a:srgbClr>
+                  </a:solidFill>
+                  <a:latin typeface="Helvetica"/>
+                  <a:cs typeface="Helvetica"/>
+                </a:rPr>
+                <a:t>-20</a:t>
+              </a:r>
+            </a:p>
+          </p:txBody>
+        </p:sp>
+        <p:sp>
+          <p:nvSpPr>
+            <p:cNvPr id="81" name="tx81"/>
+            <p:cNvSpPr/>
+            <p:nvPr/>
+          </p:nvSpPr>
+          <p:spPr>
+            <a:xfrm>
+              <a:off x="3727595" y="5716183"/>
+              <a:ext cx="161574" cy="80101"/>
+            </a:xfrm>
+            <a:prstGeom prst="rect">
+              <a:avLst/>
+            </a:prstGeom>
+            <a:noFill/>
+          </p:spPr>
+          <p:txBody>
+            <a:bodyPr lIns="0" rIns="0" tIns="0" bIns="0" anchorCtr="1" anchor="ctr" wrap="none"/>
+            <a:lstStyle/>
+            <a:p>
+              <a:pPr algn="l" marL="0" marR="0" indent="0">
+                <a:lnSpc>
+                  <a:spcPts val="880"/>
+                </a:lnSpc>
+                <a:spcBef>
+                  <a:spcPts val="0"/>
+                </a:spcBef>
+                <a:spcAft>
+                  <a:spcPts val="0"/>
+                </a:spcAft>
+              </a:pPr>
+              <a:r>
+                <a:rPr sz="880">
+                  <a:solidFill>
+                    <a:srgbClr val="4D4D4D">
+                      <a:alpha val="100000"/>
+                    </a:srgbClr>
+                  </a:solidFill>
+                  <a:latin typeface="Helvetica"/>
+                  <a:cs typeface="Helvetica"/>
+                </a:rPr>
+                <a:t>-10</a:t>
+              </a:r>
+            </a:p>
+          </p:txBody>
+        </p:sp>
+        <p:sp>
+          <p:nvSpPr>
+            <p:cNvPr id="82" name="tx82"/>
+            <p:cNvSpPr/>
+            <p:nvPr/>
+          </p:nvSpPr>
+          <p:spPr>
+            <a:xfrm>
+              <a:off x="4584458" y="5716183"/>
+              <a:ext cx="62179" cy="80101"/>
+            </a:xfrm>
+            <a:prstGeom prst="rect">
+              <a:avLst/>
+            </a:prstGeom>
+            <a:noFill/>
+          </p:spPr>
+          <p:txBody>
+            <a:bodyPr lIns="0" rIns="0" tIns="0" bIns="0" anchorCtr="1" anchor="ctr" wrap="none"/>
+            <a:lstStyle/>
+            <a:p>
+              <a:pPr algn="l" marL="0" marR="0" indent="0">
+                <a:lnSpc>
+                  <a:spcPts val="880"/>
+                </a:lnSpc>
+                <a:spcBef>
+                  <a:spcPts val="0"/>
+                </a:spcBef>
+                <a:spcAft>
+                  <a:spcPts val="0"/>
+                </a:spcAft>
+              </a:pPr>
+              <a:r>
+                <a:rPr sz="880">
+                  <a:solidFill>
+                    <a:srgbClr val="4D4D4D">
+                      <a:alpha val="100000"/>
+                    </a:srgbClr>
+                  </a:solidFill>
+                  <a:latin typeface="Helvetica"/>
+                  <a:cs typeface="Helvetica"/>
+                </a:rPr>
+                <a:t>0</a:t>
+              </a:r>
+            </a:p>
+          </p:txBody>
+        </p:sp>
+        <p:sp>
+          <p:nvSpPr>
+            <p:cNvPr id="83" name="tx83"/>
+            <p:cNvSpPr/>
+            <p:nvPr/>
+          </p:nvSpPr>
+          <p:spPr>
+            <a:xfrm>
+              <a:off x="5360534" y="5716183"/>
+              <a:ext cx="124358" cy="80101"/>
+            </a:xfrm>
+            <a:prstGeom prst="rect">
+              <a:avLst/>
+            </a:prstGeom>
+            <a:noFill/>
+          </p:spPr>
+          <p:txBody>
+            <a:bodyPr lIns="0" rIns="0" tIns="0" bIns="0" anchorCtr="1" anchor="ctr" wrap="none"/>
+            <a:lstStyle/>
+            <a:p>
+              <a:pPr algn="l" marL="0" marR="0" indent="0">
+                <a:lnSpc>
+                  <a:spcPts val="880"/>
+                </a:lnSpc>
+                <a:spcBef>
+                  <a:spcPts val="0"/>
+                </a:spcBef>
+                <a:spcAft>
+                  <a:spcPts val="0"/>
+                </a:spcAft>
+              </a:pPr>
+              <a:r>
+                <a:rPr sz="880">
+                  <a:solidFill>
+                    <a:srgbClr val="4D4D4D">
+                      <a:alpha val="100000"/>
+                    </a:srgbClr>
+                  </a:solidFill>
+                  <a:latin typeface="Helvetica"/>
+                  <a:cs typeface="Helvetica"/>
+                </a:rPr>
+                <a:t>10</a:t>
+              </a:r>
+            </a:p>
+          </p:txBody>
+        </p:sp>
+        <p:sp>
+          <p:nvSpPr>
+            <p:cNvPr id="84" name="tx84"/>
+            <p:cNvSpPr/>
+            <p:nvPr/>
+          </p:nvSpPr>
+          <p:spPr>
+            <a:xfrm>
+              <a:off x="6167699" y="5716183"/>
+              <a:ext cx="124358" cy="80101"/>
+            </a:xfrm>
+            <a:prstGeom prst="rect">
+              <a:avLst/>
+            </a:prstGeom>
+            <a:noFill/>
+          </p:spPr>
+          <p:txBody>
+            <a:bodyPr lIns="0" rIns="0" tIns="0" bIns="0" anchorCtr="1" anchor="ctr" wrap="none"/>
+            <a:lstStyle/>
+            <a:p>
+              <a:pPr algn="l" marL="0" marR="0" indent="0">
+                <a:lnSpc>
+                  <a:spcPts val="880"/>
+                </a:lnSpc>
+                <a:spcBef>
+                  <a:spcPts val="0"/>
+                </a:spcBef>
+                <a:spcAft>
+                  <a:spcPts val="0"/>
+                </a:spcAft>
+              </a:pPr>
+              <a:r>
+                <a:rPr sz="880">
+                  <a:solidFill>
+                    <a:srgbClr val="4D4D4D">
+                      <a:alpha val="100000"/>
+                    </a:srgbClr>
+                  </a:solidFill>
+                  <a:latin typeface="Helvetica"/>
+                  <a:cs typeface="Helvetica"/>
+                </a:rPr>
+                <a:t>20</a:t>
+              </a:r>
+            </a:p>
+          </p:txBody>
+        </p:sp>
+        <p:sp>
+          <p:nvSpPr>
+            <p:cNvPr id="85" name="tx85"/>
+            <p:cNvSpPr/>
+            <p:nvPr/>
+          </p:nvSpPr>
+          <p:spPr>
+            <a:xfrm>
+              <a:off x="6974865" y="5716183"/>
+              <a:ext cx="124358" cy="80101"/>
+            </a:xfrm>
+            <a:prstGeom prst="rect">
+              <a:avLst/>
+            </a:prstGeom>
+            <a:noFill/>
+          </p:spPr>
+          <p:txBody>
+            <a:bodyPr lIns="0" rIns="0" tIns="0" bIns="0" anchorCtr="1" anchor="ctr" wrap="none"/>
+            <a:lstStyle/>
+            <a:p>
+              <a:pPr algn="l" marL="0" marR="0" indent="0">
+                <a:lnSpc>
+                  <a:spcPts val="880"/>
+                </a:lnSpc>
+                <a:spcBef>
+                  <a:spcPts val="0"/>
+                </a:spcBef>
+                <a:spcAft>
+                  <a:spcPts val="0"/>
+                </a:spcAft>
+              </a:pPr>
+              <a:r>
+                <a:rPr sz="880">
+                  <a:solidFill>
+                    <a:srgbClr val="4D4D4D">
+                      <a:alpha val="100000"/>
+                    </a:srgbClr>
+                  </a:solidFill>
+                  <a:latin typeface="Helvetica"/>
+                  <a:cs typeface="Helvetica"/>
+                </a:rPr>
+                <a:t>30</a:t>
+              </a:r>
+            </a:p>
+          </p:txBody>
+        </p:sp>
+        <p:sp>
+          <p:nvSpPr>
+            <p:cNvPr id="86" name="tx86"/>
+            <p:cNvSpPr/>
+            <p:nvPr/>
+          </p:nvSpPr>
+          <p:spPr>
+            <a:xfrm>
+              <a:off x="7782030" y="5716183"/>
+              <a:ext cx="124358" cy="80101"/>
+            </a:xfrm>
+            <a:prstGeom prst="rect">
+              <a:avLst/>
+            </a:prstGeom>
+            <a:noFill/>
+          </p:spPr>
+          <p:txBody>
+            <a:bodyPr lIns="0" rIns="0" tIns="0" bIns="0" anchorCtr="1" anchor="ctr" wrap="none"/>
+            <a:lstStyle/>
+            <a:p>
+              <a:pPr algn="l" marL="0" marR="0" indent="0">
+                <a:lnSpc>
+                  <a:spcPts val="880"/>
+                </a:lnSpc>
+                <a:spcBef>
+                  <a:spcPts val="0"/>
+                </a:spcBef>
+                <a:spcAft>
+                  <a:spcPts val="0"/>
+                </a:spcAft>
+              </a:pPr>
+              <a:r>
+                <a:rPr sz="880">
+                  <a:solidFill>
+                    <a:srgbClr val="4D4D4D">
+                      <a:alpha val="100000"/>
+                    </a:srgbClr>
+                  </a:solidFill>
+                  <a:latin typeface="Helvetica"/>
+                  <a:cs typeface="Helvetica"/>
+                </a:rPr>
+                <a:t>40</a:t>
+              </a:r>
+            </a:p>
+          </p:txBody>
+        </p:sp>
+        <p:sp>
+          <p:nvSpPr>
+            <p:cNvPr id="87" name="tx87"/>
+            <p:cNvSpPr/>
+            <p:nvPr/>
+          </p:nvSpPr>
+          <p:spPr>
+            <a:xfrm>
+              <a:off x="2928340" y="5855859"/>
+              <a:ext cx="3578047" cy="100218"/>
+            </a:xfrm>
+            <a:prstGeom prst="rect">
+              <a:avLst/>
+            </a:prstGeom>
+            <a:noFill/>
+          </p:spPr>
+          <p:txBody>
+            <a:bodyPr lIns="0" rIns="0" tIns="0" bIns="0" anchorCtr="1" anchor="ctr" wrap="none"/>
+            <a:lstStyle/>
+            <a:p>
+              <a:pPr algn="l" marL="0" marR="0" indent="0">
+                <a:lnSpc>
+                  <a:spcPts val="1100"/>
+                </a:lnSpc>
+                <a:spcBef>
+                  <a:spcPts val="0"/>
+                </a:spcBef>
+                <a:spcAft>
+                  <a:spcPts val="0"/>
+                </a:spcAft>
+              </a:pPr>
+              <a:r>
+                <a:rPr sz="1100">
+                  <a:solidFill>
+                    <a:srgbClr val="000000">
+                      <a:alpha val="100000"/>
+                    </a:srgbClr>
+                  </a:solidFill>
+                  <a:latin typeface="Helvetica"/>
+                  <a:cs typeface="Helvetica"/>
+                </a:rPr>
+                <a:t>eGFR difference (%): 100 × (CKD-EPI Cr-Cys − CG) / CG</a:t>
+              </a:r>
+            </a:p>
+          </p:txBody>
+        </p:sp>
+        <p:sp>
+          <p:nvSpPr>
+            <p:cNvPr id="88" name="tx88"/>
+            <p:cNvSpPr/>
+            <p:nvPr/>
+          </p:nvSpPr>
+          <p:spPr>
+            <a:xfrm rot="-5400000">
+              <a:off x="138035" y="4944909"/>
+              <a:ext cx="1016904" cy="100218"/>
+            </a:xfrm>
+            <a:prstGeom prst="rect">
+              <a:avLst/>
+            </a:prstGeom>
+            <a:noFill/>
+          </p:spPr>
+          <p:txBody>
+            <a:bodyPr lIns="0" rIns="0" tIns="0" bIns="0" anchorCtr="1" anchor="ctr" wrap="none"/>
+            <a:lstStyle/>
+            <a:p>
+              <a:pPr algn="l" marL="0" marR="0" indent="0">
+                <a:lnSpc>
+                  <a:spcPts val="1100"/>
+                </a:lnSpc>
+                <a:spcBef>
+                  <a:spcPts val="0"/>
+                </a:spcBef>
+                <a:spcAft>
+                  <a:spcPts val="0"/>
+                </a:spcAft>
+              </a:pPr>
+              <a:r>
+                <a:rPr sz="1100">
+                  <a:solidFill>
+                    <a:srgbClr val="000000">
+                      <a:alpha val="100000"/>
+                    </a:srgbClr>
+                  </a:solidFill>
+                  <a:latin typeface="Helvetica"/>
+                  <a:cs typeface="Helvetica"/>
+                </a:rPr>
+                <a:t>subHR (95% CI)</a:t>
+              </a:r>
+            </a:p>
+          </p:txBody>
+        </p:sp>
+        <p:sp>
+          <p:nvSpPr>
+            <p:cNvPr id="89" name="tx89"/>
+            <p:cNvSpPr/>
+            <p:nvPr/>
+          </p:nvSpPr>
+          <p:spPr>
+            <a:xfrm>
+              <a:off x="887106" y="4159544"/>
+              <a:ext cx="6985375" cy="82021"/>
+            </a:xfrm>
+            <a:prstGeom prst="rect">
+              <a:avLst/>
+            </a:prstGeom>
+            <a:noFill/>
+          </p:spPr>
+          <p:txBody>
+            <a:bodyPr lIns="0" rIns="0" tIns="0" bIns="0" anchorCtr="1" anchor="ctr" wrap="none"/>
+            <a:lstStyle/>
+            <a:p>
+              <a:pPr algn="l" marL="0" marR="0" indent="0">
+                <a:lnSpc>
+                  <a:spcPts val="900"/>
+                </a:lnSpc>
+                <a:spcBef>
+                  <a:spcPts val="0"/>
+                </a:spcBef>
+                <a:spcAft>
+                  <a:spcPts val="0"/>
+                </a:spcAft>
+              </a:pPr>
+              <a:r>
+                <a:rPr sz="900">
+                  <a:solidFill>
+                    <a:srgbClr val="404040">
+                      <a:alpha val="100000"/>
+                    </a:srgbClr>
+                  </a:solidFill>
+                  <a:latin typeface="Helvetica"/>
+                  <a:cs typeface="Helvetica"/>
+                </a:rPr>
+                <a:t>subHR per 10 % decline: 1.35 (1.07-1.71), p_Bonf = 0.073 (n = 6)  |  per IQR decline (Δ = 29.5 %): 2.43 (1.21-4.85)  |  IQR: [-15.6, 13.9] %</a:t>
+              </a:r>
+            </a:p>
+          </p:txBody>
+        </p:sp>
+        <p:sp>
+          <p:nvSpPr>
+            <p:cNvPr id="90" name="tx90"/>
+            <p:cNvSpPr/>
+            <p:nvPr/>
+          </p:nvSpPr>
+          <p:spPr>
+            <a:xfrm>
+              <a:off x="887106" y="3932770"/>
               <a:ext cx="2913186" cy="120152"/>
             </a:xfrm>
             <a:prstGeom prst="rect">
